--- a/Development_D3/D3-L12_Review_and_Unit_Assessment_Work_and_Careers.pptx
+++ b/Development_D3/D3-L12_Review_and_Unit_Assessment_Work_and_Careers.pptx
@@ -1,6 +1,6 @@
 
 <file path=ppt/presentation.xml><?xml version="1.0" encoding="utf-8"?>
-<p:presentation xmlns:a="http://schemas.openxmlformats.org/drawingml/2006/main" xmlns:r="http://schemas.openxmlformats.org/officeDocument/2006/relationships" xmlns:p="http://schemas.openxmlformats.org/presentationml/2006/main" saveSubsetFonts="1" autoCompressPictures="0">
+<p:presentation xmlns:a="http://schemas.openxmlformats.org/drawingml/2006/main" xmlns:r="http://schemas.openxmlformats.org/officeDocument/2006/relationships" xmlns:p="http://schemas.openxmlformats.org/presentationml/2006/main" embedTrueTypeFonts="1" saveSubsetFonts="1" autoCompressPictures="0">
   <p:sldMasterIdLst>
     <p:sldMasterId id="2147483648" r:id="rId1"/>
   </p:sldMasterIdLst>
@@ -34,6 +34,13 @@
   </p:notesMasterIdLst>
   <p:sldSz cx="12192000" cy="6858000"/>
   <p:notesSz cx="6858000" cy="12192000"/>
+  <p:embeddedFontLst>
+    <p:embeddedFont>
+      <p:font typeface="Amiri" pitchFamily="2" charset="-78"/>
+      <p:regular r:id="rIdFont1"/>
+      <p:bold r:id="rIdFont2"/>
+    </p:embeddedFont>
+  </p:embeddedFontLst>
   <p:defaultTextStyle>
     <a:lvl1pPr marL="0" algn="l" defTabSz="914400" rtl="0" eaLnBrk="1" latinLnBrk="0" hangingPunct="1">
       <a:defRPr sz="1800" kern="1200">
@@ -390,8 +397,7 @@
           <a:schemeClr val="tx1"/>
         </a:solidFill>
         <a:latin typeface="+mn-lt"/>
-        <a:ea typeface="+mn-ea"/>
-        <a:cs typeface="+mn-cs"/>
+        <a:cs typeface="Amiri" pitchFamily="2" charset="-78"/>
       </a:defRPr>
     </a:lvl1pPr>
     <a:lvl2pPr marL="457200" algn="l" defTabSz="914400" rtl="0" eaLnBrk="1" latinLnBrk="0" hangingPunct="1">
@@ -400,8 +406,7 @@
           <a:schemeClr val="tx1"/>
         </a:solidFill>
         <a:latin typeface="+mn-lt"/>
-        <a:ea typeface="+mn-ea"/>
-        <a:cs typeface="+mn-cs"/>
+        <a:cs typeface="Amiri" pitchFamily="2" charset="-78"/>
       </a:defRPr>
     </a:lvl2pPr>
     <a:lvl3pPr marL="914400" algn="l" defTabSz="914400" rtl="0" eaLnBrk="1" latinLnBrk="0" hangingPunct="1">
@@ -410,8 +415,7 @@
           <a:schemeClr val="tx1"/>
         </a:solidFill>
         <a:latin typeface="+mn-lt"/>
-        <a:ea typeface="+mn-ea"/>
-        <a:cs typeface="+mn-cs"/>
+        <a:cs typeface="Amiri" pitchFamily="2" charset="-78"/>
       </a:defRPr>
     </a:lvl3pPr>
     <a:lvl4pPr marL="1371600" algn="l" defTabSz="914400" rtl="0" eaLnBrk="1" latinLnBrk="0" hangingPunct="1">
@@ -420,8 +424,7 @@
           <a:schemeClr val="tx1"/>
         </a:solidFill>
         <a:latin typeface="+mn-lt"/>
-        <a:ea typeface="+mn-ea"/>
-        <a:cs typeface="+mn-cs"/>
+        <a:cs typeface="Amiri" pitchFamily="2" charset="-78"/>
       </a:defRPr>
     </a:lvl4pPr>
     <a:lvl5pPr marL="1828800" algn="l" defTabSz="914400" rtl="0" eaLnBrk="1" latinLnBrk="0" hangingPunct="1">
@@ -430,8 +433,7 @@
           <a:schemeClr val="tx1"/>
         </a:solidFill>
         <a:latin typeface="+mn-lt"/>
-        <a:ea typeface="+mn-ea"/>
-        <a:cs typeface="+mn-cs"/>
+        <a:cs typeface="Amiri" pitchFamily="2" charset="-78"/>
       </a:defRPr>
     </a:lvl5pPr>
     <a:lvl6pPr marL="2286000" algn="l" defTabSz="914400" rtl="0" eaLnBrk="1" latinLnBrk="0" hangingPunct="1">
@@ -440,8 +442,7 @@
           <a:schemeClr val="tx1"/>
         </a:solidFill>
         <a:latin typeface="+mn-lt"/>
-        <a:ea typeface="+mn-ea"/>
-        <a:cs typeface="+mn-cs"/>
+        <a:cs typeface="Amiri" pitchFamily="2" charset="-78"/>
       </a:defRPr>
     </a:lvl6pPr>
     <a:lvl7pPr marL="2743200" algn="l" defTabSz="914400" rtl="0" eaLnBrk="1" latinLnBrk="0" hangingPunct="1">
@@ -450,8 +451,7 @@
           <a:schemeClr val="tx1"/>
         </a:solidFill>
         <a:latin typeface="+mn-lt"/>
-        <a:ea typeface="+mn-ea"/>
-        <a:cs typeface="+mn-cs"/>
+        <a:cs typeface="Amiri" pitchFamily="2" charset="-78"/>
       </a:defRPr>
     </a:lvl7pPr>
     <a:lvl8pPr marL="3200400" algn="l" defTabSz="914400" rtl="0" eaLnBrk="1" latinLnBrk="0" hangingPunct="1">
@@ -460,8 +460,7 @@
           <a:schemeClr val="tx1"/>
         </a:solidFill>
         <a:latin typeface="+mn-lt"/>
-        <a:ea typeface="+mn-ea"/>
-        <a:cs typeface="+mn-cs"/>
+        <a:cs typeface="Amiri" pitchFamily="2" charset="-78"/>
       </a:defRPr>
     </a:lvl8pPr>
     <a:lvl9pPr marL="3657600" algn="l" defTabSz="914400" rtl="0" eaLnBrk="1" latinLnBrk="0" hangingPunct="1">
@@ -470,8 +469,7 @@
           <a:schemeClr val="tx1"/>
         </a:solidFill>
         <a:latin typeface="+mn-lt"/>
-        <a:ea typeface="+mn-ea"/>
-        <a:cs typeface="+mn-cs"/>
+        <a:cs typeface="Amiri" pitchFamily="2" charset="-78"/>
       </a:defRPr>
     </a:lvl9pPr>
   </p:notesStyle>
@@ -2602,8 +2600,7 @@
             <a:schemeClr val="tx1"/>
           </a:solidFill>
           <a:latin typeface="+mj-lt"/>
-          <a:ea typeface="+mj-ea"/>
-          <a:cs typeface="+mj-cs"/>
+          <a:cs typeface="Amiri" pitchFamily="2" charset="-78"/>
         </a:defRPr>
       </a:lvl1pPr>
     </p:titleStyle>
@@ -2619,8 +2616,7 @@
             <a:schemeClr val="tx1"/>
           </a:solidFill>
           <a:latin typeface="+mn-lt"/>
-          <a:ea typeface="+mn-ea"/>
-          <a:cs typeface="+mn-cs"/>
+          <a:cs typeface="Amiri" pitchFamily="2" charset="-78"/>
         </a:defRPr>
       </a:lvl1pPr>
       <a:lvl2pPr marL="742950" indent="-285750" algn="l" defTabSz="914400" rtl="0" eaLnBrk="1" latinLnBrk="0" hangingPunct="1">
@@ -2634,8 +2630,7 @@
             <a:schemeClr val="tx1"/>
           </a:solidFill>
           <a:latin typeface="+mn-lt"/>
-          <a:ea typeface="+mn-ea"/>
-          <a:cs typeface="+mn-cs"/>
+          <a:cs typeface="Amiri" pitchFamily="2" charset="-78"/>
         </a:defRPr>
       </a:lvl2pPr>
       <a:lvl3pPr marL="1143000" indent="-228600" algn="l" defTabSz="914400" rtl="0" eaLnBrk="1" latinLnBrk="0" hangingPunct="1">
@@ -2649,8 +2644,7 @@
             <a:schemeClr val="tx1"/>
           </a:solidFill>
           <a:latin typeface="+mn-lt"/>
-          <a:ea typeface="+mn-ea"/>
-          <a:cs typeface="+mn-cs"/>
+          <a:cs typeface="Amiri" pitchFamily="2" charset="-78"/>
         </a:defRPr>
       </a:lvl3pPr>
       <a:lvl4pPr marL="1600200" indent="-228600" algn="l" defTabSz="914400" rtl="0" eaLnBrk="1" latinLnBrk="0" hangingPunct="1">
@@ -2664,8 +2658,7 @@
             <a:schemeClr val="tx1"/>
           </a:solidFill>
           <a:latin typeface="+mn-lt"/>
-          <a:ea typeface="+mn-ea"/>
-          <a:cs typeface="+mn-cs"/>
+          <a:cs typeface="Amiri" pitchFamily="2" charset="-78"/>
         </a:defRPr>
       </a:lvl4pPr>
       <a:lvl5pPr marL="2057400" indent="-228600" algn="l" defTabSz="914400" rtl="0" eaLnBrk="1" latinLnBrk="0" hangingPunct="1">
@@ -2679,8 +2672,7 @@
             <a:schemeClr val="tx1"/>
           </a:solidFill>
           <a:latin typeface="+mn-lt"/>
-          <a:ea typeface="+mn-ea"/>
-          <a:cs typeface="+mn-cs"/>
+          <a:cs typeface="Amiri" pitchFamily="2" charset="-78"/>
         </a:defRPr>
       </a:lvl5pPr>
       <a:lvl6pPr marL="2514600" indent="-228600" algn="l" defTabSz="914400" rtl="0" eaLnBrk="1" latinLnBrk="0" hangingPunct="1">
@@ -2694,8 +2686,7 @@
             <a:schemeClr val="tx1"/>
           </a:solidFill>
           <a:latin typeface="+mn-lt"/>
-          <a:ea typeface="+mn-ea"/>
-          <a:cs typeface="+mn-cs"/>
+          <a:cs typeface="Amiri" pitchFamily="2" charset="-78"/>
         </a:defRPr>
       </a:lvl6pPr>
       <a:lvl7pPr marL="2971800" indent="-228600" algn="l" defTabSz="914400" rtl="0" eaLnBrk="1" latinLnBrk="0" hangingPunct="1">
@@ -2709,8 +2700,7 @@
             <a:schemeClr val="tx1"/>
           </a:solidFill>
           <a:latin typeface="+mn-lt"/>
-          <a:ea typeface="+mn-ea"/>
-          <a:cs typeface="+mn-cs"/>
+          <a:cs typeface="Amiri" pitchFamily="2" charset="-78"/>
         </a:defRPr>
       </a:lvl7pPr>
       <a:lvl8pPr marL="3429000" indent="-228600" algn="l" defTabSz="914400" rtl="0" eaLnBrk="1" latinLnBrk="0" hangingPunct="1">
@@ -2724,8 +2714,7 @@
             <a:schemeClr val="tx1"/>
           </a:solidFill>
           <a:latin typeface="+mn-lt"/>
-          <a:ea typeface="+mn-ea"/>
-          <a:cs typeface="+mn-cs"/>
+          <a:cs typeface="Amiri" pitchFamily="2" charset="-78"/>
         </a:defRPr>
       </a:lvl8pPr>
       <a:lvl9pPr marL="3886200" indent="-228600" algn="l" defTabSz="914400" rtl="0" eaLnBrk="1" latinLnBrk="0" hangingPunct="1">
@@ -2739,8 +2728,7 @@
             <a:schemeClr val="tx1"/>
           </a:solidFill>
           <a:latin typeface="+mn-lt"/>
-          <a:ea typeface="+mn-ea"/>
-          <a:cs typeface="+mn-cs"/>
+          <a:cs typeface="Amiri" pitchFamily="2" charset="-78"/>
         </a:defRPr>
       </a:lvl9pPr>
     </p:bodyStyle>
@@ -2754,8 +2742,7 @@
             <a:schemeClr val="tx1"/>
           </a:solidFill>
           <a:latin typeface="+mn-lt"/>
-          <a:ea typeface="+mn-ea"/>
-          <a:cs typeface="+mn-cs"/>
+          <a:cs typeface="Amiri" pitchFamily="2" charset="-78"/>
         </a:defRPr>
       </a:lvl1pPr>
       <a:lvl2pPr marL="457200" algn="l" defTabSz="914400" rtl="0" eaLnBrk="1" latinLnBrk="0" hangingPunct="1">
@@ -2764,8 +2751,7 @@
             <a:schemeClr val="tx1"/>
           </a:solidFill>
           <a:latin typeface="+mn-lt"/>
-          <a:ea typeface="+mn-ea"/>
-          <a:cs typeface="+mn-cs"/>
+          <a:cs typeface="Amiri" pitchFamily="2" charset="-78"/>
         </a:defRPr>
       </a:lvl2pPr>
       <a:lvl3pPr marL="914400" algn="l" defTabSz="914400" rtl="0" eaLnBrk="1" latinLnBrk="0" hangingPunct="1">
@@ -2774,8 +2760,7 @@
             <a:schemeClr val="tx1"/>
           </a:solidFill>
           <a:latin typeface="+mn-lt"/>
-          <a:ea typeface="+mn-ea"/>
-          <a:cs typeface="+mn-cs"/>
+          <a:cs typeface="Amiri" pitchFamily="2" charset="-78"/>
         </a:defRPr>
       </a:lvl3pPr>
       <a:lvl4pPr marL="1371600" algn="l" defTabSz="914400" rtl="0" eaLnBrk="1" latinLnBrk="0" hangingPunct="1">
@@ -2784,8 +2769,7 @@
             <a:schemeClr val="tx1"/>
           </a:solidFill>
           <a:latin typeface="+mn-lt"/>
-          <a:ea typeface="+mn-ea"/>
-          <a:cs typeface="+mn-cs"/>
+          <a:cs typeface="Amiri" pitchFamily="2" charset="-78"/>
         </a:defRPr>
       </a:lvl4pPr>
       <a:lvl5pPr marL="1828800" algn="l" defTabSz="914400" rtl="0" eaLnBrk="1" latinLnBrk="0" hangingPunct="1">
@@ -2794,8 +2778,7 @@
             <a:schemeClr val="tx1"/>
           </a:solidFill>
           <a:latin typeface="+mn-lt"/>
-          <a:ea typeface="+mn-ea"/>
-          <a:cs typeface="+mn-cs"/>
+          <a:cs typeface="Amiri" pitchFamily="2" charset="-78"/>
         </a:defRPr>
       </a:lvl5pPr>
       <a:lvl6pPr marL="2286000" algn="l" defTabSz="914400" rtl="0" eaLnBrk="1" latinLnBrk="0" hangingPunct="1">
@@ -2804,8 +2787,7 @@
             <a:schemeClr val="tx1"/>
           </a:solidFill>
           <a:latin typeface="+mn-lt"/>
-          <a:ea typeface="+mn-ea"/>
-          <a:cs typeface="+mn-cs"/>
+          <a:cs typeface="Amiri" pitchFamily="2" charset="-78"/>
         </a:defRPr>
       </a:lvl6pPr>
       <a:lvl7pPr marL="2743200" algn="l" defTabSz="914400" rtl="0" eaLnBrk="1" latinLnBrk="0" hangingPunct="1">
@@ -2814,8 +2796,7 @@
             <a:schemeClr val="tx1"/>
           </a:solidFill>
           <a:latin typeface="+mn-lt"/>
-          <a:ea typeface="+mn-ea"/>
-          <a:cs typeface="+mn-cs"/>
+          <a:cs typeface="Amiri" pitchFamily="2" charset="-78"/>
         </a:defRPr>
       </a:lvl7pPr>
       <a:lvl8pPr marL="3200400" algn="l" defTabSz="914400" rtl="0" eaLnBrk="1" latinLnBrk="0" hangingPunct="1">
@@ -2824,8 +2805,7 @@
             <a:schemeClr val="tx1"/>
           </a:solidFill>
           <a:latin typeface="+mn-lt"/>
-          <a:ea typeface="+mn-ea"/>
-          <a:cs typeface="+mn-cs"/>
+          <a:cs typeface="Amiri" pitchFamily="2" charset="-78"/>
         </a:defRPr>
       </a:lvl8pPr>
       <a:lvl9pPr marL="3657600" algn="l" defTabSz="914400" rtl="0" eaLnBrk="1" latinLnBrk="0" hangingPunct="1">
@@ -2834,8 +2814,7 @@
             <a:schemeClr val="tx1"/>
           </a:solidFill>
           <a:latin typeface="+mn-lt"/>
-          <a:ea typeface="+mn-ea"/>
-          <a:cs typeface="+mn-cs"/>
+          <a:cs typeface="Amiri" pitchFamily="2" charset="-78"/>
         </a:defRPr>
       </a:lvl9pPr>
     </p:otherStyle>
@@ -2995,9 +2974,8 @@
                 <a:solidFill>
                   <a:srgbClr val="D4AF37"/>
                 </a:solidFill>
-                <a:latin typeface="Amiri" pitchFamily="34" charset="0"/>
-                <a:ea typeface="Amiri" pitchFamily="34" charset="-122"/>
-                <a:cs typeface="Amiri" pitchFamily="34" charset="-120"/>
+                <a:latin typeface="Amiri" pitchFamily="2" charset="-78"/>
+                <a:cs typeface="Amiri" pitchFamily="2" charset="-78"/>
               </a:rPr>
               <a:t>م</a:t>
             </a:r>
@@ -3035,8 +3013,7 @@
                   <a:srgbClr val="FFFFFF"/>
                 </a:solidFill>
                 <a:latin typeface="Cambria" pitchFamily="34" charset="0"/>
-                <a:ea typeface="Cambria" pitchFamily="34" charset="-122"/>
-                <a:cs typeface="Cambria" pitchFamily="34" charset="-120"/>
+                <a:cs typeface="Amiri" pitchFamily="2" charset="-78"/>
               </a:rPr>
               <a:t>Al Madina Online School</a:t>
             </a:r>
@@ -3052,8 +3029,7 @@
                   <a:srgbClr val="D4AF37"/>
                 </a:solidFill>
                 <a:latin typeface="Calibri" pitchFamily="34" charset="0"/>
-                <a:ea typeface="Calibri" pitchFamily="34" charset="-122"/>
-                <a:cs typeface="Calibri" pitchFamily="34" charset="-120"/>
+                <a:cs typeface="Amiri" pitchFamily="2" charset="-78"/>
               </a:rPr>
               <a:t>ARABIC DEPARTMENT · MIFTAH ARABIC</a:t>
             </a:r>
@@ -3091,8 +3067,7 @@
                   <a:srgbClr val="D4AF37"/>
                 </a:solidFill>
                 <a:latin typeface="Calibri" pitchFamily="34" charset="0"/>
-                <a:ea typeface="Calibri" pitchFamily="34" charset="-122"/>
-                <a:cs typeface="Calibri" pitchFamily="34" charset="-120"/>
+                <a:cs typeface="Amiri" pitchFamily="2" charset="-78"/>
               </a:rPr>
               <a:t>CAMBRIDGE IGCSE ARABIC 0544  ·  YEAR 8  ·  DEVELOPMENT D3  ·  D3-L12</a:t>
             </a:r>
@@ -3130,8 +3105,7 @@
                   <a:srgbClr val="9FB3D1"/>
                 </a:solidFill>
                 <a:latin typeface="Cambria" pitchFamily="34" charset="0"/>
-                <a:ea typeface="Cambria" pitchFamily="34" charset="-122"/>
-                <a:cs typeface="Cambria" pitchFamily="34" charset="-120"/>
+                <a:cs typeface="Amiri" pitchFamily="2" charset="-78"/>
               </a:rPr>
               <a:t>D3-L12</a:t>
             </a:r>
@@ -3169,8 +3143,7 @@
                   <a:srgbClr val="FFFFFF"/>
                 </a:solidFill>
                 <a:latin typeface="Cambria" pitchFamily="34" charset="0"/>
-                <a:ea typeface="Cambria" pitchFamily="34" charset="-122"/>
-                <a:cs typeface="Cambria" pitchFamily="34" charset="-120"/>
+                <a:cs typeface="Amiri" pitchFamily="2" charset="-78"/>
               </a:rPr>
               <a:t>Review and Unit Assessment: Work and Careers</a:t>
             </a:r>
@@ -3207,9 +3180,8 @@
                 <a:solidFill>
                   <a:srgbClr val="D4AF37"/>
                 </a:solidFill>
-                <a:latin typeface="Amiri" pitchFamily="34" charset="0"/>
-                <a:ea typeface="Amiri" pitchFamily="34" charset="-122"/>
-                <a:cs typeface="Amiri" pitchFamily="34" charset="-120"/>
+                <a:latin typeface="Amiri" pitchFamily="2" charset="-78"/>
+                <a:cs typeface="Amiri" pitchFamily="2" charset="-78"/>
               </a:rPr>
               <a:t>المُرَاجَعَةُ وَتَقْيِيمُ الوَحْدَةِ</a:t>
             </a:r>
@@ -3247,8 +3219,7 @@
                   <a:srgbClr val="C6D2E6"/>
                 </a:solidFill>
                 <a:latin typeface="Calibri" pitchFamily="34" charset="0"/>
-                <a:ea typeface="Calibri" pitchFamily="34" charset="-122"/>
-                <a:cs typeface="Calibri" pitchFamily="34" charset="-120"/>
+                <a:cs typeface="Amiri" pitchFamily="2" charset="-78"/>
               </a:rPr>
               <a:t>Show what you can understand and produce about jobs, workplaces, skills, future plans, training routes, applications and work values — then choose one precise next step for D4.</a:t>
             </a:r>
@@ -3313,8 +3284,7 @@
                   <a:srgbClr val="D4AF37"/>
                 </a:solidFill>
                 <a:latin typeface="Calibri" pitchFamily="34" charset="0"/>
-                <a:ea typeface="Calibri" pitchFamily="34" charset="-122"/>
-                <a:cs typeface="Calibri" pitchFamily="34" charset="-120"/>
+                <a:cs typeface="Amiri" pitchFamily="2" charset="-78"/>
               </a:rPr>
               <a:t>LESSON</a:t>
             </a:r>
@@ -3330,8 +3300,7 @@
                   <a:srgbClr val="FFFFFF"/>
                 </a:solidFill>
                 <a:latin typeface="Calibri" pitchFamily="34" charset="0"/>
-                <a:ea typeface="Calibri" pitchFamily="34" charset="-122"/>
-                <a:cs typeface="Calibri" pitchFamily="34" charset="-120"/>
+                <a:cs typeface="Amiri" pitchFamily="2" charset="-78"/>
               </a:rPr>
               <a:t>D3-L12 · Development D3 · Work and Careers</a:t>
             </a:r>
@@ -3396,8 +3365,7 @@
                   <a:srgbClr val="D4AF37"/>
                 </a:solidFill>
                 <a:latin typeface="Calibri" pitchFamily="34" charset="0"/>
-                <a:ea typeface="Calibri" pitchFamily="34" charset="-122"/>
-                <a:cs typeface="Calibri" pitchFamily="34" charset="-120"/>
+                <a:cs typeface="Amiri" pitchFamily="2" charset="-78"/>
               </a:rPr>
               <a:t>DURATION</a:t>
             </a:r>
@@ -3413,8 +3381,7 @@
                   <a:srgbClr val="FFFFFF"/>
                 </a:solidFill>
                 <a:latin typeface="Calibri" pitchFamily="34" charset="0"/>
-                <a:ea typeface="Calibri" pitchFamily="34" charset="-122"/>
-                <a:cs typeface="Calibri" pitchFamily="34" charset="-120"/>
+                <a:cs typeface="Amiri" pitchFamily="2" charset="-78"/>
               </a:rPr>
               <a:t>60 minutes · Teams</a:t>
             </a:r>
@@ -3479,8 +3446,7 @@
                   <a:srgbClr val="D4AF37"/>
                 </a:solidFill>
                 <a:latin typeface="Calibri" pitchFamily="34" charset="0"/>
-                <a:ea typeface="Calibri" pitchFamily="34" charset="-122"/>
-                <a:cs typeface="Calibri" pitchFamily="34" charset="-120"/>
+                <a:cs typeface="Amiri" pitchFamily="2" charset="-78"/>
               </a:rPr>
               <a:t>LEVEL</a:t>
             </a:r>
@@ -3496,8 +3462,7 @@
                   <a:srgbClr val="FFFFFF"/>
                 </a:solidFill>
                 <a:latin typeface="Calibri" pitchFamily="34" charset="0"/>
-                <a:ea typeface="Calibri" pitchFamily="34" charset="-122"/>
-                <a:cs typeface="Calibri" pitchFamily="34" charset="-120"/>
+                <a:cs typeface="Amiri" pitchFamily="2" charset="-78"/>
               </a:rPr>
               <a:t>Development · end of unit D3</a:t>
             </a:r>
@@ -3562,8 +3527,7 @@
                   <a:srgbClr val="D4AF37"/>
                 </a:solidFill>
                 <a:latin typeface="Calibri" pitchFamily="34" charset="0"/>
-                <a:ea typeface="Calibri" pitchFamily="34" charset="-122"/>
-                <a:cs typeface="Calibri" pitchFamily="34" charset="-120"/>
+                <a:cs typeface="Amiri" pitchFamily="2" charset="-78"/>
               </a:rPr>
               <a:t>ON THE WEBSITE</a:t>
             </a:r>
@@ -3579,8 +3543,7 @@
                   <a:srgbClr val="FFFFFF"/>
                 </a:solidFill>
                 <a:latin typeface="Calibri" pitchFamily="34" charset="0"/>
-                <a:ea typeface="Calibri" pitchFamily="34" charset="-122"/>
-                <a:cs typeface="Calibri" pitchFamily="34" charset="-120"/>
+                <a:cs typeface="Amiri" pitchFamily="2" charset="-78"/>
               </a:rPr>
               <a:t>Pathways › Development › D3 › D3-L12</a:t>
             </a:r>
@@ -3674,9 +3637,8 @@
                 <a:solidFill>
                   <a:srgbClr val="D4AF37"/>
                 </a:solidFill>
-                <a:latin typeface="Amiri" pitchFamily="34" charset="0"/>
-                <a:ea typeface="Amiri" pitchFamily="34" charset="-122"/>
-                <a:cs typeface="Amiri" pitchFamily="34" charset="-120"/>
+                <a:latin typeface="Amiri" pitchFamily="2" charset="-78"/>
+                <a:cs typeface="Amiri" pitchFamily="2" charset="-78"/>
               </a:rPr>
               <a:t>م</a:t>
             </a:r>
@@ -3714,8 +3676,7 @@
                   <a:srgbClr val="1B3B6F"/>
                 </a:solidFill>
                 <a:latin typeface="Cambria" pitchFamily="34" charset="0"/>
-                <a:ea typeface="Cambria" pitchFamily="34" charset="-122"/>
-                <a:cs typeface="Cambria" pitchFamily="34" charset="-120"/>
+                <a:cs typeface="Amiri" pitchFamily="2" charset="-78"/>
               </a:rPr>
               <a:t>Al Madina Online School</a:t>
             </a:r>
@@ -3753,8 +3714,7 @@
                   <a:srgbClr val="8A6D1E"/>
                 </a:solidFill>
                 <a:latin typeface="Calibri" pitchFamily="34" charset="0"/>
-                <a:ea typeface="Calibri" pitchFamily="34" charset="-122"/>
-                <a:cs typeface="Calibri" pitchFamily="34" charset="-120"/>
+                <a:cs typeface="Amiri" pitchFamily="2" charset="-78"/>
               </a:rPr>
               <a:t>ARABIC DEPARTMENT · MIFTAH ARABIC · IGCSE 0544</a:t>
             </a:r>
@@ -3819,8 +3779,7 @@
                   <a:srgbClr val="FFFFFF"/>
                 </a:solidFill>
                 <a:latin typeface="Calibri" pitchFamily="34" charset="0"/>
-                <a:ea typeface="Calibri" pitchFamily="34" charset="-122"/>
-                <a:cs typeface="Calibri" pitchFamily="34" charset="-120"/>
+                <a:cs typeface="Amiri" pitchFamily="2" charset="-78"/>
               </a:rPr>
               <a:t>D3-L12 · D3 Assessment</a:t>
             </a:r>
@@ -3885,8 +3844,7 @@
                   <a:srgbClr val="FFFFFF"/>
                 </a:solidFill>
                 <a:latin typeface="Calibri" pitchFamily="34" charset="0"/>
-                <a:ea typeface="Calibri" pitchFamily="34" charset="-122"/>
-                <a:cs typeface="Calibri" pitchFamily="34" charset="-120"/>
+                <a:cs typeface="Amiri" pitchFamily="2" charset="-78"/>
               </a:rPr>
               <a:t>I DO · 5 MIN</a:t>
             </a:r>
@@ -3924,8 +3882,7 @@
                   <a:srgbClr val="6B4C9A"/>
                 </a:solidFill>
                 <a:latin typeface="Calibri" pitchFamily="34" charset="0"/>
-                <a:ea typeface="Calibri" pitchFamily="34" charset="-122"/>
-                <a:cs typeface="Calibri" pitchFamily="34" charset="-120"/>
+                <a:cs typeface="Amiri" pitchFamily="2" charset="-78"/>
               </a:rPr>
               <a:t>LISTENING · QUESTIONS 6–10 · 2 MARKS EACH (WEBSITE)</a:t>
             </a:r>
@@ -3963,8 +3920,7 @@
                   <a:srgbClr val="1B3B6F"/>
                 </a:solidFill>
                 <a:latin typeface="Cambria" pitchFamily="34" charset="0"/>
-                <a:ea typeface="Cambria" pitchFamily="34" charset="-122"/>
-                <a:cs typeface="Cambria" pitchFamily="34" charset="-120"/>
+                <a:cs typeface="Amiri" pitchFamily="2" charset="-78"/>
               </a:rPr>
               <a:t>The summer-training advert (6–10)</a:t>
             </a:r>
@@ -4001,9 +3957,8 @@
                 <a:solidFill>
                   <a:srgbClr val="8A6D1E"/>
                 </a:solidFill>
-                <a:latin typeface="Amiri" pitchFamily="34" charset="0"/>
-                <a:ea typeface="Amiri" pitchFamily="34" charset="-122"/>
-                <a:cs typeface="Amiri" pitchFamily="34" charset="-120"/>
+                <a:latin typeface="Amiri" pitchFamily="2" charset="-78"/>
+                <a:cs typeface="Amiri" pitchFamily="2" charset="-78"/>
               </a:rPr>
               <a:t>الاِسْتِمَاعُ</a:t>
             </a:r>
@@ -4041,8 +3996,7 @@
                   <a:srgbClr val="8A93A0"/>
                 </a:solidFill>
                 <a:latin typeface="Calibri" pitchFamily="34" charset="0"/>
-                <a:ea typeface="Calibri" pitchFamily="34" charset="-122"/>
-                <a:cs typeface="Calibri" pitchFamily="34" charset="-120"/>
+                <a:cs typeface="Amiri" pitchFamily="2" charset="-78"/>
               </a:rPr>
               <a:t>Miftah Arabic · Development D3 · Work and Careers · D3-L12</a:t>
             </a:r>
@@ -4139,8 +4093,7 @@
                   <a:srgbClr val="FFFFFF"/>
                 </a:solidFill>
                 <a:latin typeface="Calibri" pitchFamily="34" charset="0"/>
-                <a:ea typeface="Calibri" pitchFamily="34" charset="-122"/>
-                <a:cs typeface="Calibri" pitchFamily="34" charset="-120"/>
+                <a:cs typeface="Amiri" pitchFamily="2" charset="-78"/>
               </a:rPr>
               <a:t>1</a:t>
             </a:r>
@@ -4178,8 +4131,7 @@
                   <a:srgbClr val="1B3B6F"/>
                 </a:solidFill>
                 <a:latin typeface="Calibri" pitchFamily="34" charset="0"/>
-                <a:ea typeface="Calibri" pitchFamily="34" charset="-122"/>
-                <a:cs typeface="Calibri" pitchFamily="34" charset="-120"/>
+                <a:cs typeface="Amiri" pitchFamily="2" charset="-78"/>
               </a:rPr>
               <a:t>What is not provided?</a:t>
             </a:r>
@@ -4242,8 +4194,7 @@
                   <a:srgbClr val="1B3B6F"/>
                 </a:solidFill>
                 <a:latin typeface="Calibri" pitchFamily="34" charset="0"/>
-                <a:ea typeface="Calibri" pitchFamily="34" charset="-122"/>
-                <a:cs typeface="Calibri" pitchFamily="34" charset="-120"/>
+                <a:cs typeface="Amiri" pitchFamily="2" charset="-78"/>
               </a:rPr>
               <a:t>A</a:t>
             </a:r>
@@ -4281,8 +4232,7 @@
                   <a:srgbClr val="1F2A37"/>
                 </a:solidFill>
                 <a:latin typeface="Calibri" pitchFamily="34" charset="0"/>
-                <a:ea typeface="Calibri" pitchFamily="34" charset="-122"/>
-                <a:cs typeface="Calibri" pitchFamily="34" charset="-120"/>
+                <a:cs typeface="Amiri" pitchFamily="2" charset="-78"/>
               </a:rPr>
               <a:t>computer access</a:t>
             </a:r>
@@ -4345,8 +4295,7 @@
                   <a:srgbClr val="1B3B6F"/>
                 </a:solidFill>
                 <a:latin typeface="Calibri" pitchFamily="34" charset="0"/>
-                <a:ea typeface="Calibri" pitchFamily="34" charset="-122"/>
-                <a:cs typeface="Calibri" pitchFamily="34" charset="-120"/>
+                <a:cs typeface="Amiri" pitchFamily="2" charset="-78"/>
               </a:rPr>
               <a:t>B</a:t>
             </a:r>
@@ -4384,8 +4333,7 @@
                   <a:srgbClr val="1F2A37"/>
                 </a:solidFill>
                 <a:latin typeface="Calibri" pitchFamily="34" charset="0"/>
-                <a:ea typeface="Calibri" pitchFamily="34" charset="-122"/>
-                <a:cs typeface="Calibri" pitchFamily="34" charset="-120"/>
+                <a:cs typeface="Amiri" pitchFamily="2" charset="-78"/>
               </a:rPr>
               <a:t>a salary</a:t>
             </a:r>
@@ -4448,8 +4396,7 @@
                   <a:srgbClr val="1B3B6F"/>
                 </a:solidFill>
                 <a:latin typeface="Calibri" pitchFamily="34" charset="0"/>
-                <a:ea typeface="Calibri" pitchFamily="34" charset="-122"/>
-                <a:cs typeface="Calibri" pitchFamily="34" charset="-120"/>
+                <a:cs typeface="Amiri" pitchFamily="2" charset="-78"/>
               </a:rPr>
               <a:t>C</a:t>
             </a:r>
@@ -4487,8 +4434,7 @@
                   <a:srgbClr val="1F2A37"/>
                 </a:solidFill>
                 <a:latin typeface="Calibri" pitchFamily="34" charset="0"/>
-                <a:ea typeface="Calibri" pitchFamily="34" charset="-122"/>
-                <a:cs typeface="Calibri" pitchFamily="34" charset="-120"/>
+                <a:cs typeface="Amiri" pitchFamily="2" charset="-78"/>
               </a:rPr>
               <a:t>a reference</a:t>
             </a:r>
@@ -4585,8 +4531,7 @@
                   <a:srgbClr val="FFFFFF"/>
                 </a:solidFill>
                 <a:latin typeface="Calibri" pitchFamily="34" charset="0"/>
-                <a:ea typeface="Calibri" pitchFamily="34" charset="-122"/>
-                <a:cs typeface="Calibri" pitchFamily="34" charset="-120"/>
+                <a:cs typeface="Amiri" pitchFamily="2" charset="-78"/>
               </a:rPr>
               <a:t>2</a:t>
             </a:r>
@@ -4624,8 +4569,7 @@
                   <a:srgbClr val="1B3B6F"/>
                 </a:solidFill>
                 <a:latin typeface="Calibri" pitchFamily="34" charset="0"/>
-                <a:ea typeface="Calibri" pitchFamily="34" charset="-122"/>
-                <a:cs typeface="Calibri" pitchFamily="34" charset="-120"/>
+                <a:cs typeface="Amiri" pitchFamily="2" charset="-78"/>
               </a:rPr>
               <a:t>What must applicants send?</a:t>
             </a:r>
@@ -4688,8 +4632,7 @@
                   <a:srgbClr val="1B3B6F"/>
                 </a:solidFill>
                 <a:latin typeface="Calibri" pitchFamily="34" charset="0"/>
-                <a:ea typeface="Calibri" pitchFamily="34" charset="-122"/>
-                <a:cs typeface="Calibri" pitchFamily="34" charset="-120"/>
+                <a:cs typeface="Amiri" pitchFamily="2" charset="-78"/>
               </a:rPr>
               <a:t>A</a:t>
             </a:r>
@@ -4727,8 +4670,7 @@
                   <a:srgbClr val="1F2A37"/>
                 </a:solidFill>
                 <a:latin typeface="Calibri" pitchFamily="34" charset="0"/>
-                <a:ea typeface="Calibri" pitchFamily="34" charset="-122"/>
-                <a:cs typeface="Calibri" pitchFamily="34" charset="-120"/>
+                <a:cs typeface="Amiri" pitchFamily="2" charset="-78"/>
               </a:rPr>
               <a:t>an essay</a:t>
             </a:r>
@@ -4791,8 +4733,7 @@
                   <a:srgbClr val="1B3B6F"/>
                 </a:solidFill>
                 <a:latin typeface="Calibri" pitchFamily="34" charset="0"/>
-                <a:ea typeface="Calibri" pitchFamily="34" charset="-122"/>
-                <a:cs typeface="Calibri" pitchFamily="34" charset="-120"/>
+                <a:cs typeface="Amiri" pitchFamily="2" charset="-78"/>
               </a:rPr>
               <a:t>B</a:t>
             </a:r>
@@ -4830,8 +4771,7 @@
                   <a:srgbClr val="1F2A37"/>
                 </a:solidFill>
                 <a:latin typeface="Calibri" pitchFamily="34" charset="0"/>
-                <a:ea typeface="Calibri" pitchFamily="34" charset="-122"/>
-                <a:cs typeface="Calibri" pitchFamily="34" charset="-120"/>
+                <a:cs typeface="Amiri" pitchFamily="2" charset="-78"/>
               </a:rPr>
               <a:t>a CV</a:t>
             </a:r>
@@ -4894,8 +4834,7 @@
                   <a:srgbClr val="1B3B6F"/>
                 </a:solidFill>
                 <a:latin typeface="Calibri" pitchFamily="34" charset="0"/>
-                <a:ea typeface="Calibri" pitchFamily="34" charset="-122"/>
-                <a:cs typeface="Calibri" pitchFamily="34" charset="-120"/>
+                <a:cs typeface="Amiri" pitchFamily="2" charset="-78"/>
               </a:rPr>
               <a:t>C</a:t>
             </a:r>
@@ -4933,8 +4872,7 @@
                   <a:srgbClr val="1F2A37"/>
                 </a:solidFill>
                 <a:latin typeface="Calibri" pitchFamily="34" charset="0"/>
-                <a:ea typeface="Calibri" pitchFamily="34" charset="-122"/>
-                <a:cs typeface="Calibri" pitchFamily="34" charset="-120"/>
+                <a:cs typeface="Amiri" pitchFamily="2" charset="-78"/>
               </a:rPr>
               <a:t>a passport</a:t>
             </a:r>
@@ -5031,8 +4969,7 @@
                   <a:srgbClr val="FFFFFF"/>
                 </a:solidFill>
                 <a:latin typeface="Calibri" pitchFamily="34" charset="0"/>
-                <a:ea typeface="Calibri" pitchFamily="34" charset="-122"/>
-                <a:cs typeface="Calibri" pitchFamily="34" charset="-120"/>
+                <a:cs typeface="Amiri" pitchFamily="2" charset="-78"/>
               </a:rPr>
               <a:t>3</a:t>
             </a:r>
@@ -5070,8 +5007,7 @@
                   <a:srgbClr val="1B3B6F"/>
                 </a:solidFill>
                 <a:latin typeface="Calibri" pitchFamily="34" charset="0"/>
-                <a:ea typeface="Calibri" pitchFamily="34" charset="-122"/>
-                <a:cs typeface="Calibri" pitchFamily="34" charset="-120"/>
+                <a:cs typeface="Amiri" pitchFamily="2" charset="-78"/>
               </a:rPr>
               <a:t>When is the deadline?</a:t>
             </a:r>
@@ -5134,8 +5070,7 @@
                   <a:srgbClr val="1B3B6F"/>
                 </a:solidFill>
                 <a:latin typeface="Calibri" pitchFamily="34" charset="0"/>
-                <a:ea typeface="Calibri" pitchFamily="34" charset="-122"/>
-                <a:cs typeface="Calibri" pitchFamily="34" charset="-120"/>
+                <a:cs typeface="Amiri" pitchFamily="2" charset="-78"/>
               </a:rPr>
               <a:t>A</a:t>
             </a:r>
@@ -5173,8 +5108,7 @@
                   <a:srgbClr val="1F2A37"/>
                 </a:solidFill>
                 <a:latin typeface="Calibri" pitchFamily="34" charset="0"/>
-                <a:ea typeface="Calibri" pitchFamily="34" charset="-122"/>
-                <a:cs typeface="Calibri" pitchFamily="34" charset="-120"/>
+                <a:cs typeface="Amiri" pitchFamily="2" charset="-78"/>
               </a:rPr>
               <a:t>Friday</a:t>
             </a:r>
@@ -5237,8 +5171,7 @@
                   <a:srgbClr val="1B3B6F"/>
                 </a:solidFill>
                 <a:latin typeface="Calibri" pitchFamily="34" charset="0"/>
-                <a:ea typeface="Calibri" pitchFamily="34" charset="-122"/>
-                <a:cs typeface="Calibri" pitchFamily="34" charset="-120"/>
+                <a:cs typeface="Amiri" pitchFamily="2" charset="-78"/>
               </a:rPr>
               <a:t>B</a:t>
             </a:r>
@@ -5276,8 +5209,7 @@
                   <a:srgbClr val="1F2A37"/>
                 </a:solidFill>
                 <a:latin typeface="Calibri" pitchFamily="34" charset="0"/>
-                <a:ea typeface="Calibri" pitchFamily="34" charset="-122"/>
-                <a:cs typeface="Calibri" pitchFamily="34" charset="-120"/>
+                <a:cs typeface="Amiri" pitchFamily="2" charset="-78"/>
               </a:rPr>
               <a:t>Monday</a:t>
             </a:r>
@@ -5340,8 +5272,7 @@
                   <a:srgbClr val="1B3B6F"/>
                 </a:solidFill>
                 <a:latin typeface="Calibri" pitchFamily="34" charset="0"/>
-                <a:ea typeface="Calibri" pitchFamily="34" charset="-122"/>
-                <a:cs typeface="Calibri" pitchFamily="34" charset="-120"/>
+                <a:cs typeface="Amiri" pitchFamily="2" charset="-78"/>
               </a:rPr>
               <a:t>C</a:t>
             </a:r>
@@ -5379,8 +5310,7 @@
                   <a:srgbClr val="1F2A37"/>
                 </a:solidFill>
                 <a:latin typeface="Calibri" pitchFamily="34" charset="0"/>
-                <a:ea typeface="Calibri" pitchFamily="34" charset="-122"/>
-                <a:cs typeface="Calibri" pitchFamily="34" charset="-120"/>
+                <a:cs typeface="Amiri" pitchFamily="2" charset="-78"/>
               </a:rPr>
               <a:t>Thursday</a:t>
             </a:r>
@@ -5477,8 +5407,7 @@
                   <a:srgbClr val="FFFFFF"/>
                 </a:solidFill>
                 <a:latin typeface="Calibri" pitchFamily="34" charset="0"/>
-                <a:ea typeface="Calibri" pitchFamily="34" charset="-122"/>
-                <a:cs typeface="Calibri" pitchFamily="34" charset="-120"/>
+                <a:cs typeface="Amiri" pitchFamily="2" charset="-78"/>
               </a:rPr>
               <a:t>4</a:t>
             </a:r>
@@ -5516,8 +5445,7 @@
                   <a:srgbClr val="1B3B6F"/>
                 </a:solidFill>
                 <a:latin typeface="Calibri" pitchFamily="34" charset="0"/>
-                <a:ea typeface="Calibri" pitchFamily="34" charset="-122"/>
-                <a:cs typeface="Calibri" pitchFamily="34" charset="-120"/>
+                <a:cs typeface="Amiri" pitchFamily="2" charset="-78"/>
               </a:rPr>
               <a:t>What attitude is encouraged?</a:t>
             </a:r>
@@ -5580,8 +5508,7 @@
                   <a:srgbClr val="1B3B6F"/>
                 </a:solidFill>
                 <a:latin typeface="Calibri" pitchFamily="34" charset="0"/>
-                <a:ea typeface="Calibri" pitchFamily="34" charset="-122"/>
-                <a:cs typeface="Calibri" pitchFamily="34" charset="-120"/>
+                <a:cs typeface="Amiri" pitchFamily="2" charset="-78"/>
               </a:rPr>
               <a:t>A</a:t>
             </a:r>
@@ -5619,8 +5546,7 @@
                   <a:srgbClr val="1F2A37"/>
                 </a:solidFill>
                 <a:latin typeface="Calibri" pitchFamily="34" charset="0"/>
-                <a:ea typeface="Calibri" pitchFamily="34" charset="-122"/>
-                <a:cs typeface="Calibri" pitchFamily="34" charset="-120"/>
+                <a:cs typeface="Amiri" pitchFamily="2" charset="-78"/>
               </a:rPr>
               <a:t>responsibility</a:t>
             </a:r>
@@ -5683,8 +5609,7 @@
                   <a:srgbClr val="1B3B6F"/>
                 </a:solidFill>
                 <a:latin typeface="Calibri" pitchFamily="34" charset="0"/>
-                <a:ea typeface="Calibri" pitchFamily="34" charset="-122"/>
-                <a:cs typeface="Calibri" pitchFamily="34" charset="-120"/>
+                <a:cs typeface="Amiri" pitchFamily="2" charset="-78"/>
               </a:rPr>
               <a:t>B</a:t>
             </a:r>
@@ -5722,8 +5647,7 @@
                   <a:srgbClr val="1F2A37"/>
                 </a:solidFill>
                 <a:latin typeface="Calibri" pitchFamily="34" charset="0"/>
-                <a:ea typeface="Calibri" pitchFamily="34" charset="-122"/>
-                <a:cs typeface="Calibri" pitchFamily="34" charset="-120"/>
+                <a:cs typeface="Amiri" pitchFamily="2" charset="-78"/>
               </a:rPr>
               <a:t>carelessness</a:t>
             </a:r>
@@ -5786,8 +5710,7 @@
                   <a:srgbClr val="1B3B6F"/>
                 </a:solidFill>
                 <a:latin typeface="Calibri" pitchFamily="34" charset="0"/>
-                <a:ea typeface="Calibri" pitchFamily="34" charset="-122"/>
-                <a:cs typeface="Calibri" pitchFamily="34" charset="-120"/>
+                <a:cs typeface="Amiri" pitchFamily="2" charset="-78"/>
               </a:rPr>
               <a:t>C</a:t>
             </a:r>
@@ -5825,8 +5748,7 @@
                   <a:srgbClr val="1F2A37"/>
                 </a:solidFill>
                 <a:latin typeface="Calibri" pitchFamily="34" charset="0"/>
-                <a:ea typeface="Calibri" pitchFamily="34" charset="-122"/>
-                <a:cs typeface="Calibri" pitchFamily="34" charset="-120"/>
+                <a:cs typeface="Amiri" pitchFamily="2" charset="-78"/>
               </a:rPr>
               <a:t>silence</a:t>
             </a:r>
@@ -5923,8 +5845,7 @@
                   <a:srgbClr val="FFFFFF"/>
                 </a:solidFill>
                 <a:latin typeface="Calibri" pitchFamily="34" charset="0"/>
-                <a:ea typeface="Calibri" pitchFamily="34" charset="-122"/>
-                <a:cs typeface="Calibri" pitchFamily="34" charset="-120"/>
+                <a:cs typeface="Amiri" pitchFamily="2" charset="-78"/>
               </a:rPr>
               <a:t>5</a:t>
             </a:r>
@@ -5962,8 +5883,7 @@
                   <a:srgbClr val="1B3B6F"/>
                 </a:solidFill>
                 <a:latin typeface="Calibri" pitchFamily="34" charset="0"/>
-                <a:ea typeface="Calibri" pitchFamily="34" charset="-122"/>
-                <a:cs typeface="Calibri" pitchFamily="34" charset="-120"/>
+                <a:cs typeface="Amiri" pitchFamily="2" charset="-78"/>
               </a:rPr>
               <a:t>What is the overall purpose?</a:t>
             </a:r>
@@ -6026,8 +5946,7 @@
                   <a:srgbClr val="1B3B6F"/>
                 </a:solidFill>
                 <a:latin typeface="Calibri" pitchFamily="34" charset="0"/>
-                <a:ea typeface="Calibri" pitchFamily="34" charset="-122"/>
-                <a:cs typeface="Calibri" pitchFamily="34" charset="-120"/>
+                <a:cs typeface="Amiri" pitchFamily="2" charset="-78"/>
               </a:rPr>
               <a:t>A</a:t>
             </a:r>
@@ -6065,8 +5984,7 @@
                   <a:srgbClr val="1F2A37"/>
                 </a:solidFill>
                 <a:latin typeface="Calibri" pitchFamily="34" charset="0"/>
-                <a:ea typeface="Calibri" pitchFamily="34" charset="-122"/>
-                <a:cs typeface="Calibri" pitchFamily="34" charset="-120"/>
+                <a:cs typeface="Amiri" pitchFamily="2" charset="-78"/>
               </a:rPr>
               <a:t>to advertise a shop</a:t>
             </a:r>
@@ -6129,8 +6047,7 @@
                   <a:srgbClr val="1B3B6F"/>
                 </a:solidFill>
                 <a:latin typeface="Calibri" pitchFamily="34" charset="0"/>
-                <a:ea typeface="Calibri" pitchFamily="34" charset="-122"/>
-                <a:cs typeface="Calibri" pitchFamily="34" charset="-120"/>
+                <a:cs typeface="Amiri" pitchFamily="2" charset="-78"/>
               </a:rPr>
               <a:t>B</a:t>
             </a:r>
@@ -6168,8 +6085,7 @@
                   <a:srgbClr val="1F2A37"/>
                 </a:solidFill>
                 <a:latin typeface="Calibri" pitchFamily="34" charset="0"/>
-                <a:ea typeface="Calibri" pitchFamily="34" charset="-122"/>
-                <a:cs typeface="Calibri" pitchFamily="34" charset="-120"/>
+                <a:cs typeface="Amiri" pitchFamily="2" charset="-78"/>
               </a:rPr>
               <a:t>to recruit trainees</a:t>
             </a:r>
@@ -6232,8 +6148,7 @@
                   <a:srgbClr val="1B3B6F"/>
                 </a:solidFill>
                 <a:latin typeface="Calibri" pitchFamily="34" charset="0"/>
-                <a:ea typeface="Calibri" pitchFamily="34" charset="-122"/>
-                <a:cs typeface="Calibri" pitchFamily="34" charset="-120"/>
+                <a:cs typeface="Amiri" pitchFamily="2" charset="-78"/>
               </a:rPr>
               <a:t>C</a:t>
             </a:r>
@@ -6271,8 +6186,7 @@
                   <a:srgbClr val="1F2A37"/>
                 </a:solidFill>
                 <a:latin typeface="Calibri" pitchFamily="34" charset="0"/>
-                <a:ea typeface="Calibri" pitchFamily="34" charset="-122"/>
-                <a:cs typeface="Calibri" pitchFamily="34" charset="-120"/>
+                <a:cs typeface="Amiri" pitchFamily="2" charset="-78"/>
               </a:rPr>
               <a:t>to cancel a course</a:t>
             </a:r>
@@ -6310,8 +6224,7 @@
                   <a:srgbClr val="8A93A0"/>
                 </a:solidFill>
                 <a:latin typeface="Calibri" pitchFamily="34" charset="0"/>
-                <a:ea typeface="Calibri" pitchFamily="34" charset="-122"/>
-                <a:cs typeface="Calibri" pitchFamily="34" charset="-120"/>
+                <a:cs typeface="Amiri" pitchFamily="2" charset="-78"/>
               </a:rPr>
               <a:t>10 / 23</a:t>
             </a:r>
@@ -6405,9 +6318,8 @@
                 <a:solidFill>
                   <a:srgbClr val="D4AF37"/>
                 </a:solidFill>
-                <a:latin typeface="Amiri" pitchFamily="34" charset="0"/>
-                <a:ea typeface="Amiri" pitchFamily="34" charset="-122"/>
-                <a:cs typeface="Amiri" pitchFamily="34" charset="-120"/>
+                <a:latin typeface="Amiri" pitchFamily="2" charset="-78"/>
+                <a:cs typeface="Amiri" pitchFamily="2" charset="-78"/>
               </a:rPr>
               <a:t>م</a:t>
             </a:r>
@@ -6445,8 +6357,7 @@
                   <a:srgbClr val="1B3B6F"/>
                 </a:solidFill>
                 <a:latin typeface="Cambria" pitchFamily="34" charset="0"/>
-                <a:ea typeface="Cambria" pitchFamily="34" charset="-122"/>
-                <a:cs typeface="Cambria" pitchFamily="34" charset="-120"/>
+                <a:cs typeface="Amiri" pitchFamily="2" charset="-78"/>
               </a:rPr>
               <a:t>Al Madina Online School</a:t>
             </a:r>
@@ -6484,8 +6395,7 @@
                   <a:srgbClr val="8A6D1E"/>
                 </a:solidFill>
                 <a:latin typeface="Calibri" pitchFamily="34" charset="0"/>
-                <a:ea typeface="Calibri" pitchFamily="34" charset="-122"/>
-                <a:cs typeface="Calibri" pitchFamily="34" charset="-120"/>
+                <a:cs typeface="Amiri" pitchFamily="2" charset="-78"/>
               </a:rPr>
               <a:t>ARABIC DEPARTMENT · MIFTAH ARABIC · IGCSE 0544</a:t>
             </a:r>
@@ -6550,8 +6460,7 @@
                   <a:srgbClr val="FFFFFF"/>
                 </a:solidFill>
                 <a:latin typeface="Calibri" pitchFamily="34" charset="0"/>
-                <a:ea typeface="Calibri" pitchFamily="34" charset="-122"/>
-                <a:cs typeface="Calibri" pitchFamily="34" charset="-120"/>
+                <a:cs typeface="Amiri" pitchFamily="2" charset="-78"/>
               </a:rPr>
               <a:t>D3-L12 · D3 Assessment</a:t>
             </a:r>
@@ -6616,8 +6525,7 @@
                   <a:srgbClr val="FFFFFF"/>
                 </a:solidFill>
                 <a:latin typeface="Calibri" pitchFamily="34" charset="0"/>
-                <a:ea typeface="Calibri" pitchFamily="34" charset="-122"/>
-                <a:cs typeface="Calibri" pitchFamily="34" charset="-120"/>
+                <a:cs typeface="Amiri" pitchFamily="2" charset="-78"/>
               </a:rPr>
               <a:t>I DO</a:t>
             </a:r>
@@ -6655,8 +6563,7 @@
                   <a:srgbClr val="6B4C9A"/>
                 </a:solidFill>
                 <a:latin typeface="Calibri" pitchFamily="34" charset="0"/>
-                <a:ea typeface="Calibri" pitchFamily="34" charset="-122"/>
-                <a:cs typeface="Calibri" pitchFamily="34" charset="-120"/>
+                <a:cs typeface="Amiri" pitchFamily="2" charset="-78"/>
               </a:rPr>
               <a:t>LISTENING · QUESTIONS 6–10 · ANSWERS</a:t>
             </a:r>
@@ -6694,8 +6601,7 @@
                   <a:srgbClr val="1B3B6F"/>
                 </a:solidFill>
                 <a:latin typeface="Cambria" pitchFamily="34" charset="0"/>
-                <a:ea typeface="Cambria" pitchFamily="34" charset="-122"/>
-                <a:cs typeface="Cambria" pitchFamily="34" charset="-120"/>
+                <a:cs typeface="Amiri" pitchFamily="2" charset="-78"/>
               </a:rPr>
               <a:t>Questions 6–10: answers</a:t>
             </a:r>
@@ -6732,9 +6638,8 @@
                 <a:solidFill>
                   <a:srgbClr val="8A6D1E"/>
                 </a:solidFill>
-                <a:latin typeface="Amiri" pitchFamily="34" charset="0"/>
-                <a:ea typeface="Amiri" pitchFamily="34" charset="-122"/>
-                <a:cs typeface="Amiri" pitchFamily="34" charset="-120"/>
+                <a:latin typeface="Amiri" pitchFamily="2" charset="-78"/>
+                <a:cs typeface="Amiri" pitchFamily="2" charset="-78"/>
               </a:rPr>
               <a:t>الإِجَابَاتُ</a:t>
             </a:r>
@@ -6772,8 +6677,7 @@
                   <a:srgbClr val="8A93A0"/>
                 </a:solidFill>
                 <a:latin typeface="Calibri" pitchFamily="34" charset="0"/>
-                <a:ea typeface="Calibri" pitchFamily="34" charset="-122"/>
-                <a:cs typeface="Calibri" pitchFamily="34" charset="-120"/>
+                <a:cs typeface="Amiri" pitchFamily="2" charset="-78"/>
               </a:rPr>
               <a:t>Miftah Arabic · Development D3 · Work and Careers · D3-L12</a:t>
             </a:r>
@@ -6870,8 +6774,7 @@
                   <a:srgbClr val="FFFFFF"/>
                 </a:solidFill>
                 <a:latin typeface="Calibri" pitchFamily="34" charset="0"/>
-                <a:ea typeface="Calibri" pitchFamily="34" charset="-122"/>
-                <a:cs typeface="Calibri" pitchFamily="34" charset="-120"/>
+                <a:cs typeface="Amiri" pitchFamily="2" charset="-78"/>
               </a:rPr>
               <a:t>1</a:t>
             </a:r>
@@ -6909,8 +6812,7 @@
                   <a:srgbClr val="1B3B6F"/>
                 </a:solidFill>
                 <a:latin typeface="Calibri" pitchFamily="34" charset="0"/>
-                <a:ea typeface="Calibri" pitchFamily="34" charset="-122"/>
-                <a:cs typeface="Calibri" pitchFamily="34" charset="-120"/>
+                <a:cs typeface="Amiri" pitchFamily="2" charset="-78"/>
               </a:rPr>
               <a:t>What is not provided?</a:t>
             </a:r>
@@ -6973,8 +6875,7 @@
                   <a:srgbClr val="1B3B6F"/>
                 </a:solidFill>
                 <a:latin typeface="Calibri" pitchFamily="34" charset="0"/>
-                <a:ea typeface="Calibri" pitchFamily="34" charset="-122"/>
-                <a:cs typeface="Calibri" pitchFamily="34" charset="-120"/>
+                <a:cs typeface="Amiri" pitchFamily="2" charset="-78"/>
               </a:rPr>
               <a:t>A</a:t>
             </a:r>
@@ -7012,8 +6913,7 @@
                   <a:srgbClr val="9AA1AB"/>
                 </a:solidFill>
                 <a:latin typeface="Calibri" pitchFamily="34" charset="0"/>
-                <a:ea typeface="Calibri" pitchFamily="34" charset="-122"/>
-                <a:cs typeface="Calibri" pitchFamily="34" charset="-120"/>
+                <a:cs typeface="Amiri" pitchFamily="2" charset="-78"/>
               </a:rPr>
               <a:t>computer access</a:t>
             </a:r>
@@ -7103,8 +7003,7 @@
                   <a:srgbClr val="FFFFFF"/>
                 </a:solidFill>
                 <a:latin typeface="Calibri" pitchFamily="34" charset="0"/>
-                <a:ea typeface="Calibri" pitchFamily="34" charset="-122"/>
-                <a:cs typeface="Calibri" pitchFamily="34" charset="-120"/>
+                <a:cs typeface="Amiri" pitchFamily="2" charset="-78"/>
               </a:rPr>
               <a:t>B</a:t>
             </a:r>
@@ -7142,8 +7041,7 @@
                   <a:srgbClr val="1F2A37"/>
                 </a:solidFill>
                 <a:latin typeface="Calibri" pitchFamily="34" charset="0"/>
-                <a:ea typeface="Calibri" pitchFamily="34" charset="-122"/>
-                <a:cs typeface="Calibri" pitchFamily="34" charset="-120"/>
+                <a:cs typeface="Amiri" pitchFamily="2" charset="-78"/>
               </a:rPr>
               <a:t>a salary</a:t>
             </a:r>
@@ -7206,8 +7104,7 @@
                   <a:srgbClr val="1B3B6F"/>
                 </a:solidFill>
                 <a:latin typeface="Calibri" pitchFamily="34" charset="0"/>
-                <a:ea typeface="Calibri" pitchFamily="34" charset="-122"/>
-                <a:cs typeface="Calibri" pitchFamily="34" charset="-120"/>
+                <a:cs typeface="Amiri" pitchFamily="2" charset="-78"/>
               </a:rPr>
               <a:t>C</a:t>
             </a:r>
@@ -7245,8 +7142,7 @@
                   <a:srgbClr val="9AA1AB"/>
                 </a:solidFill>
                 <a:latin typeface="Calibri" pitchFamily="34" charset="0"/>
-                <a:ea typeface="Calibri" pitchFamily="34" charset="-122"/>
-                <a:cs typeface="Calibri" pitchFamily="34" charset="-120"/>
+                <a:cs typeface="Amiri" pitchFamily="2" charset="-78"/>
               </a:rPr>
               <a:t>a reference</a:t>
             </a:r>
@@ -7283,9 +7179,8 @@
                 <a:solidFill>
                   <a:srgbClr val="8A6D1E"/>
                 </a:solidFill>
-                <a:latin typeface="Amiri" pitchFamily="34" charset="0"/>
-                <a:ea typeface="Amiri" pitchFamily="34" charset="-122"/>
-                <a:cs typeface="Amiri" pitchFamily="34" charset="-120"/>
+                <a:latin typeface="Amiri" pitchFamily="2" charset="-78"/>
+                <a:cs typeface="Amiri" pitchFamily="2" charset="-78"/>
               </a:rPr>
               <a:t>لَا تُقَدِّمُ رَاتِبًا</a:t>
             </a:r>
@@ -7382,8 +7277,7 @@
                   <a:srgbClr val="FFFFFF"/>
                 </a:solidFill>
                 <a:latin typeface="Calibri" pitchFamily="34" charset="0"/>
-                <a:ea typeface="Calibri" pitchFamily="34" charset="-122"/>
-                <a:cs typeface="Calibri" pitchFamily="34" charset="-120"/>
+                <a:cs typeface="Amiri" pitchFamily="2" charset="-78"/>
               </a:rPr>
               <a:t>2</a:t>
             </a:r>
@@ -7421,8 +7315,7 @@
                   <a:srgbClr val="1B3B6F"/>
                 </a:solidFill>
                 <a:latin typeface="Calibri" pitchFamily="34" charset="0"/>
-                <a:ea typeface="Calibri" pitchFamily="34" charset="-122"/>
-                <a:cs typeface="Calibri" pitchFamily="34" charset="-120"/>
+                <a:cs typeface="Amiri" pitchFamily="2" charset="-78"/>
               </a:rPr>
               <a:t>What must applicants send?</a:t>
             </a:r>
@@ -7485,8 +7378,7 @@
                   <a:srgbClr val="1B3B6F"/>
                 </a:solidFill>
                 <a:latin typeface="Calibri" pitchFamily="34" charset="0"/>
-                <a:ea typeface="Calibri" pitchFamily="34" charset="-122"/>
-                <a:cs typeface="Calibri" pitchFamily="34" charset="-120"/>
+                <a:cs typeface="Amiri" pitchFamily="2" charset="-78"/>
               </a:rPr>
               <a:t>A</a:t>
             </a:r>
@@ -7524,8 +7416,7 @@
                   <a:srgbClr val="9AA1AB"/>
                 </a:solidFill>
                 <a:latin typeface="Calibri" pitchFamily="34" charset="0"/>
-                <a:ea typeface="Calibri" pitchFamily="34" charset="-122"/>
-                <a:cs typeface="Calibri" pitchFamily="34" charset="-120"/>
+                <a:cs typeface="Amiri" pitchFamily="2" charset="-78"/>
               </a:rPr>
               <a:t>an essay</a:t>
             </a:r>
@@ -7615,8 +7506,7 @@
                   <a:srgbClr val="FFFFFF"/>
                 </a:solidFill>
                 <a:latin typeface="Calibri" pitchFamily="34" charset="0"/>
-                <a:ea typeface="Calibri" pitchFamily="34" charset="-122"/>
-                <a:cs typeface="Calibri" pitchFamily="34" charset="-120"/>
+                <a:cs typeface="Amiri" pitchFamily="2" charset="-78"/>
               </a:rPr>
               <a:t>B</a:t>
             </a:r>
@@ -7654,8 +7544,7 @@
                   <a:srgbClr val="1F2A37"/>
                 </a:solidFill>
                 <a:latin typeface="Calibri" pitchFamily="34" charset="0"/>
-                <a:ea typeface="Calibri" pitchFamily="34" charset="-122"/>
-                <a:cs typeface="Calibri" pitchFamily="34" charset="-120"/>
+                <a:cs typeface="Amiri" pitchFamily="2" charset="-78"/>
               </a:rPr>
               <a:t>a CV</a:t>
             </a:r>
@@ -7718,8 +7607,7 @@
                   <a:srgbClr val="1B3B6F"/>
                 </a:solidFill>
                 <a:latin typeface="Calibri" pitchFamily="34" charset="0"/>
-                <a:ea typeface="Calibri" pitchFamily="34" charset="-122"/>
-                <a:cs typeface="Calibri" pitchFamily="34" charset="-120"/>
+                <a:cs typeface="Amiri" pitchFamily="2" charset="-78"/>
               </a:rPr>
               <a:t>C</a:t>
             </a:r>
@@ -7757,8 +7645,7 @@
                   <a:srgbClr val="9AA1AB"/>
                 </a:solidFill>
                 <a:latin typeface="Calibri" pitchFamily="34" charset="0"/>
-                <a:ea typeface="Calibri" pitchFamily="34" charset="-122"/>
-                <a:cs typeface="Calibri" pitchFamily="34" charset="-120"/>
+                <a:cs typeface="Amiri" pitchFamily="2" charset="-78"/>
               </a:rPr>
               <a:t>a passport</a:t>
             </a:r>
@@ -7795,9 +7682,8 @@
                 <a:solidFill>
                   <a:srgbClr val="8A6D1E"/>
                 </a:solidFill>
-                <a:latin typeface="Amiri" pitchFamily="34" charset="0"/>
-                <a:ea typeface="Amiri" pitchFamily="34" charset="-122"/>
-                <a:cs typeface="Amiri" pitchFamily="34" charset="-120"/>
+                <a:latin typeface="Amiri" pitchFamily="2" charset="-78"/>
+                <a:cs typeface="Amiri" pitchFamily="2" charset="-78"/>
               </a:rPr>
               <a:t>إِرْسَالُ سِيرَةٍ ذَاتِيَّةٍ</a:t>
             </a:r>
@@ -7894,8 +7780,7 @@
                   <a:srgbClr val="FFFFFF"/>
                 </a:solidFill>
                 <a:latin typeface="Calibri" pitchFamily="34" charset="0"/>
-                <a:ea typeface="Calibri" pitchFamily="34" charset="-122"/>
-                <a:cs typeface="Calibri" pitchFamily="34" charset="-120"/>
+                <a:cs typeface="Amiri" pitchFamily="2" charset="-78"/>
               </a:rPr>
               <a:t>3</a:t>
             </a:r>
@@ -7933,8 +7818,7 @@
                   <a:srgbClr val="1B3B6F"/>
                 </a:solidFill>
                 <a:latin typeface="Calibri" pitchFamily="34" charset="0"/>
-                <a:ea typeface="Calibri" pitchFamily="34" charset="-122"/>
-                <a:cs typeface="Calibri" pitchFamily="34" charset="-120"/>
+                <a:cs typeface="Amiri" pitchFamily="2" charset="-78"/>
               </a:rPr>
               <a:t>When is the deadline?</a:t>
             </a:r>
@@ -7997,8 +7881,7 @@
                   <a:srgbClr val="1B3B6F"/>
                 </a:solidFill>
                 <a:latin typeface="Calibri" pitchFamily="34" charset="0"/>
-                <a:ea typeface="Calibri" pitchFamily="34" charset="-122"/>
-                <a:cs typeface="Calibri" pitchFamily="34" charset="-120"/>
+                <a:cs typeface="Amiri" pitchFamily="2" charset="-78"/>
               </a:rPr>
               <a:t>A</a:t>
             </a:r>
@@ -8036,8 +7919,7 @@
                   <a:srgbClr val="9AA1AB"/>
                 </a:solidFill>
                 <a:latin typeface="Calibri" pitchFamily="34" charset="0"/>
-                <a:ea typeface="Calibri" pitchFamily="34" charset="-122"/>
-                <a:cs typeface="Calibri" pitchFamily="34" charset="-120"/>
+                <a:cs typeface="Amiri" pitchFamily="2" charset="-78"/>
               </a:rPr>
               <a:t>Friday</a:t>
             </a:r>
@@ -8100,8 +7982,7 @@
                   <a:srgbClr val="1B3B6F"/>
                 </a:solidFill>
                 <a:latin typeface="Calibri" pitchFamily="34" charset="0"/>
-                <a:ea typeface="Calibri" pitchFamily="34" charset="-122"/>
-                <a:cs typeface="Calibri" pitchFamily="34" charset="-120"/>
+                <a:cs typeface="Amiri" pitchFamily="2" charset="-78"/>
               </a:rPr>
               <a:t>B</a:t>
             </a:r>
@@ -8139,8 +8020,7 @@
                   <a:srgbClr val="9AA1AB"/>
                 </a:solidFill>
                 <a:latin typeface="Calibri" pitchFamily="34" charset="0"/>
-                <a:ea typeface="Calibri" pitchFamily="34" charset="-122"/>
-                <a:cs typeface="Calibri" pitchFamily="34" charset="-120"/>
+                <a:cs typeface="Amiri" pitchFamily="2" charset="-78"/>
               </a:rPr>
               <a:t>Monday</a:t>
             </a:r>
@@ -8230,8 +8110,7 @@
                   <a:srgbClr val="FFFFFF"/>
                 </a:solidFill>
                 <a:latin typeface="Calibri" pitchFamily="34" charset="0"/>
-                <a:ea typeface="Calibri" pitchFamily="34" charset="-122"/>
-                <a:cs typeface="Calibri" pitchFamily="34" charset="-120"/>
+                <a:cs typeface="Amiri" pitchFamily="2" charset="-78"/>
               </a:rPr>
               <a:t>C</a:t>
             </a:r>
@@ -8269,8 +8148,7 @@
                   <a:srgbClr val="1F2A37"/>
                 </a:solidFill>
                 <a:latin typeface="Calibri" pitchFamily="34" charset="0"/>
-                <a:ea typeface="Calibri" pitchFamily="34" charset="-122"/>
-                <a:cs typeface="Calibri" pitchFamily="34" charset="-120"/>
+                <a:cs typeface="Amiri" pitchFamily="2" charset="-78"/>
               </a:rPr>
               <a:t>Thursday</a:t>
             </a:r>
@@ -8307,9 +8185,8 @@
                 <a:solidFill>
                   <a:srgbClr val="8A6D1E"/>
                 </a:solidFill>
-                <a:latin typeface="Amiri" pitchFamily="34" charset="0"/>
-                <a:ea typeface="Amiri" pitchFamily="34" charset="-122"/>
-                <a:cs typeface="Amiri" pitchFamily="34" charset="-120"/>
+                <a:latin typeface="Amiri" pitchFamily="2" charset="-78"/>
+                <a:cs typeface="Amiri" pitchFamily="2" charset="-78"/>
               </a:rPr>
               <a:t>قَبْلَ يَوْمِ الخَمِيسِ</a:t>
             </a:r>
@@ -8406,8 +8283,7 @@
                   <a:srgbClr val="FFFFFF"/>
                 </a:solidFill>
                 <a:latin typeface="Calibri" pitchFamily="34" charset="0"/>
-                <a:ea typeface="Calibri" pitchFamily="34" charset="-122"/>
-                <a:cs typeface="Calibri" pitchFamily="34" charset="-120"/>
+                <a:cs typeface="Amiri" pitchFamily="2" charset="-78"/>
               </a:rPr>
               <a:t>4</a:t>
             </a:r>
@@ -8445,8 +8321,7 @@
                   <a:srgbClr val="1B3B6F"/>
                 </a:solidFill>
                 <a:latin typeface="Calibri" pitchFamily="34" charset="0"/>
-                <a:ea typeface="Calibri" pitchFamily="34" charset="-122"/>
-                <a:cs typeface="Calibri" pitchFamily="34" charset="-120"/>
+                <a:cs typeface="Amiri" pitchFamily="2" charset="-78"/>
               </a:rPr>
               <a:t>What attitude is encouraged?</a:t>
             </a:r>
@@ -8536,8 +8411,7 @@
                   <a:srgbClr val="FFFFFF"/>
                 </a:solidFill>
                 <a:latin typeface="Calibri" pitchFamily="34" charset="0"/>
-                <a:ea typeface="Calibri" pitchFamily="34" charset="-122"/>
-                <a:cs typeface="Calibri" pitchFamily="34" charset="-120"/>
+                <a:cs typeface="Amiri" pitchFamily="2" charset="-78"/>
               </a:rPr>
               <a:t>A</a:t>
             </a:r>
@@ -8575,8 +8449,7 @@
                   <a:srgbClr val="1F2A37"/>
                 </a:solidFill>
                 <a:latin typeface="Calibri" pitchFamily="34" charset="0"/>
-                <a:ea typeface="Calibri" pitchFamily="34" charset="-122"/>
-                <a:cs typeface="Calibri" pitchFamily="34" charset="-120"/>
+                <a:cs typeface="Amiri" pitchFamily="2" charset="-78"/>
               </a:rPr>
               <a:t>responsibility</a:t>
             </a:r>
@@ -8639,8 +8512,7 @@
                   <a:srgbClr val="1B3B6F"/>
                 </a:solidFill>
                 <a:latin typeface="Calibri" pitchFamily="34" charset="0"/>
-                <a:ea typeface="Calibri" pitchFamily="34" charset="-122"/>
-                <a:cs typeface="Calibri" pitchFamily="34" charset="-120"/>
+                <a:cs typeface="Amiri" pitchFamily="2" charset="-78"/>
               </a:rPr>
               <a:t>B</a:t>
             </a:r>
@@ -8678,8 +8550,7 @@
                   <a:srgbClr val="9AA1AB"/>
                 </a:solidFill>
                 <a:latin typeface="Calibri" pitchFamily="34" charset="0"/>
-                <a:ea typeface="Calibri" pitchFamily="34" charset="-122"/>
-                <a:cs typeface="Calibri" pitchFamily="34" charset="-120"/>
+                <a:cs typeface="Amiri" pitchFamily="2" charset="-78"/>
               </a:rPr>
               <a:t>carelessness</a:t>
             </a:r>
@@ -8742,8 +8613,7 @@
                   <a:srgbClr val="1B3B6F"/>
                 </a:solidFill>
                 <a:latin typeface="Calibri" pitchFamily="34" charset="0"/>
-                <a:ea typeface="Calibri" pitchFamily="34" charset="-122"/>
-                <a:cs typeface="Calibri" pitchFamily="34" charset="-120"/>
+                <a:cs typeface="Amiri" pitchFamily="2" charset="-78"/>
               </a:rPr>
               <a:t>C</a:t>
             </a:r>
@@ -8781,8 +8651,7 @@
                   <a:srgbClr val="9AA1AB"/>
                 </a:solidFill>
                 <a:latin typeface="Calibri" pitchFamily="34" charset="0"/>
-                <a:ea typeface="Calibri" pitchFamily="34" charset="-122"/>
-                <a:cs typeface="Calibri" pitchFamily="34" charset="-120"/>
+                <a:cs typeface="Amiri" pitchFamily="2" charset="-78"/>
               </a:rPr>
               <a:t>silence</a:t>
             </a:r>
@@ -8819,9 +8688,8 @@
                 <a:solidFill>
                   <a:srgbClr val="8A6D1E"/>
                 </a:solidFill>
-                <a:latin typeface="Amiri" pitchFamily="34" charset="0"/>
-                <a:ea typeface="Amiri" pitchFamily="34" charset="-122"/>
-                <a:cs typeface="Amiri" pitchFamily="34" charset="-120"/>
+                <a:latin typeface="Amiri" pitchFamily="2" charset="-78"/>
+                <a:cs typeface="Amiri" pitchFamily="2" charset="-78"/>
               </a:rPr>
               <a:t>مَسْؤُولِينَ وَمُسْتَعِدِّينَ لِلتَّعَلُّمِ</a:t>
             </a:r>
@@ -8918,8 +8786,7 @@
                   <a:srgbClr val="FFFFFF"/>
                 </a:solidFill>
                 <a:latin typeface="Calibri" pitchFamily="34" charset="0"/>
-                <a:ea typeface="Calibri" pitchFamily="34" charset="-122"/>
-                <a:cs typeface="Calibri" pitchFamily="34" charset="-120"/>
+                <a:cs typeface="Amiri" pitchFamily="2" charset="-78"/>
               </a:rPr>
               <a:t>5</a:t>
             </a:r>
@@ -8957,8 +8824,7 @@
                   <a:srgbClr val="1B3B6F"/>
                 </a:solidFill>
                 <a:latin typeface="Calibri" pitchFamily="34" charset="0"/>
-                <a:ea typeface="Calibri" pitchFamily="34" charset="-122"/>
-                <a:cs typeface="Calibri" pitchFamily="34" charset="-120"/>
+                <a:cs typeface="Amiri" pitchFamily="2" charset="-78"/>
               </a:rPr>
               <a:t>What is the overall purpose?</a:t>
             </a:r>
@@ -9021,8 +8887,7 @@
                   <a:srgbClr val="1B3B6F"/>
                 </a:solidFill>
                 <a:latin typeface="Calibri" pitchFamily="34" charset="0"/>
-                <a:ea typeface="Calibri" pitchFamily="34" charset="-122"/>
-                <a:cs typeface="Calibri" pitchFamily="34" charset="-120"/>
+                <a:cs typeface="Amiri" pitchFamily="2" charset="-78"/>
               </a:rPr>
               <a:t>A</a:t>
             </a:r>
@@ -9060,8 +8925,7 @@
                   <a:srgbClr val="9AA1AB"/>
                 </a:solidFill>
                 <a:latin typeface="Calibri" pitchFamily="34" charset="0"/>
-                <a:ea typeface="Calibri" pitchFamily="34" charset="-122"/>
-                <a:cs typeface="Calibri" pitchFamily="34" charset="-120"/>
+                <a:cs typeface="Amiri" pitchFamily="2" charset="-78"/>
               </a:rPr>
               <a:t>to advertise a shop</a:t>
             </a:r>
@@ -9151,8 +9015,7 @@
                   <a:srgbClr val="FFFFFF"/>
                 </a:solidFill>
                 <a:latin typeface="Calibri" pitchFamily="34" charset="0"/>
-                <a:ea typeface="Calibri" pitchFamily="34" charset="-122"/>
-                <a:cs typeface="Calibri" pitchFamily="34" charset="-120"/>
+                <a:cs typeface="Amiri" pitchFamily="2" charset="-78"/>
               </a:rPr>
               <a:t>B</a:t>
             </a:r>
@@ -9190,8 +9053,7 @@
                   <a:srgbClr val="1F2A37"/>
                 </a:solidFill>
                 <a:latin typeface="Calibri" pitchFamily="34" charset="0"/>
-                <a:ea typeface="Calibri" pitchFamily="34" charset="-122"/>
-                <a:cs typeface="Calibri" pitchFamily="34" charset="-120"/>
+                <a:cs typeface="Amiri" pitchFamily="2" charset="-78"/>
               </a:rPr>
               <a:t>to recruit trainees</a:t>
             </a:r>
@@ -9254,8 +9116,7 @@
                   <a:srgbClr val="1B3B6F"/>
                 </a:solidFill>
                 <a:latin typeface="Calibri" pitchFamily="34" charset="0"/>
-                <a:ea typeface="Calibri" pitchFamily="34" charset="-122"/>
-                <a:cs typeface="Calibri" pitchFamily="34" charset="-120"/>
+                <a:cs typeface="Amiri" pitchFamily="2" charset="-78"/>
               </a:rPr>
               <a:t>C</a:t>
             </a:r>
@@ -9293,8 +9154,7 @@
                   <a:srgbClr val="9AA1AB"/>
                 </a:solidFill>
                 <a:latin typeface="Calibri" pitchFamily="34" charset="0"/>
-                <a:ea typeface="Calibri" pitchFamily="34" charset="-122"/>
-                <a:cs typeface="Calibri" pitchFamily="34" charset="-120"/>
+                <a:cs typeface="Amiri" pitchFamily="2" charset="-78"/>
               </a:rPr>
               <a:t>to cancel a course</a:t>
             </a:r>
@@ -9331,9 +9191,8 @@
                 <a:solidFill>
                   <a:srgbClr val="8A6D1E"/>
                 </a:solidFill>
-                <a:latin typeface="Amiri" pitchFamily="34" charset="0"/>
-                <a:ea typeface="Amiri" pitchFamily="34" charset="-122"/>
-                <a:cs typeface="Amiri" pitchFamily="34" charset="-120"/>
+                <a:latin typeface="Amiri" pitchFamily="2" charset="-78"/>
+                <a:cs typeface="Amiri" pitchFamily="2" charset="-78"/>
               </a:rPr>
               <a:t>تُعْلِنُ … عَنْ فُرْصَةِ تَدْرِيبٍ</a:t>
             </a:r>
@@ -9371,8 +9230,7 @@
                   <a:srgbClr val="8A93A0"/>
                 </a:solidFill>
                 <a:latin typeface="Calibri" pitchFamily="34" charset="0"/>
-                <a:ea typeface="Calibri" pitchFamily="34" charset="-122"/>
-                <a:cs typeface="Calibri" pitchFamily="34" charset="-120"/>
+                <a:cs typeface="Amiri" pitchFamily="2" charset="-78"/>
               </a:rPr>
               <a:t>11 / 23</a:t>
             </a:r>
@@ -9466,9 +9324,8 @@
                 <a:solidFill>
                   <a:srgbClr val="D4AF37"/>
                 </a:solidFill>
-                <a:latin typeface="Amiri" pitchFamily="34" charset="0"/>
-                <a:ea typeface="Amiri" pitchFamily="34" charset="-122"/>
-                <a:cs typeface="Amiri" pitchFamily="34" charset="-120"/>
+                <a:latin typeface="Amiri" pitchFamily="2" charset="-78"/>
+                <a:cs typeface="Amiri" pitchFamily="2" charset="-78"/>
               </a:rPr>
               <a:t>م</a:t>
             </a:r>
@@ -9506,8 +9363,7 @@
                   <a:srgbClr val="1B3B6F"/>
                 </a:solidFill>
                 <a:latin typeface="Cambria" pitchFamily="34" charset="0"/>
-                <a:ea typeface="Cambria" pitchFamily="34" charset="-122"/>
-                <a:cs typeface="Cambria" pitchFamily="34" charset="-120"/>
+                <a:cs typeface="Amiri" pitchFamily="2" charset="-78"/>
               </a:rPr>
               <a:t>Al Madina Online School</a:t>
             </a:r>
@@ -9545,8 +9401,7 @@
                   <a:srgbClr val="8A6D1E"/>
                 </a:solidFill>
                 <a:latin typeface="Calibri" pitchFamily="34" charset="0"/>
-                <a:ea typeface="Calibri" pitchFamily="34" charset="-122"/>
-                <a:cs typeface="Calibri" pitchFamily="34" charset="-120"/>
+                <a:cs typeface="Amiri" pitchFamily="2" charset="-78"/>
               </a:rPr>
               <a:t>ARABIC DEPARTMENT · MIFTAH ARABIC · IGCSE 0544</a:t>
             </a:r>
@@ -9611,8 +9466,7 @@
                   <a:srgbClr val="FFFFFF"/>
                 </a:solidFill>
                 <a:latin typeface="Calibri" pitchFamily="34" charset="0"/>
-                <a:ea typeface="Calibri" pitchFamily="34" charset="-122"/>
-                <a:cs typeface="Calibri" pitchFamily="34" charset="-120"/>
+                <a:cs typeface="Amiri" pitchFamily="2" charset="-78"/>
               </a:rPr>
               <a:t>D3-L12 · D3 Assessment</a:t>
             </a:r>
@@ -9677,8 +9531,7 @@
                   <a:srgbClr val="FFFFFF"/>
                 </a:solidFill>
                 <a:latin typeface="Calibri" pitchFamily="34" charset="0"/>
-                <a:ea typeface="Calibri" pitchFamily="34" charset="-122"/>
-                <a:cs typeface="Calibri" pitchFamily="34" charset="-120"/>
+                <a:cs typeface="Amiri" pitchFamily="2" charset="-78"/>
               </a:rPr>
               <a:t>WE DO · 3 MIN</a:t>
             </a:r>
@@ -9716,8 +9569,7 @@
                   <a:srgbClr val="2F6FB0"/>
                 </a:solidFill>
                 <a:latin typeface="Calibri" pitchFamily="34" charset="0"/>
-                <a:ea typeface="Calibri" pitchFamily="34" charset="-122"/>
-                <a:cs typeface="Calibri" pitchFamily="34" charset="-120"/>
+                <a:cs typeface="Amiri" pitchFamily="2" charset="-78"/>
               </a:rPr>
               <a:t>READING · PART B · 10 MARKS (WEBSITE)</a:t>
             </a:r>
@@ -9755,8 +9607,7 @@
                   <a:srgbClr val="1B3B6F"/>
                 </a:solidFill>
                 <a:latin typeface="Cambria" pitchFamily="34" charset="0"/>
-                <a:ea typeface="Cambria" pitchFamily="34" charset="-122"/>
-                <a:cs typeface="Cambria" pitchFamily="34" charset="-120"/>
+                <a:cs typeface="Amiri" pitchFamily="2" charset="-78"/>
               </a:rPr>
               <a:t>Amal’s career plan</a:t>
             </a:r>
@@ -9793,9 +9644,8 @@
                 <a:solidFill>
                   <a:srgbClr val="8A6D1E"/>
                 </a:solidFill>
-                <a:latin typeface="Amiri" pitchFamily="34" charset="0"/>
-                <a:ea typeface="Amiri" pitchFamily="34" charset="-122"/>
-                <a:cs typeface="Amiri" pitchFamily="34" charset="-120"/>
+                <a:latin typeface="Amiri" pitchFamily="2" charset="-78"/>
+                <a:cs typeface="Amiri" pitchFamily="2" charset="-78"/>
               </a:rPr>
               <a:t>خُطَّتِي المِهَنِيَّةُ</a:t>
             </a:r>
@@ -9833,8 +9683,7 @@
                   <a:srgbClr val="8A93A0"/>
                 </a:solidFill>
                 <a:latin typeface="Calibri" pitchFamily="34" charset="0"/>
-                <a:ea typeface="Calibri" pitchFamily="34" charset="-122"/>
-                <a:cs typeface="Calibri" pitchFamily="34" charset="-120"/>
+                <a:cs typeface="Amiri" pitchFamily="2" charset="-78"/>
               </a:rPr>
               <a:t>Miftah Arabic · Development D3 · Work and Careers · D3-L12</a:t>
             </a:r>
@@ -9908,9 +9757,8 @@
                 <a:solidFill>
                   <a:srgbClr val="1F2A37"/>
                 </a:solidFill>
-                <a:latin typeface="Amiri" pitchFamily="34" charset="0"/>
-                <a:ea typeface="Amiri" pitchFamily="34" charset="-122"/>
-                <a:cs typeface="Amiri" pitchFamily="34" charset="-120"/>
+                <a:latin typeface="Amiri" pitchFamily="2" charset="-78"/>
+                <a:cs typeface="Amiri" pitchFamily="2" charset="-78"/>
               </a:rPr>
               <a:t>أَطْمَحُ إِلَى أَنْ أُصْبِحَ مُهَنْدِسَةَ بِيئَةٍ لِأَنَّنِي أُرِيدُ أَنْ أُسَاهِمَ فِي حَلِّ مُشْكِلَاتِ التَّلَوُّثِ. أَنَا جَيِّدَةٌ فِي العُلُومِ وَالعَمَلِ الجَمَاعِيِّ، وَالدَّلِيلُ عَلَى ذٰلِكَ أَنَّنِي قُدْتُ مَشْرُوعًا مَدْرَسِيًّا عَنْ إِعَادَةِ التَّدْوِيرِ. بَعْدَ التَّخَرُّجِ سَأَدْرُسُ الهَنْدَسَةَ، ثُمَّ سَأَبْحَثُ عَنْ تَدْرِيبٍ عَمَلِيٍّ. عَلَى الرَّغْمِ مِنْ أَنَّ الطَّرِيقَ طَوِيلٌ، فَإِنَّنِي مُسْتَعِدَّةٌ لِلْعَمَلِ بِجِدٍّ.</a:t>
             </a:r>
@@ -9948,8 +9796,7 @@
                   <a:srgbClr val="8A93A0"/>
                 </a:solidFill>
                 <a:latin typeface="Calibri" pitchFamily="34" charset="0"/>
-                <a:ea typeface="Calibri" pitchFamily="34" charset="-122"/>
-                <a:cs typeface="Calibri" pitchFamily="34" charset="-120"/>
+                <a:cs typeface="Amiri" pitchFamily="2" charset="-78"/>
               </a:rPr>
               <a:t>12 / 23</a:t>
             </a:r>
@@ -10043,9 +9890,8 @@
                 <a:solidFill>
                   <a:srgbClr val="D4AF37"/>
                 </a:solidFill>
-                <a:latin typeface="Amiri" pitchFamily="34" charset="0"/>
-                <a:ea typeface="Amiri" pitchFamily="34" charset="-122"/>
-                <a:cs typeface="Amiri" pitchFamily="34" charset="-120"/>
+                <a:latin typeface="Amiri" pitchFamily="2" charset="-78"/>
+                <a:cs typeface="Amiri" pitchFamily="2" charset="-78"/>
               </a:rPr>
               <a:t>م</a:t>
             </a:r>
@@ -10083,8 +9929,7 @@
                   <a:srgbClr val="1B3B6F"/>
                 </a:solidFill>
                 <a:latin typeface="Cambria" pitchFamily="34" charset="0"/>
-                <a:ea typeface="Cambria" pitchFamily="34" charset="-122"/>
-                <a:cs typeface="Cambria" pitchFamily="34" charset="-120"/>
+                <a:cs typeface="Amiri" pitchFamily="2" charset="-78"/>
               </a:rPr>
               <a:t>Al Madina Online School</a:t>
             </a:r>
@@ -10122,8 +9967,7 @@
                   <a:srgbClr val="8A6D1E"/>
                 </a:solidFill>
                 <a:latin typeface="Calibri" pitchFamily="34" charset="0"/>
-                <a:ea typeface="Calibri" pitchFamily="34" charset="-122"/>
-                <a:cs typeface="Calibri" pitchFamily="34" charset="-120"/>
+                <a:cs typeface="Amiri" pitchFamily="2" charset="-78"/>
               </a:rPr>
               <a:t>ARABIC DEPARTMENT · MIFTAH ARABIC · IGCSE 0544</a:t>
             </a:r>
@@ -10188,8 +10032,7 @@
                   <a:srgbClr val="FFFFFF"/>
                 </a:solidFill>
                 <a:latin typeface="Calibri" pitchFamily="34" charset="0"/>
-                <a:ea typeface="Calibri" pitchFamily="34" charset="-122"/>
-                <a:cs typeface="Calibri" pitchFamily="34" charset="-120"/>
+                <a:cs typeface="Amiri" pitchFamily="2" charset="-78"/>
               </a:rPr>
               <a:t>D3-L12 · D3 Assessment</a:t>
             </a:r>
@@ -10254,8 +10097,7 @@
                   <a:srgbClr val="FFFFFF"/>
                 </a:solidFill>
                 <a:latin typeface="Calibri" pitchFamily="34" charset="0"/>
-                <a:ea typeface="Calibri" pitchFamily="34" charset="-122"/>
-                <a:cs typeface="Calibri" pitchFamily="34" charset="-120"/>
+                <a:cs typeface="Amiri" pitchFamily="2" charset="-78"/>
               </a:rPr>
               <a:t>WE DO · 5 MIN</a:t>
             </a:r>
@@ -10293,8 +10135,7 @@
                   <a:srgbClr val="2F6FB0"/>
                 </a:solidFill>
                 <a:latin typeface="Calibri" pitchFamily="34" charset="0"/>
-                <a:ea typeface="Calibri" pitchFamily="34" charset="-122"/>
-                <a:cs typeface="Calibri" pitchFamily="34" charset="-120"/>
+                <a:cs typeface="Amiri" pitchFamily="2" charset="-78"/>
               </a:rPr>
               <a:t>READING · QUESTIONS 1–5 · 1 MARK EACH (WEBSITE)</a:t>
             </a:r>
@@ -10332,8 +10173,7 @@
                   <a:srgbClr val="1B3B6F"/>
                 </a:solidFill>
                 <a:latin typeface="Cambria" pitchFamily="34" charset="0"/>
-                <a:ea typeface="Cambria" pitchFamily="34" charset="-122"/>
-                <a:cs typeface="Cambria" pitchFamily="34" charset="-120"/>
+                <a:cs typeface="Amiri" pitchFamily="2" charset="-78"/>
               </a:rPr>
               <a:t>Reading questions 1–5</a:t>
             </a:r>
@@ -10370,9 +10210,8 @@
                 <a:solidFill>
                   <a:srgbClr val="8A6D1E"/>
                 </a:solidFill>
-                <a:latin typeface="Amiri" pitchFamily="34" charset="0"/>
-                <a:ea typeface="Amiri" pitchFamily="34" charset="-122"/>
-                <a:cs typeface="Amiri" pitchFamily="34" charset="-120"/>
+                <a:latin typeface="Amiri" pitchFamily="2" charset="-78"/>
+                <a:cs typeface="Amiri" pitchFamily="2" charset="-78"/>
               </a:rPr>
               <a:t>أَسْئِلَةُ القِرَاءَةِ</a:t>
             </a:r>
@@ -10410,8 +10249,7 @@
                   <a:srgbClr val="8A93A0"/>
                 </a:solidFill>
                 <a:latin typeface="Calibri" pitchFamily="34" charset="0"/>
-                <a:ea typeface="Calibri" pitchFamily="34" charset="-122"/>
-                <a:cs typeface="Calibri" pitchFamily="34" charset="-120"/>
+                <a:cs typeface="Amiri" pitchFamily="2" charset="-78"/>
               </a:rPr>
               <a:t>Miftah Arabic · Development D3 · Work and Careers · D3-L12</a:t>
             </a:r>
@@ -10508,8 +10346,7 @@
                   <a:srgbClr val="FFFFFF"/>
                 </a:solidFill>
                 <a:latin typeface="Calibri" pitchFamily="34" charset="0"/>
-                <a:ea typeface="Calibri" pitchFamily="34" charset="-122"/>
-                <a:cs typeface="Calibri" pitchFamily="34" charset="-120"/>
+                <a:cs typeface="Amiri" pitchFamily="2" charset="-78"/>
               </a:rPr>
               <a:t>1</a:t>
             </a:r>
@@ -10547,8 +10384,7 @@
                   <a:srgbClr val="1B3B6F"/>
                 </a:solidFill>
                 <a:latin typeface="Calibri" pitchFamily="34" charset="0"/>
-                <a:ea typeface="Calibri" pitchFamily="34" charset="-122"/>
-                <a:cs typeface="Calibri" pitchFamily="34" charset="-120"/>
+                <a:cs typeface="Amiri" pitchFamily="2" charset="-78"/>
               </a:rPr>
               <a:t>What job does Amal want?</a:t>
             </a:r>
@@ -10611,8 +10447,7 @@
                   <a:srgbClr val="1B3B6F"/>
                 </a:solidFill>
                 <a:latin typeface="Calibri" pitchFamily="34" charset="0"/>
-                <a:ea typeface="Calibri" pitchFamily="34" charset="-122"/>
-                <a:cs typeface="Calibri" pitchFamily="34" charset="-120"/>
+                <a:cs typeface="Amiri" pitchFamily="2" charset="-78"/>
               </a:rPr>
               <a:t>A</a:t>
             </a:r>
@@ -10650,8 +10485,7 @@
                   <a:srgbClr val="1F2A37"/>
                 </a:solidFill>
                 <a:latin typeface="Calibri" pitchFamily="34" charset="0"/>
-                <a:ea typeface="Calibri" pitchFamily="34" charset="-122"/>
-                <a:cs typeface="Calibri" pitchFamily="34" charset="-120"/>
+                <a:cs typeface="Amiri" pitchFamily="2" charset="-78"/>
               </a:rPr>
               <a:t>accountant</a:t>
             </a:r>
@@ -10714,8 +10548,7 @@
                   <a:srgbClr val="1B3B6F"/>
                 </a:solidFill>
                 <a:latin typeface="Calibri" pitchFamily="34" charset="0"/>
-                <a:ea typeface="Calibri" pitchFamily="34" charset="-122"/>
-                <a:cs typeface="Calibri" pitchFamily="34" charset="-120"/>
+                <a:cs typeface="Amiri" pitchFamily="2" charset="-78"/>
               </a:rPr>
               <a:t>B</a:t>
             </a:r>
@@ -10753,8 +10586,7 @@
                   <a:srgbClr val="1F2A37"/>
                 </a:solidFill>
                 <a:latin typeface="Calibri" pitchFamily="34" charset="0"/>
-                <a:ea typeface="Calibri" pitchFamily="34" charset="-122"/>
-                <a:cs typeface="Calibri" pitchFamily="34" charset="-120"/>
+                <a:cs typeface="Amiri" pitchFamily="2" charset="-78"/>
               </a:rPr>
               <a:t>environmental engineer</a:t>
             </a:r>
@@ -10817,8 +10649,7 @@
                   <a:srgbClr val="1B3B6F"/>
                 </a:solidFill>
                 <a:latin typeface="Calibri" pitchFamily="34" charset="0"/>
-                <a:ea typeface="Calibri" pitchFamily="34" charset="-122"/>
-                <a:cs typeface="Calibri" pitchFamily="34" charset="-120"/>
+                <a:cs typeface="Amiri" pitchFamily="2" charset="-78"/>
               </a:rPr>
               <a:t>C</a:t>
             </a:r>
@@ -10856,8 +10687,7 @@
                   <a:srgbClr val="1F2A37"/>
                 </a:solidFill>
                 <a:latin typeface="Calibri" pitchFamily="34" charset="0"/>
-                <a:ea typeface="Calibri" pitchFamily="34" charset="-122"/>
-                <a:cs typeface="Calibri" pitchFamily="34" charset="-120"/>
+                <a:cs typeface="Amiri" pitchFamily="2" charset="-78"/>
               </a:rPr>
               <a:t>journalist</a:t>
             </a:r>
@@ -10954,8 +10784,7 @@
                   <a:srgbClr val="FFFFFF"/>
                 </a:solidFill>
                 <a:latin typeface="Calibri" pitchFamily="34" charset="0"/>
-                <a:ea typeface="Calibri" pitchFamily="34" charset="-122"/>
-                <a:cs typeface="Calibri" pitchFamily="34" charset="-120"/>
+                <a:cs typeface="Amiri" pitchFamily="2" charset="-78"/>
               </a:rPr>
               <a:t>2</a:t>
             </a:r>
@@ -10993,8 +10822,7 @@
                   <a:srgbClr val="1B3B6F"/>
                 </a:solidFill>
                 <a:latin typeface="Calibri" pitchFamily="34" charset="0"/>
-                <a:ea typeface="Calibri" pitchFamily="34" charset="-122"/>
-                <a:cs typeface="Calibri" pitchFamily="34" charset="-120"/>
+                <a:cs typeface="Amiri" pitchFamily="2" charset="-78"/>
               </a:rPr>
               <a:t>Why does she choose it?</a:t>
             </a:r>
@@ -11057,8 +10885,7 @@
                   <a:srgbClr val="1B3B6F"/>
                 </a:solidFill>
                 <a:latin typeface="Calibri" pitchFamily="34" charset="0"/>
-                <a:ea typeface="Calibri" pitchFamily="34" charset="-122"/>
-                <a:cs typeface="Calibri" pitchFamily="34" charset="-120"/>
+                <a:cs typeface="Amiri" pitchFamily="2" charset="-78"/>
               </a:rPr>
               <a:t>A</a:t>
             </a:r>
@@ -11096,8 +10923,7 @@
                   <a:srgbClr val="1F2A37"/>
                 </a:solidFill>
                 <a:latin typeface="Calibri" pitchFamily="34" charset="0"/>
-                <a:ea typeface="Calibri" pitchFamily="34" charset="-122"/>
-                <a:cs typeface="Calibri" pitchFamily="34" charset="-120"/>
+                <a:cs typeface="Amiri" pitchFamily="2" charset="-78"/>
               </a:rPr>
               <a:t>to work fewer hours</a:t>
             </a:r>
@@ -11160,8 +10986,7 @@
                   <a:srgbClr val="1B3B6F"/>
                 </a:solidFill>
                 <a:latin typeface="Calibri" pitchFamily="34" charset="0"/>
-                <a:ea typeface="Calibri" pitchFamily="34" charset="-122"/>
-                <a:cs typeface="Calibri" pitchFamily="34" charset="-120"/>
+                <a:cs typeface="Amiri" pitchFamily="2" charset="-78"/>
               </a:rPr>
               <a:t>B</a:t>
             </a:r>
@@ -11199,8 +11024,7 @@
                   <a:srgbClr val="1F2A37"/>
                 </a:solidFill>
                 <a:latin typeface="Calibri" pitchFamily="34" charset="0"/>
-                <a:ea typeface="Calibri" pitchFamily="34" charset="-122"/>
-                <a:cs typeface="Calibri" pitchFamily="34" charset="-120"/>
+                <a:cs typeface="Amiri" pitchFamily="2" charset="-78"/>
               </a:rPr>
               <a:t>to travel for free</a:t>
             </a:r>
@@ -11263,8 +11087,7 @@
                   <a:srgbClr val="1B3B6F"/>
                 </a:solidFill>
                 <a:latin typeface="Calibri" pitchFamily="34" charset="0"/>
-                <a:ea typeface="Calibri" pitchFamily="34" charset="-122"/>
-                <a:cs typeface="Calibri" pitchFamily="34" charset="-120"/>
+                <a:cs typeface="Amiri" pitchFamily="2" charset="-78"/>
               </a:rPr>
               <a:t>C</a:t>
             </a:r>
@@ -11302,8 +11125,7 @@
                   <a:srgbClr val="1F2A37"/>
                 </a:solidFill>
                 <a:latin typeface="Calibri" pitchFamily="34" charset="0"/>
-                <a:ea typeface="Calibri" pitchFamily="34" charset="-122"/>
-                <a:cs typeface="Calibri" pitchFamily="34" charset="-120"/>
+                <a:cs typeface="Amiri" pitchFamily="2" charset="-78"/>
               </a:rPr>
               <a:t>to solve pollution problems</a:t>
             </a:r>
@@ -11400,8 +11222,7 @@
                   <a:srgbClr val="FFFFFF"/>
                 </a:solidFill>
                 <a:latin typeface="Calibri" pitchFamily="34" charset="0"/>
-                <a:ea typeface="Calibri" pitchFamily="34" charset="-122"/>
-                <a:cs typeface="Calibri" pitchFamily="34" charset="-120"/>
+                <a:cs typeface="Amiri" pitchFamily="2" charset="-78"/>
               </a:rPr>
               <a:t>3</a:t>
             </a:r>
@@ -11439,8 +11260,7 @@
                   <a:srgbClr val="1B3B6F"/>
                 </a:solidFill>
                 <a:latin typeface="Calibri" pitchFamily="34" charset="0"/>
-                <a:ea typeface="Calibri" pitchFamily="34" charset="-122"/>
-                <a:cs typeface="Calibri" pitchFamily="34" charset="-120"/>
+                <a:cs typeface="Amiri" pitchFamily="2" charset="-78"/>
               </a:rPr>
               <a:t>Which strength does she name?</a:t>
             </a:r>
@@ -11503,8 +11323,7 @@
                   <a:srgbClr val="1B3B6F"/>
                 </a:solidFill>
                 <a:latin typeface="Calibri" pitchFamily="34" charset="0"/>
-                <a:ea typeface="Calibri" pitchFamily="34" charset="-122"/>
-                <a:cs typeface="Calibri" pitchFamily="34" charset="-120"/>
+                <a:cs typeface="Amiri" pitchFamily="2" charset="-78"/>
               </a:rPr>
               <a:t>A</a:t>
             </a:r>
@@ -11542,8 +11361,7 @@
                   <a:srgbClr val="1F2A37"/>
                 </a:solidFill>
                 <a:latin typeface="Calibri" pitchFamily="34" charset="0"/>
-                <a:ea typeface="Calibri" pitchFamily="34" charset="-122"/>
-                <a:cs typeface="Calibri" pitchFamily="34" charset="-120"/>
+                <a:cs typeface="Amiri" pitchFamily="2" charset="-78"/>
               </a:rPr>
               <a:t>science and teamwork</a:t>
             </a:r>
@@ -11606,8 +11424,7 @@
                   <a:srgbClr val="1B3B6F"/>
                 </a:solidFill>
                 <a:latin typeface="Calibri" pitchFamily="34" charset="0"/>
-                <a:ea typeface="Calibri" pitchFamily="34" charset="-122"/>
-                <a:cs typeface="Calibri" pitchFamily="34" charset="-120"/>
+                <a:cs typeface="Amiri" pitchFamily="2" charset="-78"/>
               </a:rPr>
               <a:t>B</a:t>
             </a:r>
@@ -11645,8 +11462,7 @@
                   <a:srgbClr val="1F2A37"/>
                 </a:solidFill>
                 <a:latin typeface="Calibri" pitchFamily="34" charset="0"/>
-                <a:ea typeface="Calibri" pitchFamily="34" charset="-122"/>
-                <a:cs typeface="Calibri" pitchFamily="34" charset="-120"/>
+                <a:cs typeface="Amiri" pitchFamily="2" charset="-78"/>
               </a:rPr>
               <a:t>driving and sales</a:t>
             </a:r>
@@ -11709,8 +11525,7 @@
                   <a:srgbClr val="1B3B6F"/>
                 </a:solidFill>
                 <a:latin typeface="Calibri" pitchFamily="34" charset="0"/>
-                <a:ea typeface="Calibri" pitchFamily="34" charset="-122"/>
-                <a:cs typeface="Calibri" pitchFamily="34" charset="-120"/>
+                <a:cs typeface="Amiri" pitchFamily="2" charset="-78"/>
               </a:rPr>
               <a:t>C</a:t>
             </a:r>
@@ -11748,8 +11563,7 @@
                   <a:srgbClr val="1F2A37"/>
                 </a:solidFill>
                 <a:latin typeface="Calibri" pitchFamily="34" charset="0"/>
-                <a:ea typeface="Calibri" pitchFamily="34" charset="-122"/>
-                <a:cs typeface="Calibri" pitchFamily="34" charset="-120"/>
+                <a:cs typeface="Amiri" pitchFamily="2" charset="-78"/>
               </a:rPr>
               <a:t>drawing and cooking</a:t>
             </a:r>
@@ -11846,8 +11660,7 @@
                   <a:srgbClr val="FFFFFF"/>
                 </a:solidFill>
                 <a:latin typeface="Calibri" pitchFamily="34" charset="0"/>
-                <a:ea typeface="Calibri" pitchFamily="34" charset="-122"/>
-                <a:cs typeface="Calibri" pitchFamily="34" charset="-120"/>
+                <a:cs typeface="Amiri" pitchFamily="2" charset="-78"/>
               </a:rPr>
               <a:t>4</a:t>
             </a:r>
@@ -11885,8 +11698,7 @@
                   <a:srgbClr val="1B3B6F"/>
                 </a:solidFill>
                 <a:latin typeface="Calibri" pitchFamily="34" charset="0"/>
-                <a:ea typeface="Calibri" pitchFamily="34" charset="-122"/>
-                <a:cs typeface="Calibri" pitchFamily="34" charset="-120"/>
+                <a:cs typeface="Amiri" pitchFamily="2" charset="-78"/>
               </a:rPr>
               <a:t>What evidence does she give?</a:t>
             </a:r>
@@ -11949,8 +11761,7 @@
                   <a:srgbClr val="1B3B6F"/>
                 </a:solidFill>
                 <a:latin typeface="Calibri" pitchFamily="34" charset="0"/>
-                <a:ea typeface="Calibri" pitchFamily="34" charset="-122"/>
-                <a:cs typeface="Calibri" pitchFamily="34" charset="-120"/>
+                <a:cs typeface="Amiri" pitchFamily="2" charset="-78"/>
               </a:rPr>
               <a:t>A</a:t>
             </a:r>
@@ -11988,8 +11799,7 @@
                   <a:srgbClr val="1F2A37"/>
                 </a:solidFill>
                 <a:latin typeface="Calibri" pitchFamily="34" charset="0"/>
-                <a:ea typeface="Calibri" pitchFamily="34" charset="-122"/>
-                <a:cs typeface="Calibri" pitchFamily="34" charset="-120"/>
+                <a:cs typeface="Amiri" pitchFamily="2" charset="-78"/>
               </a:rPr>
               <a:t>she watched a video</a:t>
             </a:r>
@@ -12052,8 +11862,7 @@
                   <a:srgbClr val="1B3B6F"/>
                 </a:solidFill>
                 <a:latin typeface="Calibri" pitchFamily="34" charset="0"/>
-                <a:ea typeface="Calibri" pitchFamily="34" charset="-122"/>
-                <a:cs typeface="Calibri" pitchFamily="34" charset="-120"/>
+                <a:cs typeface="Amiri" pitchFamily="2" charset="-78"/>
               </a:rPr>
               <a:t>B</a:t>
             </a:r>
@@ -12091,8 +11900,7 @@
                   <a:srgbClr val="1F2A37"/>
                 </a:solidFill>
                 <a:latin typeface="Calibri" pitchFamily="34" charset="0"/>
-                <a:ea typeface="Calibri" pitchFamily="34" charset="-122"/>
-                <a:cs typeface="Calibri" pitchFamily="34" charset="-120"/>
+                <a:cs typeface="Amiri" pitchFamily="2" charset="-78"/>
               </a:rPr>
               <a:t>she led a recycling project</a:t>
             </a:r>
@@ -12155,8 +11963,7 @@
                   <a:srgbClr val="1B3B6F"/>
                 </a:solidFill>
                 <a:latin typeface="Calibri" pitchFamily="34" charset="0"/>
-                <a:ea typeface="Calibri" pitchFamily="34" charset="-122"/>
-                <a:cs typeface="Calibri" pitchFamily="34" charset="-120"/>
+                <a:cs typeface="Amiri" pitchFamily="2" charset="-78"/>
               </a:rPr>
               <a:t>C</a:t>
             </a:r>
@@ -12194,8 +12001,7 @@
                   <a:srgbClr val="1F2A37"/>
                 </a:solidFill>
                 <a:latin typeface="Calibri" pitchFamily="34" charset="0"/>
-                <a:ea typeface="Calibri" pitchFamily="34" charset="-122"/>
-                <a:cs typeface="Calibri" pitchFamily="34" charset="-120"/>
+                <a:cs typeface="Amiri" pitchFamily="2" charset="-78"/>
               </a:rPr>
               <a:t>she bought a book</a:t>
             </a:r>
@@ -12292,8 +12098,7 @@
                   <a:srgbClr val="FFFFFF"/>
                 </a:solidFill>
                 <a:latin typeface="Calibri" pitchFamily="34" charset="0"/>
-                <a:ea typeface="Calibri" pitchFamily="34" charset="-122"/>
-                <a:cs typeface="Calibri" pitchFamily="34" charset="-120"/>
+                <a:cs typeface="Amiri" pitchFamily="2" charset="-78"/>
               </a:rPr>
               <a:t>5</a:t>
             </a:r>
@@ -12331,8 +12136,7 @@
                   <a:srgbClr val="1B3B6F"/>
                 </a:solidFill>
                 <a:latin typeface="Calibri" pitchFamily="34" charset="0"/>
-                <a:ea typeface="Calibri" pitchFamily="34" charset="-122"/>
-                <a:cs typeface="Calibri" pitchFamily="34" charset="-120"/>
+                <a:cs typeface="Amiri" pitchFamily="2" charset="-78"/>
               </a:rPr>
               <a:t>What will she study?</a:t>
             </a:r>
@@ -12395,8 +12199,7 @@
                   <a:srgbClr val="1B3B6F"/>
                 </a:solidFill>
                 <a:latin typeface="Calibri" pitchFamily="34" charset="0"/>
-                <a:ea typeface="Calibri" pitchFamily="34" charset="-122"/>
-                <a:cs typeface="Calibri" pitchFamily="34" charset="-120"/>
+                <a:cs typeface="Amiri" pitchFamily="2" charset="-78"/>
               </a:rPr>
               <a:t>A</a:t>
             </a:r>
@@ -12434,8 +12237,7 @@
                   <a:srgbClr val="1F2A37"/>
                 </a:solidFill>
                 <a:latin typeface="Calibri" pitchFamily="34" charset="0"/>
-                <a:ea typeface="Calibri" pitchFamily="34" charset="-122"/>
-                <a:cs typeface="Calibri" pitchFamily="34" charset="-120"/>
+                <a:cs typeface="Amiri" pitchFamily="2" charset="-78"/>
               </a:rPr>
               <a:t>engineering</a:t>
             </a:r>
@@ -12498,8 +12300,7 @@
                   <a:srgbClr val="1B3B6F"/>
                 </a:solidFill>
                 <a:latin typeface="Calibri" pitchFamily="34" charset="0"/>
-                <a:ea typeface="Calibri" pitchFamily="34" charset="-122"/>
-                <a:cs typeface="Calibri" pitchFamily="34" charset="-120"/>
+                <a:cs typeface="Amiri" pitchFamily="2" charset="-78"/>
               </a:rPr>
               <a:t>B</a:t>
             </a:r>
@@ -12537,8 +12338,7 @@
                   <a:srgbClr val="1F2A37"/>
                 </a:solidFill>
                 <a:latin typeface="Calibri" pitchFamily="34" charset="0"/>
-                <a:ea typeface="Calibri" pitchFamily="34" charset="-122"/>
-                <a:cs typeface="Calibri" pitchFamily="34" charset="-120"/>
+                <a:cs typeface="Amiri" pitchFamily="2" charset="-78"/>
               </a:rPr>
               <a:t>law</a:t>
             </a:r>
@@ -12601,8 +12401,7 @@
                   <a:srgbClr val="1B3B6F"/>
                 </a:solidFill>
                 <a:latin typeface="Calibri" pitchFamily="34" charset="0"/>
-                <a:ea typeface="Calibri" pitchFamily="34" charset="-122"/>
-                <a:cs typeface="Calibri" pitchFamily="34" charset="-120"/>
+                <a:cs typeface="Amiri" pitchFamily="2" charset="-78"/>
               </a:rPr>
               <a:t>C</a:t>
             </a:r>
@@ -12640,8 +12439,7 @@
                   <a:srgbClr val="1F2A37"/>
                 </a:solidFill>
                 <a:latin typeface="Calibri" pitchFamily="34" charset="0"/>
-                <a:ea typeface="Calibri" pitchFamily="34" charset="-122"/>
-                <a:cs typeface="Calibri" pitchFamily="34" charset="-120"/>
+                <a:cs typeface="Amiri" pitchFamily="2" charset="-78"/>
               </a:rPr>
               <a:t>medicine</a:t>
             </a:r>
@@ -12679,8 +12477,7 @@
                   <a:srgbClr val="8A93A0"/>
                 </a:solidFill>
                 <a:latin typeface="Calibri" pitchFamily="34" charset="0"/>
-                <a:ea typeface="Calibri" pitchFamily="34" charset="-122"/>
-                <a:cs typeface="Calibri" pitchFamily="34" charset="-120"/>
+                <a:cs typeface="Amiri" pitchFamily="2" charset="-78"/>
               </a:rPr>
               <a:t>13 / 23</a:t>
             </a:r>
@@ -12774,9 +12571,8 @@
                 <a:solidFill>
                   <a:srgbClr val="D4AF37"/>
                 </a:solidFill>
-                <a:latin typeface="Amiri" pitchFamily="34" charset="0"/>
-                <a:ea typeface="Amiri" pitchFamily="34" charset="-122"/>
-                <a:cs typeface="Amiri" pitchFamily="34" charset="-120"/>
+                <a:latin typeface="Amiri" pitchFamily="2" charset="-78"/>
+                <a:cs typeface="Amiri" pitchFamily="2" charset="-78"/>
               </a:rPr>
               <a:t>م</a:t>
             </a:r>
@@ -12814,8 +12610,7 @@
                   <a:srgbClr val="1B3B6F"/>
                 </a:solidFill>
                 <a:latin typeface="Cambria" pitchFamily="34" charset="0"/>
-                <a:ea typeface="Cambria" pitchFamily="34" charset="-122"/>
-                <a:cs typeface="Cambria" pitchFamily="34" charset="-120"/>
+                <a:cs typeface="Amiri" pitchFamily="2" charset="-78"/>
               </a:rPr>
               <a:t>Al Madina Online School</a:t>
             </a:r>
@@ -12853,8 +12648,7 @@
                   <a:srgbClr val="8A6D1E"/>
                 </a:solidFill>
                 <a:latin typeface="Calibri" pitchFamily="34" charset="0"/>
-                <a:ea typeface="Calibri" pitchFamily="34" charset="-122"/>
-                <a:cs typeface="Calibri" pitchFamily="34" charset="-120"/>
+                <a:cs typeface="Amiri" pitchFamily="2" charset="-78"/>
               </a:rPr>
               <a:t>ARABIC DEPARTMENT · MIFTAH ARABIC · IGCSE 0544</a:t>
             </a:r>
@@ -12919,8 +12713,7 @@
                   <a:srgbClr val="FFFFFF"/>
                 </a:solidFill>
                 <a:latin typeface="Calibri" pitchFamily="34" charset="0"/>
-                <a:ea typeface="Calibri" pitchFamily="34" charset="-122"/>
-                <a:cs typeface="Calibri" pitchFamily="34" charset="-120"/>
+                <a:cs typeface="Amiri" pitchFamily="2" charset="-78"/>
               </a:rPr>
               <a:t>D3-L12 · D3 Assessment</a:t>
             </a:r>
@@ -12985,8 +12778,7 @@
                   <a:srgbClr val="FFFFFF"/>
                 </a:solidFill>
                 <a:latin typeface="Calibri" pitchFamily="34" charset="0"/>
-                <a:ea typeface="Calibri" pitchFamily="34" charset="-122"/>
-                <a:cs typeface="Calibri" pitchFamily="34" charset="-120"/>
+                <a:cs typeface="Amiri" pitchFamily="2" charset="-78"/>
               </a:rPr>
               <a:t>WE DO</a:t>
             </a:r>
@@ -13024,8 +12816,7 @@
                   <a:srgbClr val="2F6FB0"/>
                 </a:solidFill>
                 <a:latin typeface="Calibri" pitchFamily="34" charset="0"/>
-                <a:ea typeface="Calibri" pitchFamily="34" charset="-122"/>
-                <a:cs typeface="Calibri" pitchFamily="34" charset="-120"/>
+                <a:cs typeface="Amiri" pitchFamily="2" charset="-78"/>
               </a:rPr>
               <a:t>READING · ANSWERS · SHOW AFTER THE SECTION</a:t>
             </a:r>
@@ -13063,8 +12854,7 @@
                   <a:srgbClr val="1B3B6F"/>
                 </a:solidFill>
                 <a:latin typeface="Cambria" pitchFamily="34" charset="0"/>
-                <a:ea typeface="Cambria" pitchFamily="34" charset="-122"/>
-                <a:cs typeface="Cambria" pitchFamily="34" charset="-120"/>
+                <a:cs typeface="Amiri" pitchFamily="2" charset="-78"/>
               </a:rPr>
               <a:t>Questions 1–5: answers</a:t>
             </a:r>
@@ -13101,9 +12891,8 @@
                 <a:solidFill>
                   <a:srgbClr val="8A6D1E"/>
                 </a:solidFill>
-                <a:latin typeface="Amiri" pitchFamily="34" charset="0"/>
-                <a:ea typeface="Amiri" pitchFamily="34" charset="-122"/>
-                <a:cs typeface="Amiri" pitchFamily="34" charset="-120"/>
+                <a:latin typeface="Amiri" pitchFamily="2" charset="-78"/>
+                <a:cs typeface="Amiri" pitchFamily="2" charset="-78"/>
               </a:rPr>
               <a:t>الإِجَابَاتُ</a:t>
             </a:r>
@@ -13141,8 +12930,7 @@
                   <a:srgbClr val="8A93A0"/>
                 </a:solidFill>
                 <a:latin typeface="Calibri" pitchFamily="34" charset="0"/>
-                <a:ea typeface="Calibri" pitchFamily="34" charset="-122"/>
-                <a:cs typeface="Calibri" pitchFamily="34" charset="-120"/>
+                <a:cs typeface="Amiri" pitchFamily="2" charset="-78"/>
               </a:rPr>
               <a:t>Miftah Arabic · Development D3 · Work and Careers · D3-L12</a:t>
             </a:r>
@@ -13239,8 +13027,7 @@
                   <a:srgbClr val="FFFFFF"/>
                 </a:solidFill>
                 <a:latin typeface="Calibri" pitchFamily="34" charset="0"/>
-                <a:ea typeface="Calibri" pitchFamily="34" charset="-122"/>
-                <a:cs typeface="Calibri" pitchFamily="34" charset="-120"/>
+                <a:cs typeface="Amiri" pitchFamily="2" charset="-78"/>
               </a:rPr>
               <a:t>1</a:t>
             </a:r>
@@ -13278,8 +13065,7 @@
                   <a:srgbClr val="1B3B6F"/>
                 </a:solidFill>
                 <a:latin typeface="Calibri" pitchFamily="34" charset="0"/>
-                <a:ea typeface="Calibri" pitchFamily="34" charset="-122"/>
-                <a:cs typeface="Calibri" pitchFamily="34" charset="-120"/>
+                <a:cs typeface="Amiri" pitchFamily="2" charset="-78"/>
               </a:rPr>
               <a:t>What job does Amal want?</a:t>
             </a:r>
@@ -13342,8 +13128,7 @@
                   <a:srgbClr val="1B3B6F"/>
                 </a:solidFill>
                 <a:latin typeface="Calibri" pitchFamily="34" charset="0"/>
-                <a:ea typeface="Calibri" pitchFamily="34" charset="-122"/>
-                <a:cs typeface="Calibri" pitchFamily="34" charset="-120"/>
+                <a:cs typeface="Amiri" pitchFamily="2" charset="-78"/>
               </a:rPr>
               <a:t>A</a:t>
             </a:r>
@@ -13381,8 +13166,7 @@
                   <a:srgbClr val="9AA1AB"/>
                 </a:solidFill>
                 <a:latin typeface="Calibri" pitchFamily="34" charset="0"/>
-                <a:ea typeface="Calibri" pitchFamily="34" charset="-122"/>
-                <a:cs typeface="Calibri" pitchFamily="34" charset="-120"/>
+                <a:cs typeface="Amiri" pitchFamily="2" charset="-78"/>
               </a:rPr>
               <a:t>accountant</a:t>
             </a:r>
@@ -13472,8 +13256,7 @@
                   <a:srgbClr val="FFFFFF"/>
                 </a:solidFill>
                 <a:latin typeface="Calibri" pitchFamily="34" charset="0"/>
-                <a:ea typeface="Calibri" pitchFamily="34" charset="-122"/>
-                <a:cs typeface="Calibri" pitchFamily="34" charset="-120"/>
+                <a:cs typeface="Amiri" pitchFamily="2" charset="-78"/>
               </a:rPr>
               <a:t>B</a:t>
             </a:r>
@@ -13511,8 +13294,7 @@
                   <a:srgbClr val="1F2A37"/>
                 </a:solidFill>
                 <a:latin typeface="Calibri" pitchFamily="34" charset="0"/>
-                <a:ea typeface="Calibri" pitchFamily="34" charset="-122"/>
-                <a:cs typeface="Calibri" pitchFamily="34" charset="-120"/>
+                <a:cs typeface="Amiri" pitchFamily="2" charset="-78"/>
               </a:rPr>
               <a:t>environmental engineer</a:t>
             </a:r>
@@ -13575,8 +13357,7 @@
                   <a:srgbClr val="1B3B6F"/>
                 </a:solidFill>
                 <a:latin typeface="Calibri" pitchFamily="34" charset="0"/>
-                <a:ea typeface="Calibri" pitchFamily="34" charset="-122"/>
-                <a:cs typeface="Calibri" pitchFamily="34" charset="-120"/>
+                <a:cs typeface="Amiri" pitchFamily="2" charset="-78"/>
               </a:rPr>
               <a:t>C</a:t>
             </a:r>
@@ -13614,8 +13395,7 @@
                   <a:srgbClr val="9AA1AB"/>
                 </a:solidFill>
                 <a:latin typeface="Calibri" pitchFamily="34" charset="0"/>
-                <a:ea typeface="Calibri" pitchFamily="34" charset="-122"/>
-                <a:cs typeface="Calibri" pitchFamily="34" charset="-120"/>
+                <a:cs typeface="Amiri" pitchFamily="2" charset="-78"/>
               </a:rPr>
               <a:t>journalist</a:t>
             </a:r>
@@ -13652,9 +13432,8 @@
                 <a:solidFill>
                   <a:srgbClr val="8A6D1E"/>
                 </a:solidFill>
-                <a:latin typeface="Amiri" pitchFamily="34" charset="0"/>
-                <a:ea typeface="Amiri" pitchFamily="34" charset="-122"/>
-                <a:cs typeface="Amiri" pitchFamily="34" charset="-120"/>
+                <a:latin typeface="Amiri" pitchFamily="2" charset="-78"/>
+                <a:cs typeface="Amiri" pitchFamily="2" charset="-78"/>
               </a:rPr>
               <a:t>مُهَنْدِسَةَ بِيئَةٍ</a:t>
             </a:r>
@@ -13751,8 +13530,7 @@
                   <a:srgbClr val="FFFFFF"/>
                 </a:solidFill>
                 <a:latin typeface="Calibri" pitchFamily="34" charset="0"/>
-                <a:ea typeface="Calibri" pitchFamily="34" charset="-122"/>
-                <a:cs typeface="Calibri" pitchFamily="34" charset="-120"/>
+                <a:cs typeface="Amiri" pitchFamily="2" charset="-78"/>
               </a:rPr>
               <a:t>2</a:t>
             </a:r>
@@ -13790,8 +13568,7 @@
                   <a:srgbClr val="1B3B6F"/>
                 </a:solidFill>
                 <a:latin typeface="Calibri" pitchFamily="34" charset="0"/>
-                <a:ea typeface="Calibri" pitchFamily="34" charset="-122"/>
-                <a:cs typeface="Calibri" pitchFamily="34" charset="-120"/>
+                <a:cs typeface="Amiri" pitchFamily="2" charset="-78"/>
               </a:rPr>
               <a:t>Why does she choose it?</a:t>
             </a:r>
@@ -13854,8 +13631,7 @@
                   <a:srgbClr val="1B3B6F"/>
                 </a:solidFill>
                 <a:latin typeface="Calibri" pitchFamily="34" charset="0"/>
-                <a:ea typeface="Calibri" pitchFamily="34" charset="-122"/>
-                <a:cs typeface="Calibri" pitchFamily="34" charset="-120"/>
+                <a:cs typeface="Amiri" pitchFamily="2" charset="-78"/>
               </a:rPr>
               <a:t>A</a:t>
             </a:r>
@@ -13893,8 +13669,7 @@
                   <a:srgbClr val="9AA1AB"/>
                 </a:solidFill>
                 <a:latin typeface="Calibri" pitchFamily="34" charset="0"/>
-                <a:ea typeface="Calibri" pitchFamily="34" charset="-122"/>
-                <a:cs typeface="Calibri" pitchFamily="34" charset="-120"/>
+                <a:cs typeface="Amiri" pitchFamily="2" charset="-78"/>
               </a:rPr>
               <a:t>to work fewer hours</a:t>
             </a:r>
@@ -13957,8 +13732,7 @@
                   <a:srgbClr val="1B3B6F"/>
                 </a:solidFill>
                 <a:latin typeface="Calibri" pitchFamily="34" charset="0"/>
-                <a:ea typeface="Calibri" pitchFamily="34" charset="-122"/>
-                <a:cs typeface="Calibri" pitchFamily="34" charset="-120"/>
+                <a:cs typeface="Amiri" pitchFamily="2" charset="-78"/>
               </a:rPr>
               <a:t>B</a:t>
             </a:r>
@@ -13996,8 +13770,7 @@
                   <a:srgbClr val="9AA1AB"/>
                 </a:solidFill>
                 <a:latin typeface="Calibri" pitchFamily="34" charset="0"/>
-                <a:ea typeface="Calibri" pitchFamily="34" charset="-122"/>
-                <a:cs typeface="Calibri" pitchFamily="34" charset="-120"/>
+                <a:cs typeface="Amiri" pitchFamily="2" charset="-78"/>
               </a:rPr>
               <a:t>to travel for free</a:t>
             </a:r>
@@ -14087,8 +13860,7 @@
                   <a:srgbClr val="FFFFFF"/>
                 </a:solidFill>
                 <a:latin typeface="Calibri" pitchFamily="34" charset="0"/>
-                <a:ea typeface="Calibri" pitchFamily="34" charset="-122"/>
-                <a:cs typeface="Calibri" pitchFamily="34" charset="-120"/>
+                <a:cs typeface="Amiri" pitchFamily="2" charset="-78"/>
               </a:rPr>
               <a:t>C</a:t>
             </a:r>
@@ -14126,8 +13898,7 @@
                   <a:srgbClr val="1F2A37"/>
                 </a:solidFill>
                 <a:latin typeface="Calibri" pitchFamily="34" charset="0"/>
-                <a:ea typeface="Calibri" pitchFamily="34" charset="-122"/>
-                <a:cs typeface="Calibri" pitchFamily="34" charset="-120"/>
+                <a:cs typeface="Amiri" pitchFamily="2" charset="-78"/>
               </a:rPr>
               <a:t>to solve pollution problems</a:t>
             </a:r>
@@ -14164,9 +13935,8 @@
                 <a:solidFill>
                   <a:srgbClr val="8A6D1E"/>
                 </a:solidFill>
-                <a:latin typeface="Amiri" pitchFamily="34" charset="0"/>
-                <a:ea typeface="Amiri" pitchFamily="34" charset="-122"/>
-                <a:cs typeface="Amiri" pitchFamily="34" charset="-120"/>
+                <a:latin typeface="Amiri" pitchFamily="2" charset="-78"/>
+                <a:cs typeface="Amiri" pitchFamily="2" charset="-78"/>
               </a:rPr>
               <a:t>حَلِّ مُشْكِلَاتِ التَّلَوُّثِ</a:t>
             </a:r>
@@ -14263,8 +14033,7 @@
                   <a:srgbClr val="FFFFFF"/>
                 </a:solidFill>
                 <a:latin typeface="Calibri" pitchFamily="34" charset="0"/>
-                <a:ea typeface="Calibri" pitchFamily="34" charset="-122"/>
-                <a:cs typeface="Calibri" pitchFamily="34" charset="-120"/>
+                <a:cs typeface="Amiri" pitchFamily="2" charset="-78"/>
               </a:rPr>
               <a:t>3</a:t>
             </a:r>
@@ -14302,8 +14071,7 @@
                   <a:srgbClr val="1B3B6F"/>
                 </a:solidFill>
                 <a:latin typeface="Calibri" pitchFamily="34" charset="0"/>
-                <a:ea typeface="Calibri" pitchFamily="34" charset="-122"/>
-                <a:cs typeface="Calibri" pitchFamily="34" charset="-120"/>
+                <a:cs typeface="Amiri" pitchFamily="2" charset="-78"/>
               </a:rPr>
               <a:t>Which strength does she name?</a:t>
             </a:r>
@@ -14393,8 +14161,7 @@
                   <a:srgbClr val="FFFFFF"/>
                 </a:solidFill>
                 <a:latin typeface="Calibri" pitchFamily="34" charset="0"/>
-                <a:ea typeface="Calibri" pitchFamily="34" charset="-122"/>
-                <a:cs typeface="Calibri" pitchFamily="34" charset="-120"/>
+                <a:cs typeface="Amiri" pitchFamily="2" charset="-78"/>
               </a:rPr>
               <a:t>A</a:t>
             </a:r>
@@ -14432,8 +14199,7 @@
                   <a:srgbClr val="1F2A37"/>
                 </a:solidFill>
                 <a:latin typeface="Calibri" pitchFamily="34" charset="0"/>
-                <a:ea typeface="Calibri" pitchFamily="34" charset="-122"/>
-                <a:cs typeface="Calibri" pitchFamily="34" charset="-120"/>
+                <a:cs typeface="Amiri" pitchFamily="2" charset="-78"/>
               </a:rPr>
               <a:t>science and teamwork</a:t>
             </a:r>
@@ -14496,8 +14262,7 @@
                   <a:srgbClr val="1B3B6F"/>
                 </a:solidFill>
                 <a:latin typeface="Calibri" pitchFamily="34" charset="0"/>
-                <a:ea typeface="Calibri" pitchFamily="34" charset="-122"/>
-                <a:cs typeface="Calibri" pitchFamily="34" charset="-120"/>
+                <a:cs typeface="Amiri" pitchFamily="2" charset="-78"/>
               </a:rPr>
               <a:t>B</a:t>
             </a:r>
@@ -14535,8 +14300,7 @@
                   <a:srgbClr val="9AA1AB"/>
                 </a:solidFill>
                 <a:latin typeface="Calibri" pitchFamily="34" charset="0"/>
-                <a:ea typeface="Calibri" pitchFamily="34" charset="-122"/>
-                <a:cs typeface="Calibri" pitchFamily="34" charset="-120"/>
+                <a:cs typeface="Amiri" pitchFamily="2" charset="-78"/>
               </a:rPr>
               <a:t>driving and sales</a:t>
             </a:r>
@@ -14599,8 +14363,7 @@
                   <a:srgbClr val="1B3B6F"/>
                 </a:solidFill>
                 <a:latin typeface="Calibri" pitchFamily="34" charset="0"/>
-                <a:ea typeface="Calibri" pitchFamily="34" charset="-122"/>
-                <a:cs typeface="Calibri" pitchFamily="34" charset="-120"/>
+                <a:cs typeface="Amiri" pitchFamily="2" charset="-78"/>
               </a:rPr>
               <a:t>C</a:t>
             </a:r>
@@ -14638,8 +14401,7 @@
                   <a:srgbClr val="9AA1AB"/>
                 </a:solidFill>
                 <a:latin typeface="Calibri" pitchFamily="34" charset="0"/>
-                <a:ea typeface="Calibri" pitchFamily="34" charset="-122"/>
-                <a:cs typeface="Calibri" pitchFamily="34" charset="-120"/>
+                <a:cs typeface="Amiri" pitchFamily="2" charset="-78"/>
               </a:rPr>
               <a:t>drawing and cooking</a:t>
             </a:r>
@@ -14676,9 +14438,8 @@
                 <a:solidFill>
                   <a:srgbClr val="8A6D1E"/>
                 </a:solidFill>
-                <a:latin typeface="Amiri" pitchFamily="34" charset="0"/>
-                <a:ea typeface="Amiri" pitchFamily="34" charset="-122"/>
-                <a:cs typeface="Amiri" pitchFamily="34" charset="-120"/>
+                <a:latin typeface="Amiri" pitchFamily="2" charset="-78"/>
+                <a:cs typeface="Amiri" pitchFamily="2" charset="-78"/>
               </a:rPr>
               <a:t>العُلُومِ وَالعَمَلِ الجَمَاعِيِّ</a:t>
             </a:r>
@@ -14775,8 +14536,7 @@
                   <a:srgbClr val="FFFFFF"/>
                 </a:solidFill>
                 <a:latin typeface="Calibri" pitchFamily="34" charset="0"/>
-                <a:ea typeface="Calibri" pitchFamily="34" charset="-122"/>
-                <a:cs typeface="Calibri" pitchFamily="34" charset="-120"/>
+                <a:cs typeface="Amiri" pitchFamily="2" charset="-78"/>
               </a:rPr>
               <a:t>4</a:t>
             </a:r>
@@ -14814,8 +14574,7 @@
                   <a:srgbClr val="1B3B6F"/>
                 </a:solidFill>
                 <a:latin typeface="Calibri" pitchFamily="34" charset="0"/>
-                <a:ea typeface="Calibri" pitchFamily="34" charset="-122"/>
-                <a:cs typeface="Calibri" pitchFamily="34" charset="-120"/>
+                <a:cs typeface="Amiri" pitchFamily="2" charset="-78"/>
               </a:rPr>
               <a:t>What evidence does she give?</a:t>
             </a:r>
@@ -14878,8 +14637,7 @@
                   <a:srgbClr val="1B3B6F"/>
                 </a:solidFill>
                 <a:latin typeface="Calibri" pitchFamily="34" charset="0"/>
-                <a:ea typeface="Calibri" pitchFamily="34" charset="-122"/>
-                <a:cs typeface="Calibri" pitchFamily="34" charset="-120"/>
+                <a:cs typeface="Amiri" pitchFamily="2" charset="-78"/>
               </a:rPr>
               <a:t>A</a:t>
             </a:r>
@@ -14917,8 +14675,7 @@
                   <a:srgbClr val="9AA1AB"/>
                 </a:solidFill>
                 <a:latin typeface="Calibri" pitchFamily="34" charset="0"/>
-                <a:ea typeface="Calibri" pitchFamily="34" charset="-122"/>
-                <a:cs typeface="Calibri" pitchFamily="34" charset="-120"/>
+                <a:cs typeface="Amiri" pitchFamily="2" charset="-78"/>
               </a:rPr>
               <a:t>she watched a video</a:t>
             </a:r>
@@ -15008,8 +14765,7 @@
                   <a:srgbClr val="FFFFFF"/>
                 </a:solidFill>
                 <a:latin typeface="Calibri" pitchFamily="34" charset="0"/>
-                <a:ea typeface="Calibri" pitchFamily="34" charset="-122"/>
-                <a:cs typeface="Calibri" pitchFamily="34" charset="-120"/>
+                <a:cs typeface="Amiri" pitchFamily="2" charset="-78"/>
               </a:rPr>
               <a:t>B</a:t>
             </a:r>
@@ -15047,8 +14803,7 @@
                   <a:srgbClr val="1F2A37"/>
                 </a:solidFill>
                 <a:latin typeface="Calibri" pitchFamily="34" charset="0"/>
-                <a:ea typeface="Calibri" pitchFamily="34" charset="-122"/>
-                <a:cs typeface="Calibri" pitchFamily="34" charset="-120"/>
+                <a:cs typeface="Amiri" pitchFamily="2" charset="-78"/>
               </a:rPr>
               <a:t>she led a recycling project</a:t>
             </a:r>
@@ -15111,8 +14866,7 @@
                   <a:srgbClr val="1B3B6F"/>
                 </a:solidFill>
                 <a:latin typeface="Calibri" pitchFamily="34" charset="0"/>
-                <a:ea typeface="Calibri" pitchFamily="34" charset="-122"/>
-                <a:cs typeface="Calibri" pitchFamily="34" charset="-120"/>
+                <a:cs typeface="Amiri" pitchFamily="2" charset="-78"/>
               </a:rPr>
               <a:t>C</a:t>
             </a:r>
@@ -15150,8 +14904,7 @@
                   <a:srgbClr val="9AA1AB"/>
                 </a:solidFill>
                 <a:latin typeface="Calibri" pitchFamily="34" charset="0"/>
-                <a:ea typeface="Calibri" pitchFamily="34" charset="-122"/>
-                <a:cs typeface="Calibri" pitchFamily="34" charset="-120"/>
+                <a:cs typeface="Amiri" pitchFamily="2" charset="-78"/>
               </a:rPr>
               <a:t>she bought a book</a:t>
             </a:r>
@@ -15188,9 +14941,8 @@
                 <a:solidFill>
                   <a:srgbClr val="8A6D1E"/>
                 </a:solidFill>
-                <a:latin typeface="Amiri" pitchFamily="34" charset="0"/>
-                <a:ea typeface="Amiri" pitchFamily="34" charset="-122"/>
-                <a:cs typeface="Amiri" pitchFamily="34" charset="-120"/>
+                <a:latin typeface="Amiri" pitchFamily="2" charset="-78"/>
+                <a:cs typeface="Amiri" pitchFamily="2" charset="-78"/>
               </a:rPr>
               <a:t>قُدْتُ مَشْرُوعًا … إِعَادَةِ التَّدْوِيرِ</a:t>
             </a:r>
@@ -15287,8 +15039,7 @@
                   <a:srgbClr val="FFFFFF"/>
                 </a:solidFill>
                 <a:latin typeface="Calibri" pitchFamily="34" charset="0"/>
-                <a:ea typeface="Calibri" pitchFamily="34" charset="-122"/>
-                <a:cs typeface="Calibri" pitchFamily="34" charset="-120"/>
+                <a:cs typeface="Amiri" pitchFamily="2" charset="-78"/>
               </a:rPr>
               <a:t>5</a:t>
             </a:r>
@@ -15326,8 +15077,7 @@
                   <a:srgbClr val="1B3B6F"/>
                 </a:solidFill>
                 <a:latin typeface="Calibri" pitchFamily="34" charset="0"/>
-                <a:ea typeface="Calibri" pitchFamily="34" charset="-122"/>
-                <a:cs typeface="Calibri" pitchFamily="34" charset="-120"/>
+                <a:cs typeface="Amiri" pitchFamily="2" charset="-78"/>
               </a:rPr>
               <a:t>What will she study?</a:t>
             </a:r>
@@ -15417,8 +15167,7 @@
                   <a:srgbClr val="FFFFFF"/>
                 </a:solidFill>
                 <a:latin typeface="Calibri" pitchFamily="34" charset="0"/>
-                <a:ea typeface="Calibri" pitchFamily="34" charset="-122"/>
-                <a:cs typeface="Calibri" pitchFamily="34" charset="-120"/>
+                <a:cs typeface="Amiri" pitchFamily="2" charset="-78"/>
               </a:rPr>
               <a:t>A</a:t>
             </a:r>
@@ -15456,8 +15205,7 @@
                   <a:srgbClr val="1F2A37"/>
                 </a:solidFill>
                 <a:latin typeface="Calibri" pitchFamily="34" charset="0"/>
-                <a:ea typeface="Calibri" pitchFamily="34" charset="-122"/>
-                <a:cs typeface="Calibri" pitchFamily="34" charset="-120"/>
+                <a:cs typeface="Amiri" pitchFamily="2" charset="-78"/>
               </a:rPr>
               <a:t>engineering</a:t>
             </a:r>
@@ -15520,8 +15268,7 @@
                   <a:srgbClr val="1B3B6F"/>
                 </a:solidFill>
                 <a:latin typeface="Calibri" pitchFamily="34" charset="0"/>
-                <a:ea typeface="Calibri" pitchFamily="34" charset="-122"/>
-                <a:cs typeface="Calibri" pitchFamily="34" charset="-120"/>
+                <a:cs typeface="Amiri" pitchFamily="2" charset="-78"/>
               </a:rPr>
               <a:t>B</a:t>
             </a:r>
@@ -15559,8 +15306,7 @@
                   <a:srgbClr val="9AA1AB"/>
                 </a:solidFill>
                 <a:latin typeface="Calibri" pitchFamily="34" charset="0"/>
-                <a:ea typeface="Calibri" pitchFamily="34" charset="-122"/>
-                <a:cs typeface="Calibri" pitchFamily="34" charset="-120"/>
+                <a:cs typeface="Amiri" pitchFamily="2" charset="-78"/>
               </a:rPr>
               <a:t>law</a:t>
             </a:r>
@@ -15623,8 +15369,7 @@
                   <a:srgbClr val="1B3B6F"/>
                 </a:solidFill>
                 <a:latin typeface="Calibri" pitchFamily="34" charset="0"/>
-                <a:ea typeface="Calibri" pitchFamily="34" charset="-122"/>
-                <a:cs typeface="Calibri" pitchFamily="34" charset="-120"/>
+                <a:cs typeface="Amiri" pitchFamily="2" charset="-78"/>
               </a:rPr>
               <a:t>C</a:t>
             </a:r>
@@ -15662,8 +15407,7 @@
                   <a:srgbClr val="9AA1AB"/>
                 </a:solidFill>
                 <a:latin typeface="Calibri" pitchFamily="34" charset="0"/>
-                <a:ea typeface="Calibri" pitchFamily="34" charset="-122"/>
-                <a:cs typeface="Calibri" pitchFamily="34" charset="-120"/>
+                <a:cs typeface="Amiri" pitchFamily="2" charset="-78"/>
               </a:rPr>
               <a:t>medicine</a:t>
             </a:r>
@@ -15700,9 +15444,8 @@
                 <a:solidFill>
                   <a:srgbClr val="8A6D1E"/>
                 </a:solidFill>
-                <a:latin typeface="Amiri" pitchFamily="34" charset="0"/>
-                <a:ea typeface="Amiri" pitchFamily="34" charset="-122"/>
-                <a:cs typeface="Amiri" pitchFamily="34" charset="-120"/>
+                <a:latin typeface="Amiri" pitchFamily="2" charset="-78"/>
+                <a:cs typeface="Amiri" pitchFamily="2" charset="-78"/>
               </a:rPr>
               <a:t>سَأَدْرُسُ الهَنْدَسَةَ</a:t>
             </a:r>
@@ -15740,8 +15483,7 @@
                   <a:srgbClr val="8A93A0"/>
                 </a:solidFill>
                 <a:latin typeface="Calibri" pitchFamily="34" charset="0"/>
-                <a:ea typeface="Calibri" pitchFamily="34" charset="-122"/>
-                <a:cs typeface="Calibri" pitchFamily="34" charset="-120"/>
+                <a:cs typeface="Amiri" pitchFamily="2" charset="-78"/>
               </a:rPr>
               <a:t>14 / 23</a:t>
             </a:r>
@@ -15835,9 +15577,8 @@
                 <a:solidFill>
                   <a:srgbClr val="D4AF37"/>
                 </a:solidFill>
-                <a:latin typeface="Amiri" pitchFamily="34" charset="0"/>
-                <a:ea typeface="Amiri" pitchFamily="34" charset="-122"/>
-                <a:cs typeface="Amiri" pitchFamily="34" charset="-120"/>
+                <a:latin typeface="Amiri" pitchFamily="2" charset="-78"/>
+                <a:cs typeface="Amiri" pitchFamily="2" charset="-78"/>
               </a:rPr>
               <a:t>م</a:t>
             </a:r>
@@ -15875,8 +15616,7 @@
                   <a:srgbClr val="1B3B6F"/>
                 </a:solidFill>
                 <a:latin typeface="Cambria" pitchFamily="34" charset="0"/>
-                <a:ea typeface="Cambria" pitchFamily="34" charset="-122"/>
-                <a:cs typeface="Cambria" pitchFamily="34" charset="-120"/>
+                <a:cs typeface="Amiri" pitchFamily="2" charset="-78"/>
               </a:rPr>
               <a:t>Al Madina Online School</a:t>
             </a:r>
@@ -15914,8 +15654,7 @@
                   <a:srgbClr val="8A6D1E"/>
                 </a:solidFill>
                 <a:latin typeface="Calibri" pitchFamily="34" charset="0"/>
-                <a:ea typeface="Calibri" pitchFamily="34" charset="-122"/>
-                <a:cs typeface="Calibri" pitchFamily="34" charset="-120"/>
+                <a:cs typeface="Amiri" pitchFamily="2" charset="-78"/>
               </a:rPr>
               <a:t>ARABIC DEPARTMENT · MIFTAH ARABIC · IGCSE 0544</a:t>
             </a:r>
@@ -15980,8 +15719,7 @@
                   <a:srgbClr val="FFFFFF"/>
                 </a:solidFill>
                 <a:latin typeface="Calibri" pitchFamily="34" charset="0"/>
-                <a:ea typeface="Calibri" pitchFamily="34" charset="-122"/>
-                <a:cs typeface="Calibri" pitchFamily="34" charset="-120"/>
+                <a:cs typeface="Amiri" pitchFamily="2" charset="-78"/>
               </a:rPr>
               <a:t>D3-L12 · D3 Assessment</a:t>
             </a:r>
@@ -16046,8 +15784,7 @@
                   <a:srgbClr val="FFFFFF"/>
                 </a:solidFill>
                 <a:latin typeface="Calibri" pitchFamily="34" charset="0"/>
-                <a:ea typeface="Calibri" pitchFamily="34" charset="-122"/>
-                <a:cs typeface="Calibri" pitchFamily="34" charset="-120"/>
+                <a:cs typeface="Amiri" pitchFamily="2" charset="-78"/>
               </a:rPr>
               <a:t>WE DO · 5 MIN</a:t>
             </a:r>
@@ -16085,8 +15822,7 @@
                   <a:srgbClr val="2F6FB0"/>
                 </a:solidFill>
                 <a:latin typeface="Calibri" pitchFamily="34" charset="0"/>
-                <a:ea typeface="Calibri" pitchFamily="34" charset="-122"/>
-                <a:cs typeface="Calibri" pitchFamily="34" charset="-120"/>
+                <a:cs typeface="Amiri" pitchFamily="2" charset="-78"/>
               </a:rPr>
               <a:t>READING · QUESTIONS 6–10 · 1 MARK EACH (WEBSITE)</a:t>
             </a:r>
@@ -16124,8 +15860,7 @@
                   <a:srgbClr val="1B3B6F"/>
                 </a:solidFill>
                 <a:latin typeface="Cambria" pitchFamily="34" charset="0"/>
-                <a:ea typeface="Cambria" pitchFamily="34" charset="-122"/>
-                <a:cs typeface="Cambria" pitchFamily="34" charset="-120"/>
+                <a:cs typeface="Amiri" pitchFamily="2" charset="-78"/>
               </a:rPr>
               <a:t>Reading questions 6–10</a:t>
             </a:r>
@@ -16162,9 +15897,8 @@
                 <a:solidFill>
                   <a:srgbClr val="8A6D1E"/>
                 </a:solidFill>
-                <a:latin typeface="Amiri" pitchFamily="34" charset="0"/>
-                <a:ea typeface="Amiri" pitchFamily="34" charset="-122"/>
-                <a:cs typeface="Amiri" pitchFamily="34" charset="-120"/>
+                <a:latin typeface="Amiri" pitchFamily="2" charset="-78"/>
+                <a:cs typeface="Amiri" pitchFamily="2" charset="-78"/>
               </a:rPr>
               <a:t>أَسْئِلَةُ القِرَاءَةِ</a:t>
             </a:r>
@@ -16202,8 +15936,7 @@
                   <a:srgbClr val="8A93A0"/>
                 </a:solidFill>
                 <a:latin typeface="Calibri" pitchFamily="34" charset="0"/>
-                <a:ea typeface="Calibri" pitchFamily="34" charset="-122"/>
-                <a:cs typeface="Calibri" pitchFamily="34" charset="-120"/>
+                <a:cs typeface="Amiri" pitchFamily="2" charset="-78"/>
               </a:rPr>
               <a:t>Miftah Arabic · Development D3 · Work and Careers · D3-L12</a:t>
             </a:r>
@@ -16300,8 +16033,7 @@
                   <a:srgbClr val="FFFFFF"/>
                 </a:solidFill>
                 <a:latin typeface="Calibri" pitchFamily="34" charset="0"/>
-                <a:ea typeface="Calibri" pitchFamily="34" charset="-122"/>
-                <a:cs typeface="Calibri" pitchFamily="34" charset="-120"/>
+                <a:cs typeface="Amiri" pitchFamily="2" charset="-78"/>
               </a:rPr>
               <a:t>1</a:t>
             </a:r>
@@ -16339,8 +16071,7 @@
                   <a:srgbClr val="1B3B6F"/>
                 </a:solidFill>
                 <a:latin typeface="Calibri" pitchFamily="34" charset="0"/>
-                <a:ea typeface="Calibri" pitchFamily="34" charset="-122"/>
-                <a:cs typeface="Calibri" pitchFamily="34" charset="-120"/>
+                <a:cs typeface="Amiri" pitchFamily="2" charset="-78"/>
               </a:rPr>
               <a:t>What practical step will follow?</a:t>
             </a:r>
@@ -16403,8 +16134,7 @@
                   <a:srgbClr val="1B3B6F"/>
                 </a:solidFill>
                 <a:latin typeface="Calibri" pitchFamily="34" charset="0"/>
-                <a:ea typeface="Calibri" pitchFamily="34" charset="-122"/>
-                <a:cs typeface="Calibri" pitchFamily="34" charset="-120"/>
+                <a:cs typeface="Amiri" pitchFamily="2" charset="-78"/>
               </a:rPr>
               <a:t>A</a:t>
             </a:r>
@@ -16442,8 +16172,7 @@
                   <a:srgbClr val="1F2A37"/>
                 </a:solidFill>
                 <a:latin typeface="Calibri" pitchFamily="34" charset="0"/>
-                <a:ea typeface="Calibri" pitchFamily="34" charset="-122"/>
-                <a:cs typeface="Calibri" pitchFamily="34" charset="-120"/>
+                <a:cs typeface="Amiri" pitchFamily="2" charset="-78"/>
               </a:rPr>
               <a:t>a holiday</a:t>
             </a:r>
@@ -16506,8 +16235,7 @@
                   <a:srgbClr val="1B3B6F"/>
                 </a:solidFill>
                 <a:latin typeface="Calibri" pitchFamily="34" charset="0"/>
-                <a:ea typeface="Calibri" pitchFamily="34" charset="-122"/>
-                <a:cs typeface="Calibri" pitchFamily="34" charset="-120"/>
+                <a:cs typeface="Amiri" pitchFamily="2" charset="-78"/>
               </a:rPr>
               <a:t>B</a:t>
             </a:r>
@@ -16545,8 +16273,7 @@
                   <a:srgbClr val="1F2A37"/>
                 </a:solidFill>
                 <a:latin typeface="Calibri" pitchFamily="34" charset="0"/>
-                <a:ea typeface="Calibri" pitchFamily="34" charset="-122"/>
-                <a:cs typeface="Calibri" pitchFamily="34" charset="-120"/>
+                <a:cs typeface="Amiri" pitchFamily="2" charset="-78"/>
               </a:rPr>
               <a:t>a sports course</a:t>
             </a:r>
@@ -16609,8 +16336,7 @@
                   <a:srgbClr val="1B3B6F"/>
                 </a:solidFill>
                 <a:latin typeface="Calibri" pitchFamily="34" charset="0"/>
-                <a:ea typeface="Calibri" pitchFamily="34" charset="-122"/>
-                <a:cs typeface="Calibri" pitchFamily="34" charset="-120"/>
+                <a:cs typeface="Amiri" pitchFamily="2" charset="-78"/>
               </a:rPr>
               <a:t>C</a:t>
             </a:r>
@@ -16648,8 +16374,7 @@
                   <a:srgbClr val="1F2A37"/>
                 </a:solidFill>
                 <a:latin typeface="Calibri" pitchFamily="34" charset="0"/>
-                <a:ea typeface="Calibri" pitchFamily="34" charset="-122"/>
-                <a:cs typeface="Calibri" pitchFamily="34" charset="-120"/>
+                <a:cs typeface="Amiri" pitchFamily="2" charset="-78"/>
               </a:rPr>
               <a:t>a work placement</a:t>
             </a:r>
@@ -16746,8 +16471,7 @@
                   <a:srgbClr val="FFFFFF"/>
                 </a:solidFill>
                 <a:latin typeface="Calibri" pitchFamily="34" charset="0"/>
-                <a:ea typeface="Calibri" pitchFamily="34" charset="-122"/>
-                <a:cs typeface="Calibri" pitchFamily="34" charset="-120"/>
+                <a:cs typeface="Amiri" pitchFamily="2" charset="-78"/>
               </a:rPr>
               <a:t>2</a:t>
             </a:r>
@@ -16785,8 +16509,7 @@
                   <a:srgbClr val="1B3B6F"/>
                 </a:solidFill>
                 <a:latin typeface="Calibri" pitchFamily="34" charset="0"/>
-                <a:ea typeface="Calibri" pitchFamily="34" charset="-122"/>
-                <a:cs typeface="Calibri" pitchFamily="34" charset="-120"/>
+                <a:cs typeface="Amiri" pitchFamily="2" charset="-78"/>
               </a:rPr>
               <a:t>What challenge does she acknowledge?</a:t>
             </a:r>
@@ -16849,8 +16572,7 @@
                   <a:srgbClr val="1B3B6F"/>
                 </a:solidFill>
                 <a:latin typeface="Calibri" pitchFamily="34" charset="0"/>
-                <a:ea typeface="Calibri" pitchFamily="34" charset="-122"/>
-                <a:cs typeface="Calibri" pitchFamily="34" charset="-120"/>
+                <a:cs typeface="Amiri" pitchFamily="2" charset="-78"/>
               </a:rPr>
               <a:t>A</a:t>
             </a:r>
@@ -16888,8 +16610,7 @@
                   <a:srgbClr val="1F2A37"/>
                 </a:solidFill>
                 <a:latin typeface="Calibri" pitchFamily="34" charset="0"/>
-                <a:ea typeface="Calibri" pitchFamily="34" charset="-122"/>
-                <a:cs typeface="Calibri" pitchFamily="34" charset="-120"/>
+                <a:cs typeface="Amiri" pitchFamily="2" charset="-78"/>
               </a:rPr>
               <a:t>the route is long</a:t>
             </a:r>
@@ -16952,8 +16673,7 @@
                   <a:srgbClr val="1B3B6F"/>
                 </a:solidFill>
                 <a:latin typeface="Calibri" pitchFamily="34" charset="0"/>
-                <a:ea typeface="Calibri" pitchFamily="34" charset="-122"/>
-                <a:cs typeface="Calibri" pitchFamily="34" charset="-120"/>
+                <a:cs typeface="Amiri" pitchFamily="2" charset="-78"/>
               </a:rPr>
               <a:t>B</a:t>
             </a:r>
@@ -16991,8 +16711,7 @@
                   <a:srgbClr val="1F2A37"/>
                 </a:solidFill>
                 <a:latin typeface="Calibri" pitchFamily="34" charset="0"/>
-                <a:ea typeface="Calibri" pitchFamily="34" charset="-122"/>
-                <a:cs typeface="Calibri" pitchFamily="34" charset="-120"/>
+                <a:cs typeface="Amiri" pitchFamily="2" charset="-78"/>
               </a:rPr>
               <a:t>the job has no value</a:t>
             </a:r>
@@ -17055,8 +16774,7 @@
                   <a:srgbClr val="1B3B6F"/>
                 </a:solidFill>
                 <a:latin typeface="Calibri" pitchFamily="34" charset="0"/>
-                <a:ea typeface="Calibri" pitchFamily="34" charset="-122"/>
-                <a:cs typeface="Calibri" pitchFamily="34" charset="-120"/>
+                <a:cs typeface="Amiri" pitchFamily="2" charset="-78"/>
               </a:rPr>
               <a:t>C</a:t>
             </a:r>
@@ -17094,8 +16812,7 @@
                   <a:srgbClr val="1F2A37"/>
                 </a:solidFill>
                 <a:latin typeface="Calibri" pitchFamily="34" charset="0"/>
-                <a:ea typeface="Calibri" pitchFamily="34" charset="-122"/>
-                <a:cs typeface="Calibri" pitchFamily="34" charset="-120"/>
+                <a:cs typeface="Amiri" pitchFamily="2" charset="-78"/>
               </a:rPr>
               <a:t>the subject is easy</a:t>
             </a:r>
@@ -17192,8 +16909,7 @@
                   <a:srgbClr val="FFFFFF"/>
                 </a:solidFill>
                 <a:latin typeface="Calibri" pitchFamily="34" charset="0"/>
-                <a:ea typeface="Calibri" pitchFamily="34" charset="-122"/>
-                <a:cs typeface="Calibri" pitchFamily="34" charset="-120"/>
+                <a:cs typeface="Amiri" pitchFamily="2" charset="-78"/>
               </a:rPr>
               <a:t>3</a:t>
             </a:r>
@@ -17231,8 +16947,7 @@
                   <a:srgbClr val="1B3B6F"/>
                 </a:solidFill>
                 <a:latin typeface="Calibri" pitchFamily="34" charset="0"/>
-                <a:ea typeface="Calibri" pitchFamily="34" charset="-122"/>
-                <a:cs typeface="Calibri" pitchFamily="34" charset="-120"/>
+                <a:cs typeface="Amiri" pitchFamily="2" charset="-78"/>
               </a:rPr>
               <a:t>What is her attitude?</a:t>
             </a:r>
@@ -17295,8 +17010,7 @@
                   <a:srgbClr val="1B3B6F"/>
                 </a:solidFill>
                 <a:latin typeface="Calibri" pitchFamily="34" charset="0"/>
-                <a:ea typeface="Calibri" pitchFamily="34" charset="-122"/>
-                <a:cs typeface="Calibri" pitchFamily="34" charset="-120"/>
+                <a:cs typeface="Amiri" pitchFamily="2" charset="-78"/>
               </a:rPr>
               <a:t>A</a:t>
             </a:r>
@@ -17334,8 +17048,7 @@
                   <a:srgbClr val="1F2A37"/>
                 </a:solidFill>
                 <a:latin typeface="Calibri" pitchFamily="34" charset="0"/>
-                <a:ea typeface="Calibri" pitchFamily="34" charset="-122"/>
-                <a:cs typeface="Calibri" pitchFamily="34" charset="-120"/>
+                <a:cs typeface="Amiri" pitchFamily="2" charset="-78"/>
               </a:rPr>
               <a:t>indifferent</a:t>
             </a:r>
@@ -17398,8 +17111,7 @@
                   <a:srgbClr val="1B3B6F"/>
                 </a:solidFill>
                 <a:latin typeface="Calibri" pitchFamily="34" charset="0"/>
-                <a:ea typeface="Calibri" pitchFamily="34" charset="-122"/>
-                <a:cs typeface="Calibri" pitchFamily="34" charset="-120"/>
+                <a:cs typeface="Amiri" pitchFamily="2" charset="-78"/>
               </a:rPr>
               <a:t>B</a:t>
             </a:r>
@@ -17437,8 +17149,7 @@
                   <a:srgbClr val="1F2A37"/>
                 </a:solidFill>
                 <a:latin typeface="Calibri" pitchFamily="34" charset="0"/>
-                <a:ea typeface="Calibri" pitchFamily="34" charset="-122"/>
-                <a:cs typeface="Calibri" pitchFamily="34" charset="-120"/>
+                <a:cs typeface="Amiri" pitchFamily="2" charset="-78"/>
               </a:rPr>
               <a:t>determined</a:t>
             </a:r>
@@ -17501,8 +17212,7 @@
                   <a:srgbClr val="1B3B6F"/>
                 </a:solidFill>
                 <a:latin typeface="Calibri" pitchFamily="34" charset="0"/>
-                <a:ea typeface="Calibri" pitchFamily="34" charset="-122"/>
-                <a:cs typeface="Calibri" pitchFamily="34" charset="-120"/>
+                <a:cs typeface="Amiri" pitchFamily="2" charset="-78"/>
               </a:rPr>
               <a:t>C</a:t>
             </a:r>
@@ -17540,8 +17250,7 @@
                   <a:srgbClr val="1F2A37"/>
                 </a:solidFill>
                 <a:latin typeface="Calibri" pitchFamily="34" charset="0"/>
-                <a:ea typeface="Calibri" pitchFamily="34" charset="-122"/>
-                <a:cs typeface="Calibri" pitchFamily="34" charset="-120"/>
+                <a:cs typeface="Amiri" pitchFamily="2" charset="-78"/>
               </a:rPr>
               <a:t>uncertain and unwilling</a:t>
             </a:r>
@@ -17638,8 +17347,7 @@
                   <a:srgbClr val="FFFFFF"/>
                 </a:solidFill>
                 <a:latin typeface="Calibri" pitchFamily="34" charset="0"/>
-                <a:ea typeface="Calibri" pitchFamily="34" charset="-122"/>
-                <a:cs typeface="Calibri" pitchFamily="34" charset="-120"/>
+                <a:cs typeface="Amiri" pitchFamily="2" charset="-78"/>
               </a:rPr>
               <a:t>4</a:t>
             </a:r>
@@ -17677,8 +17385,7 @@
                   <a:srgbClr val="1B3B6F"/>
                 </a:solidFill>
                 <a:latin typeface="Calibri" pitchFamily="34" charset="0"/>
-                <a:ea typeface="Calibri" pitchFamily="34" charset="-122"/>
-                <a:cs typeface="Calibri" pitchFamily="34" charset="-120"/>
+                <a:cs typeface="Amiri" pitchFamily="2" charset="-78"/>
               </a:rPr>
               <a:t>Which connector introduces concession?</a:t>
             </a:r>
@@ -17741,8 +17448,7 @@
                   <a:srgbClr val="1B3B6F"/>
                 </a:solidFill>
                 <a:latin typeface="Calibri" pitchFamily="34" charset="0"/>
-                <a:ea typeface="Calibri" pitchFamily="34" charset="-122"/>
-                <a:cs typeface="Calibri" pitchFamily="34" charset="-120"/>
+                <a:cs typeface="Amiri" pitchFamily="2" charset="-78"/>
               </a:rPr>
               <a:t>A</a:t>
             </a:r>
@@ -17779,9 +17485,8 @@
                 <a:solidFill>
                   <a:srgbClr val="1F2A37"/>
                 </a:solidFill>
-                <a:latin typeface="Amiri" pitchFamily="34" charset="0"/>
-                <a:ea typeface="Amiri" pitchFamily="34" charset="-122"/>
-                <a:cs typeface="Amiri" pitchFamily="34" charset="-120"/>
+                <a:latin typeface="Amiri" pitchFamily="2" charset="-78"/>
+                <a:cs typeface="Amiri" pitchFamily="2" charset="-78"/>
               </a:rPr>
               <a:t>عَلَى الرَّغْمِ مِنْ أَنَّ</a:t>
             </a:r>
@@ -17844,8 +17549,7 @@
                   <a:srgbClr val="1B3B6F"/>
                 </a:solidFill>
                 <a:latin typeface="Calibri" pitchFamily="34" charset="0"/>
-                <a:ea typeface="Calibri" pitchFamily="34" charset="-122"/>
-                <a:cs typeface="Calibri" pitchFamily="34" charset="-120"/>
+                <a:cs typeface="Amiri" pitchFamily="2" charset="-78"/>
               </a:rPr>
               <a:t>B</a:t>
             </a:r>
@@ -17882,9 +17586,8 @@
                 <a:solidFill>
                   <a:srgbClr val="1F2A37"/>
                 </a:solidFill>
-                <a:latin typeface="Amiri" pitchFamily="34" charset="0"/>
-                <a:ea typeface="Amiri" pitchFamily="34" charset="-122"/>
-                <a:cs typeface="Amiri" pitchFamily="34" charset="-120"/>
+                <a:latin typeface="Amiri" pitchFamily="2" charset="-78"/>
+                <a:cs typeface="Amiri" pitchFamily="2" charset="-78"/>
               </a:rPr>
               <a:t>ثُمَّ</a:t>
             </a:r>
@@ -17947,8 +17650,7 @@
                   <a:srgbClr val="1B3B6F"/>
                 </a:solidFill>
                 <a:latin typeface="Calibri" pitchFamily="34" charset="0"/>
-                <a:ea typeface="Calibri" pitchFamily="34" charset="-122"/>
-                <a:cs typeface="Calibri" pitchFamily="34" charset="-120"/>
+                <a:cs typeface="Amiri" pitchFamily="2" charset="-78"/>
               </a:rPr>
               <a:t>C</a:t>
             </a:r>
@@ -17985,9 +17687,8 @@
                 <a:solidFill>
                   <a:srgbClr val="1F2A37"/>
                 </a:solidFill>
-                <a:latin typeface="Amiri" pitchFamily="34" charset="0"/>
-                <a:ea typeface="Amiri" pitchFamily="34" charset="-122"/>
-                <a:cs typeface="Amiri" pitchFamily="34" charset="-120"/>
+                <a:latin typeface="Amiri" pitchFamily="2" charset="-78"/>
+                <a:cs typeface="Amiri" pitchFamily="2" charset="-78"/>
               </a:rPr>
               <a:t>لِكَيْ</a:t>
             </a:r>
@@ -18084,8 +17785,7 @@
                   <a:srgbClr val="FFFFFF"/>
                 </a:solidFill>
                 <a:latin typeface="Calibri" pitchFamily="34" charset="0"/>
-                <a:ea typeface="Calibri" pitchFamily="34" charset="-122"/>
-                <a:cs typeface="Calibri" pitchFamily="34" charset="-120"/>
+                <a:cs typeface="Amiri" pitchFamily="2" charset="-78"/>
               </a:rPr>
               <a:t>5</a:t>
             </a:r>
@@ -18123,8 +17823,7 @@
                   <a:srgbClr val="1B3B6F"/>
                 </a:solidFill>
                 <a:latin typeface="Calibri" pitchFamily="34" charset="0"/>
-                <a:ea typeface="Calibri" pitchFamily="34" charset="-122"/>
-                <a:cs typeface="Calibri" pitchFamily="34" charset="-120"/>
+                <a:cs typeface="Amiri" pitchFamily="2" charset="-78"/>
               </a:rPr>
               <a:t>What is the text type?</a:t>
             </a:r>
@@ -18187,8 +17886,7 @@
                   <a:srgbClr val="1B3B6F"/>
                 </a:solidFill>
                 <a:latin typeface="Calibri" pitchFamily="34" charset="0"/>
-                <a:ea typeface="Calibri" pitchFamily="34" charset="-122"/>
-                <a:cs typeface="Calibri" pitchFamily="34" charset="-120"/>
+                <a:cs typeface="Amiri" pitchFamily="2" charset="-78"/>
               </a:rPr>
               <a:t>A</a:t>
             </a:r>
@@ -18226,8 +17924,7 @@
                   <a:srgbClr val="1F2A37"/>
                 </a:solidFill>
                 <a:latin typeface="Calibri" pitchFamily="34" charset="0"/>
-                <a:ea typeface="Calibri" pitchFamily="34" charset="-122"/>
-                <a:cs typeface="Calibri" pitchFamily="34" charset="-120"/>
+                <a:cs typeface="Amiri" pitchFamily="2" charset="-78"/>
               </a:rPr>
               <a:t>a shopping list</a:t>
             </a:r>
@@ -18290,8 +17987,7 @@
                   <a:srgbClr val="1B3B6F"/>
                 </a:solidFill>
                 <a:latin typeface="Calibri" pitchFamily="34" charset="0"/>
-                <a:ea typeface="Calibri" pitchFamily="34" charset="-122"/>
-                <a:cs typeface="Calibri" pitchFamily="34" charset="-120"/>
+                <a:cs typeface="Amiri" pitchFamily="2" charset="-78"/>
               </a:rPr>
               <a:t>B</a:t>
             </a:r>
@@ -18329,8 +18025,7 @@
                   <a:srgbClr val="1F2A37"/>
                 </a:solidFill>
                 <a:latin typeface="Calibri" pitchFamily="34" charset="0"/>
-                <a:ea typeface="Calibri" pitchFamily="34" charset="-122"/>
-                <a:cs typeface="Calibri" pitchFamily="34" charset="-120"/>
+                <a:cs typeface="Amiri" pitchFamily="2" charset="-78"/>
               </a:rPr>
               <a:t>a weather report</a:t>
             </a:r>
@@ -18393,8 +18088,7 @@
                   <a:srgbClr val="1B3B6F"/>
                 </a:solidFill>
                 <a:latin typeface="Calibri" pitchFamily="34" charset="0"/>
-                <a:ea typeface="Calibri" pitchFamily="34" charset="-122"/>
-                <a:cs typeface="Calibri" pitchFamily="34" charset="-120"/>
+                <a:cs typeface="Amiri" pitchFamily="2" charset="-78"/>
               </a:rPr>
               <a:t>C</a:t>
             </a:r>
@@ -18432,8 +18126,7 @@
                   <a:srgbClr val="1F2A37"/>
                 </a:solidFill>
                 <a:latin typeface="Calibri" pitchFamily="34" charset="0"/>
-                <a:ea typeface="Calibri" pitchFamily="34" charset="-122"/>
-                <a:cs typeface="Calibri" pitchFamily="34" charset="-120"/>
+                <a:cs typeface="Amiri" pitchFamily="2" charset="-78"/>
               </a:rPr>
               <a:t>a career-plan article</a:t>
             </a:r>
@@ -18471,8 +18164,7 @@
                   <a:srgbClr val="8A93A0"/>
                 </a:solidFill>
                 <a:latin typeface="Calibri" pitchFamily="34" charset="0"/>
-                <a:ea typeface="Calibri" pitchFamily="34" charset="-122"/>
-                <a:cs typeface="Calibri" pitchFamily="34" charset="-120"/>
+                <a:cs typeface="Amiri" pitchFamily="2" charset="-78"/>
               </a:rPr>
               <a:t>15 / 23</a:t>
             </a:r>
@@ -18566,9 +18258,8 @@
                 <a:solidFill>
                   <a:srgbClr val="D4AF37"/>
                 </a:solidFill>
-                <a:latin typeface="Amiri" pitchFamily="34" charset="0"/>
-                <a:ea typeface="Amiri" pitchFamily="34" charset="-122"/>
-                <a:cs typeface="Amiri" pitchFamily="34" charset="-120"/>
+                <a:latin typeface="Amiri" pitchFamily="2" charset="-78"/>
+                <a:cs typeface="Amiri" pitchFamily="2" charset="-78"/>
               </a:rPr>
               <a:t>م</a:t>
             </a:r>
@@ -18606,8 +18297,7 @@
                   <a:srgbClr val="1B3B6F"/>
                 </a:solidFill>
                 <a:latin typeface="Cambria" pitchFamily="34" charset="0"/>
-                <a:ea typeface="Cambria" pitchFamily="34" charset="-122"/>
-                <a:cs typeface="Cambria" pitchFamily="34" charset="-120"/>
+                <a:cs typeface="Amiri" pitchFamily="2" charset="-78"/>
               </a:rPr>
               <a:t>Al Madina Online School</a:t>
             </a:r>
@@ -18645,8 +18335,7 @@
                   <a:srgbClr val="8A6D1E"/>
                 </a:solidFill>
                 <a:latin typeface="Calibri" pitchFamily="34" charset="0"/>
-                <a:ea typeface="Calibri" pitchFamily="34" charset="-122"/>
-                <a:cs typeface="Calibri" pitchFamily="34" charset="-120"/>
+                <a:cs typeface="Amiri" pitchFamily="2" charset="-78"/>
               </a:rPr>
               <a:t>ARABIC DEPARTMENT · MIFTAH ARABIC · IGCSE 0544</a:t>
             </a:r>
@@ -18711,8 +18400,7 @@
                   <a:srgbClr val="FFFFFF"/>
                 </a:solidFill>
                 <a:latin typeface="Calibri" pitchFamily="34" charset="0"/>
-                <a:ea typeface="Calibri" pitchFamily="34" charset="-122"/>
-                <a:cs typeface="Calibri" pitchFamily="34" charset="-120"/>
+                <a:cs typeface="Amiri" pitchFamily="2" charset="-78"/>
               </a:rPr>
               <a:t>D3-L12 · D3 Assessment</a:t>
             </a:r>
@@ -18777,8 +18465,7 @@
                   <a:srgbClr val="FFFFFF"/>
                 </a:solidFill>
                 <a:latin typeface="Calibri" pitchFamily="34" charset="0"/>
-                <a:ea typeface="Calibri" pitchFamily="34" charset="-122"/>
-                <a:cs typeface="Calibri" pitchFamily="34" charset="-120"/>
+                <a:cs typeface="Amiri" pitchFamily="2" charset="-78"/>
               </a:rPr>
               <a:t>WE DO</a:t>
             </a:r>
@@ -18816,8 +18503,7 @@
                   <a:srgbClr val="2F6FB0"/>
                 </a:solidFill>
                 <a:latin typeface="Calibri" pitchFamily="34" charset="0"/>
-                <a:ea typeface="Calibri" pitchFamily="34" charset="-122"/>
-                <a:cs typeface="Calibri" pitchFamily="34" charset="-120"/>
+                <a:cs typeface="Amiri" pitchFamily="2" charset="-78"/>
               </a:rPr>
               <a:t>READING · ANSWERS · SHOW AFTER THE SECTION</a:t>
             </a:r>
@@ -18855,8 +18541,7 @@
                   <a:srgbClr val="1B3B6F"/>
                 </a:solidFill>
                 <a:latin typeface="Cambria" pitchFamily="34" charset="0"/>
-                <a:ea typeface="Cambria" pitchFamily="34" charset="-122"/>
-                <a:cs typeface="Cambria" pitchFamily="34" charset="-120"/>
+                <a:cs typeface="Amiri" pitchFamily="2" charset="-78"/>
               </a:rPr>
               <a:t>Questions 6–10: answers</a:t>
             </a:r>
@@ -18893,9 +18578,8 @@
                 <a:solidFill>
                   <a:srgbClr val="8A6D1E"/>
                 </a:solidFill>
-                <a:latin typeface="Amiri" pitchFamily="34" charset="0"/>
-                <a:ea typeface="Amiri" pitchFamily="34" charset="-122"/>
-                <a:cs typeface="Amiri" pitchFamily="34" charset="-120"/>
+                <a:latin typeface="Amiri" pitchFamily="2" charset="-78"/>
+                <a:cs typeface="Amiri" pitchFamily="2" charset="-78"/>
               </a:rPr>
               <a:t>الإِجَابَاتُ</a:t>
             </a:r>
@@ -18933,8 +18617,7 @@
                   <a:srgbClr val="8A93A0"/>
                 </a:solidFill>
                 <a:latin typeface="Calibri" pitchFamily="34" charset="0"/>
-                <a:ea typeface="Calibri" pitchFamily="34" charset="-122"/>
-                <a:cs typeface="Calibri" pitchFamily="34" charset="-120"/>
+                <a:cs typeface="Amiri" pitchFamily="2" charset="-78"/>
               </a:rPr>
               <a:t>Miftah Arabic · Development D3 · Work and Careers · D3-L12</a:t>
             </a:r>
@@ -19031,8 +18714,7 @@
                   <a:srgbClr val="FFFFFF"/>
                 </a:solidFill>
                 <a:latin typeface="Calibri" pitchFamily="34" charset="0"/>
-                <a:ea typeface="Calibri" pitchFamily="34" charset="-122"/>
-                <a:cs typeface="Calibri" pitchFamily="34" charset="-120"/>
+                <a:cs typeface="Amiri" pitchFamily="2" charset="-78"/>
               </a:rPr>
               <a:t>1</a:t>
             </a:r>
@@ -19070,8 +18752,7 @@
                   <a:srgbClr val="1B3B6F"/>
                 </a:solidFill>
                 <a:latin typeface="Calibri" pitchFamily="34" charset="0"/>
-                <a:ea typeface="Calibri" pitchFamily="34" charset="-122"/>
-                <a:cs typeface="Calibri" pitchFamily="34" charset="-120"/>
+                <a:cs typeface="Amiri" pitchFamily="2" charset="-78"/>
               </a:rPr>
               <a:t>What practical step will follow?</a:t>
             </a:r>
@@ -19134,8 +18815,7 @@
                   <a:srgbClr val="1B3B6F"/>
                 </a:solidFill>
                 <a:latin typeface="Calibri" pitchFamily="34" charset="0"/>
-                <a:ea typeface="Calibri" pitchFamily="34" charset="-122"/>
-                <a:cs typeface="Calibri" pitchFamily="34" charset="-120"/>
+                <a:cs typeface="Amiri" pitchFamily="2" charset="-78"/>
               </a:rPr>
               <a:t>A</a:t>
             </a:r>
@@ -19173,8 +18853,7 @@
                   <a:srgbClr val="9AA1AB"/>
                 </a:solidFill>
                 <a:latin typeface="Calibri" pitchFamily="34" charset="0"/>
-                <a:ea typeface="Calibri" pitchFamily="34" charset="-122"/>
-                <a:cs typeface="Calibri" pitchFamily="34" charset="-120"/>
+                <a:cs typeface="Amiri" pitchFamily="2" charset="-78"/>
               </a:rPr>
               <a:t>a holiday</a:t>
             </a:r>
@@ -19237,8 +18916,7 @@
                   <a:srgbClr val="1B3B6F"/>
                 </a:solidFill>
                 <a:latin typeface="Calibri" pitchFamily="34" charset="0"/>
-                <a:ea typeface="Calibri" pitchFamily="34" charset="-122"/>
-                <a:cs typeface="Calibri" pitchFamily="34" charset="-120"/>
+                <a:cs typeface="Amiri" pitchFamily="2" charset="-78"/>
               </a:rPr>
               <a:t>B</a:t>
             </a:r>
@@ -19276,8 +18954,7 @@
                   <a:srgbClr val="9AA1AB"/>
                 </a:solidFill>
                 <a:latin typeface="Calibri" pitchFamily="34" charset="0"/>
-                <a:ea typeface="Calibri" pitchFamily="34" charset="-122"/>
-                <a:cs typeface="Calibri" pitchFamily="34" charset="-120"/>
+                <a:cs typeface="Amiri" pitchFamily="2" charset="-78"/>
               </a:rPr>
               <a:t>a sports course</a:t>
             </a:r>
@@ -19367,8 +19044,7 @@
                   <a:srgbClr val="FFFFFF"/>
                 </a:solidFill>
                 <a:latin typeface="Calibri" pitchFamily="34" charset="0"/>
-                <a:ea typeface="Calibri" pitchFamily="34" charset="-122"/>
-                <a:cs typeface="Calibri" pitchFamily="34" charset="-120"/>
+                <a:cs typeface="Amiri" pitchFamily="2" charset="-78"/>
               </a:rPr>
               <a:t>C</a:t>
             </a:r>
@@ -19406,8 +19082,7 @@
                   <a:srgbClr val="1F2A37"/>
                 </a:solidFill>
                 <a:latin typeface="Calibri" pitchFamily="34" charset="0"/>
-                <a:ea typeface="Calibri" pitchFamily="34" charset="-122"/>
-                <a:cs typeface="Calibri" pitchFamily="34" charset="-120"/>
+                <a:cs typeface="Amiri" pitchFamily="2" charset="-78"/>
               </a:rPr>
               <a:t>a work placement</a:t>
             </a:r>
@@ -19444,9 +19119,8 @@
                 <a:solidFill>
                   <a:srgbClr val="8A6D1E"/>
                 </a:solidFill>
-                <a:latin typeface="Amiri" pitchFamily="34" charset="0"/>
-                <a:ea typeface="Amiri" pitchFamily="34" charset="-122"/>
-                <a:cs typeface="Amiri" pitchFamily="34" charset="-120"/>
+                <a:latin typeface="Amiri" pitchFamily="2" charset="-78"/>
+                <a:cs typeface="Amiri" pitchFamily="2" charset="-78"/>
               </a:rPr>
               <a:t>تَدْرِيبٍ عَمَلِيٍّ</a:t>
             </a:r>
@@ -19543,8 +19217,7 @@
                   <a:srgbClr val="FFFFFF"/>
                 </a:solidFill>
                 <a:latin typeface="Calibri" pitchFamily="34" charset="0"/>
-                <a:ea typeface="Calibri" pitchFamily="34" charset="-122"/>
-                <a:cs typeface="Calibri" pitchFamily="34" charset="-120"/>
+                <a:cs typeface="Amiri" pitchFamily="2" charset="-78"/>
               </a:rPr>
               <a:t>2</a:t>
             </a:r>
@@ -19582,8 +19255,7 @@
                   <a:srgbClr val="1B3B6F"/>
                 </a:solidFill>
                 <a:latin typeface="Calibri" pitchFamily="34" charset="0"/>
-                <a:ea typeface="Calibri" pitchFamily="34" charset="-122"/>
-                <a:cs typeface="Calibri" pitchFamily="34" charset="-120"/>
+                <a:cs typeface="Amiri" pitchFamily="2" charset="-78"/>
               </a:rPr>
               <a:t>What challenge does she acknowledge?</a:t>
             </a:r>
@@ -19673,8 +19345,7 @@
                   <a:srgbClr val="FFFFFF"/>
                 </a:solidFill>
                 <a:latin typeface="Calibri" pitchFamily="34" charset="0"/>
-                <a:ea typeface="Calibri" pitchFamily="34" charset="-122"/>
-                <a:cs typeface="Calibri" pitchFamily="34" charset="-120"/>
+                <a:cs typeface="Amiri" pitchFamily="2" charset="-78"/>
               </a:rPr>
               <a:t>A</a:t>
             </a:r>
@@ -19712,8 +19383,7 @@
                   <a:srgbClr val="1F2A37"/>
                 </a:solidFill>
                 <a:latin typeface="Calibri" pitchFamily="34" charset="0"/>
-                <a:ea typeface="Calibri" pitchFamily="34" charset="-122"/>
-                <a:cs typeface="Calibri" pitchFamily="34" charset="-120"/>
+                <a:cs typeface="Amiri" pitchFamily="2" charset="-78"/>
               </a:rPr>
               <a:t>the route is long</a:t>
             </a:r>
@@ -19776,8 +19446,7 @@
                   <a:srgbClr val="1B3B6F"/>
                 </a:solidFill>
                 <a:latin typeface="Calibri" pitchFamily="34" charset="0"/>
-                <a:ea typeface="Calibri" pitchFamily="34" charset="-122"/>
-                <a:cs typeface="Calibri" pitchFamily="34" charset="-120"/>
+                <a:cs typeface="Amiri" pitchFamily="2" charset="-78"/>
               </a:rPr>
               <a:t>B</a:t>
             </a:r>
@@ -19815,8 +19484,7 @@
                   <a:srgbClr val="9AA1AB"/>
                 </a:solidFill>
                 <a:latin typeface="Calibri" pitchFamily="34" charset="0"/>
-                <a:ea typeface="Calibri" pitchFamily="34" charset="-122"/>
-                <a:cs typeface="Calibri" pitchFamily="34" charset="-120"/>
+                <a:cs typeface="Amiri" pitchFamily="2" charset="-78"/>
               </a:rPr>
               <a:t>the job has no value</a:t>
             </a:r>
@@ -19879,8 +19547,7 @@
                   <a:srgbClr val="1B3B6F"/>
                 </a:solidFill>
                 <a:latin typeface="Calibri" pitchFamily="34" charset="0"/>
-                <a:ea typeface="Calibri" pitchFamily="34" charset="-122"/>
-                <a:cs typeface="Calibri" pitchFamily="34" charset="-120"/>
+                <a:cs typeface="Amiri" pitchFamily="2" charset="-78"/>
               </a:rPr>
               <a:t>C</a:t>
             </a:r>
@@ -19918,8 +19585,7 @@
                   <a:srgbClr val="9AA1AB"/>
                 </a:solidFill>
                 <a:latin typeface="Calibri" pitchFamily="34" charset="0"/>
-                <a:ea typeface="Calibri" pitchFamily="34" charset="-122"/>
-                <a:cs typeface="Calibri" pitchFamily="34" charset="-120"/>
+                <a:cs typeface="Amiri" pitchFamily="2" charset="-78"/>
               </a:rPr>
               <a:t>the subject is easy</a:t>
             </a:r>
@@ -19956,9 +19622,8 @@
                 <a:solidFill>
                   <a:srgbClr val="8A6D1E"/>
                 </a:solidFill>
-                <a:latin typeface="Amiri" pitchFamily="34" charset="0"/>
-                <a:ea typeface="Amiri" pitchFamily="34" charset="-122"/>
-                <a:cs typeface="Amiri" pitchFamily="34" charset="-120"/>
+                <a:latin typeface="Amiri" pitchFamily="2" charset="-78"/>
+                <a:cs typeface="Amiri" pitchFamily="2" charset="-78"/>
               </a:rPr>
               <a:t>الطَّرِيقَ طَوِيلٌ</a:t>
             </a:r>
@@ -20055,8 +19720,7 @@
                   <a:srgbClr val="FFFFFF"/>
                 </a:solidFill>
                 <a:latin typeface="Calibri" pitchFamily="34" charset="0"/>
-                <a:ea typeface="Calibri" pitchFamily="34" charset="-122"/>
-                <a:cs typeface="Calibri" pitchFamily="34" charset="-120"/>
+                <a:cs typeface="Amiri" pitchFamily="2" charset="-78"/>
               </a:rPr>
               <a:t>3</a:t>
             </a:r>
@@ -20094,8 +19758,7 @@
                   <a:srgbClr val="1B3B6F"/>
                 </a:solidFill>
                 <a:latin typeface="Calibri" pitchFamily="34" charset="0"/>
-                <a:ea typeface="Calibri" pitchFamily="34" charset="-122"/>
-                <a:cs typeface="Calibri" pitchFamily="34" charset="-120"/>
+                <a:cs typeface="Amiri" pitchFamily="2" charset="-78"/>
               </a:rPr>
               <a:t>What is her attitude?</a:t>
             </a:r>
@@ -20158,8 +19821,7 @@
                   <a:srgbClr val="1B3B6F"/>
                 </a:solidFill>
                 <a:latin typeface="Calibri" pitchFamily="34" charset="0"/>
-                <a:ea typeface="Calibri" pitchFamily="34" charset="-122"/>
-                <a:cs typeface="Calibri" pitchFamily="34" charset="-120"/>
+                <a:cs typeface="Amiri" pitchFamily="2" charset="-78"/>
               </a:rPr>
               <a:t>A</a:t>
             </a:r>
@@ -20197,8 +19859,7 @@
                   <a:srgbClr val="9AA1AB"/>
                 </a:solidFill>
                 <a:latin typeface="Calibri" pitchFamily="34" charset="0"/>
-                <a:ea typeface="Calibri" pitchFamily="34" charset="-122"/>
-                <a:cs typeface="Calibri" pitchFamily="34" charset="-120"/>
+                <a:cs typeface="Amiri" pitchFamily="2" charset="-78"/>
               </a:rPr>
               <a:t>indifferent</a:t>
             </a:r>
@@ -20288,8 +19949,7 @@
                   <a:srgbClr val="FFFFFF"/>
                 </a:solidFill>
                 <a:latin typeface="Calibri" pitchFamily="34" charset="0"/>
-                <a:ea typeface="Calibri" pitchFamily="34" charset="-122"/>
-                <a:cs typeface="Calibri" pitchFamily="34" charset="-120"/>
+                <a:cs typeface="Amiri" pitchFamily="2" charset="-78"/>
               </a:rPr>
               <a:t>B</a:t>
             </a:r>
@@ -20327,8 +19987,7 @@
                   <a:srgbClr val="1F2A37"/>
                 </a:solidFill>
                 <a:latin typeface="Calibri" pitchFamily="34" charset="0"/>
-                <a:ea typeface="Calibri" pitchFamily="34" charset="-122"/>
-                <a:cs typeface="Calibri" pitchFamily="34" charset="-120"/>
+                <a:cs typeface="Amiri" pitchFamily="2" charset="-78"/>
               </a:rPr>
               <a:t>determined</a:t>
             </a:r>
@@ -20391,8 +20050,7 @@
                   <a:srgbClr val="1B3B6F"/>
                 </a:solidFill>
                 <a:latin typeface="Calibri" pitchFamily="34" charset="0"/>
-                <a:ea typeface="Calibri" pitchFamily="34" charset="-122"/>
-                <a:cs typeface="Calibri" pitchFamily="34" charset="-120"/>
+                <a:cs typeface="Amiri" pitchFamily="2" charset="-78"/>
               </a:rPr>
               <a:t>C</a:t>
             </a:r>
@@ -20430,8 +20088,7 @@
                   <a:srgbClr val="9AA1AB"/>
                 </a:solidFill>
                 <a:latin typeface="Calibri" pitchFamily="34" charset="0"/>
-                <a:ea typeface="Calibri" pitchFamily="34" charset="-122"/>
-                <a:cs typeface="Calibri" pitchFamily="34" charset="-120"/>
+                <a:cs typeface="Amiri" pitchFamily="2" charset="-78"/>
               </a:rPr>
               <a:t>uncertain and unwilling</a:t>
             </a:r>
@@ -20468,9 +20125,8 @@
                 <a:solidFill>
                   <a:srgbClr val="8A6D1E"/>
                 </a:solidFill>
-                <a:latin typeface="Amiri" pitchFamily="34" charset="0"/>
-                <a:ea typeface="Amiri" pitchFamily="34" charset="-122"/>
-                <a:cs typeface="Amiri" pitchFamily="34" charset="-120"/>
+                <a:latin typeface="Amiri" pitchFamily="2" charset="-78"/>
+                <a:cs typeface="Amiri" pitchFamily="2" charset="-78"/>
               </a:rPr>
               <a:t>مُسْتَعِدَّةٌ لِلْعَمَلِ بِجِدٍّ</a:t>
             </a:r>
@@ -20567,8 +20223,7 @@
                   <a:srgbClr val="FFFFFF"/>
                 </a:solidFill>
                 <a:latin typeface="Calibri" pitchFamily="34" charset="0"/>
-                <a:ea typeface="Calibri" pitchFamily="34" charset="-122"/>
-                <a:cs typeface="Calibri" pitchFamily="34" charset="-120"/>
+                <a:cs typeface="Amiri" pitchFamily="2" charset="-78"/>
               </a:rPr>
               <a:t>4</a:t>
             </a:r>
@@ -20606,8 +20261,7 @@
                   <a:srgbClr val="1B3B6F"/>
                 </a:solidFill>
                 <a:latin typeface="Calibri" pitchFamily="34" charset="0"/>
-                <a:ea typeface="Calibri" pitchFamily="34" charset="-122"/>
-                <a:cs typeface="Calibri" pitchFamily="34" charset="-120"/>
+                <a:cs typeface="Amiri" pitchFamily="2" charset="-78"/>
               </a:rPr>
               <a:t>Which connector introduces concession?</a:t>
             </a:r>
@@ -20697,8 +20351,7 @@
                   <a:srgbClr val="FFFFFF"/>
                 </a:solidFill>
                 <a:latin typeface="Calibri" pitchFamily="34" charset="0"/>
-                <a:ea typeface="Calibri" pitchFamily="34" charset="-122"/>
-                <a:cs typeface="Calibri" pitchFamily="34" charset="-120"/>
+                <a:cs typeface="Amiri" pitchFamily="2" charset="-78"/>
               </a:rPr>
               <a:t>A</a:t>
             </a:r>
@@ -20735,9 +20388,8 @@
                 <a:solidFill>
                   <a:srgbClr val="1F2A37"/>
                 </a:solidFill>
-                <a:latin typeface="Amiri" pitchFamily="34" charset="0"/>
-                <a:ea typeface="Amiri" pitchFamily="34" charset="-122"/>
-                <a:cs typeface="Amiri" pitchFamily="34" charset="-120"/>
+                <a:latin typeface="Amiri" pitchFamily="2" charset="-78"/>
+                <a:cs typeface="Amiri" pitchFamily="2" charset="-78"/>
               </a:rPr>
               <a:t>عَلَى الرَّغْمِ مِنْ أَنَّ</a:t>
             </a:r>
@@ -20800,8 +20452,7 @@
                   <a:srgbClr val="1B3B6F"/>
                 </a:solidFill>
                 <a:latin typeface="Calibri" pitchFamily="34" charset="0"/>
-                <a:ea typeface="Calibri" pitchFamily="34" charset="-122"/>
-                <a:cs typeface="Calibri" pitchFamily="34" charset="-120"/>
+                <a:cs typeface="Amiri" pitchFamily="2" charset="-78"/>
               </a:rPr>
               <a:t>B</a:t>
             </a:r>
@@ -20838,9 +20489,8 @@
                 <a:solidFill>
                   <a:srgbClr val="9AA1AB"/>
                 </a:solidFill>
-                <a:latin typeface="Amiri" pitchFamily="34" charset="0"/>
-                <a:ea typeface="Amiri" pitchFamily="34" charset="-122"/>
-                <a:cs typeface="Amiri" pitchFamily="34" charset="-120"/>
+                <a:latin typeface="Amiri" pitchFamily="2" charset="-78"/>
+                <a:cs typeface="Amiri" pitchFamily="2" charset="-78"/>
               </a:rPr>
               <a:t>ثُمَّ</a:t>
             </a:r>
@@ -20903,8 +20553,7 @@
                   <a:srgbClr val="1B3B6F"/>
                 </a:solidFill>
                 <a:latin typeface="Calibri" pitchFamily="34" charset="0"/>
-                <a:ea typeface="Calibri" pitchFamily="34" charset="-122"/>
-                <a:cs typeface="Calibri" pitchFamily="34" charset="-120"/>
+                <a:cs typeface="Amiri" pitchFamily="2" charset="-78"/>
               </a:rPr>
               <a:t>C</a:t>
             </a:r>
@@ -20941,9 +20590,8 @@
                 <a:solidFill>
                   <a:srgbClr val="9AA1AB"/>
                 </a:solidFill>
-                <a:latin typeface="Amiri" pitchFamily="34" charset="0"/>
-                <a:ea typeface="Amiri" pitchFamily="34" charset="-122"/>
-                <a:cs typeface="Amiri" pitchFamily="34" charset="-120"/>
+                <a:latin typeface="Amiri" pitchFamily="2" charset="-78"/>
+                <a:cs typeface="Amiri" pitchFamily="2" charset="-78"/>
               </a:rPr>
               <a:t>لِكَيْ</a:t>
             </a:r>
@@ -20981,8 +20629,7 @@
                   <a:srgbClr val="8A6D1E"/>
                 </a:solidFill>
                 <a:latin typeface="Calibri" pitchFamily="34" charset="0"/>
-                <a:ea typeface="Calibri" pitchFamily="34" charset="-122"/>
-                <a:cs typeface="Calibri" pitchFamily="34" charset="-120"/>
+                <a:cs typeface="Amiri" pitchFamily="2" charset="-78"/>
               </a:rPr>
               <a:t>although</a:t>
             </a:r>
@@ -21079,8 +20726,7 @@
                   <a:srgbClr val="FFFFFF"/>
                 </a:solidFill>
                 <a:latin typeface="Calibri" pitchFamily="34" charset="0"/>
-                <a:ea typeface="Calibri" pitchFamily="34" charset="-122"/>
-                <a:cs typeface="Calibri" pitchFamily="34" charset="-120"/>
+                <a:cs typeface="Amiri" pitchFamily="2" charset="-78"/>
               </a:rPr>
               <a:t>5</a:t>
             </a:r>
@@ -21118,8 +20764,7 @@
                   <a:srgbClr val="1B3B6F"/>
                 </a:solidFill>
                 <a:latin typeface="Calibri" pitchFamily="34" charset="0"/>
-                <a:ea typeface="Calibri" pitchFamily="34" charset="-122"/>
-                <a:cs typeface="Calibri" pitchFamily="34" charset="-120"/>
+                <a:cs typeface="Amiri" pitchFamily="2" charset="-78"/>
               </a:rPr>
               <a:t>What is the text type?</a:t>
             </a:r>
@@ -21182,8 +20827,7 @@
                   <a:srgbClr val="1B3B6F"/>
                 </a:solidFill>
                 <a:latin typeface="Calibri" pitchFamily="34" charset="0"/>
-                <a:ea typeface="Calibri" pitchFamily="34" charset="-122"/>
-                <a:cs typeface="Calibri" pitchFamily="34" charset="-120"/>
+                <a:cs typeface="Amiri" pitchFamily="2" charset="-78"/>
               </a:rPr>
               <a:t>A</a:t>
             </a:r>
@@ -21221,8 +20865,7 @@
                   <a:srgbClr val="9AA1AB"/>
                 </a:solidFill>
                 <a:latin typeface="Calibri" pitchFamily="34" charset="0"/>
-                <a:ea typeface="Calibri" pitchFamily="34" charset="-122"/>
-                <a:cs typeface="Calibri" pitchFamily="34" charset="-120"/>
+                <a:cs typeface="Amiri" pitchFamily="2" charset="-78"/>
               </a:rPr>
               <a:t>a shopping list</a:t>
             </a:r>
@@ -21285,8 +20928,7 @@
                   <a:srgbClr val="1B3B6F"/>
                 </a:solidFill>
                 <a:latin typeface="Calibri" pitchFamily="34" charset="0"/>
-                <a:ea typeface="Calibri" pitchFamily="34" charset="-122"/>
-                <a:cs typeface="Calibri" pitchFamily="34" charset="-120"/>
+                <a:cs typeface="Amiri" pitchFamily="2" charset="-78"/>
               </a:rPr>
               <a:t>B</a:t>
             </a:r>
@@ -21324,8 +20966,7 @@
                   <a:srgbClr val="9AA1AB"/>
                 </a:solidFill>
                 <a:latin typeface="Calibri" pitchFamily="34" charset="0"/>
-                <a:ea typeface="Calibri" pitchFamily="34" charset="-122"/>
-                <a:cs typeface="Calibri" pitchFamily="34" charset="-120"/>
+                <a:cs typeface="Amiri" pitchFamily="2" charset="-78"/>
               </a:rPr>
               <a:t>a weather report</a:t>
             </a:r>
@@ -21415,8 +21056,7 @@
                   <a:srgbClr val="FFFFFF"/>
                 </a:solidFill>
                 <a:latin typeface="Calibri" pitchFamily="34" charset="0"/>
-                <a:ea typeface="Calibri" pitchFamily="34" charset="-122"/>
-                <a:cs typeface="Calibri" pitchFamily="34" charset="-120"/>
+                <a:cs typeface="Amiri" pitchFamily="2" charset="-78"/>
               </a:rPr>
               <a:t>C</a:t>
             </a:r>
@@ -21454,8 +21094,7 @@
                   <a:srgbClr val="1F2A37"/>
                 </a:solidFill>
                 <a:latin typeface="Calibri" pitchFamily="34" charset="0"/>
-                <a:ea typeface="Calibri" pitchFamily="34" charset="-122"/>
-                <a:cs typeface="Calibri" pitchFamily="34" charset="-120"/>
+                <a:cs typeface="Amiri" pitchFamily="2" charset="-78"/>
               </a:rPr>
               <a:t>a career-plan article</a:t>
             </a:r>
@@ -21492,9 +21131,8 @@
                 <a:solidFill>
                   <a:srgbClr val="8A6D1E"/>
                 </a:solidFill>
-                <a:latin typeface="Amiri" pitchFamily="34" charset="0"/>
-                <a:ea typeface="Amiri" pitchFamily="34" charset="-122"/>
-                <a:cs typeface="Amiri" pitchFamily="34" charset="-120"/>
+                <a:latin typeface="Amiri" pitchFamily="2" charset="-78"/>
+                <a:cs typeface="Amiri" pitchFamily="2" charset="-78"/>
               </a:rPr>
               <a:t>أَطْمَحُ … سَأَدْرُسُ …</a:t>
             </a:r>
@@ -21532,8 +21170,7 @@
                   <a:srgbClr val="8A93A0"/>
                 </a:solidFill>
                 <a:latin typeface="Calibri" pitchFamily="34" charset="0"/>
-                <a:ea typeface="Calibri" pitchFamily="34" charset="-122"/>
-                <a:cs typeface="Calibri" pitchFamily="34" charset="-120"/>
+                <a:cs typeface="Amiri" pitchFamily="2" charset="-78"/>
               </a:rPr>
               <a:t>16 / 23</a:t>
             </a:r>
@@ -21627,9 +21264,8 @@
                 <a:solidFill>
                   <a:srgbClr val="D4AF37"/>
                 </a:solidFill>
-                <a:latin typeface="Amiri" pitchFamily="34" charset="0"/>
-                <a:ea typeface="Amiri" pitchFamily="34" charset="-122"/>
-                <a:cs typeface="Amiri" pitchFamily="34" charset="-120"/>
+                <a:latin typeface="Amiri" pitchFamily="2" charset="-78"/>
+                <a:cs typeface="Amiri" pitchFamily="2" charset="-78"/>
               </a:rPr>
               <a:t>م</a:t>
             </a:r>
@@ -21667,8 +21303,7 @@
                   <a:srgbClr val="1B3B6F"/>
                 </a:solidFill>
                 <a:latin typeface="Cambria" pitchFamily="34" charset="0"/>
-                <a:ea typeface="Cambria" pitchFamily="34" charset="-122"/>
-                <a:cs typeface="Cambria" pitchFamily="34" charset="-120"/>
+                <a:cs typeface="Amiri" pitchFamily="2" charset="-78"/>
               </a:rPr>
               <a:t>Al Madina Online School</a:t>
             </a:r>
@@ -21706,8 +21341,7 @@
                   <a:srgbClr val="8A6D1E"/>
                 </a:solidFill>
                 <a:latin typeface="Calibri" pitchFamily="34" charset="0"/>
-                <a:ea typeface="Calibri" pitchFamily="34" charset="-122"/>
-                <a:cs typeface="Calibri" pitchFamily="34" charset="-120"/>
+                <a:cs typeface="Amiri" pitchFamily="2" charset="-78"/>
               </a:rPr>
               <a:t>ARABIC DEPARTMENT · MIFTAH ARABIC · IGCSE 0544</a:t>
             </a:r>
@@ -21772,8 +21406,7 @@
                   <a:srgbClr val="FFFFFF"/>
                 </a:solidFill>
                 <a:latin typeface="Calibri" pitchFamily="34" charset="0"/>
-                <a:ea typeface="Calibri" pitchFamily="34" charset="-122"/>
-                <a:cs typeface="Calibri" pitchFamily="34" charset="-120"/>
+                <a:cs typeface="Amiri" pitchFamily="2" charset="-78"/>
               </a:rPr>
               <a:t>D3-L12 · D3 Assessment</a:t>
             </a:r>
@@ -21838,8 +21471,7 @@
                   <a:srgbClr val="FFFFFF"/>
                 </a:solidFill>
                 <a:latin typeface="Calibri" pitchFamily="34" charset="0"/>
-                <a:ea typeface="Calibri" pitchFamily="34" charset="-122"/>
-                <a:cs typeface="Calibri" pitchFamily="34" charset="-120"/>
+                <a:cs typeface="Amiri" pitchFamily="2" charset="-78"/>
               </a:rPr>
               <a:t>YOU DO · 5 MIN</a:t>
             </a:r>
@@ -21877,8 +21509,7 @@
                   <a:srgbClr val="1E6B52"/>
                 </a:solidFill>
                 <a:latin typeface="Calibri" pitchFamily="34" charset="0"/>
-                <a:ea typeface="Calibri" pitchFamily="34" charset="-122"/>
-                <a:cs typeface="Calibri" pitchFamily="34" charset="-120"/>
+                <a:cs typeface="Amiri" pitchFamily="2" charset="-78"/>
               </a:rPr>
               <a:t>WRITING · QUESTION 1 · APPLICATION PROFILE · 5 MARKS (WEBSITE)</a:t>
             </a:r>
@@ -21916,8 +21547,7 @@
                   <a:srgbClr val="1B3B6F"/>
                 </a:solidFill>
                 <a:latin typeface="Cambria" pitchFamily="34" charset="0"/>
-                <a:ea typeface="Cambria" pitchFamily="34" charset="-122"/>
-                <a:cs typeface="Cambria" pitchFamily="34" charset="-120"/>
+                <a:cs typeface="Amiri" pitchFamily="2" charset="-78"/>
               </a:rPr>
               <a:t>Complete the application profile</a:t>
             </a:r>
@@ -21954,9 +21584,8 @@
                 <a:solidFill>
                   <a:srgbClr val="8A6D1E"/>
                 </a:solidFill>
-                <a:latin typeface="Amiri" pitchFamily="34" charset="0"/>
-                <a:ea typeface="Amiri" pitchFamily="34" charset="-122"/>
-                <a:cs typeface="Amiri" pitchFamily="34" charset="-120"/>
+                <a:latin typeface="Amiri" pitchFamily="2" charset="-78"/>
+                <a:cs typeface="Amiri" pitchFamily="2" charset="-78"/>
               </a:rPr>
               <a:t>مِلَفُّ الطَّلَبِ</a:t>
             </a:r>
@@ -21994,8 +21623,7 @@
                   <a:srgbClr val="8A93A0"/>
                 </a:solidFill>
                 <a:latin typeface="Calibri" pitchFamily="34" charset="0"/>
-                <a:ea typeface="Calibri" pitchFamily="34" charset="-122"/>
-                <a:cs typeface="Calibri" pitchFamily="34" charset="-120"/>
+                <a:cs typeface="Amiri" pitchFamily="2" charset="-78"/>
               </a:rPr>
               <a:t>Miftah Arabic · Development D3 · Work and Careers · D3-L12</a:t>
             </a:r>
@@ -22058,8 +21686,7 @@
                   <a:srgbClr val="FFFFFF"/>
                 </a:solidFill>
                 <a:latin typeface="Calibri" pitchFamily="34" charset="0"/>
-                <a:ea typeface="Calibri" pitchFamily="34" charset="-122"/>
-                <a:cs typeface="Calibri" pitchFamily="34" charset="-120"/>
+                <a:cs typeface="Amiri" pitchFamily="2" charset="-78"/>
               </a:rPr>
               <a:t>Your answer in Arabic</a:t>
             </a:r>
@@ -22097,8 +21724,7 @@
                   <a:srgbClr val="FFFFFF"/>
                 </a:solidFill>
                 <a:latin typeface="Calibri" pitchFamily="34" charset="0"/>
-                <a:ea typeface="Calibri" pitchFamily="34" charset="-122"/>
-                <a:cs typeface="Calibri" pitchFamily="34" charset="-120"/>
+                <a:cs typeface="Amiri" pitchFamily="2" charset="-78"/>
               </a:rPr>
               <a:t>Arabic label</a:t>
             </a:r>
@@ -22136,8 +21762,7 @@
                   <a:srgbClr val="FFFFFF"/>
                 </a:solidFill>
                 <a:latin typeface="Calibri" pitchFamily="34" charset="0"/>
-                <a:ea typeface="Calibri" pitchFamily="34" charset="-122"/>
-                <a:cs typeface="Calibri" pitchFamily="34" charset="-120"/>
+                <a:cs typeface="Amiri" pitchFamily="2" charset="-78"/>
               </a:rPr>
               <a:t>Field</a:t>
             </a:r>
@@ -22202,8 +21827,7 @@
                   <a:srgbClr val="5A6472"/>
                 </a:solidFill>
                 <a:latin typeface="Calibri" pitchFamily="34" charset="0"/>
-                <a:ea typeface="Calibri" pitchFamily="34" charset="-122"/>
-                <a:cs typeface="Calibri" pitchFamily="34" charset="-120"/>
+                <a:cs typeface="Amiri" pitchFamily="2" charset="-78"/>
               </a:rPr>
               <a:t>______________</a:t>
             </a:r>
@@ -22240,9 +21864,8 @@
                 <a:solidFill>
                   <a:srgbClr val="1B3B6F"/>
                 </a:solidFill>
-                <a:latin typeface="Amiri" pitchFamily="34" charset="0"/>
-                <a:ea typeface="Amiri" pitchFamily="34" charset="-122"/>
-                <a:cs typeface="Amiri" pitchFamily="34" charset="-120"/>
+                <a:latin typeface="Amiri" pitchFamily="2" charset="-78"/>
+                <a:cs typeface="Amiri" pitchFamily="2" charset="-78"/>
               </a:rPr>
               <a:t>الوَظِيفَةُ المُخْتَارَةُ</a:t>
             </a:r>
@@ -22280,8 +21903,7 @@
                   <a:srgbClr val="5A6472"/>
                 </a:solidFill>
                 <a:latin typeface="Calibri" pitchFamily="34" charset="0"/>
-                <a:ea typeface="Calibri" pitchFamily="34" charset="-122"/>
-                <a:cs typeface="Calibri" pitchFamily="34" charset="-120"/>
+                <a:cs typeface="Amiri" pitchFamily="2" charset="-78"/>
               </a:rPr>
               <a:t>1 · Chosen job</a:t>
             </a:r>
@@ -22346,8 +21968,7 @@
                   <a:srgbClr val="FFFFFF"/>
                 </a:solidFill>
                 <a:latin typeface="Calibri" pitchFamily="34" charset="0"/>
-                <a:ea typeface="Calibri" pitchFamily="34" charset="-122"/>
-                <a:cs typeface="Calibri" pitchFamily="34" charset="-120"/>
+                <a:cs typeface="Amiri" pitchFamily="2" charset="-78"/>
               </a:rPr>
               <a:t>CORE</a:t>
             </a:r>
@@ -22412,8 +22033,7 @@
                   <a:srgbClr val="5A6472"/>
                 </a:solidFill>
                 <a:latin typeface="Calibri" pitchFamily="34" charset="0"/>
-                <a:ea typeface="Calibri" pitchFamily="34" charset="-122"/>
-                <a:cs typeface="Calibri" pitchFamily="34" charset="-120"/>
+                <a:cs typeface="Amiri" pitchFamily="2" charset="-78"/>
               </a:rPr>
               <a:t>______________</a:t>
             </a:r>
@@ -22450,9 +22070,8 @@
                 <a:solidFill>
                   <a:srgbClr val="1B3B6F"/>
                 </a:solidFill>
-                <a:latin typeface="Amiri" pitchFamily="34" charset="0"/>
-                <a:ea typeface="Amiri" pitchFamily="34" charset="-122"/>
-                <a:cs typeface="Amiri" pitchFamily="34" charset="-120"/>
+                <a:latin typeface="Amiri" pitchFamily="2" charset="-78"/>
+                <a:cs typeface="Amiri" pitchFamily="2" charset="-78"/>
               </a:rPr>
               <a:t>مَهَارَتَانِ</a:t>
             </a:r>
@@ -22490,8 +22109,7 @@
                   <a:srgbClr val="5A6472"/>
                 </a:solidFill>
                 <a:latin typeface="Calibri" pitchFamily="34" charset="0"/>
-                <a:ea typeface="Calibri" pitchFamily="34" charset="-122"/>
-                <a:cs typeface="Calibri" pitchFamily="34" charset="-120"/>
+                <a:cs typeface="Amiri" pitchFamily="2" charset="-78"/>
               </a:rPr>
               <a:t>2 · Two skills</a:t>
             </a:r>
@@ -22556,8 +22174,7 @@
                   <a:srgbClr val="FFFFFF"/>
                 </a:solidFill>
                 <a:latin typeface="Calibri" pitchFamily="34" charset="0"/>
-                <a:ea typeface="Calibri" pitchFamily="34" charset="-122"/>
-                <a:cs typeface="Calibri" pitchFamily="34" charset="-120"/>
+                <a:cs typeface="Amiri" pitchFamily="2" charset="-78"/>
               </a:rPr>
               <a:t>CORE</a:t>
             </a:r>
@@ -22622,8 +22239,7 @@
                   <a:srgbClr val="5A6472"/>
                 </a:solidFill>
                 <a:latin typeface="Calibri" pitchFamily="34" charset="0"/>
-                <a:ea typeface="Calibri" pitchFamily="34" charset="-122"/>
-                <a:cs typeface="Calibri" pitchFamily="34" charset="-120"/>
+                <a:cs typeface="Amiri" pitchFamily="2" charset="-78"/>
               </a:rPr>
               <a:t>______________</a:t>
             </a:r>
@@ -22660,9 +22276,8 @@
                 <a:solidFill>
                   <a:srgbClr val="1B3B6F"/>
                 </a:solidFill>
-                <a:latin typeface="Amiri" pitchFamily="34" charset="0"/>
-                <a:ea typeface="Amiri" pitchFamily="34" charset="-122"/>
-                <a:cs typeface="Amiri" pitchFamily="34" charset="-120"/>
+                <a:latin typeface="Amiri" pitchFamily="2" charset="-78"/>
+                <a:cs typeface="Amiri" pitchFamily="2" charset="-78"/>
               </a:rPr>
               <a:t>دَلِيلٌ عَلَى مَهَارَةٍ</a:t>
             </a:r>
@@ -22700,8 +22315,7 @@
                   <a:srgbClr val="5A6472"/>
                 </a:solidFill>
                 <a:latin typeface="Calibri" pitchFamily="34" charset="0"/>
-                <a:ea typeface="Calibri" pitchFamily="34" charset="-122"/>
-                <a:cs typeface="Calibri" pitchFamily="34" charset="-120"/>
+                <a:cs typeface="Amiri" pitchFamily="2" charset="-78"/>
               </a:rPr>
               <a:t>3 · Evidence for a skill</a:t>
             </a:r>
@@ -22766,8 +22380,7 @@
                   <a:srgbClr val="FFFFFF"/>
                 </a:solidFill>
                 <a:latin typeface="Calibri" pitchFamily="34" charset="0"/>
-                <a:ea typeface="Calibri" pitchFamily="34" charset="-122"/>
-                <a:cs typeface="Calibri" pitchFamily="34" charset="-120"/>
+                <a:cs typeface="Amiri" pitchFamily="2" charset="-78"/>
               </a:rPr>
               <a:t>CORE</a:t>
             </a:r>
@@ -22832,8 +22445,7 @@
                   <a:srgbClr val="5A6472"/>
                 </a:solidFill>
                 <a:latin typeface="Calibri" pitchFamily="34" charset="0"/>
-                <a:ea typeface="Calibri" pitchFamily="34" charset="-122"/>
-                <a:cs typeface="Calibri" pitchFamily="34" charset="-120"/>
+                <a:cs typeface="Amiri" pitchFamily="2" charset="-78"/>
               </a:rPr>
               <a:t>______________</a:t>
             </a:r>
@@ -22870,9 +22482,8 @@
                 <a:solidFill>
                   <a:srgbClr val="1B3B6F"/>
                 </a:solidFill>
-                <a:latin typeface="Amiri" pitchFamily="34" charset="0"/>
-                <a:ea typeface="Amiri" pitchFamily="34" charset="-122"/>
-                <a:cs typeface="Amiri" pitchFamily="34" charset="-120"/>
+                <a:latin typeface="Amiri" pitchFamily="2" charset="-78"/>
+                <a:cs typeface="Amiri" pitchFamily="2" charset="-78"/>
               </a:rPr>
               <a:t>خِبْرَةٌ سَابِقَةٌ</a:t>
             </a:r>
@@ -22910,8 +22521,7 @@
                   <a:srgbClr val="5A6472"/>
                 </a:solidFill>
                 <a:latin typeface="Calibri" pitchFamily="34" charset="0"/>
-                <a:ea typeface="Calibri" pitchFamily="34" charset="-122"/>
-                <a:cs typeface="Calibri" pitchFamily="34" charset="-120"/>
+                <a:cs typeface="Amiri" pitchFamily="2" charset="-78"/>
               </a:rPr>
               <a:t>4 · Previous experience</a:t>
             </a:r>
@@ -22976,8 +22586,7 @@
                   <a:srgbClr val="FFFFFF"/>
                 </a:solidFill>
                 <a:latin typeface="Calibri" pitchFamily="34" charset="0"/>
-                <a:ea typeface="Calibri" pitchFamily="34" charset="-122"/>
-                <a:cs typeface="Calibri" pitchFamily="34" charset="-120"/>
+                <a:cs typeface="Amiri" pitchFamily="2" charset="-78"/>
               </a:rPr>
               <a:t>CORE</a:t>
             </a:r>
@@ -23042,8 +22651,7 @@
                   <a:srgbClr val="5A6472"/>
                 </a:solidFill>
                 <a:latin typeface="Calibri" pitchFamily="34" charset="0"/>
-                <a:ea typeface="Calibri" pitchFamily="34" charset="-122"/>
-                <a:cs typeface="Calibri" pitchFamily="34" charset="-120"/>
+                <a:cs typeface="Amiri" pitchFamily="2" charset="-78"/>
               </a:rPr>
               <a:t>______________</a:t>
             </a:r>
@@ -23080,9 +22688,8 @@
                 <a:solidFill>
                   <a:srgbClr val="1B3B6F"/>
                 </a:solidFill>
-                <a:latin typeface="Amiri" pitchFamily="34" charset="0"/>
-                <a:ea typeface="Amiri" pitchFamily="34" charset="-122"/>
-                <a:cs typeface="Amiri" pitchFamily="34" charset="-120"/>
+                <a:latin typeface="Amiri" pitchFamily="2" charset="-78"/>
+                <a:cs typeface="Amiri" pitchFamily="2" charset="-78"/>
               </a:rPr>
               <a:t>خُطَّةٌ مُسْتَقْبَلِيَّةٌ</a:t>
             </a:r>
@@ -23120,8 +22727,7 @@
                   <a:srgbClr val="5A6472"/>
                 </a:solidFill>
                 <a:latin typeface="Calibri" pitchFamily="34" charset="0"/>
-                <a:ea typeface="Calibri" pitchFamily="34" charset="-122"/>
-                <a:cs typeface="Calibri" pitchFamily="34" charset="-120"/>
+                <a:cs typeface="Amiri" pitchFamily="2" charset="-78"/>
               </a:rPr>
               <a:t>5 · Future plan</a:t>
             </a:r>
@@ -23186,8 +22792,7 @@
                   <a:srgbClr val="FFFFFF"/>
                 </a:solidFill>
                 <a:latin typeface="Calibri" pitchFamily="34" charset="0"/>
-                <a:ea typeface="Calibri" pitchFamily="34" charset="-122"/>
-                <a:cs typeface="Calibri" pitchFamily="34" charset="-120"/>
+                <a:cs typeface="Amiri" pitchFamily="2" charset="-78"/>
               </a:rPr>
               <a:t>CORE</a:t>
             </a:r>
@@ -23225,8 +22830,7 @@
                   <a:srgbClr val="1B3B6F"/>
                 </a:solidFill>
                 <a:latin typeface="Calibri" pitchFamily="34" charset="0"/>
-                <a:ea typeface="Calibri" pitchFamily="34" charset="-122"/>
-                <a:cs typeface="Calibri" pitchFamily="34" charset="-120"/>
+                <a:cs typeface="Amiri" pitchFamily="2" charset="-78"/>
               </a:rPr>
               <a:t>Example: </a:t>
             </a:r>
@@ -23238,9 +22842,8 @@
                 <a:solidFill>
                   <a:srgbClr val="1B3B6F"/>
                 </a:solidFill>
-                <a:latin typeface="Amiri" pitchFamily="34" charset="0"/>
-                <a:ea typeface="Amiri" pitchFamily="34" charset="-122"/>
-                <a:cs typeface="Amiri" pitchFamily="34" charset="-120"/>
+                <a:latin typeface="Amiri" pitchFamily="2" charset="-78"/>
+                <a:cs typeface="Amiri" pitchFamily="2" charset="-78"/>
               </a:rPr>
               <a:t>مُبَرْمِجٌ</a:t>
             </a:r>
@@ -23253,8 +22856,7 @@
                   <a:srgbClr val="1B3B6F"/>
                 </a:solidFill>
                 <a:latin typeface="Calibri" pitchFamily="34" charset="0"/>
-                <a:ea typeface="Calibri" pitchFamily="34" charset="-122"/>
-                <a:cs typeface="Calibri" pitchFamily="34" charset="-120"/>
+                <a:cs typeface="Amiri" pitchFamily="2" charset="-78"/>
               </a:rPr>
               <a:t> · </a:t>
             </a:r>
@@ -23266,9 +22868,8 @@
                 <a:solidFill>
                   <a:srgbClr val="1B3B6F"/>
                 </a:solidFill>
-                <a:latin typeface="Amiri" pitchFamily="34" charset="0"/>
-                <a:ea typeface="Amiri" pitchFamily="34" charset="-122"/>
-                <a:cs typeface="Amiri" pitchFamily="34" charset="-120"/>
+                <a:latin typeface="Amiri" pitchFamily="2" charset="-78"/>
+                <a:cs typeface="Amiri" pitchFamily="2" charset="-78"/>
               </a:rPr>
               <a:t>حَلُّ المُشْكِلَاتِ وَالعَمَلُ الجَمَاعِيُّ</a:t>
             </a:r>
@@ -23281,8 +22882,7 @@
                   <a:srgbClr val="1B3B6F"/>
                 </a:solidFill>
                 <a:latin typeface="Calibri" pitchFamily="34" charset="0"/>
-                <a:ea typeface="Calibri" pitchFamily="34" charset="-122"/>
-                <a:cs typeface="Calibri" pitchFamily="34" charset="-120"/>
+                <a:cs typeface="Amiri" pitchFamily="2" charset="-78"/>
               </a:rPr>
               <a:t> · </a:t>
             </a:r>
@@ -23294,9 +22894,8 @@
                 <a:solidFill>
                   <a:srgbClr val="1B3B6F"/>
                 </a:solidFill>
-                <a:latin typeface="Amiri" pitchFamily="34" charset="0"/>
-                <a:ea typeface="Amiri" pitchFamily="34" charset="-122"/>
-                <a:cs typeface="Amiri" pitchFamily="34" charset="-120"/>
+                <a:latin typeface="Amiri" pitchFamily="2" charset="-78"/>
+                <a:cs typeface="Amiri" pitchFamily="2" charset="-78"/>
               </a:rPr>
               <a:t>قُدْتُ فَرِيقًا فِي مَشْرُوعٍ</a:t>
             </a:r>
@@ -23309,8 +22908,7 @@
                   <a:srgbClr val="1B3B6F"/>
                 </a:solidFill>
                 <a:latin typeface="Calibri" pitchFamily="34" charset="0"/>
-                <a:ea typeface="Calibri" pitchFamily="34" charset="-122"/>
-                <a:cs typeface="Calibri" pitchFamily="34" charset="-120"/>
+                <a:cs typeface="Amiri" pitchFamily="2" charset="-78"/>
               </a:rPr>
               <a:t> · </a:t>
             </a:r>
@@ -23322,9 +22920,8 @@
                 <a:solidFill>
                   <a:srgbClr val="1B3B6F"/>
                 </a:solidFill>
-                <a:latin typeface="Amiri" pitchFamily="34" charset="0"/>
-                <a:ea typeface="Amiri" pitchFamily="34" charset="-122"/>
-                <a:cs typeface="Amiri" pitchFamily="34" charset="-120"/>
+                <a:latin typeface="Amiri" pitchFamily="2" charset="-78"/>
+                <a:cs typeface="Amiri" pitchFamily="2" charset="-78"/>
               </a:rPr>
               <a:t>تَطَوَّعْتُ فِي المَكْتَبَةِ</a:t>
             </a:r>
@@ -23337,8 +22934,7 @@
                   <a:srgbClr val="1B3B6F"/>
                 </a:solidFill>
                 <a:latin typeface="Calibri" pitchFamily="34" charset="0"/>
-                <a:ea typeface="Calibri" pitchFamily="34" charset="-122"/>
-                <a:cs typeface="Calibri" pitchFamily="34" charset="-120"/>
+                <a:cs typeface="Amiri" pitchFamily="2" charset="-78"/>
               </a:rPr>
               <a:t> · </a:t>
             </a:r>
@@ -23350,9 +22946,8 @@
                 <a:solidFill>
                   <a:srgbClr val="1B3B6F"/>
                 </a:solidFill>
-                <a:latin typeface="Amiri" pitchFamily="34" charset="0"/>
-                <a:ea typeface="Amiri" pitchFamily="34" charset="-122"/>
-                <a:cs typeface="Amiri" pitchFamily="34" charset="-120"/>
+                <a:latin typeface="Amiri" pitchFamily="2" charset="-78"/>
+                <a:cs typeface="Amiri" pitchFamily="2" charset="-78"/>
               </a:rPr>
               <a:t>سَأَدْرُسُ عُلُومَ الحَاسُوبِ</a:t>
             </a:r>
@@ -23390,8 +22985,7 @@
                   <a:srgbClr val="8A93A0"/>
                 </a:solidFill>
                 <a:latin typeface="Calibri" pitchFamily="34" charset="0"/>
-                <a:ea typeface="Calibri" pitchFamily="34" charset="-122"/>
-                <a:cs typeface="Calibri" pitchFamily="34" charset="-120"/>
+                <a:cs typeface="Amiri" pitchFamily="2" charset="-78"/>
               </a:rPr>
               <a:t>17 / 23</a:t>
             </a:r>
@@ -23485,9 +23079,8 @@
                 <a:solidFill>
                   <a:srgbClr val="D4AF37"/>
                 </a:solidFill>
-                <a:latin typeface="Amiri" pitchFamily="34" charset="0"/>
-                <a:ea typeface="Amiri" pitchFamily="34" charset="-122"/>
-                <a:cs typeface="Amiri" pitchFamily="34" charset="-120"/>
+                <a:latin typeface="Amiri" pitchFamily="2" charset="-78"/>
+                <a:cs typeface="Amiri" pitchFamily="2" charset="-78"/>
               </a:rPr>
               <a:t>م</a:t>
             </a:r>
@@ -23525,8 +23118,7 @@
                   <a:srgbClr val="1B3B6F"/>
                 </a:solidFill>
                 <a:latin typeface="Cambria" pitchFamily="34" charset="0"/>
-                <a:ea typeface="Cambria" pitchFamily="34" charset="-122"/>
-                <a:cs typeface="Cambria" pitchFamily="34" charset="-120"/>
+                <a:cs typeface="Amiri" pitchFamily="2" charset="-78"/>
               </a:rPr>
               <a:t>Al Madina Online School</a:t>
             </a:r>
@@ -23564,8 +23156,7 @@
                   <a:srgbClr val="8A6D1E"/>
                 </a:solidFill>
                 <a:latin typeface="Calibri" pitchFamily="34" charset="0"/>
-                <a:ea typeface="Calibri" pitchFamily="34" charset="-122"/>
-                <a:cs typeface="Calibri" pitchFamily="34" charset="-120"/>
+                <a:cs typeface="Amiri" pitchFamily="2" charset="-78"/>
               </a:rPr>
               <a:t>ARABIC DEPARTMENT · MIFTAH ARABIC · IGCSE 0544</a:t>
             </a:r>
@@ -23630,8 +23221,7 @@
                   <a:srgbClr val="FFFFFF"/>
                 </a:solidFill>
                 <a:latin typeface="Calibri" pitchFamily="34" charset="0"/>
-                <a:ea typeface="Calibri" pitchFamily="34" charset="-122"/>
-                <a:cs typeface="Calibri" pitchFamily="34" charset="-120"/>
+                <a:cs typeface="Amiri" pitchFamily="2" charset="-78"/>
               </a:rPr>
               <a:t>D3-L12 · D3 Assessment</a:t>
             </a:r>
@@ -23696,8 +23286,7 @@
                   <a:srgbClr val="FFFFFF"/>
                 </a:solidFill>
                 <a:latin typeface="Calibri" pitchFamily="34" charset="0"/>
-                <a:ea typeface="Calibri" pitchFamily="34" charset="-122"/>
-                <a:cs typeface="Calibri" pitchFamily="34" charset="-120"/>
+                <a:cs typeface="Amiri" pitchFamily="2" charset="-78"/>
               </a:rPr>
               <a:t>YOU DO · 13 MIN</a:t>
             </a:r>
@@ -23735,8 +23324,7 @@
                   <a:srgbClr val="1E6B52"/>
                 </a:solidFill>
                 <a:latin typeface="Calibri" pitchFamily="34" charset="0"/>
-                <a:ea typeface="Calibri" pitchFamily="34" charset="-122"/>
-                <a:cs typeface="Calibri" pitchFamily="34" charset="-120"/>
+                <a:cs typeface="Amiri" pitchFamily="2" charset="-78"/>
               </a:rPr>
               <a:t>WRITING · QUESTION 2 · 120–140 WORDS · 15 MARKS (WEBSITE)</a:t>
             </a:r>
@@ -23774,8 +23362,7 @@
                   <a:srgbClr val="1B3B6F"/>
                 </a:solidFill>
                 <a:latin typeface="Cambria" pitchFamily="34" charset="0"/>
-                <a:ea typeface="Cambria" pitchFamily="34" charset="-122"/>
-                <a:cs typeface="Cambria" pitchFamily="34" charset="-120"/>
+                <a:cs typeface="Amiri" pitchFamily="2" charset="-78"/>
               </a:rPr>
               <a:t>Career article or formal email</a:t>
             </a:r>
@@ -23812,9 +23399,8 @@
                 <a:solidFill>
                   <a:srgbClr val="8A6D1E"/>
                 </a:solidFill>
-                <a:latin typeface="Amiri" pitchFamily="34" charset="0"/>
-                <a:ea typeface="Amiri" pitchFamily="34" charset="-122"/>
-                <a:cs typeface="Amiri" pitchFamily="34" charset="-120"/>
+                <a:latin typeface="Amiri" pitchFamily="2" charset="-78"/>
+                <a:cs typeface="Amiri" pitchFamily="2" charset="-78"/>
               </a:rPr>
               <a:t>مَقَالٌ أَوْ رِسَالَةٌ رَسْمِيَّةٌ</a:t>
             </a:r>
@@ -23852,8 +23438,7 @@
                   <a:srgbClr val="8A93A0"/>
                 </a:solidFill>
                 <a:latin typeface="Calibri" pitchFamily="34" charset="0"/>
-                <a:ea typeface="Calibri" pitchFamily="34" charset="-122"/>
-                <a:cs typeface="Calibri" pitchFamily="34" charset="-120"/>
+                <a:cs typeface="Amiri" pitchFamily="2" charset="-78"/>
               </a:rPr>
               <a:t>Miftah Arabic · Development D3 · Work and Careers · D3-L12</a:t>
             </a:r>
@@ -23916,8 +23501,7 @@
                   <a:srgbClr val="FFFFFF"/>
                 </a:solidFill>
                 <a:latin typeface="Calibri" pitchFamily="34" charset="0"/>
-                <a:ea typeface="Calibri" pitchFamily="34" charset="-122"/>
-                <a:cs typeface="Calibri" pitchFamily="34" charset="-120"/>
+                <a:cs typeface="Amiri" pitchFamily="2" charset="-78"/>
               </a:rPr>
               <a:t>Marked for (website)</a:t>
             </a:r>
@@ -23955,8 +23539,7 @@
                   <a:srgbClr val="FFFFFF"/>
                 </a:solidFill>
                 <a:latin typeface="Calibri" pitchFamily="34" charset="0"/>
-                <a:ea typeface="Calibri" pitchFamily="34" charset="-122"/>
-                <a:cs typeface="Calibri" pitchFamily="34" charset="-120"/>
+                <a:cs typeface="Amiri" pitchFamily="2" charset="-78"/>
               </a:rPr>
               <a:t>Include all five points</a:t>
             </a:r>
@@ -24021,8 +23604,7 @@
                   <a:srgbClr val="5A6472"/>
                 </a:solidFill>
                 <a:latin typeface="Calibri" pitchFamily="34" charset="0"/>
-                <a:ea typeface="Calibri" pitchFamily="34" charset="-122"/>
-                <a:cs typeface="Calibri" pitchFamily="34" charset="-120"/>
+                <a:cs typeface="Amiri" pitchFamily="2" charset="-78"/>
               </a:rPr>
               <a:t>Task /5 — all points developed</a:t>
             </a:r>
@@ -24060,8 +23642,7 @@
                   <a:srgbClr val="5A6472"/>
                 </a:solidFill>
                 <a:latin typeface="Calibri" pitchFamily="34" charset="0"/>
-                <a:ea typeface="Calibri" pitchFamily="34" charset="-122"/>
-                <a:cs typeface="Calibri" pitchFamily="34" charset="-120"/>
+                <a:cs typeface="Amiri" pitchFamily="2" charset="-78"/>
               </a:rPr>
               <a:t>1 · Your career choice and why</a:t>
             </a:r>
@@ -24126,8 +23707,7 @@
                   <a:srgbClr val="FFFFFF"/>
                 </a:solidFill>
                 <a:latin typeface="Calibri" pitchFamily="34" charset="0"/>
-                <a:ea typeface="Calibri" pitchFamily="34" charset="-122"/>
-                <a:cs typeface="Calibri" pitchFamily="34" charset="-120"/>
+                <a:cs typeface="Amiri" pitchFamily="2" charset="-78"/>
               </a:rPr>
               <a:t>CORE</a:t>
             </a:r>
@@ -24192,8 +23772,7 @@
                   <a:srgbClr val="5A6472"/>
                 </a:solidFill>
                 <a:latin typeface="Calibri" pitchFamily="34" charset="0"/>
-                <a:ea typeface="Calibri" pitchFamily="34" charset="-122"/>
-                <a:cs typeface="Calibri" pitchFamily="34" charset="-120"/>
+                <a:cs typeface="Amiri" pitchFamily="2" charset="-78"/>
               </a:rPr>
               <a:t>Range /5 — varied grammar and vocabulary</a:t>
             </a:r>
@@ -24231,8 +23810,7 @@
                   <a:srgbClr val="5A6472"/>
                 </a:solidFill>
                 <a:latin typeface="Calibri" pitchFamily="34" charset="0"/>
-                <a:ea typeface="Calibri" pitchFamily="34" charset="-122"/>
-                <a:cs typeface="Calibri" pitchFamily="34" charset="-120"/>
+                <a:cs typeface="Amiri" pitchFamily="2" charset="-78"/>
               </a:rPr>
               <a:t>2 · The skills it needs</a:t>
             </a:r>
@@ -24297,8 +23875,7 @@
                   <a:srgbClr val="FFFFFF"/>
                 </a:solidFill>
                 <a:latin typeface="Calibri" pitchFamily="34" charset="0"/>
-                <a:ea typeface="Calibri" pitchFamily="34" charset="-122"/>
-                <a:cs typeface="Calibri" pitchFamily="34" charset="-120"/>
+                <a:cs typeface="Amiri" pitchFamily="2" charset="-78"/>
               </a:rPr>
               <a:t>CORE</a:t>
             </a:r>
@@ -24363,8 +23940,7 @@
                   <a:srgbClr val="5A6472"/>
                 </a:solidFill>
                 <a:latin typeface="Calibri" pitchFamily="34" charset="0"/>
-                <a:ea typeface="Calibri" pitchFamily="34" charset="-122"/>
-                <a:cs typeface="Calibri" pitchFamily="34" charset="-120"/>
+                <a:cs typeface="Amiri" pitchFamily="2" charset="-78"/>
               </a:rPr>
               <a:t>Accuracy /5 — agreement, patterns, spelling</a:t>
             </a:r>
@@ -24402,8 +23978,7 @@
                   <a:srgbClr val="5A6472"/>
                 </a:solidFill>
                 <a:latin typeface="Calibri" pitchFamily="34" charset="0"/>
-                <a:ea typeface="Calibri" pitchFamily="34" charset="-122"/>
-                <a:cs typeface="Calibri" pitchFamily="34" charset="-120"/>
+                <a:cs typeface="Amiri" pitchFamily="2" charset="-78"/>
               </a:rPr>
               <a:t>3 · Evidence that you have them</a:t>
             </a:r>
@@ -24468,8 +24043,7 @@
                   <a:srgbClr val="FFFFFF"/>
                 </a:solidFill>
                 <a:latin typeface="Calibri" pitchFamily="34" charset="0"/>
-                <a:ea typeface="Calibri" pitchFamily="34" charset="-122"/>
-                <a:cs typeface="Calibri" pitchFamily="34" charset="-120"/>
+                <a:cs typeface="Amiri" pitchFamily="2" charset="-78"/>
               </a:rPr>
               <a:t>CORE</a:t>
             </a:r>
@@ -24534,8 +24108,7 @@
                   <a:srgbClr val="5A6472"/>
                 </a:solidFill>
                 <a:latin typeface="Calibri" pitchFamily="34" charset="0"/>
-                <a:ea typeface="Calibri" pitchFamily="34" charset="-122"/>
-                <a:cs typeface="Calibri" pitchFamily="34" charset="-120"/>
+                <a:cs typeface="Amiri" pitchFamily="2" charset="-78"/>
               </a:rPr>
               <a:t>sa- / sawfa · li-kay · idhā</a:t>
             </a:r>
@@ -24573,8 +24146,7 @@
                   <a:srgbClr val="5A6472"/>
                 </a:solidFill>
                 <a:latin typeface="Calibri" pitchFamily="34" charset="0"/>
-                <a:ea typeface="Calibri" pitchFamily="34" charset="-122"/>
-                <a:cs typeface="Calibri" pitchFamily="34" charset="-120"/>
+                <a:cs typeface="Amiri" pitchFamily="2" charset="-78"/>
               </a:rPr>
               <a:t>4 · Your education / training route</a:t>
             </a:r>
@@ -24639,8 +24211,7 @@
                   <a:srgbClr val="FFFFFF"/>
                 </a:solidFill>
                 <a:latin typeface="Calibri" pitchFamily="34" charset="0"/>
-                <a:ea typeface="Calibri" pitchFamily="34" charset="-122"/>
-                <a:cs typeface="Calibri" pitchFamily="34" charset="-120"/>
+                <a:cs typeface="Amiri" pitchFamily="2" charset="-78"/>
               </a:rPr>
               <a:t>CORE</a:t>
             </a:r>
@@ -24705,8 +24276,7 @@
                   <a:srgbClr val="5A6472"/>
                 </a:solidFill>
                 <a:latin typeface="Calibri" pitchFamily="34" charset="0"/>
-                <a:ea typeface="Calibri" pitchFamily="34" charset="-122"/>
-                <a:cs typeface="Calibri" pitchFamily="34" charset="-120"/>
+                <a:cs typeface="Amiri" pitchFamily="2" charset="-78"/>
               </a:rPr>
               <a:t>ʿalā al-raghmi min anna … fa-inna</a:t>
             </a:r>
@@ -24744,8 +24314,7 @@
                   <a:srgbClr val="5A6472"/>
                 </a:solidFill>
                 <a:latin typeface="Calibri" pitchFamily="34" charset="0"/>
-                <a:ea typeface="Calibri" pitchFamily="34" charset="-122"/>
-                <a:cs typeface="Calibri" pitchFamily="34" charset="-120"/>
+                <a:cs typeface="Amiri" pitchFamily="2" charset="-78"/>
               </a:rPr>
               <a:t>5 · One challenge (and how you will face it)</a:t>
             </a:r>
@@ -24810,8 +24379,7 @@
                   <a:srgbClr val="FFFFFF"/>
                 </a:solidFill>
                 <a:latin typeface="Calibri" pitchFamily="34" charset="0"/>
-                <a:ea typeface="Calibri" pitchFamily="34" charset="-122"/>
-                <a:cs typeface="Calibri" pitchFamily="34" charset="-120"/>
+                <a:cs typeface="Amiri" pitchFamily="2" charset="-78"/>
               </a:rPr>
               <a:t>CORE</a:t>
             </a:r>
@@ -24849,8 +24417,7 @@
                   <a:srgbClr val="1B3B6F"/>
                 </a:solidFill>
                 <a:latin typeface="Calibri" pitchFamily="34" charset="0"/>
-                <a:ea typeface="Calibri" pitchFamily="34" charset="-122"/>
-                <a:cs typeface="Calibri" pitchFamily="34" charset="-120"/>
+                <a:cs typeface="Amiri" pitchFamily="2" charset="-78"/>
               </a:rPr>
               <a:t>Independent evidence: no translation software or AI. Four paragraphs, four jobs (D3-L09) — then run the four audits (D3-L11).</a:t>
             </a:r>
@@ -24888,8 +24455,7 @@
                   <a:srgbClr val="8A93A0"/>
                 </a:solidFill>
                 <a:latin typeface="Calibri" pitchFamily="34" charset="0"/>
-                <a:ea typeface="Calibri" pitchFamily="34" charset="-122"/>
-                <a:cs typeface="Calibri" pitchFamily="34" charset="-120"/>
+                <a:cs typeface="Amiri" pitchFamily="2" charset="-78"/>
               </a:rPr>
               <a:t>18 / 23</a:t>
             </a:r>
@@ -24983,9 +24549,8 @@
                 <a:solidFill>
                   <a:srgbClr val="D4AF37"/>
                 </a:solidFill>
-                <a:latin typeface="Amiri" pitchFamily="34" charset="0"/>
-                <a:ea typeface="Amiri" pitchFamily="34" charset="-122"/>
-                <a:cs typeface="Amiri" pitchFamily="34" charset="-120"/>
+                <a:latin typeface="Amiri" pitchFamily="2" charset="-78"/>
+                <a:cs typeface="Amiri" pitchFamily="2" charset="-78"/>
               </a:rPr>
               <a:t>م</a:t>
             </a:r>
@@ -25023,8 +24588,7 @@
                   <a:srgbClr val="1B3B6F"/>
                 </a:solidFill>
                 <a:latin typeface="Cambria" pitchFamily="34" charset="0"/>
-                <a:ea typeface="Cambria" pitchFamily="34" charset="-122"/>
-                <a:cs typeface="Cambria" pitchFamily="34" charset="-120"/>
+                <a:cs typeface="Amiri" pitchFamily="2" charset="-78"/>
               </a:rPr>
               <a:t>Al Madina Online School</a:t>
             </a:r>
@@ -25062,8 +24626,7 @@
                   <a:srgbClr val="8A6D1E"/>
                 </a:solidFill>
                 <a:latin typeface="Calibri" pitchFamily="34" charset="0"/>
-                <a:ea typeface="Calibri" pitchFamily="34" charset="-122"/>
-                <a:cs typeface="Calibri" pitchFamily="34" charset="-120"/>
+                <a:cs typeface="Amiri" pitchFamily="2" charset="-78"/>
               </a:rPr>
               <a:t>ARABIC DEPARTMENT · MIFTAH ARABIC · IGCSE 0544</a:t>
             </a:r>
@@ -25128,8 +24691,7 @@
                   <a:srgbClr val="FFFFFF"/>
                 </a:solidFill>
                 <a:latin typeface="Calibri" pitchFamily="34" charset="0"/>
-                <a:ea typeface="Calibri" pitchFamily="34" charset="-122"/>
-                <a:cs typeface="Calibri" pitchFamily="34" charset="-120"/>
+                <a:cs typeface="Amiri" pitchFamily="2" charset="-78"/>
               </a:rPr>
               <a:t>D3-L12 · D3 Assessment</a:t>
             </a:r>
@@ -25194,8 +24756,7 @@
                   <a:srgbClr val="FFFFFF"/>
                 </a:solidFill>
                 <a:latin typeface="Calibri" pitchFamily="34" charset="0"/>
-                <a:ea typeface="Calibri" pitchFamily="34" charset="-122"/>
-                <a:cs typeface="Calibri" pitchFamily="34" charset="-120"/>
+                <a:cs typeface="Amiri" pitchFamily="2" charset="-78"/>
               </a:rPr>
               <a:t>YOU DO · 8 MIN</a:t>
             </a:r>
@@ -25233,8 +24794,7 @@
                   <a:srgbClr val="1E6B52"/>
                 </a:solidFill>
                 <a:latin typeface="Calibri" pitchFamily="34" charset="0"/>
-                <a:ea typeface="Calibri" pitchFamily="34" charset="-122"/>
-                <a:cs typeface="Calibri" pitchFamily="34" charset="-120"/>
+                <a:cs typeface="Amiri" pitchFamily="2" charset="-78"/>
               </a:rPr>
               <a:t>SPEAKING · PART D · 10 MARKS (WEBSITE)</a:t>
             </a:r>
@@ -25272,8 +24832,7 @@
                   <a:srgbClr val="1B3B6F"/>
                 </a:solidFill>
                 <a:latin typeface="Cambria" pitchFamily="34" charset="0"/>
-                <a:ea typeface="Cambria" pitchFamily="34" charset="-122"/>
-                <a:cs typeface="Cambria" pitchFamily="34" charset="-120"/>
+                <a:cs typeface="Amiri" pitchFamily="2" charset="-78"/>
               </a:rPr>
               <a:t>Interview and topic conversation</a:t>
             </a:r>
@@ -25310,9 +24869,8 @@
                 <a:solidFill>
                   <a:srgbClr val="8A6D1E"/>
                 </a:solidFill>
-                <a:latin typeface="Amiri" pitchFamily="34" charset="0"/>
-                <a:ea typeface="Amiri" pitchFamily="34" charset="-122"/>
-                <a:cs typeface="Amiri" pitchFamily="34" charset="-120"/>
+                <a:latin typeface="Amiri" pitchFamily="2" charset="-78"/>
+                <a:cs typeface="Amiri" pitchFamily="2" charset="-78"/>
               </a:rPr>
               <a:t>التَّحَدُّثُ</a:t>
             </a:r>
@@ -25350,8 +24908,7 @@
                   <a:srgbClr val="8A93A0"/>
                 </a:solidFill>
                 <a:latin typeface="Calibri" pitchFamily="34" charset="0"/>
-                <a:ea typeface="Calibri" pitchFamily="34" charset="-122"/>
-                <a:cs typeface="Calibri" pitchFamily="34" charset="-120"/>
+                <a:cs typeface="Amiri" pitchFamily="2" charset="-78"/>
               </a:rPr>
               <a:t>Miftah Arabic · Development D3 · Work and Careers · D3-L12</a:t>
             </a:r>
@@ -25414,8 +24971,7 @@
                   <a:srgbClr val="FFFFFF"/>
                 </a:solidFill>
                 <a:latin typeface="Calibri" pitchFamily="34" charset="0"/>
-                <a:ea typeface="Calibri" pitchFamily="34" charset="-122"/>
-                <a:cs typeface="Calibri" pitchFamily="34" charset="-120"/>
+                <a:cs typeface="Amiri" pitchFamily="2" charset="-78"/>
               </a:rPr>
               <a:t>Useful language</a:t>
             </a:r>
@@ -25453,8 +25009,7 @@
                   <a:srgbClr val="FFFFFF"/>
                 </a:solidFill>
                 <a:latin typeface="Calibri" pitchFamily="34" charset="0"/>
-                <a:ea typeface="Calibri" pitchFamily="34" charset="-122"/>
-                <a:cs typeface="Calibri" pitchFamily="34" charset="-120"/>
+                <a:cs typeface="Amiri" pitchFamily="2" charset="-78"/>
               </a:rPr>
               <a:t>Cue (website)</a:t>
             </a:r>
@@ -25519,8 +25074,7 @@
                   <a:srgbClr val="5A6472"/>
                 </a:solidFill>
                 <a:latin typeface="Calibri" pitchFamily="34" charset="0"/>
-                <a:ea typeface="Calibri" pitchFamily="34" charset="-122"/>
-                <a:cs typeface="Calibri" pitchFamily="34" charset="-120"/>
+                <a:cs typeface="Amiri" pitchFamily="2" charset="-78"/>
               </a:rPr>
               <a:t>aṭmaḥu ilā an uṣbiḥa … li-annanī …</a:t>
             </a:r>
@@ -25558,8 +25112,7 @@
                   <a:srgbClr val="5A6472"/>
                 </a:solidFill>
                 <a:latin typeface="Calibri" pitchFamily="34" charset="0"/>
-                <a:ea typeface="Calibri" pitchFamily="34" charset="-122"/>
-                <a:cs typeface="Calibri" pitchFamily="34" charset="-120"/>
+                <a:cs typeface="Amiri" pitchFamily="2" charset="-78"/>
               </a:rPr>
               <a:t>1 · State the career and why it interests you.</a:t>
             </a:r>
@@ -25624,8 +25177,7 @@
                   <a:srgbClr val="FFFFFF"/>
                 </a:solidFill>
                 <a:latin typeface="Calibri" pitchFamily="34" charset="0"/>
-                <a:ea typeface="Calibri" pitchFamily="34" charset="-122"/>
-                <a:cs typeface="Calibri" pitchFamily="34" charset="-120"/>
+                <a:cs typeface="Amiri" pitchFamily="2" charset="-78"/>
               </a:rPr>
               <a:t>CORE</a:t>
             </a:r>
@@ -25690,8 +25242,7 @@
                   <a:srgbClr val="5A6472"/>
                 </a:solidFill>
                 <a:latin typeface="Calibri" pitchFamily="34" charset="0"/>
-                <a:ea typeface="Calibri" pitchFamily="34" charset="-122"/>
-                <a:cs typeface="Calibri" pitchFamily="34" charset="-120"/>
+                <a:cs typeface="Amiri" pitchFamily="2" charset="-78"/>
               </a:rPr>
               <a:t>wa-l-dalīlu annanī …</a:t>
             </a:r>
@@ -25729,8 +25280,7 @@
                   <a:srgbClr val="5A6472"/>
                 </a:solidFill>
                 <a:latin typeface="Calibri" pitchFamily="34" charset="0"/>
-                <a:ea typeface="Calibri" pitchFamily="34" charset="-122"/>
-                <a:cs typeface="Calibri" pitchFamily="34" charset="-120"/>
+                <a:cs typeface="Amiri" pitchFamily="2" charset="-78"/>
               </a:rPr>
               <a:t>2 · Name two skills and evidence.</a:t>
             </a:r>
@@ -25795,8 +25345,7 @@
                   <a:srgbClr val="FFFFFF"/>
                 </a:solidFill>
                 <a:latin typeface="Calibri" pitchFamily="34" charset="0"/>
-                <a:ea typeface="Calibri" pitchFamily="34" charset="-122"/>
-                <a:cs typeface="Calibri" pitchFamily="34" charset="-120"/>
+                <a:cs typeface="Amiri" pitchFamily="2" charset="-78"/>
               </a:rPr>
               <a:t>CORE</a:t>
             </a:r>
@@ -25861,8 +25410,7 @@
                   <a:srgbClr val="5A6472"/>
                 </a:solidFill>
                 <a:latin typeface="Calibri" pitchFamily="34" charset="0"/>
-                <a:ea typeface="Calibri" pitchFamily="34" charset="-122"/>
-                <a:cs typeface="Calibri" pitchFamily="34" charset="-120"/>
+                <a:cs typeface="Amiri" pitchFamily="2" charset="-78"/>
               </a:rPr>
               <a:t>awwalan … thumma … li-kay …</a:t>
             </a:r>
@@ -25900,8 +25448,7 @@
                   <a:srgbClr val="5A6472"/>
                 </a:solidFill>
                 <a:latin typeface="Calibri" pitchFamily="34" charset="0"/>
-                <a:ea typeface="Calibri" pitchFamily="34" charset="-122"/>
-                <a:cs typeface="Calibri" pitchFamily="34" charset="-120"/>
+                <a:cs typeface="Amiri" pitchFamily="2" charset="-78"/>
               </a:rPr>
               <a:t>3 · Explain the education or training route.</a:t>
             </a:r>
@@ -25966,8 +25513,7 @@
                   <a:srgbClr val="FFFFFF"/>
                 </a:solidFill>
                 <a:latin typeface="Calibri" pitchFamily="34" charset="0"/>
-                <a:ea typeface="Calibri" pitchFamily="34" charset="-122"/>
-                <a:cs typeface="Calibri" pitchFamily="34" charset="-120"/>
+                <a:cs typeface="Amiri" pitchFamily="2" charset="-78"/>
               </a:rPr>
               <a:t>CORE</a:t>
             </a:r>
@@ -26032,8 +25578,7 @@
                   <a:srgbClr val="5A6472"/>
                 </a:solidFill>
                 <a:latin typeface="Calibri" pitchFamily="34" charset="0"/>
-                <a:ea typeface="Calibri" pitchFamily="34" charset="-122"/>
-                <a:cs typeface="Calibri" pitchFamily="34" charset="-120"/>
+                <a:cs typeface="Amiri" pitchFamily="2" charset="-78"/>
               </a:rPr>
               <a:t>min niqāṭi quwwatī …</a:t>
             </a:r>
@@ -26071,8 +25616,7 @@
                   <a:srgbClr val="5A6472"/>
                 </a:solidFill>
                 <a:latin typeface="Calibri" pitchFamily="34" charset="0"/>
-                <a:ea typeface="Calibri" pitchFamily="34" charset="-122"/>
-                <a:cs typeface="Calibri" pitchFamily="34" charset="-120"/>
+                <a:cs typeface="Amiri" pitchFamily="2" charset="-78"/>
               </a:rPr>
               <a:t>4 · Answer an interview question about strengths.</a:t>
             </a:r>
@@ -26137,8 +25681,7 @@
                   <a:srgbClr val="FFFFFF"/>
                 </a:solidFill>
                 <a:latin typeface="Calibri" pitchFamily="34" charset="0"/>
-                <a:ea typeface="Calibri" pitchFamily="34" charset="-122"/>
-                <a:cs typeface="Calibri" pitchFamily="34" charset="-120"/>
+                <a:cs typeface="Amiri" pitchFamily="2" charset="-78"/>
               </a:rPr>
               <a:t>CORE</a:t>
             </a:r>
@@ -26203,8 +25746,7 @@
                   <a:srgbClr val="5A6472"/>
                 </a:solidFill>
                 <a:latin typeface="Calibri" pitchFamily="34" charset="0"/>
-                <a:ea typeface="Calibri" pitchFamily="34" charset="-122"/>
-                <a:cs typeface="Calibri" pitchFamily="34" charset="-120"/>
+                <a:cs typeface="Amiri" pitchFamily="2" charset="-78"/>
               </a:rPr>
               <a:t>ʿalā al-raghmi min anna …</a:t>
             </a:r>
@@ -26242,8 +25784,7 @@
                   <a:srgbClr val="5A6472"/>
                 </a:solidFill>
                 <a:latin typeface="Calibri" pitchFamily="34" charset="0"/>
-                <a:ea typeface="Calibri" pitchFamily="34" charset="-122"/>
-                <a:cs typeface="Calibri" pitchFamily="34" charset="-120"/>
+                <a:cs typeface="Amiri" pitchFamily="2" charset="-78"/>
               </a:rPr>
               <a:t>5 · Discuss one challenge and solution.</a:t>
             </a:r>
@@ -26308,8 +25849,7 @@
                   <a:srgbClr val="FFFFFF"/>
                 </a:solidFill>
                 <a:latin typeface="Calibri" pitchFamily="34" charset="0"/>
-                <a:ea typeface="Calibri" pitchFamily="34" charset="-122"/>
-                <a:cs typeface="Calibri" pitchFamily="34" charset="-120"/>
+                <a:cs typeface="Amiri" pitchFamily="2" charset="-78"/>
               </a:rPr>
               <a:t>CORE</a:t>
             </a:r>
@@ -26347,8 +25887,7 @@
                   <a:srgbClr val="1B3B6F"/>
                 </a:solidFill>
                 <a:latin typeface="Calibri" pitchFamily="34" charset="0"/>
-                <a:ea typeface="Calibri" pitchFamily="34" charset="-122"/>
-                <a:cs typeface="Calibri" pitchFamily="34" charset="-120"/>
+                <a:cs typeface="Amiri" pitchFamily="2" charset="-78"/>
               </a:rPr>
               <a:t>Website: prepare concise cues, not a script. Be ready for natural follow-up questions.</a:t>
             </a:r>
@@ -26386,8 +25925,7 @@
                   <a:srgbClr val="8A93A0"/>
                 </a:solidFill>
                 <a:latin typeface="Calibri" pitchFamily="34" charset="0"/>
-                <a:ea typeface="Calibri" pitchFamily="34" charset="-122"/>
-                <a:cs typeface="Calibri" pitchFamily="34" charset="-120"/>
+                <a:cs typeface="Amiri" pitchFamily="2" charset="-78"/>
               </a:rPr>
               <a:t>19 / 23</a:t>
             </a:r>
@@ -26481,9 +26019,8 @@
                 <a:solidFill>
                   <a:srgbClr val="D4AF37"/>
                 </a:solidFill>
-                <a:latin typeface="Amiri" pitchFamily="34" charset="0"/>
-                <a:ea typeface="Amiri" pitchFamily="34" charset="-122"/>
-                <a:cs typeface="Amiri" pitchFamily="34" charset="-120"/>
+                <a:latin typeface="Amiri" pitchFamily="2" charset="-78"/>
+                <a:cs typeface="Amiri" pitchFamily="2" charset="-78"/>
               </a:rPr>
               <a:t>م</a:t>
             </a:r>
@@ -26521,8 +26058,7 @@
                   <a:srgbClr val="1B3B6F"/>
                 </a:solidFill>
                 <a:latin typeface="Cambria" pitchFamily="34" charset="0"/>
-                <a:ea typeface="Cambria" pitchFamily="34" charset="-122"/>
-                <a:cs typeface="Cambria" pitchFamily="34" charset="-120"/>
+                <a:cs typeface="Amiri" pitchFamily="2" charset="-78"/>
               </a:rPr>
               <a:t>Al Madina Online School</a:t>
             </a:r>
@@ -26560,8 +26096,7 @@
                   <a:srgbClr val="8A6D1E"/>
                 </a:solidFill>
                 <a:latin typeface="Calibri" pitchFamily="34" charset="0"/>
-                <a:ea typeface="Calibri" pitchFamily="34" charset="-122"/>
-                <a:cs typeface="Calibri" pitchFamily="34" charset="-120"/>
+                <a:cs typeface="Amiri" pitchFamily="2" charset="-78"/>
               </a:rPr>
               <a:t>ARABIC DEPARTMENT · MIFTAH ARABIC · IGCSE 0544</a:t>
             </a:r>
@@ -26626,8 +26161,7 @@
                   <a:srgbClr val="FFFFFF"/>
                 </a:solidFill>
                 <a:latin typeface="Calibri" pitchFamily="34" charset="0"/>
-                <a:ea typeface="Calibri" pitchFamily="34" charset="-122"/>
-                <a:cs typeface="Calibri" pitchFamily="34" charset="-120"/>
+                <a:cs typeface="Amiri" pitchFamily="2" charset="-78"/>
               </a:rPr>
               <a:t>D3-L12 · D3 Assessment</a:t>
             </a:r>
@@ -26692,8 +26226,7 @@
                   <a:srgbClr val="FFFFFF"/>
                 </a:solidFill>
                 <a:latin typeface="Calibri" pitchFamily="34" charset="0"/>
-                <a:ea typeface="Calibri" pitchFamily="34" charset="-122"/>
-                <a:cs typeface="Calibri" pitchFamily="34" charset="-120"/>
+                <a:cs typeface="Amiri" pitchFamily="2" charset="-78"/>
               </a:rPr>
               <a:t>WELCOME · 1 MIN</a:t>
             </a:r>
@@ -26731,8 +26264,7 @@
                   <a:srgbClr val="5A6472"/>
                 </a:solidFill>
                 <a:latin typeface="Calibri" pitchFamily="34" charset="0"/>
-                <a:ea typeface="Calibri" pitchFamily="34" charset="-122"/>
-                <a:cs typeface="Calibri" pitchFamily="34" charset="-120"/>
+                <a:cs typeface="Amiri" pitchFamily="2" charset="-78"/>
               </a:rPr>
               <a:t>BEFORE WE BEGIN</a:t>
             </a:r>
@@ -26770,8 +26302,7 @@
                   <a:srgbClr val="1B3B6F"/>
                 </a:solidFill>
                 <a:latin typeface="Cambria" pitchFamily="34" charset="0"/>
-                <a:ea typeface="Cambria" pitchFamily="34" charset="-122"/>
-                <a:cs typeface="Cambria" pitchFamily="34" charset="-120"/>
+                <a:cs typeface="Amiri" pitchFamily="2" charset="-78"/>
               </a:rPr>
               <a:t>Our online classroom</a:t>
             </a:r>
@@ -26808,9 +26339,8 @@
                 <a:solidFill>
                   <a:srgbClr val="8A6D1E"/>
                 </a:solidFill>
-                <a:latin typeface="Amiri" pitchFamily="34" charset="0"/>
-                <a:ea typeface="Amiri" pitchFamily="34" charset="-122"/>
-                <a:cs typeface="Amiri" pitchFamily="34" charset="-120"/>
+                <a:latin typeface="Amiri" pitchFamily="2" charset="-78"/>
+                <a:cs typeface="Amiri" pitchFamily="2" charset="-78"/>
               </a:rPr>
               <a:t>آدَابُ الصَّفِّ</a:t>
             </a:r>
@@ -26848,8 +26378,7 @@
                   <a:srgbClr val="8A93A0"/>
                 </a:solidFill>
                 <a:latin typeface="Calibri" pitchFamily="34" charset="0"/>
-                <a:ea typeface="Calibri" pitchFamily="34" charset="-122"/>
-                <a:cs typeface="Calibri" pitchFamily="34" charset="-120"/>
+                <a:cs typeface="Amiri" pitchFamily="2" charset="-78"/>
               </a:rPr>
               <a:t>Miftah Arabic · Development D3 · Work and Careers · D3-L12</a:t>
             </a:r>
@@ -26970,8 +26499,7 @@
                   <a:srgbClr val="1B3B6F"/>
                 </a:solidFill>
                 <a:latin typeface="Calibri" pitchFamily="34" charset="0"/>
-                <a:ea typeface="Calibri" pitchFamily="34" charset="-122"/>
-                <a:cs typeface="Calibri" pitchFamily="34" charset="-120"/>
+                <a:cs typeface="Amiri" pitchFamily="2" charset="-78"/>
               </a:rPr>
               <a:t>Camera on</a:t>
             </a:r>
@@ -26987,8 +26515,7 @@
                   <a:srgbClr val="5A6472"/>
                 </a:solidFill>
                 <a:latin typeface="Calibri" pitchFamily="34" charset="0"/>
-                <a:ea typeface="Calibri" pitchFamily="34" charset="-122"/>
-                <a:cs typeface="Calibri" pitchFamily="34" charset="-120"/>
+                <a:cs typeface="Amiri" pitchFamily="2" charset="-78"/>
               </a:rPr>
               <a:t>So I can see you learning and help you quickly.</a:t>
             </a:r>
@@ -27109,8 +26636,7 @@
                   <a:srgbClr val="1B3B6F"/>
                 </a:solidFill>
                 <a:latin typeface="Calibri" pitchFamily="34" charset="0"/>
-                <a:ea typeface="Calibri" pitchFamily="34" charset="-122"/>
-                <a:cs typeface="Calibri" pitchFamily="34" charset="-120"/>
+                <a:cs typeface="Amiri" pitchFamily="2" charset="-78"/>
               </a:rPr>
               <a:t>Mic muted</a:t>
             </a:r>
@@ -27126,8 +26652,7 @@
                   <a:srgbClr val="5A6472"/>
                 </a:solidFill>
                 <a:latin typeface="Calibri" pitchFamily="34" charset="0"/>
-                <a:ea typeface="Calibri" pitchFamily="34" charset="-122"/>
-                <a:cs typeface="Calibri" pitchFamily="34" charset="-120"/>
+                <a:cs typeface="Amiri" pitchFamily="2" charset="-78"/>
               </a:rPr>
               <a:t>Unmute only when invited to speak.</a:t>
             </a:r>
@@ -27248,8 +26773,7 @@
                   <a:srgbClr val="1B3B6F"/>
                 </a:solidFill>
                 <a:latin typeface="Calibri" pitchFamily="34" charset="0"/>
-                <a:ea typeface="Calibri" pitchFamily="34" charset="-122"/>
-                <a:cs typeface="Calibri" pitchFamily="34" charset="-120"/>
+                <a:cs typeface="Amiri" pitchFamily="2" charset="-78"/>
               </a:rPr>
               <a:t>Chat for learning</a:t>
             </a:r>
@@ -27265,8 +26789,7 @@
                   <a:srgbClr val="5A6472"/>
                 </a:solidFill>
                 <a:latin typeface="Calibri" pitchFamily="34" charset="0"/>
-                <a:ea typeface="Calibri" pitchFamily="34" charset="-122"/>
-                <a:cs typeface="Calibri" pitchFamily="34" charset="-120"/>
+                <a:cs typeface="Amiri" pitchFamily="2" charset="-78"/>
               </a:rPr>
               <a:t>Answers, questions and Arabic only.</a:t>
             </a:r>
@@ -27387,8 +26910,7 @@
                   <a:srgbClr val="1B3B6F"/>
                 </a:solidFill>
                 <a:latin typeface="Calibri" pitchFamily="34" charset="0"/>
-                <a:ea typeface="Calibri" pitchFamily="34" charset="-122"/>
-                <a:cs typeface="Calibri" pitchFamily="34" charset="-120"/>
+                <a:cs typeface="Amiri" pitchFamily="2" charset="-78"/>
               </a:rPr>
               <a:t>Raise your hand</a:t>
             </a:r>
@@ -27404,8 +26926,7 @@
                   <a:srgbClr val="5A6472"/>
                 </a:solidFill>
                 <a:latin typeface="Calibri" pitchFamily="34" charset="0"/>
-                <a:ea typeface="Calibri" pitchFamily="34" charset="-122"/>
-                <a:cs typeface="Calibri" pitchFamily="34" charset="-120"/>
+                <a:cs typeface="Amiri" pitchFamily="2" charset="-78"/>
               </a:rPr>
               <a:t>Use the hand button to ask for help.</a:t>
             </a:r>
@@ -27477,8 +26998,7 @@
                   <a:srgbClr val="1B3B6F"/>
                 </a:solidFill>
                 <a:latin typeface="Calibri" pitchFamily="34" charset="0"/>
-                <a:ea typeface="Calibri" pitchFamily="34" charset="-122"/>
-                <a:cs typeface="Calibri" pitchFamily="34" charset="-120"/>
+                <a:cs typeface="Amiri" pitchFamily="2" charset="-78"/>
               </a:rPr>
               <a:t>HOW WE TALK — THE ORACY CODE</a:t>
             </a:r>
@@ -27541,8 +27061,7 @@
                   <a:srgbClr val="D4AF37"/>
                 </a:solidFill>
                 <a:latin typeface="Arial" pitchFamily="34" charset="0"/>
-                <a:ea typeface="Arial" pitchFamily="34" charset="-122"/>
-                <a:cs typeface="Arial" pitchFamily="34" charset="-120"/>
+                <a:cs typeface="Amiri" pitchFamily="2" charset="-78"/>
               </a:rPr>
               <a:t>●</a:t>
             </a:r>
@@ -27580,8 +27099,7 @@
                   <a:srgbClr val="1B3B6F"/>
                 </a:solidFill>
                 <a:latin typeface="Calibri" pitchFamily="34" charset="0"/>
-                <a:ea typeface="Calibri" pitchFamily="34" charset="-122"/>
-                <a:cs typeface="Calibri" pitchFamily="34" charset="-120"/>
+                <a:cs typeface="Amiri" pitchFamily="2" charset="-78"/>
               </a:rPr>
               <a:t>Think</a:t>
             </a:r>
@@ -27597,8 +27115,7 @@
                   <a:srgbClr val="5A6472"/>
                 </a:solidFill>
                 <a:latin typeface="Calibri" pitchFamily="34" charset="0"/>
-                <a:ea typeface="Calibri" pitchFamily="34" charset="-122"/>
-                <a:cs typeface="Calibri" pitchFamily="34" charset="-120"/>
+                <a:cs typeface="Amiri" pitchFamily="2" charset="-78"/>
               </a:rPr>
               <a:t>silent preparation</a:t>
             </a:r>
@@ -27661,8 +27178,7 @@
                   <a:srgbClr val="D4AF37"/>
                 </a:solidFill>
                 <a:latin typeface="Arial" pitchFamily="34" charset="0"/>
-                <a:ea typeface="Arial" pitchFamily="34" charset="-122"/>
-                <a:cs typeface="Arial" pitchFamily="34" charset="-120"/>
+                <a:cs typeface="Amiri" pitchFamily="2" charset="-78"/>
               </a:rPr>
               <a:t>↔</a:t>
             </a:r>
@@ -27700,8 +27216,7 @@
                   <a:srgbClr val="1B3B6F"/>
                 </a:solidFill>
                 <a:latin typeface="Calibri" pitchFamily="34" charset="0"/>
-                <a:ea typeface="Calibri" pitchFamily="34" charset="-122"/>
-                <a:cs typeface="Calibri" pitchFamily="34" charset="-120"/>
+                <a:cs typeface="Amiri" pitchFamily="2" charset="-78"/>
               </a:rPr>
               <a:t>Rehearse</a:t>
             </a:r>
@@ -27717,8 +27232,7 @@
                   <a:srgbClr val="5A6472"/>
                 </a:solidFill>
                 <a:latin typeface="Calibri" pitchFamily="34" charset="0"/>
-                <a:ea typeface="Calibri" pitchFamily="34" charset="-122"/>
-                <a:cs typeface="Calibri" pitchFamily="34" charset="-120"/>
+                <a:cs typeface="Amiri" pitchFamily="2" charset="-78"/>
               </a:rPr>
               <a:t>both partners speak</a:t>
             </a:r>
@@ -27781,8 +27295,7 @@
                   <a:srgbClr val="D4AF37"/>
                 </a:solidFill>
                 <a:latin typeface="Arial" pitchFamily="34" charset="0"/>
-                <a:ea typeface="Arial" pitchFamily="34" charset="-122"/>
-                <a:cs typeface="Arial" pitchFamily="34" charset="-120"/>
+                <a:cs typeface="Amiri" pitchFamily="2" charset="-78"/>
               </a:rPr>
               <a:t>+</a:t>
             </a:r>
@@ -27820,8 +27333,7 @@
                   <a:srgbClr val="1B3B6F"/>
                 </a:solidFill>
                 <a:latin typeface="Calibri" pitchFamily="34" charset="0"/>
-                <a:ea typeface="Calibri" pitchFamily="34" charset="-122"/>
-                <a:cs typeface="Calibri" pitchFamily="34" charset="-120"/>
+                <a:cs typeface="Amiri" pitchFamily="2" charset="-78"/>
               </a:rPr>
               <a:t>Build</a:t>
             </a:r>
@@ -27837,8 +27349,7 @@
                   <a:srgbClr val="5A6472"/>
                 </a:solidFill>
                 <a:latin typeface="Calibri" pitchFamily="34" charset="0"/>
-                <a:ea typeface="Calibri" pitchFamily="34" charset="-122"/>
-                <a:cs typeface="Calibri" pitchFamily="34" charset="-120"/>
+                <a:cs typeface="Amiri" pitchFamily="2" charset="-78"/>
               </a:rPr>
               <a:t>add a reason or detail</a:t>
             </a:r>
@@ -27901,8 +27412,7 @@
                   <a:srgbClr val="D4AF37"/>
                 </a:solidFill>
                 <a:latin typeface="Arial" pitchFamily="34" charset="0"/>
-                <a:ea typeface="Arial" pitchFamily="34" charset="-122"/>
-                <a:cs typeface="Arial" pitchFamily="34" charset="-120"/>
+                <a:cs typeface="Amiri" pitchFamily="2" charset="-78"/>
               </a:rPr>
               <a:t>?</a:t>
             </a:r>
@@ -27940,8 +27450,7 @@
                   <a:srgbClr val="1B3B6F"/>
                 </a:solidFill>
                 <a:latin typeface="Calibri" pitchFamily="34" charset="0"/>
-                <a:ea typeface="Calibri" pitchFamily="34" charset="-122"/>
-                <a:cs typeface="Calibri" pitchFamily="34" charset="-120"/>
+                <a:cs typeface="Amiri" pitchFamily="2" charset="-78"/>
               </a:rPr>
               <a:t>Challenge</a:t>
             </a:r>
@@ -27957,8 +27466,7 @@
                   <a:srgbClr val="5A6472"/>
                 </a:solidFill>
                 <a:latin typeface="Calibri" pitchFamily="34" charset="0"/>
-                <a:ea typeface="Calibri" pitchFamily="34" charset="-122"/>
-                <a:cs typeface="Calibri" pitchFamily="34" charset="-120"/>
+                <a:cs typeface="Amiri" pitchFamily="2" charset="-78"/>
               </a:rPr>
               <a:t>question respectfully</a:t>
             </a:r>
@@ -28021,8 +27529,7 @@
                   <a:srgbClr val="D4AF37"/>
                 </a:solidFill>
                 <a:latin typeface="Arial" pitchFamily="34" charset="0"/>
-                <a:ea typeface="Arial" pitchFamily="34" charset="-122"/>
-                <a:cs typeface="Arial" pitchFamily="34" charset="-120"/>
+                <a:cs typeface="Amiri" pitchFamily="2" charset="-78"/>
               </a:rPr>
               <a:t>◎</a:t>
             </a:r>
@@ -28060,8 +27567,7 @@
                   <a:srgbClr val="1B3B6F"/>
                 </a:solidFill>
                 <a:latin typeface="Calibri" pitchFamily="34" charset="0"/>
-                <a:ea typeface="Calibri" pitchFamily="34" charset="-122"/>
-                <a:cs typeface="Calibri" pitchFamily="34" charset="-120"/>
+                <a:cs typeface="Amiri" pitchFamily="2" charset="-78"/>
               </a:rPr>
               <a:t>Share</a:t>
             </a:r>
@@ -28077,8 +27583,7 @@
                   <a:srgbClr val="5A6472"/>
                 </a:solidFill>
                 <a:latin typeface="Calibri" pitchFamily="34" charset="0"/>
-                <a:ea typeface="Calibri" pitchFamily="34" charset="-122"/>
-                <a:cs typeface="Calibri" pitchFamily="34" charset="-120"/>
+                <a:cs typeface="Amiri" pitchFamily="2" charset="-78"/>
               </a:rPr>
               <a:t>anyone may be invited</a:t>
             </a:r>
@@ -28141,8 +27646,7 @@
                   <a:srgbClr val="D4AF37"/>
                 </a:solidFill>
                 <a:latin typeface="Arial" pitchFamily="34" charset="0"/>
-                <a:ea typeface="Arial" pitchFamily="34" charset="-122"/>
-                <a:cs typeface="Arial" pitchFamily="34" charset="-120"/>
+                <a:cs typeface="Amiri" pitchFamily="2" charset="-78"/>
               </a:rPr>
               <a:t>↺</a:t>
             </a:r>
@@ -28180,8 +27684,7 @@
                   <a:srgbClr val="1B3B6F"/>
                 </a:solidFill>
                 <a:latin typeface="Calibri" pitchFamily="34" charset="0"/>
-                <a:ea typeface="Calibri" pitchFamily="34" charset="-122"/>
-                <a:cs typeface="Calibri" pitchFamily="34" charset="-120"/>
+                <a:cs typeface="Amiri" pitchFamily="2" charset="-78"/>
               </a:rPr>
               <a:t>Summarise</a:t>
             </a:r>
@@ -28197,8 +27700,7 @@
                   <a:srgbClr val="5A6472"/>
                 </a:solidFill>
                 <a:latin typeface="Calibri" pitchFamily="34" charset="0"/>
-                <a:ea typeface="Calibri" pitchFamily="34" charset="-122"/>
-                <a:cs typeface="Calibri" pitchFamily="34" charset="-120"/>
+                <a:cs typeface="Amiri" pitchFamily="2" charset="-78"/>
               </a:rPr>
               <a:t>say it more precisely</a:t>
             </a:r>
@@ -28236,8 +27738,7 @@
                   <a:srgbClr val="8A6D1E"/>
                 </a:solidFill>
                 <a:latin typeface="Calibri" pitchFamily="34" charset="0"/>
-                <a:ea typeface="Calibri" pitchFamily="34" charset="-122"/>
-                <a:cs typeface="Calibri" pitchFamily="34" charset="-120"/>
+                <a:cs typeface="Amiri" pitchFamily="2" charset="-78"/>
               </a:rPr>
               <a:t>I will always give you thinking and practice time before I ask anyone. Reading aloud is by invitation — you can always say “pass, please come back to me”.</a:t>
             </a:r>
@@ -28275,8 +27776,7 @@
                   <a:srgbClr val="8A93A0"/>
                 </a:solidFill>
                 <a:latin typeface="Calibri" pitchFamily="34" charset="0"/>
-                <a:ea typeface="Calibri" pitchFamily="34" charset="-122"/>
-                <a:cs typeface="Calibri" pitchFamily="34" charset="-120"/>
+                <a:cs typeface="Amiri" pitchFamily="2" charset="-78"/>
               </a:rPr>
               <a:t>2 / 23</a:t>
             </a:r>
@@ -28370,9 +27870,8 @@
                 <a:solidFill>
                   <a:srgbClr val="D4AF37"/>
                 </a:solidFill>
-                <a:latin typeface="Amiri" pitchFamily="34" charset="0"/>
-                <a:ea typeface="Amiri" pitchFamily="34" charset="-122"/>
-                <a:cs typeface="Amiri" pitchFamily="34" charset="-120"/>
+                <a:latin typeface="Amiri" pitchFamily="2" charset="-78"/>
+                <a:cs typeface="Amiri" pitchFamily="2" charset="-78"/>
               </a:rPr>
               <a:t>م</a:t>
             </a:r>
@@ -28410,8 +27909,7 @@
                   <a:srgbClr val="1B3B6F"/>
                 </a:solidFill>
                 <a:latin typeface="Cambria" pitchFamily="34" charset="0"/>
-                <a:ea typeface="Cambria" pitchFamily="34" charset="-122"/>
-                <a:cs typeface="Cambria" pitchFamily="34" charset="-120"/>
+                <a:cs typeface="Amiri" pitchFamily="2" charset="-78"/>
               </a:rPr>
               <a:t>Al Madina Online School</a:t>
             </a:r>
@@ -28449,8 +27947,7 @@
                   <a:srgbClr val="8A6D1E"/>
                 </a:solidFill>
                 <a:latin typeface="Calibri" pitchFamily="34" charset="0"/>
-                <a:ea typeface="Calibri" pitchFamily="34" charset="-122"/>
-                <a:cs typeface="Calibri" pitchFamily="34" charset="-120"/>
+                <a:cs typeface="Amiri" pitchFamily="2" charset="-78"/>
               </a:rPr>
               <a:t>ARABIC DEPARTMENT · MIFTAH ARABIC · IGCSE 0544</a:t>
             </a:r>
@@ -28515,8 +28012,7 @@
                   <a:srgbClr val="FFFFFF"/>
                 </a:solidFill>
                 <a:latin typeface="Calibri" pitchFamily="34" charset="0"/>
-                <a:ea typeface="Calibri" pitchFamily="34" charset="-122"/>
-                <a:cs typeface="Calibri" pitchFamily="34" charset="-120"/>
+                <a:cs typeface="Amiri" pitchFamily="2" charset="-78"/>
               </a:rPr>
               <a:t>D3-L12 · D3 Assessment</a:t>
             </a:r>
@@ -28581,8 +28077,7 @@
                   <a:srgbClr val="FFFFFF"/>
                 </a:solidFill>
                 <a:latin typeface="Calibri" pitchFamily="34" charset="0"/>
-                <a:ea typeface="Calibri" pitchFamily="34" charset="-122"/>
-                <a:cs typeface="Calibri" pitchFamily="34" charset="-120"/>
+                <a:cs typeface="Amiri" pitchFamily="2" charset="-78"/>
               </a:rPr>
               <a:t>FEEDBACK · 3 MIN</a:t>
             </a:r>
@@ -28620,8 +28115,7 @@
                   <a:srgbClr val="8A6D1E"/>
                 </a:solidFill>
                 <a:latin typeface="Calibri" pitchFamily="34" charset="0"/>
-                <a:ea typeface="Calibri" pitchFamily="34" charset="-122"/>
-                <a:cs typeface="Calibri" pitchFamily="34" charset="-120"/>
+                <a:cs typeface="Amiri" pitchFamily="2" charset="-78"/>
               </a:rPr>
               <a:t>RESULTS · YOUR D3 FOUR-SKILLS PROFILE (WEBSITE)</a:t>
             </a:r>
@@ -28659,8 +28153,7 @@
                   <a:srgbClr val="1B3B6F"/>
                 </a:solidFill>
                 <a:latin typeface="Cambria" pitchFamily="34" charset="0"/>
-                <a:ea typeface="Cambria" pitchFamily="34" charset="-122"/>
-                <a:cs typeface="Cambria" pitchFamily="34" charset="-120"/>
+                <a:cs typeface="Amiri" pitchFamily="2" charset="-78"/>
               </a:rPr>
               <a:t>My D3 score profile</a:t>
             </a:r>
@@ -28697,9 +28190,8 @@
                 <a:solidFill>
                   <a:srgbClr val="8A6D1E"/>
                 </a:solidFill>
-                <a:latin typeface="Amiri" pitchFamily="34" charset="0"/>
-                <a:ea typeface="Amiri" pitchFamily="34" charset="-122"/>
-                <a:cs typeface="Amiri" pitchFamily="34" charset="-120"/>
+                <a:latin typeface="Amiri" pitchFamily="2" charset="-78"/>
+                <a:cs typeface="Amiri" pitchFamily="2" charset="-78"/>
               </a:rPr>
               <a:t>مِلَفُّ المَهَارَاتِ</a:t>
             </a:r>
@@ -28737,8 +28229,7 @@
                   <a:srgbClr val="8A93A0"/>
                 </a:solidFill>
                 <a:latin typeface="Calibri" pitchFamily="34" charset="0"/>
-                <a:ea typeface="Calibri" pitchFamily="34" charset="-122"/>
-                <a:cs typeface="Calibri" pitchFamily="34" charset="-120"/>
+                <a:cs typeface="Amiri" pitchFamily="2" charset="-78"/>
               </a:rPr>
               <a:t>Miftah Arabic · Development D3 · Work and Careers · D3-L12</a:t>
             </a:r>
@@ -28801,8 +28292,7 @@
                   <a:srgbClr val="FFFFFF"/>
                 </a:solidFill>
                 <a:latin typeface="Calibri" pitchFamily="34" charset="0"/>
-                <a:ea typeface="Calibri" pitchFamily="34" charset="-122"/>
-                <a:cs typeface="Calibri" pitchFamily="34" charset="-120"/>
+                <a:cs typeface="Amiri" pitchFamily="2" charset="-78"/>
               </a:rPr>
               <a:t>Section</a:t>
             </a:r>
@@ -28840,8 +28330,7 @@
                   <a:srgbClr val="FFFFFF"/>
                 </a:solidFill>
                 <a:latin typeface="Calibri" pitchFamily="34" charset="0"/>
-                <a:ea typeface="Calibri" pitchFamily="34" charset="-122"/>
-                <a:cs typeface="Calibri" pitchFamily="34" charset="-120"/>
+                <a:cs typeface="Amiri" pitchFamily="2" charset="-78"/>
               </a:rPr>
               <a:t>My score</a:t>
             </a:r>
@@ -28879,8 +28368,7 @@
                   <a:srgbClr val="FFFFFF"/>
                 </a:solidFill>
                 <a:latin typeface="Calibri" pitchFamily="34" charset="0"/>
-                <a:ea typeface="Calibri" pitchFamily="34" charset="-122"/>
-                <a:cs typeface="Calibri" pitchFamily="34" charset="-120"/>
+                <a:cs typeface="Amiri" pitchFamily="2" charset="-78"/>
               </a:rPr>
               <a:t>Teacher guide (total /60)</a:t>
             </a:r>
@@ -28945,8 +28433,7 @@
                   <a:srgbClr val="5A6472"/>
                 </a:solidFill>
                 <a:latin typeface="Calibri" pitchFamily="34" charset="0"/>
-                <a:ea typeface="Calibri" pitchFamily="34" charset="-122"/>
-                <a:cs typeface="Calibri" pitchFamily="34" charset="-120"/>
+                <a:cs typeface="Amiri" pitchFamily="2" charset="-78"/>
               </a:rPr>
               <a:t>A · Listening</a:t>
             </a:r>
@@ -28984,8 +28471,7 @@
                   <a:srgbClr val="5A6472"/>
                 </a:solidFill>
                 <a:latin typeface="Calibri" pitchFamily="34" charset="0"/>
-                <a:ea typeface="Calibri" pitchFamily="34" charset="-122"/>
-                <a:cs typeface="Calibri" pitchFamily="34" charset="-120"/>
+                <a:cs typeface="Amiri" pitchFamily="2" charset="-78"/>
               </a:rPr>
               <a:t>/20</a:t>
             </a:r>
@@ -29023,8 +28509,7 @@
                   <a:srgbClr val="5A6472"/>
                 </a:solidFill>
                 <a:latin typeface="Calibri" pitchFamily="34" charset="0"/>
-                <a:ea typeface="Calibri" pitchFamily="34" charset="-122"/>
-                <a:cs typeface="Calibri" pitchFamily="34" charset="-120"/>
+                <a:cs typeface="Amiri" pitchFamily="2" charset="-78"/>
               </a:rPr>
               <a:t>54–60 Excellent — confident career communication</a:t>
             </a:r>
@@ -29089,8 +28574,7 @@
                   <a:srgbClr val="FFFFFF"/>
                 </a:solidFill>
                 <a:latin typeface="Calibri" pitchFamily="34" charset="0"/>
-                <a:ea typeface="Calibri" pitchFamily="34" charset="-122"/>
-                <a:cs typeface="Calibri" pitchFamily="34" charset="-120"/>
+                <a:cs typeface="Amiri" pitchFamily="2" charset="-78"/>
               </a:rPr>
               <a:t>CORE</a:t>
             </a:r>
@@ -29155,8 +28639,7 @@
                   <a:srgbClr val="5A6472"/>
                 </a:solidFill>
                 <a:latin typeface="Calibri" pitchFamily="34" charset="0"/>
-                <a:ea typeface="Calibri" pitchFamily="34" charset="-122"/>
-                <a:cs typeface="Calibri" pitchFamily="34" charset="-120"/>
+                <a:cs typeface="Amiri" pitchFamily="2" charset="-78"/>
               </a:rPr>
               <a:t>B · Reading</a:t>
             </a:r>
@@ -29194,8 +28677,7 @@
                   <a:srgbClr val="5A6472"/>
                 </a:solidFill>
                 <a:latin typeface="Calibri" pitchFamily="34" charset="0"/>
-                <a:ea typeface="Calibri" pitchFamily="34" charset="-122"/>
-                <a:cs typeface="Calibri" pitchFamily="34" charset="-120"/>
+                <a:cs typeface="Amiri" pitchFamily="2" charset="-78"/>
               </a:rPr>
               <a:t>/10</a:t>
             </a:r>
@@ -29233,8 +28715,7 @@
                   <a:srgbClr val="5A6472"/>
                 </a:solidFill>
                 <a:latin typeface="Calibri" pitchFamily="34" charset="0"/>
-                <a:ea typeface="Calibri" pitchFamily="34" charset="-122"/>
-                <a:cs typeface="Calibri" pitchFamily="34" charset="-120"/>
+                <a:cs typeface="Amiri" pitchFamily="2" charset="-78"/>
               </a:rPr>
               <a:t>42–53 Good — secure, with a few focused gaps</a:t>
             </a:r>
@@ -29299,8 +28780,7 @@
                   <a:srgbClr val="FFFFFF"/>
                 </a:solidFill>
                 <a:latin typeface="Calibri" pitchFamily="34" charset="0"/>
-                <a:ea typeface="Calibri" pitchFamily="34" charset="-122"/>
-                <a:cs typeface="Calibri" pitchFamily="34" charset="-120"/>
+                <a:cs typeface="Amiri" pitchFamily="2" charset="-78"/>
               </a:rPr>
               <a:t>CORE</a:t>
             </a:r>
@@ -29365,8 +28845,7 @@
                   <a:srgbClr val="5A6472"/>
                 </a:solidFill>
                 <a:latin typeface="Calibri" pitchFamily="34" charset="0"/>
-                <a:ea typeface="Calibri" pitchFamily="34" charset="-122"/>
-                <a:cs typeface="Calibri" pitchFamily="34" charset="-120"/>
+                <a:cs typeface="Amiri" pitchFamily="2" charset="-78"/>
               </a:rPr>
               <a:t>C · Writing</a:t>
             </a:r>
@@ -29404,8 +28883,7 @@
                   <a:srgbClr val="5A6472"/>
                 </a:solidFill>
                 <a:latin typeface="Calibri" pitchFamily="34" charset="0"/>
-                <a:ea typeface="Calibri" pitchFamily="34" charset="-122"/>
-                <a:cs typeface="Calibri" pitchFamily="34" charset="-120"/>
+                <a:cs typeface="Amiri" pitchFamily="2" charset="-78"/>
               </a:rPr>
               <a:t>/20</a:t>
             </a:r>
@@ -29443,8 +28921,7 @@
                   <a:srgbClr val="5A6472"/>
                 </a:solidFill>
                 <a:latin typeface="Calibri" pitchFamily="34" charset="0"/>
-                <a:ea typeface="Calibri" pitchFamily="34" charset="-122"/>
-                <a:cs typeface="Calibri" pitchFamily="34" charset="-120"/>
+                <a:cs typeface="Amiri" pitchFamily="2" charset="-78"/>
               </a:rPr>
               <a:t>30–41 Satisfactory — core communication in place</a:t>
             </a:r>
@@ -29509,8 +28986,7 @@
                   <a:srgbClr val="FFFFFF"/>
                 </a:solidFill>
                 <a:latin typeface="Calibri" pitchFamily="34" charset="0"/>
-                <a:ea typeface="Calibri" pitchFamily="34" charset="-122"/>
-                <a:cs typeface="Calibri" pitchFamily="34" charset="-120"/>
+                <a:cs typeface="Amiri" pitchFamily="2" charset="-78"/>
               </a:rPr>
               <a:t>CORE</a:t>
             </a:r>
@@ -29575,8 +29051,7 @@
                   <a:srgbClr val="5A6472"/>
                 </a:solidFill>
                 <a:latin typeface="Calibri" pitchFamily="34" charset="0"/>
-                <a:ea typeface="Calibri" pitchFamily="34" charset="-122"/>
-                <a:cs typeface="Calibri" pitchFamily="34" charset="-120"/>
+                <a:cs typeface="Amiri" pitchFamily="2" charset="-78"/>
               </a:rPr>
               <a:t>D · Speaking</a:t>
             </a:r>
@@ -29614,8 +29089,7 @@
                   <a:srgbClr val="5A6472"/>
                 </a:solidFill>
                 <a:latin typeface="Calibri" pitchFamily="34" charset="0"/>
-                <a:ea typeface="Calibri" pitchFamily="34" charset="-122"/>
-                <a:cs typeface="Calibri" pitchFamily="34" charset="-120"/>
+                <a:cs typeface="Amiri" pitchFamily="2" charset="-78"/>
               </a:rPr>
               <a:t>/10</a:t>
             </a:r>
@@ -29653,8 +29127,7 @@
                   <a:srgbClr val="5A6472"/>
                 </a:solidFill>
                 <a:latin typeface="Calibri" pitchFamily="34" charset="0"/>
-                <a:ea typeface="Calibri" pitchFamily="34" charset="-122"/>
-                <a:cs typeface="Calibri" pitchFamily="34" charset="-120"/>
+                <a:cs typeface="Amiri" pitchFamily="2" charset="-78"/>
               </a:rPr>
               <a:t>Below 30 — revisit selected D3 lessons with guided practice</a:t>
             </a:r>
@@ -29719,8 +29192,7 @@
                   <a:srgbClr val="FFFFFF"/>
                 </a:solidFill>
                 <a:latin typeface="Calibri" pitchFamily="34" charset="0"/>
-                <a:ea typeface="Calibri" pitchFamily="34" charset="-122"/>
-                <a:cs typeface="Calibri" pitchFamily="34" charset="-120"/>
+                <a:cs typeface="Amiri" pitchFamily="2" charset="-78"/>
               </a:rPr>
               <a:t>CORE</a:t>
             </a:r>
@@ -29758,8 +29230,7 @@
                   <a:srgbClr val="1B3B6F"/>
                 </a:solidFill>
                 <a:latin typeface="Calibri" pitchFamily="34" charset="0"/>
-                <a:ea typeface="Calibri" pitchFamily="34" charset="-122"/>
-                <a:cs typeface="Calibri" pitchFamily="34" charset="-120"/>
+                <a:cs typeface="Amiri" pitchFamily="2" charset="-78"/>
               </a:rPr>
               <a:t>Website reflection: My strongest D3 evidence was … · My precise next action is …</a:t>
             </a:r>
@@ -29797,8 +29268,7 @@
                   <a:srgbClr val="8A93A0"/>
                 </a:solidFill>
                 <a:latin typeface="Calibri" pitchFamily="34" charset="0"/>
-                <a:ea typeface="Calibri" pitchFamily="34" charset="-122"/>
-                <a:cs typeface="Calibri" pitchFamily="34" charset="-120"/>
+                <a:cs typeface="Amiri" pitchFamily="2" charset="-78"/>
               </a:rPr>
               <a:t>20 / 23</a:t>
             </a:r>
@@ -29892,9 +29362,8 @@
                 <a:solidFill>
                   <a:srgbClr val="D4AF37"/>
                 </a:solidFill>
-                <a:latin typeface="Amiri" pitchFamily="34" charset="0"/>
-                <a:ea typeface="Amiri" pitchFamily="34" charset="-122"/>
-                <a:cs typeface="Amiri" pitchFamily="34" charset="-120"/>
+                <a:latin typeface="Amiri" pitchFamily="2" charset="-78"/>
+                <a:cs typeface="Amiri" pitchFamily="2" charset="-78"/>
               </a:rPr>
               <a:t>م</a:t>
             </a:r>
@@ -29932,8 +29401,7 @@
                   <a:srgbClr val="1B3B6F"/>
                 </a:solidFill>
                 <a:latin typeface="Cambria" pitchFamily="34" charset="0"/>
-                <a:ea typeface="Cambria" pitchFamily="34" charset="-122"/>
-                <a:cs typeface="Cambria" pitchFamily="34" charset="-120"/>
+                <a:cs typeface="Amiri" pitchFamily="2" charset="-78"/>
               </a:rPr>
               <a:t>Al Madina Online School</a:t>
             </a:r>
@@ -29971,8 +29439,7 @@
                   <a:srgbClr val="8A6D1E"/>
                 </a:solidFill>
                 <a:latin typeface="Calibri" pitchFamily="34" charset="0"/>
-                <a:ea typeface="Calibri" pitchFamily="34" charset="-122"/>
-                <a:cs typeface="Calibri" pitchFamily="34" charset="-120"/>
+                <a:cs typeface="Amiri" pitchFamily="2" charset="-78"/>
               </a:rPr>
               <a:t>ARABIC DEPARTMENT · MIFTAH ARABIC · IGCSE 0544</a:t>
             </a:r>
@@ -30037,8 +29504,7 @@
                   <a:srgbClr val="FFFFFF"/>
                 </a:solidFill>
                 <a:latin typeface="Calibri" pitchFamily="34" charset="0"/>
-                <a:ea typeface="Calibri" pitchFamily="34" charset="-122"/>
-                <a:cs typeface="Calibri" pitchFamily="34" charset="-120"/>
+                <a:cs typeface="Amiri" pitchFamily="2" charset="-78"/>
               </a:rPr>
               <a:t>D3-L12 · D3 Assessment</a:t>
             </a:r>
@@ -30103,8 +29569,7 @@
                   <a:srgbClr val="FFFFFF"/>
                 </a:solidFill>
                 <a:latin typeface="Calibri" pitchFamily="34" charset="0"/>
-                <a:ea typeface="Calibri" pitchFamily="34" charset="-122"/>
-                <a:cs typeface="Calibri" pitchFamily="34" charset="-120"/>
+                <a:cs typeface="Amiri" pitchFamily="2" charset="-78"/>
               </a:rPr>
               <a:t>FEEDBACK · 1 MIN</a:t>
             </a:r>
@@ -30142,8 +29607,7 @@
                   <a:srgbClr val="8A6D1E"/>
                 </a:solidFill>
                 <a:latin typeface="Calibri" pitchFamily="34" charset="0"/>
-                <a:ea typeface="Calibri" pitchFamily="34" charset="-122"/>
-                <a:cs typeface="Calibri" pitchFamily="34" charset="-120"/>
+                <a:cs typeface="Amiri" pitchFamily="2" charset="-78"/>
               </a:rPr>
               <a:t>FEEDBACK · SUCCESS CRITERIA</a:t>
             </a:r>
@@ -30181,8 +29645,7 @@
                   <a:srgbClr val="1B3B6F"/>
                 </a:solidFill>
                 <a:latin typeface="Cambria" pitchFamily="34" charset="0"/>
-                <a:ea typeface="Cambria" pitchFamily="34" charset="-122"/>
-                <a:cs typeface="Cambria" pitchFamily="34" charset="-120"/>
+                <a:cs typeface="Amiri" pitchFamily="2" charset="-78"/>
               </a:rPr>
               <a:t>Check your work</a:t>
             </a:r>
@@ -30219,9 +29682,8 @@
                 <a:solidFill>
                   <a:srgbClr val="8A6D1E"/>
                 </a:solidFill>
-                <a:latin typeface="Amiri" pitchFamily="34" charset="0"/>
-                <a:ea typeface="Amiri" pitchFamily="34" charset="-122"/>
-                <a:cs typeface="Amiri" pitchFamily="34" charset="-120"/>
+                <a:latin typeface="Amiri" pitchFamily="2" charset="-78"/>
+                <a:cs typeface="Amiri" pitchFamily="2" charset="-78"/>
               </a:rPr>
               <a:t>قَيِّمْ عَمَلَكَ</a:t>
             </a:r>
@@ -30259,8 +29721,7 @@
                   <a:srgbClr val="8A93A0"/>
                 </a:solidFill>
                 <a:latin typeface="Calibri" pitchFamily="34" charset="0"/>
-                <a:ea typeface="Calibri" pitchFamily="34" charset="-122"/>
-                <a:cs typeface="Calibri" pitchFamily="34" charset="-120"/>
+                <a:cs typeface="Amiri" pitchFamily="2" charset="-78"/>
               </a:rPr>
               <a:t>Miftah Arabic · Development D3 · Work and Careers · D3-L12</a:t>
             </a:r>
@@ -30357,8 +29818,7 @@
                   <a:srgbClr val="1F2A37"/>
                 </a:solidFill>
                 <a:latin typeface="Calibri" pitchFamily="34" charset="0"/>
-                <a:ea typeface="Calibri" pitchFamily="34" charset="-122"/>
-                <a:cs typeface="Calibri" pitchFamily="34" charset="-120"/>
+                <a:cs typeface="Amiri" pitchFamily="2" charset="-78"/>
               </a:rPr>
               <a:t>I can name jobs for a man and a woman and say where they work.</a:t>
             </a:r>
@@ -30423,8 +29883,7 @@
                   <a:srgbClr val="FFFFFF"/>
                 </a:solidFill>
                 <a:latin typeface="Calibri" pitchFamily="34" charset="0"/>
-                <a:ea typeface="Calibri" pitchFamily="34" charset="-122"/>
-                <a:cs typeface="Calibri" pitchFamily="34" charset="-120"/>
+                <a:cs typeface="Amiri" pitchFamily="2" charset="-78"/>
               </a:rPr>
               <a:t>CORE</a:t>
             </a:r>
@@ -30521,8 +29980,7 @@
                   <a:srgbClr val="1F2A37"/>
                 </a:solidFill>
                 <a:latin typeface="Calibri" pitchFamily="34" charset="0"/>
-                <a:ea typeface="Calibri" pitchFamily="34" charset="-122"/>
-                <a:cs typeface="Calibri" pitchFamily="34" charset="-120"/>
+                <a:cs typeface="Amiri" pitchFamily="2" charset="-78"/>
               </a:rPr>
               <a:t>I can say what I will study (sa- / sawfa).</a:t>
             </a:r>
@@ -30587,8 +30045,7 @@
                   <a:srgbClr val="FFFFFF"/>
                 </a:solidFill>
                 <a:latin typeface="Calibri" pitchFamily="34" charset="0"/>
-                <a:ea typeface="Calibri" pitchFamily="34" charset="-122"/>
-                <a:cs typeface="Calibri" pitchFamily="34" charset="-120"/>
+                <a:cs typeface="Amiri" pitchFamily="2" charset="-78"/>
               </a:rPr>
               <a:t>CORE</a:t>
             </a:r>
@@ -30685,8 +30142,7 @@
                   <a:srgbClr val="1F2A37"/>
                 </a:solidFill>
                 <a:latin typeface="Calibri" pitchFamily="34" charset="0"/>
-                <a:ea typeface="Calibri" pitchFamily="34" charset="-122"/>
-                <a:cs typeface="Calibri" pitchFamily="34" charset="-120"/>
+                <a:cs typeface="Amiri" pitchFamily="2" charset="-78"/>
               </a:rPr>
               <a:t>I can describe skills with evidence.</a:t>
             </a:r>
@@ -30751,8 +30207,7 @@
                   <a:srgbClr val="FFFFFF"/>
                 </a:solidFill>
                 <a:latin typeface="Calibri" pitchFamily="34" charset="0"/>
-                <a:ea typeface="Calibri" pitchFamily="34" charset="-122"/>
-                <a:cs typeface="Calibri" pitchFamily="34" charset="-120"/>
+                <a:cs typeface="Amiri" pitchFamily="2" charset="-78"/>
               </a:rPr>
               <a:t>DEVELOP</a:t>
             </a:r>
@@ -30849,8 +30304,7 @@
                   <a:srgbClr val="1F2A37"/>
                 </a:solidFill>
                 <a:latin typeface="Calibri" pitchFamily="34" charset="0"/>
-                <a:ea typeface="Calibri" pitchFamily="34" charset="-122"/>
-                <a:cs typeface="Calibri" pitchFamily="34" charset="-120"/>
+                <a:cs typeface="Amiri" pitchFamily="2" charset="-78"/>
               </a:rPr>
               <a:t>I can write a formal application.</a:t>
             </a:r>
@@ -30915,8 +30369,7 @@
                   <a:srgbClr val="FFFFFF"/>
                 </a:solidFill>
                 <a:latin typeface="Calibri" pitchFamily="34" charset="0"/>
-                <a:ea typeface="Calibri" pitchFamily="34" charset="-122"/>
-                <a:cs typeface="Calibri" pitchFamily="34" charset="-120"/>
+                <a:cs typeface="Amiri" pitchFamily="2" charset="-78"/>
               </a:rPr>
               <a:t>DEVELOP</a:t>
             </a:r>
@@ -31013,8 +30466,7 @@
                   <a:srgbClr val="1F2A37"/>
                 </a:solidFill>
                 <a:latin typeface="Calibri" pitchFamily="34" charset="0"/>
-                <a:ea typeface="Calibri" pitchFamily="34" charset="-122"/>
-                <a:cs typeface="Calibri" pitchFamily="34" charset="-120"/>
+                <a:cs typeface="Amiri" pitchFamily="2" charset="-78"/>
               </a:rPr>
               <a:t>I can write a 120–140-word career plan with a concession.</a:t>
             </a:r>
@@ -31079,8 +30531,7 @@
                   <a:srgbClr val="FFFFFF"/>
                 </a:solidFill>
                 <a:latin typeface="Calibri" pitchFamily="34" charset="0"/>
-                <a:ea typeface="Calibri" pitchFamily="34" charset="-122"/>
-                <a:cs typeface="Calibri" pitchFamily="34" charset="-120"/>
+                <a:cs typeface="Amiri" pitchFamily="2" charset="-78"/>
               </a:rPr>
               <a:t>STRETCH</a:t>
             </a:r>
@@ -31152,8 +30603,7 @@
                   <a:srgbClr val="2E8B57"/>
                 </a:solidFill>
                 <a:latin typeface="Calibri" pitchFamily="34" charset="0"/>
-                <a:ea typeface="Calibri" pitchFamily="34" charset="-122"/>
-                <a:cs typeface="Calibri" pitchFamily="34" charset="-120"/>
+                <a:cs typeface="Amiri" pitchFamily="2" charset="-78"/>
               </a:rPr>
               <a:t>WWW</a:t>
             </a:r>
@@ -31169,8 +30619,7 @@
                   <a:srgbClr val="1F2A37"/>
                 </a:solidFill>
                 <a:latin typeface="Calibri" pitchFamily="34" charset="0"/>
-                <a:ea typeface="Calibri" pitchFamily="34" charset="-122"/>
-                <a:cs typeface="Calibri" pitchFamily="34" charset="-120"/>
+                <a:cs typeface="Amiri" pitchFamily="2" charset="-78"/>
               </a:rPr>
               <a:t>What went well? One thing you did accurately.</a:t>
             </a:r>
@@ -31242,8 +30691,7 @@
                   <a:srgbClr val="C9780A"/>
                 </a:solidFill>
                 <a:latin typeface="Calibri" pitchFamily="34" charset="0"/>
-                <a:ea typeface="Calibri" pitchFamily="34" charset="-122"/>
-                <a:cs typeface="Calibri" pitchFamily="34" charset="-120"/>
+                <a:cs typeface="Amiri" pitchFamily="2" charset="-78"/>
               </a:rPr>
               <a:t>EBI</a:t>
             </a:r>
@@ -31259,8 +30707,7 @@
                   <a:srgbClr val="1F2A37"/>
                 </a:solidFill>
                 <a:latin typeface="Calibri" pitchFamily="34" charset="0"/>
-                <a:ea typeface="Calibri" pitchFamily="34" charset="-122"/>
-                <a:cs typeface="Calibri" pitchFamily="34" charset="-120"/>
+                <a:cs typeface="Amiri" pitchFamily="2" charset="-78"/>
               </a:rPr>
               <a:t>Even better if… One thing you will fix or add.</a:t>
             </a:r>
@@ -31298,8 +30745,7 @@
                   <a:srgbClr val="8A93A0"/>
                 </a:solidFill>
                 <a:latin typeface="Calibri" pitchFamily="34" charset="0"/>
-                <a:ea typeface="Calibri" pitchFamily="34" charset="-122"/>
-                <a:cs typeface="Calibri" pitchFamily="34" charset="-120"/>
+                <a:cs typeface="Amiri" pitchFamily="2" charset="-78"/>
               </a:rPr>
               <a:t>21 / 23</a:t>
             </a:r>
@@ -31393,9 +30839,8 @@
                 <a:solidFill>
                   <a:srgbClr val="D4AF37"/>
                 </a:solidFill>
-                <a:latin typeface="Amiri" pitchFamily="34" charset="0"/>
-                <a:ea typeface="Amiri" pitchFamily="34" charset="-122"/>
-                <a:cs typeface="Amiri" pitchFamily="34" charset="-120"/>
+                <a:latin typeface="Amiri" pitchFamily="2" charset="-78"/>
+                <a:cs typeface="Amiri" pitchFamily="2" charset="-78"/>
               </a:rPr>
               <a:t>م</a:t>
             </a:r>
@@ -31433,8 +30878,7 @@
                   <a:srgbClr val="1B3B6F"/>
                 </a:solidFill>
                 <a:latin typeface="Cambria" pitchFamily="34" charset="0"/>
-                <a:ea typeface="Cambria" pitchFamily="34" charset="-122"/>
-                <a:cs typeface="Cambria" pitchFamily="34" charset="-120"/>
+                <a:cs typeface="Amiri" pitchFamily="2" charset="-78"/>
               </a:rPr>
               <a:t>Al Madina Online School</a:t>
             </a:r>
@@ -31472,8 +30916,7 @@
                   <a:srgbClr val="8A6D1E"/>
                 </a:solidFill>
                 <a:latin typeface="Calibri" pitchFamily="34" charset="0"/>
-                <a:ea typeface="Calibri" pitchFamily="34" charset="-122"/>
-                <a:cs typeface="Calibri" pitchFamily="34" charset="-120"/>
+                <a:cs typeface="Amiri" pitchFamily="2" charset="-78"/>
               </a:rPr>
               <a:t>ARABIC DEPARTMENT · MIFTAH ARABIC · IGCSE 0544</a:t>
             </a:r>
@@ -31538,8 +30981,7 @@
                   <a:srgbClr val="FFFFFF"/>
                 </a:solidFill>
                 <a:latin typeface="Calibri" pitchFamily="34" charset="0"/>
-                <a:ea typeface="Calibri" pitchFamily="34" charset="-122"/>
-                <a:cs typeface="Calibri" pitchFamily="34" charset="-120"/>
+                <a:cs typeface="Amiri" pitchFamily="2" charset="-78"/>
               </a:rPr>
               <a:t>D3-L12 · D3 Assessment</a:t>
             </a:r>
@@ -31604,8 +31046,7 @@
                   <a:srgbClr val="FFFFFF"/>
                 </a:solidFill>
                 <a:latin typeface="Calibri" pitchFamily="34" charset="0"/>
-                <a:ea typeface="Calibri" pitchFamily="34" charset="-122"/>
-                <a:cs typeface="Calibri" pitchFamily="34" charset="-120"/>
+                <a:cs typeface="Amiri" pitchFamily="2" charset="-78"/>
               </a:rPr>
               <a:t>PREPARATION · 2 MIN</a:t>
             </a:r>
@@ -31643,8 +31084,7 @@
                   <a:srgbClr val="C45A3C"/>
                 </a:solidFill>
                 <a:latin typeface="Calibri" pitchFamily="34" charset="0"/>
-                <a:ea typeface="Calibri" pitchFamily="34" charset="-122"/>
-                <a:cs typeface="Calibri" pitchFamily="34" charset="-120"/>
+                <a:cs typeface="Amiri" pitchFamily="2" charset="-78"/>
               </a:rPr>
               <a:t>PREPARATION FOR NEXT LESSON · ABOUT 10 MINUTES</a:t>
             </a:r>
@@ -31682,8 +31122,7 @@
                   <a:srgbClr val="1B3B6F"/>
                 </a:solidFill>
                 <a:latin typeface="Cambria" pitchFamily="34" charset="0"/>
-                <a:ea typeface="Cambria" pitchFamily="34" charset="-122"/>
-                <a:cs typeface="Cambria" pitchFamily="34" charset="-120"/>
+                <a:cs typeface="Amiri" pitchFamily="2" charset="-78"/>
               </a:rPr>
               <a:t>Before D4-L01: get ready at home</a:t>
             </a:r>
@@ -31720,9 +31159,8 @@
                 <a:solidFill>
                   <a:srgbClr val="8A6D1E"/>
                 </a:solidFill>
-                <a:latin typeface="Amiri" pitchFamily="34" charset="0"/>
-                <a:ea typeface="Amiri" pitchFamily="34" charset="-122"/>
-                <a:cs typeface="Amiri" pitchFamily="34" charset="-120"/>
+                <a:latin typeface="Amiri" pitchFamily="2" charset="-78"/>
+                <a:cs typeface="Amiri" pitchFamily="2" charset="-78"/>
               </a:rPr>
               <a:t>التَّحْضِيرُ لِلدَّرْسِ القَادِمِ</a:t>
             </a:r>
@@ -31760,8 +31198,7 @@
                   <a:srgbClr val="8A93A0"/>
                 </a:solidFill>
                 <a:latin typeface="Calibri" pitchFamily="34" charset="0"/>
-                <a:ea typeface="Calibri" pitchFamily="34" charset="-122"/>
-                <a:cs typeface="Calibri" pitchFamily="34" charset="-120"/>
+                <a:cs typeface="Amiri" pitchFamily="2" charset="-78"/>
               </a:rPr>
               <a:t>Miftah Arabic · Development D3 · Work and Careers · D3-L12</a:t>
             </a:r>
@@ -31882,8 +31319,7 @@
                   <a:srgbClr val="C45A3C"/>
                 </a:solidFill>
                 <a:latin typeface="Calibri" pitchFamily="34" charset="0"/>
-                <a:ea typeface="Calibri" pitchFamily="34" charset="-122"/>
-                <a:cs typeface="Calibri" pitchFamily="34" charset="-120"/>
+                <a:cs typeface="Amiri" pitchFamily="2" charset="-78"/>
               </a:rPr>
               <a:t>LEARN THESE 5 WORDS</a:t>
             </a:r>
@@ -31899,8 +31335,7 @@
                   <a:srgbClr val="5A6472"/>
                 </a:solidFill>
                 <a:latin typeface="Calibri" pitchFamily="34" charset="0"/>
-                <a:ea typeface="Calibri" pitchFamily="34" charset="-122"/>
-                <a:cs typeface="Calibri" pitchFamily="34" charset="-120"/>
+                <a:cs typeface="Amiri" pitchFamily="2" charset="-78"/>
               </a:rPr>
               <a:t>for D4-L01 · The Natural World — Environment and Climate</a:t>
             </a:r>
@@ -31937,9 +31372,8 @@
                 <a:solidFill>
                   <a:srgbClr val="1B3B6F"/>
                 </a:solidFill>
-                <a:latin typeface="Amiri" pitchFamily="34" charset="0"/>
-                <a:ea typeface="Amiri" pitchFamily="34" charset="-122"/>
-                <a:cs typeface="Amiri" pitchFamily="34" charset="-120"/>
+                <a:latin typeface="Amiri" pitchFamily="2" charset="-78"/>
+                <a:cs typeface="Amiri" pitchFamily="2" charset="-78"/>
               </a:rPr>
               <a:t>البِيئَةُ</a:t>
             </a:r>
@@ -31977,8 +31411,7 @@
                   <a:srgbClr val="1F2A37"/>
                 </a:solidFill>
                 <a:latin typeface="Calibri" pitchFamily="34" charset="0"/>
-                <a:ea typeface="Calibri" pitchFamily="34" charset="-122"/>
-                <a:cs typeface="Calibri" pitchFamily="34" charset="-120"/>
+                <a:cs typeface="Amiri" pitchFamily="2" charset="-78"/>
               </a:rPr>
               <a:t>the environment</a:t>
             </a:r>
@@ -31991,8 +31424,7 @@
                   <a:srgbClr val="5A6472"/>
                 </a:solidFill>
                 <a:latin typeface="Calibri" pitchFamily="34" charset="0"/>
-                <a:ea typeface="Calibri" pitchFamily="34" charset="-122"/>
-                <a:cs typeface="Calibri" pitchFamily="34" charset="-120"/>
+                <a:cs typeface="Amiri" pitchFamily="2" charset="-78"/>
               </a:rPr>
               <a:t>  —</a:t>
             </a:r>
@@ -32029,9 +31461,8 @@
                 <a:solidFill>
                   <a:srgbClr val="1B3B6F"/>
                 </a:solidFill>
-                <a:latin typeface="Amiri" pitchFamily="34" charset="0"/>
-                <a:ea typeface="Amiri" pitchFamily="34" charset="-122"/>
-                <a:cs typeface="Amiri" pitchFamily="34" charset="-120"/>
+                <a:latin typeface="Amiri" pitchFamily="2" charset="-78"/>
+                <a:cs typeface="Amiri" pitchFamily="2" charset="-78"/>
               </a:rPr>
               <a:t>المَنَاخُ</a:t>
             </a:r>
@@ -32069,8 +31500,7 @@
                   <a:srgbClr val="1F2A37"/>
                 </a:solidFill>
                 <a:latin typeface="Calibri" pitchFamily="34" charset="0"/>
-                <a:ea typeface="Calibri" pitchFamily="34" charset="-122"/>
-                <a:cs typeface="Calibri" pitchFamily="34" charset="-120"/>
+                <a:cs typeface="Amiri" pitchFamily="2" charset="-78"/>
               </a:rPr>
               <a:t>the climate</a:t>
             </a:r>
@@ -32083,8 +31513,7 @@
                   <a:srgbClr val="5A6472"/>
                 </a:solidFill>
                 <a:latin typeface="Calibri" pitchFamily="34" charset="0"/>
-                <a:ea typeface="Calibri" pitchFamily="34" charset="-122"/>
-                <a:cs typeface="Calibri" pitchFamily="34" charset="-120"/>
+                <a:cs typeface="Amiri" pitchFamily="2" charset="-78"/>
               </a:rPr>
               <a:t>  —</a:t>
             </a:r>
@@ -32121,9 +31550,8 @@
                 <a:solidFill>
                   <a:srgbClr val="1B3B6F"/>
                 </a:solidFill>
-                <a:latin typeface="Amiri" pitchFamily="34" charset="0"/>
-                <a:ea typeface="Amiri" pitchFamily="34" charset="-122"/>
-                <a:cs typeface="Amiri" pitchFamily="34" charset="-120"/>
+                <a:latin typeface="Amiri" pitchFamily="2" charset="-78"/>
+                <a:cs typeface="Amiri" pitchFamily="2" charset="-78"/>
               </a:rPr>
               <a:t>الطَّقْسُ</a:t>
             </a:r>
@@ -32161,8 +31589,7 @@
                   <a:srgbClr val="1F2A37"/>
                 </a:solidFill>
                 <a:latin typeface="Calibri" pitchFamily="34" charset="0"/>
-                <a:ea typeface="Calibri" pitchFamily="34" charset="-122"/>
-                <a:cs typeface="Calibri" pitchFamily="34" charset="-120"/>
+                <a:cs typeface="Amiri" pitchFamily="2" charset="-78"/>
               </a:rPr>
               <a:t>the weather</a:t>
             </a:r>
@@ -32175,8 +31602,7 @@
                   <a:srgbClr val="5A6472"/>
                 </a:solidFill>
                 <a:latin typeface="Calibri" pitchFamily="34" charset="0"/>
-                <a:ea typeface="Calibri" pitchFamily="34" charset="-122"/>
-                <a:cs typeface="Calibri" pitchFamily="34" charset="-120"/>
+                <a:cs typeface="Amiri" pitchFamily="2" charset="-78"/>
               </a:rPr>
               <a:t>  —</a:t>
             </a:r>
@@ -32213,9 +31639,8 @@
                 <a:solidFill>
                   <a:srgbClr val="1B3B6F"/>
                 </a:solidFill>
-                <a:latin typeface="Amiri" pitchFamily="34" charset="0"/>
-                <a:ea typeface="Amiri" pitchFamily="34" charset="-122"/>
-                <a:cs typeface="Amiri" pitchFamily="34" charset="-120"/>
+                <a:latin typeface="Amiri" pitchFamily="2" charset="-78"/>
+                <a:cs typeface="Amiri" pitchFamily="2" charset="-78"/>
               </a:rPr>
               <a:t>الصَّحْرَاءُ</a:t>
             </a:r>
@@ -32253,8 +31678,7 @@
                   <a:srgbClr val="1F2A37"/>
                 </a:solidFill>
                 <a:latin typeface="Calibri" pitchFamily="34" charset="0"/>
-                <a:ea typeface="Calibri" pitchFamily="34" charset="-122"/>
-                <a:cs typeface="Calibri" pitchFamily="34" charset="-120"/>
+                <a:cs typeface="Amiri" pitchFamily="2" charset="-78"/>
               </a:rPr>
               <a:t>the desert</a:t>
             </a:r>
@@ -32267,8 +31691,7 @@
                   <a:srgbClr val="5A6472"/>
                 </a:solidFill>
                 <a:latin typeface="Calibri" pitchFamily="34" charset="0"/>
-                <a:ea typeface="Calibri" pitchFamily="34" charset="-122"/>
-                <a:cs typeface="Calibri" pitchFamily="34" charset="-120"/>
+                <a:cs typeface="Amiri" pitchFamily="2" charset="-78"/>
               </a:rPr>
               <a:t>  pl. الصَّحَارِي</a:t>
             </a:r>
@@ -32305,9 +31728,8 @@
                 <a:solidFill>
                   <a:srgbClr val="1B3B6F"/>
                 </a:solidFill>
-                <a:latin typeface="Amiri" pitchFamily="34" charset="0"/>
-                <a:ea typeface="Amiri" pitchFamily="34" charset="-122"/>
-                <a:cs typeface="Amiri" pitchFamily="34" charset="-120"/>
+                <a:latin typeface="Amiri" pitchFamily="2" charset="-78"/>
+                <a:cs typeface="Amiri" pitchFamily="2" charset="-78"/>
               </a:rPr>
               <a:t>الغَابَةُ</a:t>
             </a:r>
@@ -32345,8 +31767,7 @@
                   <a:srgbClr val="1F2A37"/>
                 </a:solidFill>
                 <a:latin typeface="Calibri" pitchFamily="34" charset="0"/>
-                <a:ea typeface="Calibri" pitchFamily="34" charset="-122"/>
-                <a:cs typeface="Calibri" pitchFamily="34" charset="-120"/>
+                <a:cs typeface="Amiri" pitchFamily="2" charset="-78"/>
               </a:rPr>
               <a:t>the forest</a:t>
             </a:r>
@@ -32359,8 +31780,7 @@
                   <a:srgbClr val="5A6472"/>
                 </a:solidFill>
                 <a:latin typeface="Calibri" pitchFamily="34" charset="0"/>
-                <a:ea typeface="Calibri" pitchFamily="34" charset="-122"/>
-                <a:cs typeface="Calibri" pitchFamily="34" charset="-120"/>
+                <a:cs typeface="Amiri" pitchFamily="2" charset="-78"/>
               </a:rPr>
               <a:t>  pl. الغَابَاتُ</a:t>
             </a:r>
@@ -32398,8 +31818,7 @@
                   <a:srgbClr val="C45A3C"/>
                 </a:solidFill>
                 <a:latin typeface="Calibri" pitchFamily="34" charset="0"/>
-                <a:ea typeface="Calibri" pitchFamily="34" charset="-122"/>
-                <a:cs typeface="Calibri" pitchFamily="34" charset="-120"/>
+                <a:cs typeface="Amiri" pitchFamily="2" charset="-78"/>
               </a:rPr>
               <a:t>AND ANSWER ONE QUESTION</a:t>
             </a:r>
@@ -32437,8 +31856,7 @@
                   <a:srgbClr val="1F2A37"/>
                 </a:solidFill>
                 <a:latin typeface="Calibri" pitchFamily="34" charset="0"/>
-                <a:ea typeface="Calibri" pitchFamily="34" charset="-122"/>
-                <a:cs typeface="Calibri" pitchFamily="34" charset="-120"/>
+                <a:cs typeface="Amiri" pitchFamily="2" charset="-78"/>
               </a:rPr>
               <a:t>Describe the weather where you live today in one Arabic sentence.</a:t>
             </a:r>
@@ -32475,9 +31893,8 @@
                 <a:solidFill>
                   <a:srgbClr val="1B3B6F"/>
                 </a:solidFill>
-                <a:latin typeface="Amiri" pitchFamily="34" charset="0"/>
-                <a:ea typeface="Amiri" pitchFamily="34" charset="-122"/>
-                <a:cs typeface="Amiri" pitchFamily="34" charset="-120"/>
+                <a:latin typeface="Amiri" pitchFamily="2" charset="-78"/>
+                <a:cs typeface="Amiri" pitchFamily="2" charset="-78"/>
               </a:rPr>
               <a:t>الطَّقْسُ اليَوْمَ …</a:t>
             </a:r>
@@ -32515,8 +31932,7 @@
                   <a:srgbClr val="1B3B6F"/>
                 </a:solidFill>
                 <a:latin typeface="Calibri" pitchFamily="34" charset="0"/>
-                <a:ea typeface="Calibri" pitchFamily="34" charset="-122"/>
-                <a:cs typeface="Calibri" pitchFamily="34" charset="-120"/>
+                <a:cs typeface="Amiri" pitchFamily="2" charset="-78"/>
               </a:rPr>
               <a:t>HOMEWORK — CHOOSE YOUR ROUTE</a:t>
             </a:r>
@@ -32615,8 +32031,7 @@
                   <a:srgbClr val="FFFFFF"/>
                 </a:solidFill>
                 <a:latin typeface="Calibri" pitchFamily="34" charset="0"/>
-                <a:ea typeface="Calibri" pitchFamily="34" charset="-122"/>
-                <a:cs typeface="Calibri" pitchFamily="34" charset="-120"/>
+                <a:cs typeface="Amiri" pitchFamily="2" charset="-78"/>
               </a:rPr>
               <a:t>CORE</a:t>
             </a:r>
@@ -32654,8 +32069,7 @@
                   <a:srgbClr val="1F2A37"/>
                 </a:solidFill>
                 <a:latin typeface="Calibri" pitchFamily="34" charset="0"/>
-                <a:ea typeface="Calibri" pitchFamily="34" charset="-122"/>
-                <a:cs typeface="Calibri" pitchFamily="34" charset="-120"/>
+                <a:cs typeface="Amiri" pitchFamily="2" charset="-78"/>
               </a:rPr>
               <a:t>Redo the website D3-L12 section with your lowest score; learn the five environment words.</a:t>
             </a:r>
@@ -32754,8 +32168,7 @@
                   <a:srgbClr val="FFFFFF"/>
                 </a:solidFill>
                 <a:latin typeface="Calibri" pitchFamily="34" charset="0"/>
-                <a:ea typeface="Calibri" pitchFamily="34" charset="-122"/>
-                <a:cs typeface="Calibri" pitchFamily="34" charset="-120"/>
+                <a:cs typeface="Amiri" pitchFamily="2" charset="-78"/>
               </a:rPr>
               <a:t>DEVELOP</a:t>
             </a:r>
@@ -32793,8 +32206,7 @@
                   <a:srgbClr val="1F2A37"/>
                 </a:solidFill>
                 <a:latin typeface="Calibri" pitchFamily="34" charset="0"/>
-                <a:ea typeface="Calibri" pitchFamily="34" charset="-122"/>
-                <a:cs typeface="Calibri" pitchFamily="34" charset="-120"/>
+                <a:cs typeface="Amiri" pitchFamily="2" charset="-78"/>
               </a:rPr>
               <a:t>Improve one paragraph of your assessed article, then learn the five environment words.</a:t>
             </a:r>
@@ -32893,8 +32305,7 @@
                   <a:srgbClr val="FFFFFF"/>
                 </a:solidFill>
                 <a:latin typeface="Calibri" pitchFamily="34" charset="0"/>
-                <a:ea typeface="Calibri" pitchFamily="34" charset="-122"/>
-                <a:cs typeface="Calibri" pitchFamily="34" charset="-120"/>
+                <a:cs typeface="Amiri" pitchFamily="2" charset="-78"/>
               </a:rPr>
               <a:t>STRETCH</a:t>
             </a:r>
@@ -32932,8 +32343,7 @@
                   <a:srgbClr val="1F2A37"/>
                 </a:solidFill>
                 <a:latin typeface="Calibri" pitchFamily="34" charset="0"/>
-                <a:ea typeface="Calibri" pitchFamily="34" charset="-122"/>
-                <a:cs typeface="Calibri" pitchFamily="34" charset="-120"/>
+                <a:cs typeface="Amiri" pitchFamily="2" charset="-78"/>
               </a:rPr>
               <a:t>Write three sentences about the climate of a country you know, using the five words.</a:t>
             </a:r>
@@ -32971,8 +32381,7 @@
                   <a:srgbClr val="8A93A0"/>
                 </a:solidFill>
                 <a:latin typeface="Calibri" pitchFamily="34" charset="0"/>
-                <a:ea typeface="Calibri" pitchFamily="34" charset="-122"/>
-                <a:cs typeface="Calibri" pitchFamily="34" charset="-120"/>
+                <a:cs typeface="Amiri" pitchFamily="2" charset="-78"/>
               </a:rPr>
               <a:t>22 / 23</a:t>
             </a:r>
@@ -33116,8 +32525,7 @@
                   <a:srgbClr val="D4AF37"/>
                 </a:solidFill>
                 <a:latin typeface="Calibri" pitchFamily="34" charset="0"/>
-                <a:ea typeface="Calibri" pitchFamily="34" charset="-122"/>
-                <a:cs typeface="Calibri" pitchFamily="34" charset="-120"/>
+                <a:cs typeface="Amiri" pitchFamily="2" charset="-78"/>
               </a:rPr>
               <a:t>D3-L12 COMPLETE</a:t>
             </a:r>
@@ -33154,9 +32562,8 @@
                 <a:solidFill>
                   <a:srgbClr val="FFFFFF"/>
                 </a:solidFill>
-                <a:latin typeface="Amiri" pitchFamily="34" charset="0"/>
-                <a:ea typeface="Amiri" pitchFamily="34" charset="-122"/>
-                <a:cs typeface="Amiri" pitchFamily="34" charset="-120"/>
+                <a:latin typeface="Amiri" pitchFamily="2" charset="-78"/>
+                <a:cs typeface="Amiri" pitchFamily="2" charset="-78"/>
               </a:rPr>
               <a:t>أَحْسَنْتُمْ! إِلَى اللِّقَاءِ</a:t>
             </a:r>
@@ -33194,8 +32601,7 @@
                   <a:srgbClr val="C6D2E6"/>
                 </a:solidFill>
                 <a:latin typeface="Calibri" pitchFamily="34" charset="0"/>
-                <a:ea typeface="Calibri" pitchFamily="34" charset="-122"/>
-                <a:cs typeface="Calibri" pitchFamily="34" charset="-120"/>
+                <a:cs typeface="Amiri" pitchFamily="2" charset="-78"/>
               </a:rPr>
               <a:t>Well done — see you next lesson.</a:t>
             </a:r>
@@ -33233,8 +32639,7 @@
                   <a:srgbClr val="D4AF37"/>
                 </a:solidFill>
                 <a:latin typeface="Calibri" pitchFamily="34" charset="0"/>
-                <a:ea typeface="Calibri" pitchFamily="34" charset="-122"/>
-                <a:cs typeface="Calibri" pitchFamily="34" charset="-120"/>
+                <a:cs typeface="Amiri" pitchFamily="2" charset="-78"/>
               </a:rPr>
               <a:t>NEXT LESSON</a:t>
             </a:r>
@@ -33272,8 +32677,7 @@
                   <a:srgbClr val="FFFFFF"/>
                 </a:solidFill>
                 <a:latin typeface="Cambria" pitchFamily="34" charset="0"/>
-                <a:ea typeface="Cambria" pitchFamily="34" charset="-122"/>
-                <a:cs typeface="Cambria" pitchFamily="34" charset="-120"/>
+                <a:cs typeface="Amiri" pitchFamily="2" charset="-78"/>
               </a:rPr>
               <a:t>D4-L01 · The Natural World — Environment and Climate</a:t>
             </a:r>
@@ -33310,9 +32714,8 @@
                 <a:solidFill>
                   <a:srgbClr val="D4AF37"/>
                 </a:solidFill>
-                <a:latin typeface="Amiri" pitchFamily="34" charset="0"/>
-                <a:ea typeface="Amiri" pitchFamily="34" charset="-122"/>
-                <a:cs typeface="Amiri" pitchFamily="34" charset="-120"/>
+                <a:latin typeface="Amiri" pitchFamily="2" charset="-78"/>
+                <a:cs typeface="Amiri" pitchFamily="2" charset="-78"/>
               </a:rPr>
               <a:t>العَالَمُ الطَّبِيعِيُّ</a:t>
             </a:r>
@@ -33350,8 +32753,7 @@
                   <a:srgbClr val="FFFFFF"/>
                 </a:solidFill>
                 <a:latin typeface="Calibri" pitchFamily="34" charset="0"/>
-                <a:ea typeface="Calibri" pitchFamily="34" charset="-122"/>
-                <a:cs typeface="Calibri" pitchFamily="34" charset="-120"/>
+                <a:cs typeface="Amiri" pitchFamily="2" charset="-78"/>
               </a:rPr>
               <a:t>D3 complete — well done! Carry the four audits into D4: agreement, patterns, tense, evidence.</a:t>
             </a:r>
@@ -33445,9 +32847,8 @@
                 <a:solidFill>
                   <a:srgbClr val="D4AF37"/>
                 </a:solidFill>
-                <a:latin typeface="Amiri" pitchFamily="34" charset="0"/>
-                <a:ea typeface="Amiri" pitchFamily="34" charset="-122"/>
-                <a:cs typeface="Amiri" pitchFamily="34" charset="-120"/>
+                <a:latin typeface="Amiri" pitchFamily="2" charset="-78"/>
+                <a:cs typeface="Amiri" pitchFamily="2" charset="-78"/>
               </a:rPr>
               <a:t>م</a:t>
             </a:r>
@@ -33485,8 +32886,7 @@
                   <a:srgbClr val="1B3B6F"/>
                 </a:solidFill>
                 <a:latin typeface="Cambria" pitchFamily="34" charset="0"/>
-                <a:ea typeface="Cambria" pitchFamily="34" charset="-122"/>
-                <a:cs typeface="Cambria" pitchFamily="34" charset="-120"/>
+                <a:cs typeface="Amiri" pitchFamily="2" charset="-78"/>
               </a:rPr>
               <a:t>Al Madina Online School</a:t>
             </a:r>
@@ -33524,8 +32924,7 @@
                   <a:srgbClr val="8A6D1E"/>
                 </a:solidFill>
                 <a:latin typeface="Calibri" pitchFamily="34" charset="0"/>
-                <a:ea typeface="Calibri" pitchFamily="34" charset="-122"/>
-                <a:cs typeface="Calibri" pitchFamily="34" charset="-120"/>
+                <a:cs typeface="Amiri" pitchFamily="2" charset="-78"/>
               </a:rPr>
               <a:t>ARABIC DEPARTMENT · MIFTAH ARABIC · IGCSE 0544</a:t>
             </a:r>
@@ -33590,8 +32989,7 @@
                   <a:srgbClr val="FFFFFF"/>
                 </a:solidFill>
                 <a:latin typeface="Calibri" pitchFamily="34" charset="0"/>
-                <a:ea typeface="Calibri" pitchFamily="34" charset="-122"/>
-                <a:cs typeface="Calibri" pitchFamily="34" charset="-120"/>
+                <a:cs typeface="Amiri" pitchFamily="2" charset="-78"/>
               </a:rPr>
               <a:t>D3-L12 · D3 Assessment</a:t>
             </a:r>
@@ -33656,8 +33054,7 @@
                   <a:srgbClr val="FFFFFF"/>
                 </a:solidFill>
                 <a:latin typeface="Calibri" pitchFamily="34" charset="0"/>
-                <a:ea typeface="Calibri" pitchFamily="34" charset="-122"/>
-                <a:cs typeface="Calibri" pitchFamily="34" charset="-120"/>
+                <a:cs typeface="Amiri" pitchFamily="2" charset="-78"/>
               </a:rPr>
               <a:t>WELCOME</a:t>
             </a:r>
@@ -33695,8 +33092,7 @@
                   <a:srgbClr val="5A6472"/>
                 </a:solidFill>
                 <a:latin typeface="Calibri" pitchFamily="34" charset="0"/>
-                <a:ea typeface="Calibri" pitchFamily="34" charset="-122"/>
-                <a:cs typeface="Calibri" pitchFamily="34" charset="-120"/>
+                <a:cs typeface="Amiri" pitchFamily="2" charset="-78"/>
               </a:rPr>
               <a:t>TODAY’S LESSON MAP</a:t>
             </a:r>
@@ -33734,8 +33130,7 @@
                   <a:srgbClr val="1B3B6F"/>
                 </a:solidFill>
                 <a:latin typeface="Cambria" pitchFamily="34" charset="0"/>
-                <a:ea typeface="Cambria" pitchFamily="34" charset="-122"/>
-                <a:cs typeface="Cambria" pitchFamily="34" charset="-120"/>
+                <a:cs typeface="Amiri" pitchFamily="2" charset="-78"/>
               </a:rPr>
               <a:t>Our assessment, step by step</a:t>
             </a:r>
@@ -33772,9 +33167,8 @@
                 <a:solidFill>
                   <a:srgbClr val="8A6D1E"/>
                 </a:solidFill>
-                <a:latin typeface="Amiri" pitchFamily="34" charset="0"/>
-                <a:ea typeface="Amiri" pitchFamily="34" charset="-122"/>
-                <a:cs typeface="Amiri" pitchFamily="34" charset="-120"/>
+                <a:latin typeface="Amiri" pitchFamily="2" charset="-78"/>
+                <a:cs typeface="Amiri" pitchFamily="2" charset="-78"/>
               </a:rPr>
               <a:t>خَرِيطَةُ الدَّرْسِ</a:t>
             </a:r>
@@ -33812,8 +33206,7 @@
                   <a:srgbClr val="8A93A0"/>
                 </a:solidFill>
                 <a:latin typeface="Calibri" pitchFamily="34" charset="0"/>
-                <a:ea typeface="Calibri" pitchFamily="34" charset="-122"/>
-                <a:cs typeface="Calibri" pitchFamily="34" charset="-120"/>
+                <a:cs typeface="Amiri" pitchFamily="2" charset="-78"/>
               </a:rPr>
               <a:t>Miftah Arabic · Development D3 · Work and Careers · D3-L12</a:t>
             </a:r>
@@ -33912,8 +33305,7 @@
                   <a:srgbClr val="FFFFFF"/>
                 </a:solidFill>
                 <a:latin typeface="Calibri" pitchFamily="34" charset="0"/>
-                <a:ea typeface="Calibri" pitchFamily="34" charset="-122"/>
-                <a:cs typeface="Calibri" pitchFamily="34" charset="-120"/>
+                <a:cs typeface="Amiri" pitchFamily="2" charset="-78"/>
               </a:rPr>
               <a:t>DO NOW</a:t>
             </a:r>
@@ -33951,8 +33343,7 @@
                   <a:srgbClr val="E8EDF5"/>
                 </a:solidFill>
                 <a:latin typeface="Calibri" pitchFamily="34" charset="0"/>
-                <a:ea typeface="Calibri" pitchFamily="34" charset="-122"/>
-                <a:cs typeface="Calibri" pitchFamily="34" charset="-120"/>
+                <a:cs typeface="Amiri" pitchFamily="2" charset="-78"/>
               </a:rPr>
               <a:t>4 min</a:t>
             </a:r>
@@ -34015,8 +33406,7 @@
                   <a:srgbClr val="1B3B6F"/>
                 </a:solidFill>
                 <a:latin typeface="Calibri" pitchFamily="34" charset="0"/>
-                <a:ea typeface="Calibri" pitchFamily="34" charset="-122"/>
-                <a:cs typeface="Calibri" pitchFamily="34" charset="-120"/>
+                <a:cs typeface="Amiri" pitchFamily="2" charset="-78"/>
               </a:rPr>
               <a:t>1</a:t>
             </a:r>
@@ -34054,8 +33444,7 @@
                   <a:srgbClr val="1F2A37"/>
                 </a:solidFill>
                 <a:latin typeface="Calibri" pitchFamily="34" charset="0"/>
-                <a:ea typeface="Calibri" pitchFamily="34" charset="-122"/>
-                <a:cs typeface="Calibri" pitchFamily="34" charset="-120"/>
+                <a:cs typeface="Amiri" pitchFamily="2" charset="-78"/>
               </a:rPr>
               <a:t>Grammar laboratory (not marked).</a:t>
             </a:r>
@@ -34092,9 +33481,8 @@
                 <a:solidFill>
                   <a:srgbClr val="0E7C86"/>
                 </a:solidFill>
-                <a:latin typeface="Amiri" pitchFamily="34" charset="0"/>
-                <a:ea typeface="Amiri" pitchFamily="34" charset="-122"/>
-                <a:cs typeface="Amiri" pitchFamily="34" charset="-120"/>
+                <a:latin typeface="Amiri" pitchFamily="2" charset="-78"/>
+                <a:cs typeface="Amiri" pitchFamily="2" charset="-78"/>
               </a:rPr>
               <a:t>تَهْيِئَةٌ</a:t>
             </a:r>
@@ -34193,8 +33581,7 @@
                   <a:srgbClr val="FFFFFF"/>
                 </a:solidFill>
                 <a:latin typeface="Calibri" pitchFamily="34" charset="0"/>
-                <a:ea typeface="Calibri" pitchFamily="34" charset="-122"/>
-                <a:cs typeface="Calibri" pitchFamily="34" charset="-120"/>
+                <a:cs typeface="Amiri" pitchFamily="2" charset="-78"/>
               </a:rPr>
               <a:t>TEACHER INSTRUCTION</a:t>
             </a:r>
@@ -34232,8 +33619,7 @@
                   <a:srgbClr val="E8EDF5"/>
                 </a:solidFill>
                 <a:latin typeface="Calibri" pitchFamily="34" charset="0"/>
-                <a:ea typeface="Calibri" pitchFamily="34" charset="-122"/>
-                <a:cs typeface="Calibri" pitchFamily="34" charset="-120"/>
+                <a:cs typeface="Amiri" pitchFamily="2" charset="-78"/>
               </a:rPr>
               <a:t>2 min</a:t>
             </a:r>
@@ -34296,8 +33682,7 @@
                   <a:srgbClr val="1B3B6F"/>
                 </a:solidFill>
                 <a:latin typeface="Calibri" pitchFamily="34" charset="0"/>
-                <a:ea typeface="Calibri" pitchFamily="34" charset="-122"/>
-                <a:cs typeface="Calibri" pitchFamily="34" charset="-120"/>
+                <a:cs typeface="Amiri" pitchFamily="2" charset="-78"/>
               </a:rPr>
               <a:t>2</a:t>
             </a:r>
@@ -34335,8 +33720,7 @@
                   <a:srgbClr val="1F2A37"/>
                 </a:solidFill>
                 <a:latin typeface="Calibri" pitchFamily="34" charset="0"/>
-                <a:ea typeface="Calibri" pitchFamily="34" charset="-122"/>
-                <a:cs typeface="Calibri" pitchFamily="34" charset="-120"/>
+                <a:cs typeface="Amiri" pitchFamily="2" charset="-78"/>
               </a:rPr>
               <a:t>The four audits and the 60-mark map.</a:t>
             </a:r>
@@ -34373,9 +33757,8 @@
                 <a:solidFill>
                   <a:srgbClr val="1B3B6F"/>
                 </a:solidFill>
-                <a:latin typeface="Amiri" pitchFamily="34" charset="0"/>
-                <a:ea typeface="Amiri" pitchFamily="34" charset="-122"/>
-                <a:cs typeface="Amiri" pitchFamily="34" charset="-120"/>
+                <a:latin typeface="Amiri" pitchFamily="2" charset="-78"/>
+                <a:cs typeface="Amiri" pitchFamily="2" charset="-78"/>
               </a:rPr>
               <a:t>خُطَّةُ التَّقْيِيمِ</a:t>
             </a:r>
@@ -34474,8 +33857,7 @@
                   <a:srgbClr val="FFFFFF"/>
                 </a:solidFill>
                 <a:latin typeface="Calibri" pitchFamily="34" charset="0"/>
-                <a:ea typeface="Calibri" pitchFamily="34" charset="-122"/>
-                <a:cs typeface="Calibri" pitchFamily="34" charset="-120"/>
+                <a:cs typeface="Amiri" pitchFamily="2" charset="-78"/>
               </a:rPr>
               <a:t>I DO</a:t>
             </a:r>
@@ -34513,8 +33895,7 @@
                   <a:srgbClr val="E8EDF5"/>
                 </a:solidFill>
                 <a:latin typeface="Calibri" pitchFamily="34" charset="0"/>
-                <a:ea typeface="Calibri" pitchFamily="34" charset="-122"/>
-                <a:cs typeface="Calibri" pitchFamily="34" charset="-120"/>
+                <a:cs typeface="Amiri" pitchFamily="2" charset="-78"/>
               </a:rPr>
               <a:t>12 min</a:t>
             </a:r>
@@ -34577,8 +33958,7 @@
                   <a:srgbClr val="1B3B6F"/>
                 </a:solidFill>
                 <a:latin typeface="Calibri" pitchFamily="34" charset="0"/>
-                <a:ea typeface="Calibri" pitchFamily="34" charset="-122"/>
-                <a:cs typeface="Calibri" pitchFamily="34" charset="-120"/>
+                <a:cs typeface="Amiri" pitchFamily="2" charset="-78"/>
               </a:rPr>
               <a:t>3</a:t>
             </a:r>
@@ -34616,8 +33996,7 @@
                   <a:srgbClr val="1F2A37"/>
                 </a:solidFill>
                 <a:latin typeface="Calibri" pitchFamily="34" charset="0"/>
-                <a:ea typeface="Calibri" pitchFamily="34" charset="-122"/>
-                <a:cs typeface="Calibri" pitchFamily="34" charset="-120"/>
+                <a:cs typeface="Amiri" pitchFamily="2" charset="-78"/>
               </a:rPr>
               <a:t>Listening: 20 marks.</a:t>
             </a:r>
@@ -34654,9 +34033,8 @@
                 <a:solidFill>
                   <a:srgbClr val="6B4C9A"/>
                 </a:solidFill>
-                <a:latin typeface="Amiri" pitchFamily="34" charset="0"/>
-                <a:ea typeface="Amiri" pitchFamily="34" charset="-122"/>
-                <a:cs typeface="Amiri" pitchFamily="34" charset="-120"/>
+                <a:latin typeface="Amiri" pitchFamily="2" charset="-78"/>
+                <a:cs typeface="Amiri" pitchFamily="2" charset="-78"/>
               </a:rPr>
               <a:t>الاِسْتِمَاعُ</a:t>
             </a:r>
@@ -34755,8 +34133,7 @@
                   <a:srgbClr val="FFFFFF"/>
                 </a:solidFill>
                 <a:latin typeface="Calibri" pitchFamily="34" charset="0"/>
-                <a:ea typeface="Calibri" pitchFamily="34" charset="-122"/>
-                <a:cs typeface="Calibri" pitchFamily="34" charset="-120"/>
+                <a:cs typeface="Amiri" pitchFamily="2" charset="-78"/>
               </a:rPr>
               <a:t>WE DO</a:t>
             </a:r>
@@ -34794,8 +34171,7 @@
                   <a:srgbClr val="E8EDF5"/>
                 </a:solidFill>
                 <a:latin typeface="Calibri" pitchFamily="34" charset="0"/>
-                <a:ea typeface="Calibri" pitchFamily="34" charset="-122"/>
-                <a:cs typeface="Calibri" pitchFamily="34" charset="-120"/>
+                <a:cs typeface="Amiri" pitchFamily="2" charset="-78"/>
               </a:rPr>
               <a:t>8 min</a:t>
             </a:r>
@@ -34858,8 +34234,7 @@
                   <a:srgbClr val="1B3B6F"/>
                 </a:solidFill>
                 <a:latin typeface="Calibri" pitchFamily="34" charset="0"/>
-                <a:ea typeface="Calibri" pitchFamily="34" charset="-122"/>
-                <a:cs typeface="Calibri" pitchFamily="34" charset="-120"/>
+                <a:cs typeface="Amiri" pitchFamily="2" charset="-78"/>
               </a:rPr>
               <a:t>4</a:t>
             </a:r>
@@ -34897,8 +34272,7 @@
                   <a:srgbClr val="1F2A37"/>
                 </a:solidFill>
                 <a:latin typeface="Calibri" pitchFamily="34" charset="0"/>
-                <a:ea typeface="Calibri" pitchFamily="34" charset="-122"/>
-                <a:cs typeface="Calibri" pitchFamily="34" charset="-120"/>
+                <a:cs typeface="Amiri" pitchFamily="2" charset="-78"/>
               </a:rPr>
               <a:t>Reading: 10 marks.</a:t>
             </a:r>
@@ -34935,9 +34309,8 @@
                 <a:solidFill>
                   <a:srgbClr val="2F6FB0"/>
                 </a:solidFill>
-                <a:latin typeface="Amiri" pitchFamily="34" charset="0"/>
-                <a:ea typeface="Amiri" pitchFamily="34" charset="-122"/>
-                <a:cs typeface="Amiri" pitchFamily="34" charset="-120"/>
+                <a:latin typeface="Amiri" pitchFamily="2" charset="-78"/>
+                <a:cs typeface="Amiri" pitchFamily="2" charset="-78"/>
               </a:rPr>
               <a:t>القِرَاءَةُ</a:t>
             </a:r>
@@ -35036,8 +34409,7 @@
                   <a:srgbClr val="FFFFFF"/>
                 </a:solidFill>
                 <a:latin typeface="Calibri" pitchFamily="34" charset="0"/>
-                <a:ea typeface="Calibri" pitchFamily="34" charset="-122"/>
-                <a:cs typeface="Calibri" pitchFamily="34" charset="-120"/>
+                <a:cs typeface="Amiri" pitchFamily="2" charset="-78"/>
               </a:rPr>
               <a:t>YOU DO</a:t>
             </a:r>
@@ -35075,8 +34447,7 @@
                   <a:srgbClr val="E8EDF5"/>
                 </a:solidFill>
                 <a:latin typeface="Calibri" pitchFamily="34" charset="0"/>
-                <a:ea typeface="Calibri" pitchFamily="34" charset="-122"/>
-                <a:cs typeface="Calibri" pitchFamily="34" charset="-120"/>
+                <a:cs typeface="Amiri" pitchFamily="2" charset="-78"/>
               </a:rPr>
               <a:t>28 min</a:t>
             </a:r>
@@ -35139,8 +34510,7 @@
                   <a:srgbClr val="1B3B6F"/>
                 </a:solidFill>
                 <a:latin typeface="Calibri" pitchFamily="34" charset="0"/>
-                <a:ea typeface="Calibri" pitchFamily="34" charset="-122"/>
-                <a:cs typeface="Calibri" pitchFamily="34" charset="-120"/>
+                <a:cs typeface="Amiri" pitchFamily="2" charset="-78"/>
               </a:rPr>
               <a:t>5</a:t>
             </a:r>
@@ -35178,8 +34548,7 @@
                   <a:srgbClr val="1F2A37"/>
                 </a:solidFill>
                 <a:latin typeface="Calibri" pitchFamily="34" charset="0"/>
-                <a:ea typeface="Calibri" pitchFamily="34" charset="-122"/>
-                <a:cs typeface="Calibri" pitchFamily="34" charset="-120"/>
+                <a:cs typeface="Amiri" pitchFamily="2" charset="-78"/>
               </a:rPr>
               <a:t>Writing 20 + speaking 10.</a:t>
             </a:r>
@@ -35216,9 +34585,8 @@
                 <a:solidFill>
                   <a:srgbClr val="1E6B52"/>
                 </a:solidFill>
-                <a:latin typeface="Amiri" pitchFamily="34" charset="0"/>
-                <a:ea typeface="Amiri" pitchFamily="34" charset="-122"/>
-                <a:cs typeface="Amiri" pitchFamily="34" charset="-120"/>
+                <a:latin typeface="Amiri" pitchFamily="2" charset="-78"/>
+                <a:cs typeface="Amiri" pitchFamily="2" charset="-78"/>
               </a:rPr>
               <a:t>الكِتَابَةُ وَالتَّحَدُّثُ</a:t>
             </a:r>
@@ -35317,8 +34685,7 @@
                   <a:srgbClr val="FFFFFF"/>
                 </a:solidFill>
                 <a:latin typeface="Calibri" pitchFamily="34" charset="0"/>
-                <a:ea typeface="Calibri" pitchFamily="34" charset="-122"/>
-                <a:cs typeface="Calibri" pitchFamily="34" charset="-120"/>
+                <a:cs typeface="Amiri" pitchFamily="2" charset="-78"/>
               </a:rPr>
               <a:t>FEEDBACK</a:t>
             </a:r>
@@ -35356,8 +34723,7 @@
                   <a:srgbClr val="E8EDF5"/>
                 </a:solidFill>
                 <a:latin typeface="Calibri" pitchFamily="34" charset="0"/>
-                <a:ea typeface="Calibri" pitchFamily="34" charset="-122"/>
-                <a:cs typeface="Calibri" pitchFamily="34" charset="-120"/>
+                <a:cs typeface="Amiri" pitchFamily="2" charset="-78"/>
               </a:rPr>
               <a:t>4 min</a:t>
             </a:r>
@@ -35420,8 +34786,7 @@
                   <a:srgbClr val="1B3B6F"/>
                 </a:solidFill>
                 <a:latin typeface="Calibri" pitchFamily="34" charset="0"/>
-                <a:ea typeface="Calibri" pitchFamily="34" charset="-122"/>
-                <a:cs typeface="Calibri" pitchFamily="34" charset="-120"/>
+                <a:cs typeface="Amiri" pitchFamily="2" charset="-78"/>
               </a:rPr>
               <a:t>6</a:t>
             </a:r>
@@ -35459,8 +34824,7 @@
                   <a:srgbClr val="1F2A37"/>
                 </a:solidFill>
                 <a:latin typeface="Calibri" pitchFamily="34" charset="0"/>
-                <a:ea typeface="Calibri" pitchFamily="34" charset="-122"/>
-                <a:cs typeface="Calibri" pitchFamily="34" charset="-120"/>
+                <a:cs typeface="Amiri" pitchFamily="2" charset="-78"/>
               </a:rPr>
               <a:t>My profile and one D4 target.</a:t>
             </a:r>
@@ -35497,9 +34861,8 @@
                 <a:solidFill>
                   <a:srgbClr val="8A6D1E"/>
                 </a:solidFill>
-                <a:latin typeface="Amiri" pitchFamily="34" charset="0"/>
-                <a:ea typeface="Amiri" pitchFamily="34" charset="-122"/>
-                <a:cs typeface="Amiri" pitchFamily="34" charset="-120"/>
+                <a:latin typeface="Amiri" pitchFamily="2" charset="-78"/>
+                <a:cs typeface="Amiri" pitchFamily="2" charset="-78"/>
               </a:rPr>
               <a:t>الهَدَفُ</a:t>
             </a:r>
@@ -35598,8 +34961,7 @@
                   <a:srgbClr val="FFFFFF"/>
                 </a:solidFill>
                 <a:latin typeface="Calibri" pitchFamily="34" charset="0"/>
-                <a:ea typeface="Calibri" pitchFamily="34" charset="-122"/>
-                <a:cs typeface="Calibri" pitchFamily="34" charset="-120"/>
+                <a:cs typeface="Amiri" pitchFamily="2" charset="-78"/>
               </a:rPr>
               <a:t>PREPARATION</a:t>
             </a:r>
@@ -35637,8 +34999,7 @@
                   <a:srgbClr val="E8EDF5"/>
                 </a:solidFill>
                 <a:latin typeface="Calibri" pitchFamily="34" charset="0"/>
-                <a:ea typeface="Calibri" pitchFamily="34" charset="-122"/>
-                <a:cs typeface="Calibri" pitchFamily="34" charset="-120"/>
+                <a:cs typeface="Amiri" pitchFamily="2" charset="-78"/>
               </a:rPr>
               <a:t>2 min</a:t>
             </a:r>
@@ -35701,8 +35062,7 @@
                   <a:srgbClr val="1B3B6F"/>
                 </a:solidFill>
                 <a:latin typeface="Calibri" pitchFamily="34" charset="0"/>
-                <a:ea typeface="Calibri" pitchFamily="34" charset="-122"/>
-                <a:cs typeface="Calibri" pitchFamily="34" charset="-120"/>
+                <a:cs typeface="Amiri" pitchFamily="2" charset="-78"/>
               </a:rPr>
               <a:t>7</a:t>
             </a:r>
@@ -35740,8 +35100,7 @@
                   <a:srgbClr val="1F2A37"/>
                 </a:solidFill>
                 <a:latin typeface="Calibri" pitchFamily="34" charset="0"/>
-                <a:ea typeface="Calibri" pitchFamily="34" charset="-122"/>
-                <a:cs typeface="Calibri" pitchFamily="34" charset="-120"/>
+                <a:cs typeface="Amiri" pitchFamily="2" charset="-78"/>
               </a:rPr>
               <a:t>Get ready for D4: environment.</a:t>
             </a:r>
@@ -35778,9 +35137,8 @@
                 <a:solidFill>
                   <a:srgbClr val="C45A3C"/>
                 </a:solidFill>
-                <a:latin typeface="Amiri" pitchFamily="34" charset="0"/>
-                <a:ea typeface="Amiri" pitchFamily="34" charset="-122"/>
-                <a:cs typeface="Amiri" pitchFamily="34" charset="-120"/>
+                <a:latin typeface="Amiri" pitchFamily="2" charset="-78"/>
+                <a:cs typeface="Amiri" pitchFamily="2" charset="-78"/>
               </a:rPr>
               <a:t>اِسْتَعِدَّ</a:t>
             </a:r>
@@ -35852,8 +35210,7 @@
                   <a:srgbClr val="1E6B52"/>
                 </a:solidFill>
                 <a:latin typeface="Calibri" pitchFamily="34" charset="0"/>
-                <a:ea typeface="Calibri" pitchFamily="34" charset="-122"/>
-                <a:cs typeface="Calibri" pitchFamily="34" charset="-120"/>
+                <a:cs typeface="Amiri" pitchFamily="2" charset="-78"/>
               </a:rPr>
               <a:t>IF ARABIC FEELS HARD TODAY</a:t>
             </a:r>
@@ -35891,8 +35248,7 @@
                   <a:srgbClr val="1F2A37"/>
                 </a:solidFill>
                 <a:latin typeface="Calibri" pitchFamily="34" charset="0"/>
-                <a:ea typeface="Calibri" pitchFamily="34" charset="-122"/>
-                <a:cs typeface="Calibri" pitchFamily="34" charset="-120"/>
+                <a:cs typeface="Amiri" pitchFamily="2" charset="-78"/>
               </a:rPr>
               <a:t>Start each section with the questions you find easiest. Leave a blank and come back. The grammar laboratory does not count.</a:t>
             </a:r>
@@ -35930,8 +35286,7 @@
                   <a:srgbClr val="8A93A0"/>
                 </a:solidFill>
                 <a:latin typeface="Calibri" pitchFamily="34" charset="0"/>
-                <a:ea typeface="Calibri" pitchFamily="34" charset="-122"/>
-                <a:cs typeface="Calibri" pitchFamily="34" charset="-120"/>
+                <a:cs typeface="Amiri" pitchFamily="2" charset="-78"/>
               </a:rPr>
               <a:t>3 / 23</a:t>
             </a:r>
@@ -36025,9 +35380,8 @@
                 <a:solidFill>
                   <a:srgbClr val="D4AF37"/>
                 </a:solidFill>
-                <a:latin typeface="Amiri" pitchFamily="34" charset="0"/>
-                <a:ea typeface="Amiri" pitchFamily="34" charset="-122"/>
-                <a:cs typeface="Amiri" pitchFamily="34" charset="-120"/>
+                <a:latin typeface="Amiri" pitchFamily="2" charset="-78"/>
+                <a:cs typeface="Amiri" pitchFamily="2" charset="-78"/>
               </a:rPr>
               <a:t>م</a:t>
             </a:r>
@@ -36065,8 +35419,7 @@
                   <a:srgbClr val="1B3B6F"/>
                 </a:solidFill>
                 <a:latin typeface="Cambria" pitchFamily="34" charset="0"/>
-                <a:ea typeface="Cambria" pitchFamily="34" charset="-122"/>
-                <a:cs typeface="Cambria" pitchFamily="34" charset="-120"/>
+                <a:cs typeface="Amiri" pitchFamily="2" charset="-78"/>
               </a:rPr>
               <a:t>Al Madina Online School</a:t>
             </a:r>
@@ -36104,8 +35457,7 @@
                   <a:srgbClr val="8A6D1E"/>
                 </a:solidFill>
                 <a:latin typeface="Calibri" pitchFamily="34" charset="0"/>
-                <a:ea typeface="Calibri" pitchFamily="34" charset="-122"/>
-                <a:cs typeface="Calibri" pitchFamily="34" charset="-120"/>
+                <a:cs typeface="Amiri" pitchFamily="2" charset="-78"/>
               </a:rPr>
               <a:t>ARABIC DEPARTMENT · MIFTAH ARABIC · IGCSE 0544</a:t>
             </a:r>
@@ -36170,8 +35522,7 @@
                   <a:srgbClr val="FFFFFF"/>
                 </a:solidFill>
                 <a:latin typeface="Calibri" pitchFamily="34" charset="0"/>
-                <a:ea typeface="Calibri" pitchFamily="34" charset="-122"/>
-                <a:cs typeface="Calibri" pitchFamily="34" charset="-120"/>
+                <a:cs typeface="Amiri" pitchFamily="2" charset="-78"/>
               </a:rPr>
               <a:t>D3-L12 · D3 Assessment</a:t>
             </a:r>
@@ -36236,8 +35587,7 @@
                   <a:srgbClr val="FFFFFF"/>
                 </a:solidFill>
                 <a:latin typeface="Calibri" pitchFamily="34" charset="0"/>
-                <a:ea typeface="Calibri" pitchFamily="34" charset="-122"/>
-                <a:cs typeface="Calibri" pitchFamily="34" charset="-120"/>
+                <a:cs typeface="Amiri" pitchFamily="2" charset="-78"/>
               </a:rPr>
               <a:t>DO NOW · 5 MIN</a:t>
             </a:r>
@@ -36275,8 +35625,7 @@
                   <a:srgbClr val="0E7C86"/>
                 </a:solidFill>
                 <a:latin typeface="Calibri" pitchFamily="34" charset="0"/>
-                <a:ea typeface="Calibri" pitchFamily="34" charset="-122"/>
-                <a:cs typeface="Calibri" pitchFamily="34" charset="-120"/>
+                <a:cs typeface="Amiri" pitchFamily="2" charset="-78"/>
               </a:rPr>
               <a:t>DO NOW · ON YOUR OWN · 5 MINUTES</a:t>
             </a:r>
@@ -36314,8 +35663,7 @@
                   <a:srgbClr val="1B3B6F"/>
                 </a:solidFill>
                 <a:latin typeface="Cambria" pitchFamily="34" charset="0"/>
-                <a:ea typeface="Cambria" pitchFamily="34" charset="-122"/>
-                <a:cs typeface="Cambria" pitchFamily="34" charset="-120"/>
+                <a:cs typeface="Amiri" pitchFamily="2" charset="-78"/>
               </a:rPr>
               <a:t>Retrieval: what do you remember?</a:t>
             </a:r>
@@ -36352,9 +35700,8 @@
                 <a:solidFill>
                   <a:srgbClr val="8A6D1E"/>
                 </a:solidFill>
-                <a:latin typeface="Amiri" pitchFamily="34" charset="0"/>
-                <a:ea typeface="Amiri" pitchFamily="34" charset="-122"/>
-                <a:cs typeface="Amiri" pitchFamily="34" charset="-120"/>
+                <a:latin typeface="Amiri" pitchFamily="2" charset="-78"/>
+                <a:cs typeface="Amiri" pitchFamily="2" charset="-78"/>
               </a:rPr>
               <a:t>اِبْدَأِ الآنَ</a:t>
             </a:r>
@@ -36392,8 +35739,7 @@
                   <a:srgbClr val="8A93A0"/>
                 </a:solidFill>
                 <a:latin typeface="Calibri" pitchFamily="34" charset="0"/>
-                <a:ea typeface="Calibri" pitchFamily="34" charset="-122"/>
-                <a:cs typeface="Calibri" pitchFamily="34" charset="-120"/>
+                <a:cs typeface="Amiri" pitchFamily="2" charset="-78"/>
               </a:rPr>
               <a:t>Miftah Arabic · Development D3 · Work and Careers · D3-L12</a:t>
             </a:r>
@@ -36490,8 +35836,7 @@
                   <a:srgbClr val="FFFFFF"/>
                 </a:solidFill>
                 <a:latin typeface="Calibri" pitchFamily="34" charset="0"/>
-                <a:ea typeface="Calibri" pitchFamily="34" charset="-122"/>
-                <a:cs typeface="Calibri" pitchFamily="34" charset="-120"/>
+                <a:cs typeface="Amiri" pitchFamily="2" charset="-78"/>
               </a:rPr>
               <a:t>1</a:t>
             </a:r>
@@ -36529,8 +35874,7 @@
                   <a:srgbClr val="1B3B6F"/>
                 </a:solidFill>
                 <a:latin typeface="Calibri" pitchFamily="34" charset="0"/>
-                <a:ea typeface="Calibri" pitchFamily="34" charset="-122"/>
-                <a:cs typeface="Calibri" pitchFamily="34" charset="-120"/>
+                <a:cs typeface="Amiri" pitchFamily="2" charset="-78"/>
               </a:rPr>
               <a:t>What does </a:t>
             </a:r>
@@ -36542,9 +35886,8 @@
                 <a:solidFill>
                   <a:srgbClr val="1B3B6F"/>
                 </a:solidFill>
-                <a:latin typeface="Amiri" pitchFamily="34" charset="0"/>
-                <a:ea typeface="Amiri" pitchFamily="34" charset="-122"/>
-                <a:cs typeface="Amiri" pitchFamily="34" charset="-120"/>
+                <a:latin typeface="Amiri" pitchFamily="2" charset="-78"/>
+                <a:cs typeface="Amiri" pitchFamily="2" charset="-78"/>
               </a:rPr>
               <a:t>تَقْيِيمٌ</a:t>
             </a:r>
@@ -36557,8 +35900,7 @@
                   <a:srgbClr val="1B3B6F"/>
                 </a:solidFill>
                 <a:latin typeface="Calibri" pitchFamily="34" charset="0"/>
-                <a:ea typeface="Calibri" pitchFamily="34" charset="-122"/>
-                <a:cs typeface="Calibri" pitchFamily="34" charset="-120"/>
+                <a:cs typeface="Amiri" pitchFamily="2" charset="-78"/>
               </a:rPr>
               <a:t> mean?</a:t>
             </a:r>
@@ -36621,8 +35963,7 @@
                   <a:srgbClr val="1B3B6F"/>
                 </a:solidFill>
                 <a:latin typeface="Calibri" pitchFamily="34" charset="0"/>
-                <a:ea typeface="Calibri" pitchFamily="34" charset="-122"/>
-                <a:cs typeface="Calibri" pitchFamily="34" charset="-120"/>
+                <a:cs typeface="Amiri" pitchFamily="2" charset="-78"/>
               </a:rPr>
               <a:t>A</a:t>
             </a:r>
@@ -36660,8 +36001,7 @@
                   <a:srgbClr val="1F2A37"/>
                 </a:solidFill>
                 <a:latin typeface="Calibri" pitchFamily="34" charset="0"/>
-                <a:ea typeface="Calibri" pitchFamily="34" charset="-122"/>
-                <a:cs typeface="Calibri" pitchFamily="34" charset="-120"/>
+                <a:cs typeface="Amiri" pitchFamily="2" charset="-78"/>
               </a:rPr>
               <a:t>a skill</a:t>
             </a:r>
@@ -36724,8 +36064,7 @@
                   <a:srgbClr val="1B3B6F"/>
                 </a:solidFill>
                 <a:latin typeface="Calibri" pitchFamily="34" charset="0"/>
-                <a:ea typeface="Calibri" pitchFamily="34" charset="-122"/>
-                <a:cs typeface="Calibri" pitchFamily="34" charset="-120"/>
+                <a:cs typeface="Amiri" pitchFamily="2" charset="-78"/>
               </a:rPr>
               <a:t>B</a:t>
             </a:r>
@@ -36763,8 +36102,7 @@
                   <a:srgbClr val="1F2A37"/>
                 </a:solidFill>
                 <a:latin typeface="Calibri" pitchFamily="34" charset="0"/>
-                <a:ea typeface="Calibri" pitchFamily="34" charset="-122"/>
-                <a:cs typeface="Calibri" pitchFamily="34" charset="-120"/>
+                <a:cs typeface="Amiri" pitchFamily="2" charset="-78"/>
               </a:rPr>
               <a:t>an assessment</a:t>
             </a:r>
@@ -36827,8 +36165,7 @@
                   <a:srgbClr val="1B3B6F"/>
                 </a:solidFill>
                 <a:latin typeface="Calibri" pitchFamily="34" charset="0"/>
-                <a:ea typeface="Calibri" pitchFamily="34" charset="-122"/>
-                <a:cs typeface="Calibri" pitchFamily="34" charset="-120"/>
+                <a:cs typeface="Amiri" pitchFamily="2" charset="-78"/>
               </a:rPr>
               <a:t>C</a:t>
             </a:r>
@@ -36866,8 +36203,7 @@
                   <a:srgbClr val="1F2A37"/>
                 </a:solidFill>
                 <a:latin typeface="Calibri" pitchFamily="34" charset="0"/>
-                <a:ea typeface="Calibri" pitchFamily="34" charset="-122"/>
-                <a:cs typeface="Calibri" pitchFamily="34" charset="-120"/>
+                <a:cs typeface="Amiri" pitchFamily="2" charset="-78"/>
               </a:rPr>
               <a:t>instructions</a:t>
             </a:r>
@@ -36964,8 +36300,7 @@
                   <a:srgbClr val="FFFFFF"/>
                 </a:solidFill>
                 <a:latin typeface="Calibri" pitchFamily="34" charset="0"/>
-                <a:ea typeface="Calibri" pitchFamily="34" charset="-122"/>
-                <a:cs typeface="Calibri" pitchFamily="34" charset="-120"/>
+                <a:cs typeface="Amiri" pitchFamily="2" charset="-78"/>
               </a:rPr>
               <a:t>2</a:t>
             </a:r>
@@ -37003,8 +36338,7 @@
                   <a:srgbClr val="1B3B6F"/>
                 </a:solidFill>
                 <a:latin typeface="Calibri" pitchFamily="34" charset="0"/>
-                <a:ea typeface="Calibri" pitchFamily="34" charset="-122"/>
-                <a:cs typeface="Calibri" pitchFamily="34" charset="-120"/>
+                <a:cs typeface="Amiri" pitchFamily="2" charset="-78"/>
               </a:rPr>
               <a:t>Complete: </a:t>
             </a:r>
@@ -37016,9 +36350,8 @@
                 <a:solidFill>
                   <a:srgbClr val="1B3B6F"/>
                 </a:solidFill>
-                <a:latin typeface="Amiri" pitchFamily="34" charset="0"/>
-                <a:ea typeface="Amiri" pitchFamily="34" charset="-122"/>
-                <a:cs typeface="Amiri" pitchFamily="34" charset="-120"/>
+                <a:latin typeface="Amiri" pitchFamily="2" charset="-78"/>
+                <a:cs typeface="Amiri" pitchFamily="2" charset="-78"/>
               </a:rPr>
               <a:t>يَحْتَاجُ المُدَرِّسُ</a:t>
             </a:r>
@@ -37031,8 +36364,7 @@
                   <a:srgbClr val="1B3B6F"/>
                 </a:solidFill>
                 <a:latin typeface="Calibri" pitchFamily="34" charset="0"/>
-                <a:ea typeface="Calibri" pitchFamily="34" charset="-122"/>
-                <a:cs typeface="Calibri" pitchFamily="34" charset="-120"/>
+                <a:cs typeface="Amiri" pitchFamily="2" charset="-78"/>
               </a:rPr>
               <a:t> ___ </a:t>
             </a:r>
@@ -37044,9 +36376,8 @@
                 <a:solidFill>
                   <a:srgbClr val="1B3B6F"/>
                 </a:solidFill>
-                <a:latin typeface="Amiri" pitchFamily="34" charset="0"/>
-                <a:ea typeface="Amiri" pitchFamily="34" charset="-122"/>
-                <a:cs typeface="Amiri" pitchFamily="34" charset="-120"/>
+                <a:latin typeface="Amiri" pitchFamily="2" charset="-78"/>
+                <a:cs typeface="Amiri" pitchFamily="2" charset="-78"/>
               </a:rPr>
               <a:t>الصَّبْرِ</a:t>
             </a:r>
@@ -37059,8 +36390,7 @@
                   <a:srgbClr val="1B3B6F"/>
                 </a:solidFill>
                 <a:latin typeface="Calibri" pitchFamily="34" charset="0"/>
-                <a:ea typeface="Calibri" pitchFamily="34" charset="-122"/>
-                <a:cs typeface="Calibri" pitchFamily="34" charset="-120"/>
+                <a:cs typeface="Amiri" pitchFamily="2" charset="-78"/>
               </a:rPr>
               <a:t>.</a:t>
             </a:r>
@@ -37123,8 +36453,7 @@
                   <a:srgbClr val="1B3B6F"/>
                 </a:solidFill>
                 <a:latin typeface="Calibri" pitchFamily="34" charset="0"/>
-                <a:ea typeface="Calibri" pitchFamily="34" charset="-122"/>
-                <a:cs typeface="Calibri" pitchFamily="34" charset="-120"/>
+                <a:cs typeface="Amiri" pitchFamily="2" charset="-78"/>
               </a:rPr>
               <a:t>A</a:t>
             </a:r>
@@ -37161,9 +36490,8 @@
                 <a:solidFill>
                   <a:srgbClr val="1F2A37"/>
                 </a:solidFill>
-                <a:latin typeface="Amiri" pitchFamily="34" charset="0"/>
-                <a:ea typeface="Amiri" pitchFamily="34" charset="-122"/>
-                <a:cs typeface="Amiri" pitchFamily="34" charset="-120"/>
+                <a:latin typeface="Amiri" pitchFamily="2" charset="-78"/>
+                <a:cs typeface="Amiri" pitchFamily="2" charset="-78"/>
               </a:rPr>
               <a:t>إِلَى</a:t>
             </a:r>
@@ -37226,8 +36554,7 @@
                   <a:srgbClr val="1B3B6F"/>
                 </a:solidFill>
                 <a:latin typeface="Calibri" pitchFamily="34" charset="0"/>
-                <a:ea typeface="Calibri" pitchFamily="34" charset="-122"/>
-                <a:cs typeface="Calibri" pitchFamily="34" charset="-120"/>
+                <a:cs typeface="Amiri" pitchFamily="2" charset="-78"/>
               </a:rPr>
               <a:t>B</a:t>
             </a:r>
@@ -37264,9 +36591,8 @@
                 <a:solidFill>
                   <a:srgbClr val="1F2A37"/>
                 </a:solidFill>
-                <a:latin typeface="Amiri" pitchFamily="34" charset="0"/>
-                <a:ea typeface="Amiri" pitchFamily="34" charset="-122"/>
-                <a:cs typeface="Amiri" pitchFamily="34" charset="-120"/>
+                <a:latin typeface="Amiri" pitchFamily="2" charset="-78"/>
+                <a:cs typeface="Amiri" pitchFamily="2" charset="-78"/>
               </a:rPr>
               <a:t>فِي</a:t>
             </a:r>
@@ -37329,8 +36655,7 @@
                   <a:srgbClr val="1B3B6F"/>
                 </a:solidFill>
                 <a:latin typeface="Calibri" pitchFamily="34" charset="0"/>
-                <a:ea typeface="Calibri" pitchFamily="34" charset="-122"/>
-                <a:cs typeface="Calibri" pitchFamily="34" charset="-120"/>
+                <a:cs typeface="Amiri" pitchFamily="2" charset="-78"/>
               </a:rPr>
               <a:t>C</a:t>
             </a:r>
@@ -37367,9 +36692,8 @@
                 <a:solidFill>
                   <a:srgbClr val="1F2A37"/>
                 </a:solidFill>
-                <a:latin typeface="Amiri" pitchFamily="34" charset="0"/>
-                <a:ea typeface="Amiri" pitchFamily="34" charset="-122"/>
-                <a:cs typeface="Amiri" pitchFamily="34" charset="-120"/>
+                <a:latin typeface="Amiri" pitchFamily="2" charset="-78"/>
+                <a:cs typeface="Amiri" pitchFamily="2" charset="-78"/>
               </a:rPr>
               <a:t>مِنْ</a:t>
             </a:r>
@@ -37466,8 +36790,7 @@
                   <a:srgbClr val="FFFFFF"/>
                 </a:solidFill>
                 <a:latin typeface="Calibri" pitchFamily="34" charset="0"/>
-                <a:ea typeface="Calibri" pitchFamily="34" charset="-122"/>
-                <a:cs typeface="Calibri" pitchFamily="34" charset="-120"/>
+                <a:cs typeface="Amiri" pitchFamily="2" charset="-78"/>
               </a:rPr>
               <a:t>3</a:t>
             </a:r>
@@ -37505,8 +36828,7 @@
                   <a:srgbClr val="1B3B6F"/>
                 </a:solidFill>
                 <a:latin typeface="Calibri" pitchFamily="34" charset="0"/>
-                <a:ea typeface="Calibri" pitchFamily="34" charset="-122"/>
-                <a:cs typeface="Calibri" pitchFamily="34" charset="-120"/>
+                <a:cs typeface="Amiri" pitchFamily="2" charset="-78"/>
               </a:rPr>
               <a:t>Choose the accurate future.</a:t>
             </a:r>
@@ -37569,8 +36891,7 @@
                   <a:srgbClr val="1B3B6F"/>
                 </a:solidFill>
                 <a:latin typeface="Calibri" pitchFamily="34" charset="0"/>
-                <a:ea typeface="Calibri" pitchFamily="34" charset="-122"/>
-                <a:cs typeface="Calibri" pitchFamily="34" charset="-120"/>
+                <a:cs typeface="Amiri" pitchFamily="2" charset="-78"/>
               </a:rPr>
               <a:t>A</a:t>
             </a:r>
@@ -37607,9 +36928,8 @@
                 <a:solidFill>
                   <a:srgbClr val="1F2A37"/>
                 </a:solidFill>
-                <a:latin typeface="Amiri" pitchFamily="34" charset="0"/>
-                <a:ea typeface="Amiri" pitchFamily="34" charset="-122"/>
-                <a:cs typeface="Amiri" pitchFamily="34" charset="-120"/>
+                <a:latin typeface="Amiri" pitchFamily="2" charset="-78"/>
+                <a:cs typeface="Amiri" pitchFamily="2" charset="-78"/>
               </a:rPr>
               <a:t>سَوْفَ تَدَرَّبْتُ</a:t>
             </a:r>
@@ -37672,8 +36992,7 @@
                   <a:srgbClr val="1B3B6F"/>
                 </a:solidFill>
                 <a:latin typeface="Calibri" pitchFamily="34" charset="0"/>
-                <a:ea typeface="Calibri" pitchFamily="34" charset="-122"/>
-                <a:cs typeface="Calibri" pitchFamily="34" charset="-120"/>
+                <a:cs typeface="Amiri" pitchFamily="2" charset="-78"/>
               </a:rPr>
               <a:t>B</a:t>
             </a:r>
@@ -37710,9 +37029,8 @@
                 <a:solidFill>
                   <a:srgbClr val="1F2A37"/>
                 </a:solidFill>
-                <a:latin typeface="Amiri" pitchFamily="34" charset="0"/>
-                <a:ea typeface="Amiri" pitchFamily="34" charset="-122"/>
-                <a:cs typeface="Amiri" pitchFamily="34" charset="-120"/>
+                <a:latin typeface="Amiri" pitchFamily="2" charset="-78"/>
+                <a:cs typeface="Amiri" pitchFamily="2" charset="-78"/>
               </a:rPr>
               <a:t>سَتَدَرَّبْتُ</a:t>
             </a:r>
@@ -37775,8 +37093,7 @@
                   <a:srgbClr val="1B3B6F"/>
                 </a:solidFill>
                 <a:latin typeface="Calibri" pitchFamily="34" charset="0"/>
-                <a:ea typeface="Calibri" pitchFamily="34" charset="-122"/>
-                <a:cs typeface="Calibri" pitchFamily="34" charset="-120"/>
+                <a:cs typeface="Amiri" pitchFamily="2" charset="-78"/>
               </a:rPr>
               <a:t>C</a:t>
             </a:r>
@@ -37813,9 +37130,8 @@
                 <a:solidFill>
                   <a:srgbClr val="1F2A37"/>
                 </a:solidFill>
-                <a:latin typeface="Amiri" pitchFamily="34" charset="0"/>
-                <a:ea typeface="Amiri" pitchFamily="34" charset="-122"/>
-                <a:cs typeface="Amiri" pitchFamily="34" charset="-120"/>
+                <a:latin typeface="Amiri" pitchFamily="2" charset="-78"/>
+                <a:cs typeface="Amiri" pitchFamily="2" charset="-78"/>
               </a:rPr>
               <a:t>سَأَتَدَرَّبُ</a:t>
             </a:r>
@@ -37912,8 +37228,7 @@
                   <a:srgbClr val="FFFFFF"/>
                 </a:solidFill>
                 <a:latin typeface="Calibri" pitchFamily="34" charset="0"/>
-                <a:ea typeface="Calibri" pitchFamily="34" charset="-122"/>
-                <a:cs typeface="Calibri" pitchFamily="34" charset="-120"/>
+                <a:cs typeface="Amiri" pitchFamily="2" charset="-78"/>
               </a:rPr>
               <a:t>4</a:t>
             </a:r>
@@ -37951,8 +37266,7 @@
                   <a:srgbClr val="1B3B6F"/>
                 </a:solidFill>
                 <a:latin typeface="Calibri" pitchFamily="34" charset="0"/>
-                <a:ea typeface="Calibri" pitchFamily="34" charset="-122"/>
-                <a:cs typeface="Calibri" pitchFamily="34" charset="-120"/>
+                <a:cs typeface="Amiri" pitchFamily="2" charset="-78"/>
               </a:rPr>
               <a:t>Complete: </a:t>
             </a:r>
@@ -37964,9 +37278,8 @@
                 <a:solidFill>
                   <a:srgbClr val="1B3B6F"/>
                 </a:solidFill>
-                <a:latin typeface="Amiri" pitchFamily="34" charset="0"/>
-                <a:ea typeface="Amiri" pitchFamily="34" charset="-122"/>
-                <a:cs typeface="Amiri" pitchFamily="34" charset="-120"/>
+                <a:latin typeface="Amiri" pitchFamily="2" charset="-78"/>
+                <a:cs typeface="Amiri" pitchFamily="2" charset="-78"/>
               </a:rPr>
               <a:t>سَأَدْرُسُ بِجِدٍّ</a:t>
             </a:r>
@@ -37979,8 +37292,7 @@
                   <a:srgbClr val="1B3B6F"/>
                 </a:solidFill>
                 <a:latin typeface="Calibri" pitchFamily="34" charset="0"/>
-                <a:ea typeface="Calibri" pitchFamily="34" charset="-122"/>
-                <a:cs typeface="Calibri" pitchFamily="34" charset="-120"/>
+                <a:cs typeface="Amiri" pitchFamily="2" charset="-78"/>
               </a:rPr>
               <a:t> ___ </a:t>
             </a:r>
@@ -37992,9 +37304,8 @@
                 <a:solidFill>
                   <a:srgbClr val="1B3B6F"/>
                 </a:solidFill>
-                <a:latin typeface="Amiri" pitchFamily="34" charset="0"/>
-                <a:ea typeface="Amiri" pitchFamily="34" charset="-122"/>
-                <a:cs typeface="Amiri" pitchFamily="34" charset="-120"/>
+                <a:latin typeface="Amiri" pitchFamily="2" charset="-78"/>
+                <a:cs typeface="Amiri" pitchFamily="2" charset="-78"/>
               </a:rPr>
               <a:t>أَنْجَحَ</a:t>
             </a:r>
@@ -38007,8 +37318,7 @@
                   <a:srgbClr val="1B3B6F"/>
                 </a:solidFill>
                 <a:latin typeface="Calibri" pitchFamily="34" charset="0"/>
-                <a:ea typeface="Calibri" pitchFamily="34" charset="-122"/>
-                <a:cs typeface="Calibri" pitchFamily="34" charset="-120"/>
+                <a:cs typeface="Amiri" pitchFamily="2" charset="-78"/>
               </a:rPr>
               <a:t>.</a:t>
             </a:r>
@@ -38071,8 +37381,7 @@
                   <a:srgbClr val="1B3B6F"/>
                 </a:solidFill>
                 <a:latin typeface="Calibri" pitchFamily="34" charset="0"/>
-                <a:ea typeface="Calibri" pitchFamily="34" charset="-122"/>
-                <a:cs typeface="Calibri" pitchFamily="34" charset="-120"/>
+                <a:cs typeface="Amiri" pitchFamily="2" charset="-78"/>
               </a:rPr>
               <a:t>A</a:t>
             </a:r>
@@ -38109,9 +37418,8 @@
                 <a:solidFill>
                   <a:srgbClr val="1F2A37"/>
                 </a:solidFill>
-                <a:latin typeface="Amiri" pitchFamily="34" charset="0"/>
-                <a:ea typeface="Amiri" pitchFamily="34" charset="-122"/>
-                <a:cs typeface="Amiri" pitchFamily="34" charset="-120"/>
+                <a:latin typeface="Amiri" pitchFamily="2" charset="-78"/>
+                <a:cs typeface="Amiri" pitchFamily="2" charset="-78"/>
               </a:rPr>
               <a:t>مَعَ</a:t>
             </a:r>
@@ -38174,8 +37482,7 @@
                   <a:srgbClr val="1B3B6F"/>
                 </a:solidFill>
                 <a:latin typeface="Calibri" pitchFamily="34" charset="0"/>
-                <a:ea typeface="Calibri" pitchFamily="34" charset="-122"/>
-                <a:cs typeface="Calibri" pitchFamily="34" charset="-120"/>
+                <a:cs typeface="Amiri" pitchFamily="2" charset="-78"/>
               </a:rPr>
               <a:t>B</a:t>
             </a:r>
@@ -38212,9 +37519,8 @@
                 <a:solidFill>
                   <a:srgbClr val="1F2A37"/>
                 </a:solidFill>
-                <a:latin typeface="Amiri" pitchFamily="34" charset="0"/>
-                <a:ea typeface="Amiri" pitchFamily="34" charset="-122"/>
-                <a:cs typeface="Amiri" pitchFamily="34" charset="-120"/>
+                <a:latin typeface="Amiri" pitchFamily="2" charset="-78"/>
+                <a:cs typeface="Amiri" pitchFamily="2" charset="-78"/>
               </a:rPr>
               <a:t>بَيْنَمَا</a:t>
             </a:r>
@@ -38277,8 +37583,7 @@
                   <a:srgbClr val="1B3B6F"/>
                 </a:solidFill>
                 <a:latin typeface="Calibri" pitchFamily="34" charset="0"/>
-                <a:ea typeface="Calibri" pitchFamily="34" charset="-122"/>
-                <a:cs typeface="Calibri" pitchFamily="34" charset="-120"/>
+                <a:cs typeface="Amiri" pitchFamily="2" charset="-78"/>
               </a:rPr>
               <a:t>C</a:t>
             </a:r>
@@ -38315,9 +37620,8 @@
                 <a:solidFill>
                   <a:srgbClr val="1F2A37"/>
                 </a:solidFill>
-                <a:latin typeface="Amiri" pitchFamily="34" charset="0"/>
-                <a:ea typeface="Amiri" pitchFamily="34" charset="-122"/>
-                <a:cs typeface="Amiri" pitchFamily="34" charset="-120"/>
+                <a:latin typeface="Amiri" pitchFamily="2" charset="-78"/>
+                <a:cs typeface="Amiri" pitchFamily="2" charset="-78"/>
               </a:rPr>
               <a:t>لِكَيْ</a:t>
             </a:r>
@@ -38414,8 +37718,7 @@
                   <a:srgbClr val="FFFFFF"/>
                 </a:solidFill>
                 <a:latin typeface="Calibri" pitchFamily="34" charset="0"/>
-                <a:ea typeface="Calibri" pitchFamily="34" charset="-122"/>
-                <a:cs typeface="Calibri" pitchFamily="34" charset="-120"/>
+                <a:cs typeface="Amiri" pitchFamily="2" charset="-78"/>
               </a:rPr>
               <a:t>5</a:t>
             </a:r>
@@ -38453,8 +37756,7 @@
                   <a:srgbClr val="1B3B6F"/>
                 </a:solidFill>
                 <a:latin typeface="Calibri" pitchFamily="34" charset="0"/>
-                <a:ea typeface="Calibri" pitchFamily="34" charset="-122"/>
-                <a:cs typeface="Calibri" pitchFamily="34" charset="-120"/>
+                <a:cs typeface="Amiri" pitchFamily="2" charset="-78"/>
               </a:rPr>
               <a:t>Which sentence is fully controlled?</a:t>
             </a:r>
@@ -38517,8 +37819,7 @@
                   <a:srgbClr val="1B3B6F"/>
                 </a:solidFill>
                 <a:latin typeface="Calibri" pitchFamily="34" charset="0"/>
-                <a:ea typeface="Calibri" pitchFamily="34" charset="-122"/>
-                <a:cs typeface="Calibri" pitchFamily="34" charset="-120"/>
+                <a:cs typeface="Amiri" pitchFamily="2" charset="-78"/>
               </a:rPr>
               <a:t>A</a:t>
             </a:r>
@@ -38555,9 +37856,8 @@
                 <a:solidFill>
                   <a:srgbClr val="1F2A37"/>
                 </a:solidFill>
-                <a:latin typeface="Amiri" pitchFamily="34" charset="0"/>
-                <a:ea typeface="Amiri" pitchFamily="34" charset="-122"/>
-                <a:cs typeface="Amiri" pitchFamily="34" charset="-120"/>
+                <a:latin typeface="Amiri" pitchFamily="2" charset="-78"/>
+                <a:cs typeface="Amiri" pitchFamily="2" charset="-78"/>
               </a:rPr>
               <a:t>أُخْتِي مُحَاسِبَةٌ وَسَتَعْمَلُ فِي شَرِكَةٍ.</a:t>
             </a:r>
@@ -38620,8 +37920,7 @@
                   <a:srgbClr val="1B3B6F"/>
                 </a:solidFill>
                 <a:latin typeface="Calibri" pitchFamily="34" charset="0"/>
-                <a:ea typeface="Calibri" pitchFamily="34" charset="-122"/>
-                <a:cs typeface="Calibri" pitchFamily="34" charset="-120"/>
+                <a:cs typeface="Amiri" pitchFamily="2" charset="-78"/>
               </a:rPr>
               <a:t>B</a:t>
             </a:r>
@@ -38658,9 +37957,8 @@
                 <a:solidFill>
                   <a:srgbClr val="1F2A37"/>
                 </a:solidFill>
-                <a:latin typeface="Amiri" pitchFamily="34" charset="0"/>
-                <a:ea typeface="Amiri" pitchFamily="34" charset="-122"/>
-                <a:cs typeface="Amiri" pitchFamily="34" charset="-120"/>
+                <a:latin typeface="Amiri" pitchFamily="2" charset="-78"/>
+                <a:cs typeface="Amiri" pitchFamily="2" charset="-78"/>
               </a:rPr>
               <a:t>أُخْتِي مُحَاسِبٌ وَسَوْفَ عَمِلَتْ.</a:t>
             </a:r>
@@ -38723,8 +38021,7 @@
                   <a:srgbClr val="1B3B6F"/>
                 </a:solidFill>
                 <a:latin typeface="Calibri" pitchFamily="34" charset="0"/>
-                <a:ea typeface="Calibri" pitchFamily="34" charset="-122"/>
-                <a:cs typeface="Calibri" pitchFamily="34" charset="-120"/>
+                <a:cs typeface="Amiri" pitchFamily="2" charset="-78"/>
               </a:rPr>
               <a:t>C</a:t>
             </a:r>
@@ -38761,9 +38058,8 @@
                 <a:solidFill>
                   <a:srgbClr val="1F2A37"/>
                 </a:solidFill>
-                <a:latin typeface="Amiri" pitchFamily="34" charset="0"/>
-                <a:ea typeface="Amiri" pitchFamily="34" charset="-122"/>
-                <a:cs typeface="Amiri" pitchFamily="34" charset="-120"/>
+                <a:latin typeface="Amiri" pitchFamily="2" charset="-78"/>
+                <a:cs typeface="Amiri" pitchFamily="2" charset="-78"/>
               </a:rPr>
               <a:t>أُخْتِي فِي مُحَاسِبَةٍ.</a:t>
             </a:r>
@@ -38835,8 +38131,7 @@
                   <a:srgbClr val="0E7C86"/>
                 </a:solidFill>
                 <a:latin typeface="Calibri" pitchFamily="34" charset="0"/>
-                <a:ea typeface="Calibri" pitchFamily="34" charset="-122"/>
-                <a:cs typeface="Calibri" pitchFamily="34" charset="-120"/>
+                <a:cs typeface="Amiri" pitchFamily="2" charset="-78"/>
               </a:rPr>
               <a:t>HOW TO ANSWER</a:t>
             </a:r>
@@ -38874,8 +38169,7 @@
                   <a:srgbClr val="1F2A37"/>
                 </a:solidFill>
                 <a:latin typeface="Calibri" pitchFamily="34" charset="0"/>
-                <a:ea typeface="Calibri" pitchFamily="34" charset="-122"/>
-                <a:cs typeface="Calibri" pitchFamily="34" charset="-120"/>
+                <a:cs typeface="Amiri" pitchFamily="2" charset="-78"/>
               </a:rPr>
               <a:t>Work on your own in silence.</a:t>
             </a:r>
@@ -38891,8 +38185,7 @@
                   <a:srgbClr val="1F2A37"/>
                 </a:solidFill>
                 <a:latin typeface="Calibri" pitchFamily="34" charset="0"/>
-                <a:ea typeface="Calibri" pitchFamily="34" charset="-122"/>
-                <a:cs typeface="Calibri" pitchFamily="34" charset="-120"/>
+                <a:cs typeface="Amiri" pitchFamily="2" charset="-78"/>
               </a:rPr>
               <a:t>When the timer ends, type in the chat:</a:t>
             </a:r>
@@ -38930,8 +38223,7 @@
                   <a:srgbClr val="1B3B6F"/>
                 </a:solidFill>
                 <a:latin typeface="Consolas" pitchFamily="34" charset="0"/>
-                <a:ea typeface="Consolas" pitchFamily="34" charset="-122"/>
-                <a:cs typeface="Consolas" pitchFamily="34" charset="-120"/>
+                <a:cs typeface="Amiri" pitchFamily="2" charset="-78"/>
               </a:rPr>
               <a:t>1_  2_  3_  4_  5_</a:t>
             </a:r>
@@ -38969,8 +38261,7 @@
                   <a:srgbClr val="0E7C86"/>
                 </a:solidFill>
                 <a:latin typeface="Calibri" pitchFamily="34" charset="0"/>
-                <a:ea typeface="Calibri" pitchFamily="34" charset="-122"/>
-                <a:cs typeface="Calibri" pitchFamily="34" charset="-120"/>
+                <a:cs typeface="Amiri" pitchFamily="2" charset="-78"/>
               </a:rPr>
               <a:t>⏱  5 : 00</a:t>
             </a:r>
@@ -39008,8 +38299,7 @@
                   <a:srgbClr val="8A93A0"/>
                 </a:solidFill>
                 <a:latin typeface="Calibri" pitchFamily="34" charset="0"/>
-                <a:ea typeface="Calibri" pitchFamily="34" charset="-122"/>
-                <a:cs typeface="Calibri" pitchFamily="34" charset="-120"/>
+                <a:cs typeface="Amiri" pitchFamily="2" charset="-78"/>
               </a:rPr>
               <a:t>4 / 23</a:t>
             </a:r>
@@ -39103,9 +38393,8 @@
                 <a:solidFill>
                   <a:srgbClr val="D4AF37"/>
                 </a:solidFill>
-                <a:latin typeface="Amiri" pitchFamily="34" charset="0"/>
-                <a:ea typeface="Amiri" pitchFamily="34" charset="-122"/>
-                <a:cs typeface="Amiri" pitchFamily="34" charset="-120"/>
+                <a:latin typeface="Amiri" pitchFamily="2" charset="-78"/>
+                <a:cs typeface="Amiri" pitchFamily="2" charset="-78"/>
               </a:rPr>
               <a:t>م</a:t>
             </a:r>
@@ -39143,8 +38432,7 @@
                   <a:srgbClr val="1B3B6F"/>
                 </a:solidFill>
                 <a:latin typeface="Cambria" pitchFamily="34" charset="0"/>
-                <a:ea typeface="Cambria" pitchFamily="34" charset="-122"/>
-                <a:cs typeface="Cambria" pitchFamily="34" charset="-120"/>
+                <a:cs typeface="Amiri" pitchFamily="2" charset="-78"/>
               </a:rPr>
               <a:t>Al Madina Online School</a:t>
             </a:r>
@@ -39182,8 +38470,7 @@
                   <a:srgbClr val="8A6D1E"/>
                 </a:solidFill>
                 <a:latin typeface="Calibri" pitchFamily="34" charset="0"/>
-                <a:ea typeface="Calibri" pitchFamily="34" charset="-122"/>
-                <a:cs typeface="Calibri" pitchFamily="34" charset="-120"/>
+                <a:cs typeface="Amiri" pitchFamily="2" charset="-78"/>
               </a:rPr>
               <a:t>ARABIC DEPARTMENT · MIFTAH ARABIC · IGCSE 0544</a:t>
             </a:r>
@@ -39248,8 +38535,7 @@
                   <a:srgbClr val="FFFFFF"/>
                 </a:solidFill>
                 <a:latin typeface="Calibri" pitchFamily="34" charset="0"/>
-                <a:ea typeface="Calibri" pitchFamily="34" charset="-122"/>
-                <a:cs typeface="Calibri" pitchFamily="34" charset="-120"/>
+                <a:cs typeface="Amiri" pitchFamily="2" charset="-78"/>
               </a:rPr>
               <a:t>D3-L12 · D3 Assessment</a:t>
             </a:r>
@@ -39314,8 +38600,7 @@
                   <a:srgbClr val="FFFFFF"/>
                 </a:solidFill>
                 <a:latin typeface="Calibri" pitchFamily="34" charset="0"/>
-                <a:ea typeface="Calibri" pitchFamily="34" charset="-122"/>
-                <a:cs typeface="Calibri" pitchFamily="34" charset="-120"/>
+                <a:cs typeface="Amiri" pitchFamily="2" charset="-78"/>
               </a:rPr>
               <a:t>DO NOW · 2 MIN</a:t>
             </a:r>
@@ -39353,8 +38638,7 @@
                   <a:srgbClr val="0E7C86"/>
                 </a:solidFill>
                 <a:latin typeface="Calibri" pitchFamily="34" charset="0"/>
-                <a:ea typeface="Calibri" pitchFamily="34" charset="-122"/>
-                <a:cs typeface="Calibri" pitchFamily="34" charset="-120"/>
+                <a:cs typeface="Amiri" pitchFamily="2" charset="-78"/>
               </a:rPr>
               <a:t>DO NOW · ANSWERS AND REASONS</a:t>
             </a:r>
@@ -39392,8 +38676,7 @@
                   <a:srgbClr val="1B3B6F"/>
                 </a:solidFill>
                 <a:latin typeface="Cambria" pitchFamily="34" charset="0"/>
-                <a:ea typeface="Cambria" pitchFamily="34" charset="-122"/>
-                <a:cs typeface="Cambria" pitchFamily="34" charset="-120"/>
+                <a:cs typeface="Amiri" pitchFamily="2" charset="-78"/>
               </a:rPr>
               <a:t>Let’s check — and explain why</a:t>
             </a:r>
@@ -39430,9 +38713,8 @@
                 <a:solidFill>
                   <a:srgbClr val="8A6D1E"/>
                 </a:solidFill>
-                <a:latin typeface="Amiri" pitchFamily="34" charset="0"/>
-                <a:ea typeface="Amiri" pitchFamily="34" charset="-122"/>
-                <a:cs typeface="Amiri" pitchFamily="34" charset="-120"/>
+                <a:latin typeface="Amiri" pitchFamily="2" charset="-78"/>
+                <a:cs typeface="Amiri" pitchFamily="2" charset="-78"/>
               </a:rPr>
               <a:t>الإِجَابَاتُ وَالتَّعْلِيلُ</a:t>
             </a:r>
@@ -39470,8 +38752,7 @@
                   <a:srgbClr val="8A93A0"/>
                 </a:solidFill>
                 <a:latin typeface="Calibri" pitchFamily="34" charset="0"/>
-                <a:ea typeface="Calibri" pitchFamily="34" charset="-122"/>
-                <a:cs typeface="Calibri" pitchFamily="34" charset="-120"/>
+                <a:cs typeface="Amiri" pitchFamily="2" charset="-78"/>
               </a:rPr>
               <a:t>Miftah Arabic · Development D3 · Work and Careers · D3-L12</a:t>
             </a:r>
@@ -39568,8 +38849,7 @@
                   <a:srgbClr val="FFFFFF"/>
                 </a:solidFill>
                 <a:latin typeface="Calibri" pitchFamily="34" charset="0"/>
-                <a:ea typeface="Calibri" pitchFamily="34" charset="-122"/>
-                <a:cs typeface="Calibri" pitchFamily="34" charset="-120"/>
+                <a:cs typeface="Amiri" pitchFamily="2" charset="-78"/>
               </a:rPr>
               <a:t>1</a:t>
             </a:r>
@@ -39607,8 +38887,7 @@
                   <a:srgbClr val="1B3B6F"/>
                 </a:solidFill>
                 <a:latin typeface="Calibri" pitchFamily="34" charset="0"/>
-                <a:ea typeface="Calibri" pitchFamily="34" charset="-122"/>
-                <a:cs typeface="Calibri" pitchFamily="34" charset="-120"/>
+                <a:cs typeface="Amiri" pitchFamily="2" charset="-78"/>
               </a:rPr>
               <a:t>What does </a:t>
             </a:r>
@@ -39620,9 +38899,8 @@
                 <a:solidFill>
                   <a:srgbClr val="1B3B6F"/>
                 </a:solidFill>
-                <a:latin typeface="Amiri" pitchFamily="34" charset="0"/>
-                <a:ea typeface="Amiri" pitchFamily="34" charset="-122"/>
-                <a:cs typeface="Amiri" pitchFamily="34" charset="-120"/>
+                <a:latin typeface="Amiri" pitchFamily="2" charset="-78"/>
+                <a:cs typeface="Amiri" pitchFamily="2" charset="-78"/>
               </a:rPr>
               <a:t>تَقْيِيمٌ</a:t>
             </a:r>
@@ -39635,8 +38913,7 @@
                   <a:srgbClr val="1B3B6F"/>
                 </a:solidFill>
                 <a:latin typeface="Calibri" pitchFamily="34" charset="0"/>
-                <a:ea typeface="Calibri" pitchFamily="34" charset="-122"/>
-                <a:cs typeface="Calibri" pitchFamily="34" charset="-120"/>
+                <a:cs typeface="Amiri" pitchFamily="2" charset="-78"/>
               </a:rPr>
               <a:t> mean?</a:t>
             </a:r>
@@ -39699,8 +38976,7 @@
                   <a:srgbClr val="1B3B6F"/>
                 </a:solidFill>
                 <a:latin typeface="Calibri" pitchFamily="34" charset="0"/>
-                <a:ea typeface="Calibri" pitchFamily="34" charset="-122"/>
-                <a:cs typeface="Calibri" pitchFamily="34" charset="-120"/>
+                <a:cs typeface="Amiri" pitchFamily="2" charset="-78"/>
               </a:rPr>
               <a:t>A</a:t>
             </a:r>
@@ -39738,8 +39014,7 @@
                   <a:srgbClr val="9AA1AB"/>
                 </a:solidFill>
                 <a:latin typeface="Calibri" pitchFamily="34" charset="0"/>
-                <a:ea typeface="Calibri" pitchFamily="34" charset="-122"/>
-                <a:cs typeface="Calibri" pitchFamily="34" charset="-120"/>
+                <a:cs typeface="Amiri" pitchFamily="2" charset="-78"/>
               </a:rPr>
               <a:t>a skill</a:t>
             </a:r>
@@ -39829,8 +39104,7 @@
                   <a:srgbClr val="FFFFFF"/>
                 </a:solidFill>
                 <a:latin typeface="Calibri" pitchFamily="34" charset="0"/>
-                <a:ea typeface="Calibri" pitchFamily="34" charset="-122"/>
-                <a:cs typeface="Calibri" pitchFamily="34" charset="-120"/>
+                <a:cs typeface="Amiri" pitchFamily="2" charset="-78"/>
               </a:rPr>
               <a:t>B</a:t>
             </a:r>
@@ -39868,8 +39142,7 @@
                   <a:srgbClr val="1F2A37"/>
                 </a:solidFill>
                 <a:latin typeface="Calibri" pitchFamily="34" charset="0"/>
-                <a:ea typeface="Calibri" pitchFamily="34" charset="-122"/>
-                <a:cs typeface="Calibri" pitchFamily="34" charset="-120"/>
+                <a:cs typeface="Amiri" pitchFamily="2" charset="-78"/>
               </a:rPr>
               <a:t>an assessment</a:t>
             </a:r>
@@ -39932,8 +39205,7 @@
                   <a:srgbClr val="1B3B6F"/>
                 </a:solidFill>
                 <a:latin typeface="Calibri" pitchFamily="34" charset="0"/>
-                <a:ea typeface="Calibri" pitchFamily="34" charset="-122"/>
-                <a:cs typeface="Calibri" pitchFamily="34" charset="-120"/>
+                <a:cs typeface="Amiri" pitchFamily="2" charset="-78"/>
               </a:rPr>
               <a:t>C</a:t>
             </a:r>
@@ -39971,8 +39243,7 @@
                   <a:srgbClr val="9AA1AB"/>
                 </a:solidFill>
                 <a:latin typeface="Calibri" pitchFamily="34" charset="0"/>
-                <a:ea typeface="Calibri" pitchFamily="34" charset="-122"/>
-                <a:cs typeface="Calibri" pitchFamily="34" charset="-120"/>
+                <a:cs typeface="Amiri" pitchFamily="2" charset="-78"/>
               </a:rPr>
               <a:t>instructions</a:t>
             </a:r>
@@ -40010,8 +39281,7 @@
                   <a:srgbClr val="8A6D1E"/>
                 </a:solidFill>
                 <a:latin typeface="Calibri" pitchFamily="34" charset="0"/>
-                <a:ea typeface="Calibri" pitchFamily="34" charset="-122"/>
-                <a:cs typeface="Calibri" pitchFamily="34" charset="-120"/>
+                <a:cs typeface="Amiri" pitchFamily="2" charset="-78"/>
               </a:rPr>
               <a:t>Prepared at home (D3-L11).</a:t>
             </a:r>
@@ -40108,8 +39378,7 @@
                   <a:srgbClr val="FFFFFF"/>
                 </a:solidFill>
                 <a:latin typeface="Calibri" pitchFamily="34" charset="0"/>
-                <a:ea typeface="Calibri" pitchFamily="34" charset="-122"/>
-                <a:cs typeface="Calibri" pitchFamily="34" charset="-120"/>
+                <a:cs typeface="Amiri" pitchFamily="2" charset="-78"/>
               </a:rPr>
               <a:t>2</a:t>
             </a:r>
@@ -40147,8 +39416,7 @@
                   <a:srgbClr val="1B3B6F"/>
                 </a:solidFill>
                 <a:latin typeface="Calibri" pitchFamily="34" charset="0"/>
-                <a:ea typeface="Calibri" pitchFamily="34" charset="-122"/>
-                <a:cs typeface="Calibri" pitchFamily="34" charset="-120"/>
+                <a:cs typeface="Amiri" pitchFamily="2" charset="-78"/>
               </a:rPr>
               <a:t>Complete: </a:t>
             </a:r>
@@ -40160,9 +39428,8 @@
                 <a:solidFill>
                   <a:srgbClr val="1B3B6F"/>
                 </a:solidFill>
-                <a:latin typeface="Amiri" pitchFamily="34" charset="0"/>
-                <a:ea typeface="Amiri" pitchFamily="34" charset="-122"/>
-                <a:cs typeface="Amiri" pitchFamily="34" charset="-120"/>
+                <a:latin typeface="Amiri" pitchFamily="2" charset="-78"/>
+                <a:cs typeface="Amiri" pitchFamily="2" charset="-78"/>
               </a:rPr>
               <a:t>يَحْتَاجُ المُدَرِّسُ</a:t>
             </a:r>
@@ -40175,8 +39442,7 @@
                   <a:srgbClr val="1B3B6F"/>
                 </a:solidFill>
                 <a:latin typeface="Calibri" pitchFamily="34" charset="0"/>
-                <a:ea typeface="Calibri" pitchFamily="34" charset="-122"/>
-                <a:cs typeface="Calibri" pitchFamily="34" charset="-120"/>
+                <a:cs typeface="Amiri" pitchFamily="2" charset="-78"/>
               </a:rPr>
               <a:t> ___ </a:t>
             </a:r>
@@ -40188,9 +39454,8 @@
                 <a:solidFill>
                   <a:srgbClr val="1B3B6F"/>
                 </a:solidFill>
-                <a:latin typeface="Amiri" pitchFamily="34" charset="0"/>
-                <a:ea typeface="Amiri" pitchFamily="34" charset="-122"/>
-                <a:cs typeface="Amiri" pitchFamily="34" charset="-120"/>
+                <a:latin typeface="Amiri" pitchFamily="2" charset="-78"/>
+                <a:cs typeface="Amiri" pitchFamily="2" charset="-78"/>
               </a:rPr>
               <a:t>الصَّبْرِ</a:t>
             </a:r>
@@ -40203,8 +39468,7 @@
                   <a:srgbClr val="1B3B6F"/>
                 </a:solidFill>
                 <a:latin typeface="Calibri" pitchFamily="34" charset="0"/>
-                <a:ea typeface="Calibri" pitchFamily="34" charset="-122"/>
-                <a:cs typeface="Calibri" pitchFamily="34" charset="-120"/>
+                <a:cs typeface="Amiri" pitchFamily="2" charset="-78"/>
               </a:rPr>
               <a:t>.</a:t>
             </a:r>
@@ -40294,8 +39558,7 @@
                   <a:srgbClr val="FFFFFF"/>
                 </a:solidFill>
                 <a:latin typeface="Calibri" pitchFamily="34" charset="0"/>
-                <a:ea typeface="Calibri" pitchFamily="34" charset="-122"/>
-                <a:cs typeface="Calibri" pitchFamily="34" charset="-120"/>
+                <a:cs typeface="Amiri" pitchFamily="2" charset="-78"/>
               </a:rPr>
               <a:t>A</a:t>
             </a:r>
@@ -40332,9 +39595,8 @@
                 <a:solidFill>
                   <a:srgbClr val="1F2A37"/>
                 </a:solidFill>
-                <a:latin typeface="Amiri" pitchFamily="34" charset="0"/>
-                <a:ea typeface="Amiri" pitchFamily="34" charset="-122"/>
-                <a:cs typeface="Amiri" pitchFamily="34" charset="-120"/>
+                <a:latin typeface="Amiri" pitchFamily="2" charset="-78"/>
+                <a:cs typeface="Amiri" pitchFamily="2" charset="-78"/>
               </a:rPr>
               <a:t>إِلَى</a:t>
             </a:r>
@@ -40397,8 +39659,7 @@
                   <a:srgbClr val="1B3B6F"/>
                 </a:solidFill>
                 <a:latin typeface="Calibri" pitchFamily="34" charset="0"/>
-                <a:ea typeface="Calibri" pitchFamily="34" charset="-122"/>
-                <a:cs typeface="Calibri" pitchFamily="34" charset="-120"/>
+                <a:cs typeface="Amiri" pitchFamily="2" charset="-78"/>
               </a:rPr>
               <a:t>B</a:t>
             </a:r>
@@ -40435,9 +39696,8 @@
                 <a:solidFill>
                   <a:srgbClr val="9AA1AB"/>
                 </a:solidFill>
-                <a:latin typeface="Amiri" pitchFamily="34" charset="0"/>
-                <a:ea typeface="Amiri" pitchFamily="34" charset="-122"/>
-                <a:cs typeface="Amiri" pitchFamily="34" charset="-120"/>
+                <a:latin typeface="Amiri" pitchFamily="2" charset="-78"/>
+                <a:cs typeface="Amiri" pitchFamily="2" charset="-78"/>
               </a:rPr>
               <a:t>فِي</a:t>
             </a:r>
@@ -40500,8 +39760,7 @@
                   <a:srgbClr val="1B3B6F"/>
                 </a:solidFill>
                 <a:latin typeface="Calibri" pitchFamily="34" charset="0"/>
-                <a:ea typeface="Calibri" pitchFamily="34" charset="-122"/>
-                <a:cs typeface="Calibri" pitchFamily="34" charset="-120"/>
+                <a:cs typeface="Amiri" pitchFamily="2" charset="-78"/>
               </a:rPr>
               <a:t>C</a:t>
             </a:r>
@@ -40538,9 +39797,8 @@
                 <a:solidFill>
                   <a:srgbClr val="9AA1AB"/>
                 </a:solidFill>
-                <a:latin typeface="Amiri" pitchFamily="34" charset="0"/>
-                <a:ea typeface="Amiri" pitchFamily="34" charset="-122"/>
-                <a:cs typeface="Amiri" pitchFamily="34" charset="-120"/>
+                <a:latin typeface="Amiri" pitchFamily="2" charset="-78"/>
+                <a:cs typeface="Amiri" pitchFamily="2" charset="-78"/>
               </a:rPr>
               <a:t>مِنْ</a:t>
             </a:r>
@@ -40578,8 +39836,7 @@
                   <a:srgbClr val="8A6D1E"/>
                 </a:solidFill>
                 <a:latin typeface="Calibri" pitchFamily="34" charset="0"/>
-                <a:ea typeface="Calibri" pitchFamily="34" charset="-122"/>
-                <a:cs typeface="Calibri" pitchFamily="34" charset="-120"/>
+                <a:cs typeface="Amiri" pitchFamily="2" charset="-78"/>
               </a:rPr>
               <a:t>Website grammar laboratory 2.</a:t>
             </a:r>
@@ -40676,8 +39933,7 @@
                   <a:srgbClr val="FFFFFF"/>
                 </a:solidFill>
                 <a:latin typeface="Calibri" pitchFamily="34" charset="0"/>
-                <a:ea typeface="Calibri" pitchFamily="34" charset="-122"/>
-                <a:cs typeface="Calibri" pitchFamily="34" charset="-120"/>
+                <a:cs typeface="Amiri" pitchFamily="2" charset="-78"/>
               </a:rPr>
               <a:t>3</a:t>
             </a:r>
@@ -40715,8 +39971,7 @@
                   <a:srgbClr val="1B3B6F"/>
                 </a:solidFill>
                 <a:latin typeface="Calibri" pitchFamily="34" charset="0"/>
-                <a:ea typeface="Calibri" pitchFamily="34" charset="-122"/>
-                <a:cs typeface="Calibri" pitchFamily="34" charset="-120"/>
+                <a:cs typeface="Amiri" pitchFamily="2" charset="-78"/>
               </a:rPr>
               <a:t>Choose the accurate future.</a:t>
             </a:r>
@@ -40779,8 +40034,7 @@
                   <a:srgbClr val="1B3B6F"/>
                 </a:solidFill>
                 <a:latin typeface="Calibri" pitchFamily="34" charset="0"/>
-                <a:ea typeface="Calibri" pitchFamily="34" charset="-122"/>
-                <a:cs typeface="Calibri" pitchFamily="34" charset="-120"/>
+                <a:cs typeface="Amiri" pitchFamily="2" charset="-78"/>
               </a:rPr>
               <a:t>A</a:t>
             </a:r>
@@ -40817,9 +40071,8 @@
                 <a:solidFill>
                   <a:srgbClr val="9AA1AB"/>
                 </a:solidFill>
-                <a:latin typeface="Amiri" pitchFamily="34" charset="0"/>
-                <a:ea typeface="Amiri" pitchFamily="34" charset="-122"/>
-                <a:cs typeface="Amiri" pitchFamily="34" charset="-120"/>
+                <a:latin typeface="Amiri" pitchFamily="2" charset="-78"/>
+                <a:cs typeface="Amiri" pitchFamily="2" charset="-78"/>
               </a:rPr>
               <a:t>سَوْفَ تَدَرَّبْتُ</a:t>
             </a:r>
@@ -40882,8 +40135,7 @@
                   <a:srgbClr val="1B3B6F"/>
                 </a:solidFill>
                 <a:latin typeface="Calibri" pitchFamily="34" charset="0"/>
-                <a:ea typeface="Calibri" pitchFamily="34" charset="-122"/>
-                <a:cs typeface="Calibri" pitchFamily="34" charset="-120"/>
+                <a:cs typeface="Amiri" pitchFamily="2" charset="-78"/>
               </a:rPr>
               <a:t>B</a:t>
             </a:r>
@@ -40920,9 +40172,8 @@
                 <a:solidFill>
                   <a:srgbClr val="9AA1AB"/>
                 </a:solidFill>
-                <a:latin typeface="Amiri" pitchFamily="34" charset="0"/>
-                <a:ea typeface="Amiri" pitchFamily="34" charset="-122"/>
-                <a:cs typeface="Amiri" pitchFamily="34" charset="-120"/>
+                <a:latin typeface="Amiri" pitchFamily="2" charset="-78"/>
+                <a:cs typeface="Amiri" pitchFamily="2" charset="-78"/>
               </a:rPr>
               <a:t>سَتَدَرَّبْتُ</a:t>
             </a:r>
@@ -41012,8 +40263,7 @@
                   <a:srgbClr val="FFFFFF"/>
                 </a:solidFill>
                 <a:latin typeface="Calibri" pitchFamily="34" charset="0"/>
-                <a:ea typeface="Calibri" pitchFamily="34" charset="-122"/>
-                <a:cs typeface="Calibri" pitchFamily="34" charset="-120"/>
+                <a:cs typeface="Amiri" pitchFamily="2" charset="-78"/>
               </a:rPr>
               <a:t>C</a:t>
             </a:r>
@@ -41050,9 +40300,8 @@
                 <a:solidFill>
                   <a:srgbClr val="1F2A37"/>
                 </a:solidFill>
-                <a:latin typeface="Amiri" pitchFamily="34" charset="0"/>
-                <a:ea typeface="Amiri" pitchFamily="34" charset="-122"/>
-                <a:cs typeface="Amiri" pitchFamily="34" charset="-120"/>
+                <a:latin typeface="Amiri" pitchFamily="2" charset="-78"/>
+                <a:cs typeface="Amiri" pitchFamily="2" charset="-78"/>
               </a:rPr>
               <a:t>سَأَتَدَرَّبُ</a:t>
             </a:r>
@@ -41090,8 +40339,7 @@
                   <a:srgbClr val="8A6D1E"/>
                 </a:solidFill>
                 <a:latin typeface="Calibri" pitchFamily="34" charset="0"/>
-                <a:ea typeface="Calibri" pitchFamily="34" charset="-122"/>
-                <a:cs typeface="Calibri" pitchFamily="34" charset="-120"/>
+                <a:cs typeface="Amiri" pitchFamily="2" charset="-78"/>
               </a:rPr>
               <a:t>Website grammar laboratory 3.</a:t>
             </a:r>
@@ -41188,8 +40436,7 @@
                   <a:srgbClr val="FFFFFF"/>
                 </a:solidFill>
                 <a:latin typeface="Calibri" pitchFamily="34" charset="0"/>
-                <a:ea typeface="Calibri" pitchFamily="34" charset="-122"/>
-                <a:cs typeface="Calibri" pitchFamily="34" charset="-120"/>
+                <a:cs typeface="Amiri" pitchFamily="2" charset="-78"/>
               </a:rPr>
               <a:t>4</a:t>
             </a:r>
@@ -41227,8 +40474,7 @@
                   <a:srgbClr val="1B3B6F"/>
                 </a:solidFill>
                 <a:latin typeface="Calibri" pitchFamily="34" charset="0"/>
-                <a:ea typeface="Calibri" pitchFamily="34" charset="-122"/>
-                <a:cs typeface="Calibri" pitchFamily="34" charset="-120"/>
+                <a:cs typeface="Amiri" pitchFamily="2" charset="-78"/>
               </a:rPr>
               <a:t>Complete: </a:t>
             </a:r>
@@ -41240,9 +40486,8 @@
                 <a:solidFill>
                   <a:srgbClr val="1B3B6F"/>
                 </a:solidFill>
-                <a:latin typeface="Amiri" pitchFamily="34" charset="0"/>
-                <a:ea typeface="Amiri" pitchFamily="34" charset="-122"/>
-                <a:cs typeface="Amiri" pitchFamily="34" charset="-120"/>
+                <a:latin typeface="Amiri" pitchFamily="2" charset="-78"/>
+                <a:cs typeface="Amiri" pitchFamily="2" charset="-78"/>
               </a:rPr>
               <a:t>سَأَدْرُسُ بِجِدٍّ</a:t>
             </a:r>
@@ -41255,8 +40500,7 @@
                   <a:srgbClr val="1B3B6F"/>
                 </a:solidFill>
                 <a:latin typeface="Calibri" pitchFamily="34" charset="0"/>
-                <a:ea typeface="Calibri" pitchFamily="34" charset="-122"/>
-                <a:cs typeface="Calibri" pitchFamily="34" charset="-120"/>
+                <a:cs typeface="Amiri" pitchFamily="2" charset="-78"/>
               </a:rPr>
               <a:t> ___ </a:t>
             </a:r>
@@ -41268,9 +40512,8 @@
                 <a:solidFill>
                   <a:srgbClr val="1B3B6F"/>
                 </a:solidFill>
-                <a:latin typeface="Amiri" pitchFamily="34" charset="0"/>
-                <a:ea typeface="Amiri" pitchFamily="34" charset="-122"/>
-                <a:cs typeface="Amiri" pitchFamily="34" charset="-120"/>
+                <a:latin typeface="Amiri" pitchFamily="2" charset="-78"/>
+                <a:cs typeface="Amiri" pitchFamily="2" charset="-78"/>
               </a:rPr>
               <a:t>أَنْجَحَ</a:t>
             </a:r>
@@ -41283,8 +40526,7 @@
                   <a:srgbClr val="1B3B6F"/>
                 </a:solidFill>
                 <a:latin typeface="Calibri" pitchFamily="34" charset="0"/>
-                <a:ea typeface="Calibri" pitchFamily="34" charset="-122"/>
-                <a:cs typeface="Calibri" pitchFamily="34" charset="-120"/>
+                <a:cs typeface="Amiri" pitchFamily="2" charset="-78"/>
               </a:rPr>
               <a:t>.</a:t>
             </a:r>
@@ -41347,8 +40589,7 @@
                   <a:srgbClr val="1B3B6F"/>
                 </a:solidFill>
                 <a:latin typeface="Calibri" pitchFamily="34" charset="0"/>
-                <a:ea typeface="Calibri" pitchFamily="34" charset="-122"/>
-                <a:cs typeface="Calibri" pitchFamily="34" charset="-120"/>
+                <a:cs typeface="Amiri" pitchFamily="2" charset="-78"/>
               </a:rPr>
               <a:t>A</a:t>
             </a:r>
@@ -41385,9 +40626,8 @@
                 <a:solidFill>
                   <a:srgbClr val="9AA1AB"/>
                 </a:solidFill>
-                <a:latin typeface="Amiri" pitchFamily="34" charset="0"/>
-                <a:ea typeface="Amiri" pitchFamily="34" charset="-122"/>
-                <a:cs typeface="Amiri" pitchFamily="34" charset="-120"/>
+                <a:latin typeface="Amiri" pitchFamily="2" charset="-78"/>
+                <a:cs typeface="Amiri" pitchFamily="2" charset="-78"/>
               </a:rPr>
               <a:t>مَعَ</a:t>
             </a:r>
@@ -41450,8 +40690,7 @@
                   <a:srgbClr val="1B3B6F"/>
                 </a:solidFill>
                 <a:latin typeface="Calibri" pitchFamily="34" charset="0"/>
-                <a:ea typeface="Calibri" pitchFamily="34" charset="-122"/>
-                <a:cs typeface="Calibri" pitchFamily="34" charset="-120"/>
+                <a:cs typeface="Amiri" pitchFamily="2" charset="-78"/>
               </a:rPr>
               <a:t>B</a:t>
             </a:r>
@@ -41488,9 +40727,8 @@
                 <a:solidFill>
                   <a:srgbClr val="9AA1AB"/>
                 </a:solidFill>
-                <a:latin typeface="Amiri" pitchFamily="34" charset="0"/>
-                <a:ea typeface="Amiri" pitchFamily="34" charset="-122"/>
-                <a:cs typeface="Amiri" pitchFamily="34" charset="-120"/>
+                <a:latin typeface="Amiri" pitchFamily="2" charset="-78"/>
+                <a:cs typeface="Amiri" pitchFamily="2" charset="-78"/>
               </a:rPr>
               <a:t>بَيْنَمَا</a:t>
             </a:r>
@@ -41580,8 +40818,7 @@
                   <a:srgbClr val="FFFFFF"/>
                 </a:solidFill>
                 <a:latin typeface="Calibri" pitchFamily="34" charset="0"/>
-                <a:ea typeface="Calibri" pitchFamily="34" charset="-122"/>
-                <a:cs typeface="Calibri" pitchFamily="34" charset="-120"/>
+                <a:cs typeface="Amiri" pitchFamily="2" charset="-78"/>
               </a:rPr>
               <a:t>C</a:t>
             </a:r>
@@ -41618,9 +40855,8 @@
                 <a:solidFill>
                   <a:srgbClr val="1F2A37"/>
                 </a:solidFill>
-                <a:latin typeface="Amiri" pitchFamily="34" charset="0"/>
-                <a:ea typeface="Amiri" pitchFamily="34" charset="-122"/>
-                <a:cs typeface="Amiri" pitchFamily="34" charset="-120"/>
+                <a:latin typeface="Amiri" pitchFamily="2" charset="-78"/>
+                <a:cs typeface="Amiri" pitchFamily="2" charset="-78"/>
               </a:rPr>
               <a:t>لِكَيْ</a:t>
             </a:r>
@@ -41658,8 +40894,7 @@
                   <a:srgbClr val="8A6D1E"/>
                 </a:solidFill>
                 <a:latin typeface="Calibri" pitchFamily="34" charset="0"/>
-                <a:ea typeface="Calibri" pitchFamily="34" charset="-122"/>
-                <a:cs typeface="Calibri" pitchFamily="34" charset="-120"/>
+                <a:cs typeface="Amiri" pitchFamily="2" charset="-78"/>
               </a:rPr>
               <a:t>Website grammar laboratory 5.</a:t>
             </a:r>
@@ -41756,8 +40991,7 @@
                   <a:srgbClr val="FFFFFF"/>
                 </a:solidFill>
                 <a:latin typeface="Calibri" pitchFamily="34" charset="0"/>
-                <a:ea typeface="Calibri" pitchFamily="34" charset="-122"/>
-                <a:cs typeface="Calibri" pitchFamily="34" charset="-120"/>
+                <a:cs typeface="Amiri" pitchFamily="2" charset="-78"/>
               </a:rPr>
               <a:t>5</a:t>
             </a:r>
@@ -41795,8 +41029,7 @@
                   <a:srgbClr val="1B3B6F"/>
                 </a:solidFill>
                 <a:latin typeface="Calibri" pitchFamily="34" charset="0"/>
-                <a:ea typeface="Calibri" pitchFamily="34" charset="-122"/>
-                <a:cs typeface="Calibri" pitchFamily="34" charset="-120"/>
+                <a:cs typeface="Amiri" pitchFamily="2" charset="-78"/>
               </a:rPr>
               <a:t>Which sentence is fully controlled?</a:t>
             </a:r>
@@ -41886,8 +41119,7 @@
                   <a:srgbClr val="FFFFFF"/>
                 </a:solidFill>
                 <a:latin typeface="Calibri" pitchFamily="34" charset="0"/>
-                <a:ea typeface="Calibri" pitchFamily="34" charset="-122"/>
-                <a:cs typeface="Calibri" pitchFamily="34" charset="-120"/>
+                <a:cs typeface="Amiri" pitchFamily="2" charset="-78"/>
               </a:rPr>
               <a:t>A</a:t>
             </a:r>
@@ -41924,9 +41156,8 @@
                 <a:solidFill>
                   <a:srgbClr val="1F2A37"/>
                 </a:solidFill>
-                <a:latin typeface="Amiri" pitchFamily="34" charset="0"/>
-                <a:ea typeface="Amiri" pitchFamily="34" charset="-122"/>
-                <a:cs typeface="Amiri" pitchFamily="34" charset="-120"/>
+                <a:latin typeface="Amiri" pitchFamily="2" charset="-78"/>
+                <a:cs typeface="Amiri" pitchFamily="2" charset="-78"/>
               </a:rPr>
               <a:t>أُخْتِي مُحَاسِبَةٌ وَسَتَعْمَلُ فِي شَرِكَةٍ.</a:t>
             </a:r>
@@ -41989,8 +41220,7 @@
                   <a:srgbClr val="1B3B6F"/>
                 </a:solidFill>
                 <a:latin typeface="Calibri" pitchFamily="34" charset="0"/>
-                <a:ea typeface="Calibri" pitchFamily="34" charset="-122"/>
-                <a:cs typeface="Calibri" pitchFamily="34" charset="-120"/>
+                <a:cs typeface="Amiri" pitchFamily="2" charset="-78"/>
               </a:rPr>
               <a:t>B</a:t>
             </a:r>
@@ -42027,9 +41257,8 @@
                 <a:solidFill>
                   <a:srgbClr val="9AA1AB"/>
                 </a:solidFill>
-                <a:latin typeface="Amiri" pitchFamily="34" charset="0"/>
-                <a:ea typeface="Amiri" pitchFamily="34" charset="-122"/>
-                <a:cs typeface="Amiri" pitchFamily="34" charset="-120"/>
+                <a:latin typeface="Amiri" pitchFamily="2" charset="-78"/>
+                <a:cs typeface="Amiri" pitchFamily="2" charset="-78"/>
               </a:rPr>
               <a:t>أُخْتِي مُحَاسِبٌ وَسَوْفَ عَمِلَتْ.</a:t>
             </a:r>
@@ -42092,8 +41321,7 @@
                   <a:srgbClr val="1B3B6F"/>
                 </a:solidFill>
                 <a:latin typeface="Calibri" pitchFamily="34" charset="0"/>
-                <a:ea typeface="Calibri" pitchFamily="34" charset="-122"/>
-                <a:cs typeface="Calibri" pitchFamily="34" charset="-120"/>
+                <a:cs typeface="Amiri" pitchFamily="2" charset="-78"/>
               </a:rPr>
               <a:t>C</a:t>
             </a:r>
@@ -42130,9 +41358,8 @@
                 <a:solidFill>
                   <a:srgbClr val="9AA1AB"/>
                 </a:solidFill>
-                <a:latin typeface="Amiri" pitchFamily="34" charset="0"/>
-                <a:ea typeface="Amiri" pitchFamily="34" charset="-122"/>
-                <a:cs typeface="Amiri" pitchFamily="34" charset="-120"/>
+                <a:latin typeface="Amiri" pitchFamily="2" charset="-78"/>
+                <a:cs typeface="Amiri" pitchFamily="2" charset="-78"/>
               </a:rPr>
               <a:t>أُخْتِي فِي مُحَاسِبَةٍ.</a:t>
             </a:r>
@@ -42170,8 +41397,7 @@
                   <a:srgbClr val="8A6D1E"/>
                 </a:solidFill>
                 <a:latin typeface="Calibri" pitchFamily="34" charset="0"/>
-                <a:ea typeface="Calibri" pitchFamily="34" charset="-122"/>
-                <a:cs typeface="Calibri" pitchFamily="34" charset="-120"/>
+                <a:cs typeface="Amiri" pitchFamily="2" charset="-78"/>
               </a:rPr>
               <a:t>Website grammar laboratory 10.</a:t>
             </a:r>
@@ -42243,8 +41469,7 @@
                   <a:srgbClr val="8A6D1E"/>
                 </a:solidFill>
                 <a:latin typeface="Calibri" pitchFamily="34" charset="0"/>
-                <a:ea typeface="Calibri" pitchFamily="34" charset="-122"/>
-                <a:cs typeface="Calibri" pitchFamily="34" charset="-120"/>
+                <a:cs typeface="Amiri" pitchFamily="2" charset="-78"/>
               </a:rPr>
               <a:t>THE KEY IDEA FOR TODAY</a:t>
             </a:r>
@@ -42282,8 +41507,7 @@
                   <a:srgbClr val="1F2A37"/>
                 </a:solidFill>
                 <a:latin typeface="Calibri" pitchFamily="34" charset="0"/>
-                <a:ea typeface="Calibri" pitchFamily="34" charset="-122"/>
-                <a:cs typeface="Calibri" pitchFamily="34" charset="-120"/>
+                <a:cs typeface="Amiri" pitchFamily="2" charset="-78"/>
               </a:rPr>
               <a:t>This warm-up does NOT count. Use it to find ONE audit to check in your writing today.</a:t>
             </a:r>
@@ -42323,9 +41547,8 @@
                 <a:solidFill>
                   <a:srgbClr val="1B3B6F"/>
                 </a:solidFill>
-                <a:latin typeface="Amiri" pitchFamily="34" charset="0"/>
-                <a:ea typeface="Amiri" pitchFamily="34" charset="-122"/>
-                <a:cs typeface="Amiri" pitchFamily="34" charset="-120"/>
+                <a:latin typeface="Amiri" pitchFamily="2" charset="-78"/>
+                <a:cs typeface="Amiri" pitchFamily="2" charset="-78"/>
               </a:rPr>
               <a:t>المُطَابَقَةُ · حَرْفُ الجَرِّ · المُسْتَقْبَلُ · الدَّلِيلُ</a:t>
             </a:r>
@@ -42363,8 +41586,7 @@
                   <a:srgbClr val="8A93A0"/>
                 </a:solidFill>
                 <a:latin typeface="Calibri" pitchFamily="34" charset="0"/>
-                <a:ea typeface="Calibri" pitchFamily="34" charset="-122"/>
-                <a:cs typeface="Calibri" pitchFamily="34" charset="-120"/>
+                <a:cs typeface="Amiri" pitchFamily="2" charset="-78"/>
               </a:rPr>
               <a:t>5 / 23</a:t>
             </a:r>
@@ -42458,9 +41680,8 @@
                 <a:solidFill>
                   <a:srgbClr val="D4AF37"/>
                 </a:solidFill>
-                <a:latin typeface="Amiri" pitchFamily="34" charset="0"/>
-                <a:ea typeface="Amiri" pitchFamily="34" charset="-122"/>
-                <a:cs typeface="Amiri" pitchFamily="34" charset="-120"/>
+                <a:latin typeface="Amiri" pitchFamily="2" charset="-78"/>
+                <a:cs typeface="Amiri" pitchFamily="2" charset="-78"/>
               </a:rPr>
               <a:t>م</a:t>
             </a:r>
@@ -42498,8 +41719,7 @@
                   <a:srgbClr val="1B3B6F"/>
                 </a:solidFill>
                 <a:latin typeface="Cambria" pitchFamily="34" charset="0"/>
-                <a:ea typeface="Cambria" pitchFamily="34" charset="-122"/>
-                <a:cs typeface="Cambria" pitchFamily="34" charset="-120"/>
+                <a:cs typeface="Amiri" pitchFamily="2" charset="-78"/>
               </a:rPr>
               <a:t>Al Madina Online School</a:t>
             </a:r>
@@ -42537,8 +41757,7 @@
                   <a:srgbClr val="8A6D1E"/>
                 </a:solidFill>
                 <a:latin typeface="Calibri" pitchFamily="34" charset="0"/>
-                <a:ea typeface="Calibri" pitchFamily="34" charset="-122"/>
-                <a:cs typeface="Calibri" pitchFamily="34" charset="-120"/>
+                <a:cs typeface="Amiri" pitchFamily="2" charset="-78"/>
               </a:rPr>
               <a:t>ARABIC DEPARTMENT · MIFTAH ARABIC · IGCSE 0544</a:t>
             </a:r>
@@ -42603,8 +41822,7 @@
                   <a:srgbClr val="FFFFFF"/>
                 </a:solidFill>
                 <a:latin typeface="Calibri" pitchFamily="34" charset="0"/>
-                <a:ea typeface="Calibri" pitchFamily="34" charset="-122"/>
-                <a:cs typeface="Calibri" pitchFamily="34" charset="-120"/>
+                <a:cs typeface="Amiri" pitchFamily="2" charset="-78"/>
               </a:rPr>
               <a:t>D3-L12 · D3 Assessment</a:t>
             </a:r>
@@ -42669,8 +41887,7 @@
                   <a:srgbClr val="FFFFFF"/>
                 </a:solidFill>
                 <a:latin typeface="Calibri" pitchFamily="34" charset="0"/>
-                <a:ea typeface="Calibri" pitchFamily="34" charset="-122"/>
-                <a:cs typeface="Calibri" pitchFamily="34" charset="-120"/>
+                <a:cs typeface="Amiri" pitchFamily="2" charset="-78"/>
               </a:rPr>
               <a:t>TEACHER INSTRUCTION · 1 MIN</a:t>
             </a:r>
@@ -42708,8 +41925,7 @@
                   <a:srgbClr val="1B3B6F"/>
                 </a:solidFill>
                 <a:latin typeface="Calibri" pitchFamily="34" charset="0"/>
-                <a:ea typeface="Calibri" pitchFamily="34" charset="-122"/>
-                <a:cs typeface="Calibri" pitchFamily="34" charset="-120"/>
+                <a:cs typeface="Amiri" pitchFamily="2" charset="-78"/>
               </a:rPr>
               <a:t>REVIEW · THE D3 GRAMMAR SYSTEM (WEBSITE GRAMMAR LABORATORY)</a:t>
             </a:r>
@@ -42747,8 +41963,7 @@
                   <a:srgbClr val="1B3B6F"/>
                 </a:solidFill>
                 <a:latin typeface="Cambria" pitchFamily="34" charset="0"/>
-                <a:ea typeface="Cambria" pitchFamily="34" charset="-122"/>
-                <a:cs typeface="Cambria" pitchFamily="34" charset="-120"/>
+                <a:cs typeface="Amiri" pitchFamily="2" charset="-78"/>
               </a:rPr>
               <a:t>Four audits before you write</a:t>
             </a:r>
@@ -42785,9 +42000,8 @@
                 <a:solidFill>
                   <a:srgbClr val="8A6D1E"/>
                 </a:solidFill>
-                <a:latin typeface="Amiri" pitchFamily="34" charset="0"/>
-                <a:ea typeface="Amiri" pitchFamily="34" charset="-122"/>
-                <a:cs typeface="Amiri" pitchFamily="34" charset="-120"/>
+                <a:latin typeface="Amiri" pitchFamily="2" charset="-78"/>
+                <a:cs typeface="Amiri" pitchFamily="2" charset="-78"/>
               </a:rPr>
               <a:t>مُرَاجَعَةُ القَوَاعِدِ</a:t>
             </a:r>
@@ -42825,8 +42039,7 @@
                   <a:srgbClr val="8A93A0"/>
                 </a:solidFill>
                 <a:latin typeface="Calibri" pitchFamily="34" charset="0"/>
-                <a:ea typeface="Calibri" pitchFamily="34" charset="-122"/>
-                <a:cs typeface="Calibri" pitchFamily="34" charset="-120"/>
+                <a:cs typeface="Amiri" pitchFamily="2" charset="-78"/>
               </a:rPr>
               <a:t>Miftah Arabic · Development D3 · Work and Careers · D3-L12</a:t>
             </a:r>
@@ -42925,8 +42138,7 @@
                   <a:srgbClr val="FFFFFF"/>
                 </a:solidFill>
                 <a:latin typeface="Calibri" pitchFamily="34" charset="0"/>
-                <a:ea typeface="Calibri" pitchFamily="34" charset="-122"/>
-                <a:cs typeface="Calibri" pitchFamily="34" charset="-120"/>
+                <a:cs typeface="Amiri" pitchFamily="2" charset="-78"/>
               </a:rPr>
               <a:t>AGREEMENT</a:t>
             </a:r>
@@ -42963,9 +42175,8 @@
                 <a:solidFill>
                   <a:srgbClr val="8A6D1E"/>
                 </a:solidFill>
-                <a:latin typeface="Amiri" pitchFamily="34" charset="0"/>
-                <a:ea typeface="Amiri" pitchFamily="34" charset="-122"/>
-                <a:cs typeface="Amiri" pitchFamily="34" charset="-120"/>
+                <a:latin typeface="Amiri" pitchFamily="2" charset="-78"/>
+                <a:cs typeface="Amiri" pitchFamily="2" charset="-78"/>
               </a:rPr>
               <a:t>مُهَنْدِسَةٌ · تَعْمَلُ</a:t>
             </a:r>
@@ -43005,9 +42216,8 @@
                 <a:solidFill>
                   <a:srgbClr val="1B3B6F"/>
                 </a:solidFill>
-                <a:latin typeface="Amiri" pitchFamily="34" charset="0"/>
-                <a:ea typeface="Amiri" pitchFamily="34" charset="-122"/>
-                <a:cs typeface="Amiri" pitchFamily="34" charset="-120"/>
+                <a:latin typeface="Amiri" pitchFamily="2" charset="-78"/>
+                <a:cs typeface="Amiri" pitchFamily="2" charset="-78"/>
               </a:rPr>
               <a:t>أُخْتِي مُحَاسِبَةٌ وَسَتَعْمَلُ فِي شَرِكَةٍ.</a:t>
             </a:r>
@@ -43045,8 +42255,7 @@
                   <a:srgbClr val="5A6472"/>
                 </a:solidFill>
                 <a:latin typeface="Calibri" pitchFamily="34" charset="0"/>
-                <a:ea typeface="Calibri" pitchFamily="34" charset="-122"/>
-                <a:cs typeface="Calibri" pitchFamily="34" charset="-120"/>
+                <a:cs typeface="Amiri" pitchFamily="2" charset="-78"/>
               </a:rPr>
               <a:t>My sister is an accountant and will work in a company.</a:t>
             </a:r>
@@ -43111,8 +42320,7 @@
                   <a:srgbClr val="1F2A37"/>
                 </a:solidFill>
                 <a:latin typeface="Calibri" pitchFamily="34" charset="0"/>
-                <a:ea typeface="Calibri" pitchFamily="34" charset="-122"/>
-                <a:cs typeface="Calibri" pitchFamily="34" charset="-120"/>
+                <a:cs typeface="Amiri" pitchFamily="2" charset="-78"/>
               </a:rPr>
               <a:t>Person, verb and job match.</a:t>
             </a:r>
@@ -43211,8 +42419,7 @@
                   <a:srgbClr val="FFFFFF"/>
                 </a:solidFill>
                 <a:latin typeface="Calibri" pitchFamily="34" charset="0"/>
-                <a:ea typeface="Calibri" pitchFamily="34" charset="-122"/>
-                <a:cs typeface="Calibri" pitchFamily="34" charset="-120"/>
+                <a:cs typeface="Amiri" pitchFamily="2" charset="-78"/>
               </a:rPr>
               <a:t>PATTERNS</a:t>
             </a:r>
@@ -43249,9 +42456,8 @@
                 <a:solidFill>
                   <a:srgbClr val="8A6D1E"/>
                 </a:solidFill>
-                <a:latin typeface="Amiri" pitchFamily="34" charset="0"/>
-                <a:ea typeface="Amiri" pitchFamily="34" charset="-122"/>
-                <a:cs typeface="Amiri" pitchFamily="34" charset="-120"/>
+                <a:latin typeface="Amiri" pitchFamily="2" charset="-78"/>
+                <a:cs typeface="Amiri" pitchFamily="2" charset="-78"/>
               </a:rPr>
               <a:t>إِلَى · لِـ · الَّتِي</a:t>
             </a:r>
@@ -43288,9 +42494,8 @@
                 <a:solidFill>
                   <a:srgbClr val="1B3B6F"/>
                 </a:solidFill>
-                <a:latin typeface="Amiri" pitchFamily="34" charset="0"/>
-                <a:ea typeface="Amiri" pitchFamily="34" charset="-122"/>
-                <a:cs typeface="Amiri" pitchFamily="34" charset="-120"/>
+                <a:latin typeface="Amiri" pitchFamily="2" charset="-78"/>
+                <a:cs typeface="Amiri" pitchFamily="2" charset="-78"/>
               </a:rPr>
               <a:t>الشَّرِكَةُ الَّتِي تُقَدِّمُ تَدْرِيبًا</a:t>
             </a:r>
@@ -43328,8 +42533,7 @@
                   <a:srgbClr val="5A6472"/>
                 </a:solidFill>
                 <a:latin typeface="Calibri" pitchFamily="34" charset="0"/>
-                <a:ea typeface="Calibri" pitchFamily="34" charset="-122"/>
-                <a:cs typeface="Calibri" pitchFamily="34" charset="-120"/>
+                <a:cs typeface="Amiri" pitchFamily="2" charset="-78"/>
               </a:rPr>
               <a:t>the company which offers training</a:t>
             </a:r>
@@ -43394,8 +42598,7 @@
                   <a:srgbClr val="1F2A37"/>
                 </a:solidFill>
                 <a:latin typeface="Calibri" pitchFamily="34" charset="0"/>
-                <a:ea typeface="Calibri" pitchFamily="34" charset="-122"/>
-                <a:cs typeface="Calibri" pitchFamily="34" charset="-120"/>
+                <a:cs typeface="Amiri" pitchFamily="2" charset="-78"/>
               </a:rPr>
               <a:t>Whole phrases, right relative.</a:t>
             </a:r>
@@ -43494,8 +42697,7 @@
                   <a:srgbClr val="FFFFFF"/>
                 </a:solidFill>
                 <a:latin typeface="Calibri" pitchFamily="34" charset="0"/>
-                <a:ea typeface="Calibri" pitchFamily="34" charset="-122"/>
-                <a:cs typeface="Calibri" pitchFamily="34" charset="-120"/>
+                <a:cs typeface="Amiri" pitchFamily="2" charset="-78"/>
               </a:rPr>
               <a:t>FUTURE + EVIDENCE</a:t>
             </a:r>
@@ -43532,9 +42734,8 @@
                 <a:solidFill>
                   <a:srgbClr val="8A6D1E"/>
                 </a:solidFill>
-                <a:latin typeface="Amiri" pitchFamily="34" charset="0"/>
-                <a:ea typeface="Amiri" pitchFamily="34" charset="-122"/>
-                <a:cs typeface="Amiri" pitchFamily="34" charset="-120"/>
+                <a:latin typeface="Amiri" pitchFamily="2" charset="-78"/>
+                <a:cs typeface="Amiri" pitchFamily="2" charset="-78"/>
               </a:rPr>
               <a:t>سَـ · لِكَيْ · الدَّلِيلُ</a:t>
             </a:r>
@@ -43574,9 +42775,8 @@
                 <a:solidFill>
                   <a:srgbClr val="1B3B6F"/>
                 </a:solidFill>
-                <a:latin typeface="Amiri" pitchFamily="34" charset="0"/>
-                <a:ea typeface="Amiri" pitchFamily="34" charset="-122"/>
-                <a:cs typeface="Amiri" pitchFamily="34" charset="-120"/>
+                <a:latin typeface="Amiri" pitchFamily="2" charset="-78"/>
+                <a:cs typeface="Amiri" pitchFamily="2" charset="-78"/>
               </a:rPr>
               <a:t>أَنَا مُنَظَّمٌ، وَالدَّلِيلُ أَنَّنِي أَحْتَرِمُ المَوَاعِيدَ.</a:t>
             </a:r>
@@ -43614,8 +42814,7 @@
                   <a:srgbClr val="5A6472"/>
                 </a:solidFill>
                 <a:latin typeface="Calibri" pitchFamily="34" charset="0"/>
-                <a:ea typeface="Calibri" pitchFamily="34" charset="-122"/>
-                <a:cs typeface="Calibri" pitchFamily="34" charset="-120"/>
+                <a:cs typeface="Amiri" pitchFamily="2" charset="-78"/>
               </a:rPr>
               <a:t>I am organised; the proof is that I respect deadlines.</a:t>
             </a:r>
@@ -43680,8 +42879,7 @@
                   <a:srgbClr val="1F2A37"/>
                 </a:solidFill>
                 <a:latin typeface="Calibri" pitchFamily="34" charset="0"/>
-                <a:ea typeface="Calibri" pitchFamily="34" charset="-122"/>
-                <a:cs typeface="Calibri" pitchFamily="34" charset="-120"/>
+                <a:cs typeface="Amiri" pitchFamily="2" charset="-78"/>
               </a:rPr>
               <a:t>Claim + proof.</a:t>
             </a:r>
@@ -43753,8 +42951,7 @@
                   <a:srgbClr val="B83227"/>
                 </a:solidFill>
                 <a:latin typeface="Calibri" pitchFamily="34" charset="0"/>
-                <a:ea typeface="Calibri" pitchFamily="34" charset="-122"/>
-                <a:cs typeface="Calibri" pitchFamily="34" charset="-120"/>
+                <a:cs typeface="Amiri" pitchFamily="2" charset="-78"/>
               </a:rPr>
               <a:t>COMMON ERROR</a:t>
             </a:r>
@@ -43792,8 +42989,7 @@
                   <a:srgbClr val="1F2A37"/>
                 </a:solidFill>
                 <a:latin typeface="Calibri" pitchFamily="34" charset="0"/>
-                <a:ea typeface="Calibri" pitchFamily="34" charset="-122"/>
-                <a:cs typeface="Calibri" pitchFamily="34" charset="-120"/>
+                <a:cs typeface="Amiri" pitchFamily="2" charset="-78"/>
               </a:rPr>
               <a:t>Website grammar laboratory: a condition needs idhā + past, then fa-sa-.</a:t>
             </a:r>
@@ -43833,9 +43029,8 @@
                 <a:solidFill>
                   <a:srgbClr val="1B3B6F"/>
                 </a:solidFill>
-                <a:latin typeface="Amiri" pitchFamily="34" charset="0"/>
-                <a:ea typeface="Amiri" pitchFamily="34" charset="-122"/>
-                <a:cs typeface="Amiri" pitchFamily="34" charset="-120"/>
+                <a:latin typeface="Amiri" pitchFamily="2" charset="-78"/>
+                <a:cs typeface="Amiri" pitchFamily="2" charset="-78"/>
               </a:rPr>
               <a:t>إِذَا نَجَحْتُ فَسَأَدْرُسُ فِي الجَامِعَةِ.</a:t>
             </a:r>
@@ -43873,8 +43068,7 @@
                   <a:srgbClr val="5A6472"/>
                 </a:solidFill>
                 <a:latin typeface="Calibri" pitchFamily="34" charset="0"/>
-                <a:ea typeface="Calibri" pitchFamily="34" charset="-122"/>
-                <a:cs typeface="Calibri" pitchFamily="34" charset="-120"/>
+                <a:cs typeface="Amiri" pitchFamily="2" charset="-78"/>
               </a:rPr>
               <a:t>→</a:t>
             </a:r>
@@ -43914,9 +43108,8 @@
                 <a:solidFill>
                   <a:srgbClr val="B83227"/>
                 </a:solidFill>
-                <a:latin typeface="Amiri" pitchFamily="34" charset="0"/>
-                <a:ea typeface="Amiri" pitchFamily="34" charset="-122"/>
-                <a:cs typeface="Amiri" pitchFamily="34" charset="-120"/>
+                <a:latin typeface="Amiri" pitchFamily="2" charset="-78"/>
+                <a:cs typeface="Amiri" pitchFamily="2" charset="-78"/>
               </a:rPr>
               <a:t>إِذَا أَنْجَحُ سَوْفَ دَرَسْتُ.</a:t>
             </a:r>
@@ -43977,8 +43170,7 @@
                   <a:srgbClr val="8A93A0"/>
                 </a:solidFill>
                 <a:latin typeface="Calibri" pitchFamily="34" charset="0"/>
-                <a:ea typeface="Calibri" pitchFamily="34" charset="-122"/>
-                <a:cs typeface="Calibri" pitchFamily="34" charset="-120"/>
+                <a:cs typeface="Amiri" pitchFamily="2" charset="-78"/>
               </a:rPr>
               <a:t>6 / 23</a:t>
             </a:r>
@@ -44072,9 +43264,8 @@
                 <a:solidFill>
                   <a:srgbClr val="D4AF37"/>
                 </a:solidFill>
-                <a:latin typeface="Amiri" pitchFamily="34" charset="0"/>
-                <a:ea typeface="Amiri" pitchFamily="34" charset="-122"/>
-                <a:cs typeface="Amiri" pitchFamily="34" charset="-120"/>
+                <a:latin typeface="Amiri" pitchFamily="2" charset="-78"/>
+                <a:cs typeface="Amiri" pitchFamily="2" charset="-78"/>
               </a:rPr>
               <a:t>م</a:t>
             </a:r>
@@ -44112,8 +43303,7 @@
                   <a:srgbClr val="1B3B6F"/>
                 </a:solidFill>
                 <a:latin typeface="Cambria" pitchFamily="34" charset="0"/>
-                <a:ea typeface="Cambria" pitchFamily="34" charset="-122"/>
-                <a:cs typeface="Cambria" pitchFamily="34" charset="-120"/>
+                <a:cs typeface="Amiri" pitchFamily="2" charset="-78"/>
               </a:rPr>
               <a:t>Al Madina Online School</a:t>
             </a:r>
@@ -44151,8 +43341,7 @@
                   <a:srgbClr val="8A6D1E"/>
                 </a:solidFill>
                 <a:latin typeface="Calibri" pitchFamily="34" charset="0"/>
-                <a:ea typeface="Calibri" pitchFamily="34" charset="-122"/>
-                <a:cs typeface="Calibri" pitchFamily="34" charset="-120"/>
+                <a:cs typeface="Amiri" pitchFamily="2" charset="-78"/>
               </a:rPr>
               <a:t>ARABIC DEPARTMENT · MIFTAH ARABIC · IGCSE 0544</a:t>
             </a:r>
@@ -44217,8 +43406,7 @@
                   <a:srgbClr val="FFFFFF"/>
                 </a:solidFill>
                 <a:latin typeface="Calibri" pitchFamily="34" charset="0"/>
-                <a:ea typeface="Calibri" pitchFamily="34" charset="-122"/>
-                <a:cs typeface="Calibri" pitchFamily="34" charset="-120"/>
+                <a:cs typeface="Amiri" pitchFamily="2" charset="-78"/>
               </a:rPr>
               <a:t>D3-L12 · D3 Assessment</a:t>
             </a:r>
@@ -44283,8 +43471,7 @@
                   <a:srgbClr val="FFFFFF"/>
                 </a:solidFill>
                 <a:latin typeface="Calibri" pitchFamily="34" charset="0"/>
-                <a:ea typeface="Calibri" pitchFamily="34" charset="-122"/>
-                <a:cs typeface="Calibri" pitchFamily="34" charset="-120"/>
+                <a:cs typeface="Amiri" pitchFamily="2" charset="-78"/>
               </a:rPr>
               <a:t>TEACHER INSTRUCTION · 1 MIN</a:t>
             </a:r>
@@ -44322,8 +43509,7 @@
                   <a:srgbClr val="1B3B6F"/>
                 </a:solidFill>
                 <a:latin typeface="Calibri" pitchFamily="34" charset="0"/>
-                <a:ea typeface="Calibri" pitchFamily="34" charset="-122"/>
-                <a:cs typeface="Calibri" pitchFamily="34" charset="-120"/>
+                <a:cs typeface="Amiri" pitchFamily="2" charset="-78"/>
               </a:rPr>
               <a:t>ASSESSMENT MAP (WEBSITE) · 60 MARKS IN TOTAL</a:t>
             </a:r>
@@ -44361,8 +43547,7 @@
                   <a:srgbClr val="1B3B6F"/>
                 </a:solidFill>
                 <a:latin typeface="Cambria" pitchFamily="34" charset="0"/>
-                <a:ea typeface="Cambria" pitchFamily="34" charset="-122"/>
-                <a:cs typeface="Cambria" pitchFamily="34" charset="-120"/>
+                <a:cs typeface="Amiri" pitchFamily="2" charset="-78"/>
               </a:rPr>
               <a:t>Four skills, sixty marks</a:t>
             </a:r>
@@ -44399,9 +43584,8 @@
                 <a:solidFill>
                   <a:srgbClr val="8A6D1E"/>
                 </a:solidFill>
-                <a:latin typeface="Amiri" pitchFamily="34" charset="0"/>
-                <a:ea typeface="Amiri" pitchFamily="34" charset="-122"/>
-                <a:cs typeface="Amiri" pitchFamily="34" charset="-120"/>
+                <a:latin typeface="Amiri" pitchFamily="2" charset="-78"/>
+                <a:cs typeface="Amiri" pitchFamily="2" charset="-78"/>
               </a:rPr>
               <a:t>خُطَّةُ التَّقْيِيمِ</a:t>
             </a:r>
@@ -44439,8 +43623,7 @@
                   <a:srgbClr val="8A93A0"/>
                 </a:solidFill>
                 <a:latin typeface="Calibri" pitchFamily="34" charset="0"/>
-                <a:ea typeface="Calibri" pitchFamily="34" charset="-122"/>
-                <a:cs typeface="Calibri" pitchFamily="34" charset="-120"/>
+                <a:cs typeface="Amiri" pitchFamily="2" charset="-78"/>
               </a:rPr>
               <a:t>Miftah Arabic · Development D3 · Work and Careers · D3-L12</a:t>
             </a:r>
@@ -44503,8 +43686,7 @@
                   <a:srgbClr val="FFFFFF"/>
                 </a:solidFill>
                 <a:latin typeface="Calibri" pitchFamily="34" charset="0"/>
-                <a:ea typeface="Calibri" pitchFamily="34" charset="-122"/>
-                <a:cs typeface="Calibri" pitchFamily="34" charset="-120"/>
+                <a:cs typeface="Amiri" pitchFamily="2" charset="-78"/>
               </a:rPr>
               <a:t>Section</a:t>
             </a:r>
@@ -44542,8 +43724,7 @@
                   <a:srgbClr val="FFFFFF"/>
                 </a:solidFill>
                 <a:latin typeface="Calibri" pitchFamily="34" charset="0"/>
-                <a:ea typeface="Calibri" pitchFamily="34" charset="-122"/>
-                <a:cs typeface="Calibri" pitchFamily="34" charset="-120"/>
+                <a:cs typeface="Amiri" pitchFamily="2" charset="-78"/>
               </a:rPr>
               <a:t>What you do</a:t>
             </a:r>
@@ -44581,8 +43762,7 @@
                   <a:srgbClr val="FFFFFF"/>
                 </a:solidFill>
                 <a:latin typeface="Calibri" pitchFamily="34" charset="0"/>
-                <a:ea typeface="Calibri" pitchFamily="34" charset="-122"/>
-                <a:cs typeface="Calibri" pitchFamily="34" charset="-120"/>
+                <a:cs typeface="Amiri" pitchFamily="2" charset="-78"/>
               </a:rPr>
               <a:t>Marks</a:t>
             </a:r>
@@ -44647,8 +43827,7 @@
                   <a:srgbClr val="5A6472"/>
                 </a:solidFill>
                 <a:latin typeface="Calibri" pitchFamily="34" charset="0"/>
-                <a:ea typeface="Calibri" pitchFamily="34" charset="-122"/>
-                <a:cs typeface="Calibri" pitchFamily="34" charset="-120"/>
+                <a:cs typeface="Amiri" pitchFamily="2" charset="-78"/>
               </a:rPr>
               <a:t>A · Listening</a:t>
             </a:r>
@@ -44686,8 +43865,7 @@
                   <a:srgbClr val="5A6472"/>
                 </a:solidFill>
                 <a:latin typeface="Calibri" pitchFamily="34" charset="0"/>
-                <a:ea typeface="Calibri" pitchFamily="34" charset="-122"/>
-                <a:cs typeface="Calibri" pitchFamily="34" charset="-120"/>
+                <a:cs typeface="Amiri" pitchFamily="2" charset="-78"/>
               </a:rPr>
               <a:t>A summer-training advert (heard up to three times): 10 questions, 2 marks each — listen for the FINAL details</a:t>
             </a:r>
@@ -44725,8 +43903,7 @@
                   <a:srgbClr val="5A6472"/>
                 </a:solidFill>
                 <a:latin typeface="Calibri" pitchFamily="34" charset="0"/>
-                <a:ea typeface="Calibri" pitchFamily="34" charset="-122"/>
-                <a:cs typeface="Calibri" pitchFamily="34" charset="-120"/>
+                <a:cs typeface="Amiri" pitchFamily="2" charset="-78"/>
               </a:rPr>
               <a:t>20</a:t>
             </a:r>
@@ -44791,8 +43968,7 @@
                   <a:srgbClr val="FFFFFF"/>
                 </a:solidFill>
                 <a:latin typeface="Calibri" pitchFamily="34" charset="0"/>
-                <a:ea typeface="Calibri" pitchFamily="34" charset="-122"/>
-                <a:cs typeface="Calibri" pitchFamily="34" charset="-120"/>
+                <a:cs typeface="Amiri" pitchFamily="2" charset="-78"/>
               </a:rPr>
               <a:t>CORE</a:t>
             </a:r>
@@ -44857,8 +44033,7 @@
                   <a:srgbClr val="5A6472"/>
                 </a:solidFill>
                 <a:latin typeface="Calibri" pitchFamily="34" charset="0"/>
-                <a:ea typeface="Calibri" pitchFamily="34" charset="-122"/>
-                <a:cs typeface="Calibri" pitchFamily="34" charset="-120"/>
+                <a:cs typeface="Amiri" pitchFamily="2" charset="-78"/>
               </a:rPr>
               <a:t>B · Reading</a:t>
             </a:r>
@@ -44896,8 +44071,7 @@
                   <a:srgbClr val="5A6472"/>
                 </a:solidFill>
                 <a:latin typeface="Calibri" pitchFamily="34" charset="0"/>
-                <a:ea typeface="Calibri" pitchFamily="34" charset="-122"/>
-                <a:cs typeface="Calibri" pitchFamily="34" charset="-120"/>
+                <a:cs typeface="Amiri" pitchFamily="2" charset="-78"/>
               </a:rPr>
               <a:t>Amal’s career-plan article: locate, infer and prove — 10 questions</a:t>
             </a:r>
@@ -44935,8 +44109,7 @@
                   <a:srgbClr val="5A6472"/>
                 </a:solidFill>
                 <a:latin typeface="Calibri" pitchFamily="34" charset="0"/>
-                <a:ea typeface="Calibri" pitchFamily="34" charset="-122"/>
-                <a:cs typeface="Calibri" pitchFamily="34" charset="-120"/>
+                <a:cs typeface="Amiri" pitchFamily="2" charset="-78"/>
               </a:rPr>
               <a:t>10</a:t>
             </a:r>
@@ -45001,8 +44174,7 @@
                   <a:srgbClr val="FFFFFF"/>
                 </a:solidFill>
                 <a:latin typeface="Calibri" pitchFamily="34" charset="0"/>
-                <a:ea typeface="Calibri" pitchFamily="34" charset="-122"/>
-                <a:cs typeface="Calibri" pitchFamily="34" charset="-120"/>
+                <a:cs typeface="Amiri" pitchFamily="2" charset="-78"/>
               </a:rPr>
               <a:t>CORE</a:t>
             </a:r>
@@ -45067,8 +44239,7 @@
                   <a:srgbClr val="5A6472"/>
                 </a:solidFill>
                 <a:latin typeface="Calibri" pitchFamily="34" charset="0"/>
-                <a:ea typeface="Calibri" pitchFamily="34" charset="-122"/>
-                <a:cs typeface="Calibri" pitchFamily="34" charset="-120"/>
+                <a:cs typeface="Amiri" pitchFamily="2" charset="-78"/>
               </a:rPr>
               <a:t>C · Writing</a:t>
             </a:r>
@@ -45106,8 +44277,7 @@
                   <a:srgbClr val="5A6472"/>
                 </a:solidFill>
                 <a:latin typeface="Calibri" pitchFamily="34" charset="0"/>
-                <a:ea typeface="Calibri" pitchFamily="34" charset="-122"/>
-                <a:cs typeface="Calibri" pitchFamily="34" charset="-120"/>
+                <a:cs typeface="Amiri" pitchFamily="2" charset="-78"/>
               </a:rPr>
               <a:t>A five-field application profile (5) + a 120–140-word career article or formal email (15)</a:t>
             </a:r>
@@ -45145,8 +44315,7 @@
                   <a:srgbClr val="5A6472"/>
                 </a:solidFill>
                 <a:latin typeface="Calibri" pitchFamily="34" charset="0"/>
-                <a:ea typeface="Calibri" pitchFamily="34" charset="-122"/>
-                <a:cs typeface="Calibri" pitchFamily="34" charset="-120"/>
+                <a:cs typeface="Amiri" pitchFamily="2" charset="-78"/>
               </a:rPr>
               <a:t>20</a:t>
             </a:r>
@@ -45211,8 +44380,7 @@
                   <a:srgbClr val="FFFFFF"/>
                 </a:solidFill>
                 <a:latin typeface="Calibri" pitchFamily="34" charset="0"/>
-                <a:ea typeface="Calibri" pitchFamily="34" charset="-122"/>
-                <a:cs typeface="Calibri" pitchFamily="34" charset="-120"/>
+                <a:cs typeface="Amiri" pitchFamily="2" charset="-78"/>
               </a:rPr>
               <a:t>CORE</a:t>
             </a:r>
@@ -45277,8 +44445,7 @@
                   <a:srgbClr val="5A6472"/>
                 </a:solidFill>
                 <a:latin typeface="Calibri" pitchFamily="34" charset="0"/>
-                <a:ea typeface="Calibri" pitchFamily="34" charset="-122"/>
-                <a:cs typeface="Calibri" pitchFamily="34" charset="-120"/>
+                <a:cs typeface="Amiri" pitchFamily="2" charset="-78"/>
               </a:rPr>
               <a:t>D · Speaking</a:t>
             </a:r>
@@ -45316,8 +44483,7 @@
                   <a:srgbClr val="5A6472"/>
                 </a:solidFill>
                 <a:latin typeface="Calibri" pitchFamily="34" charset="0"/>
-                <a:ea typeface="Calibri" pitchFamily="34" charset="-122"/>
-                <a:cs typeface="Calibri" pitchFamily="34" charset="-120"/>
+                <a:cs typeface="Amiri" pitchFamily="2" charset="-78"/>
               </a:rPr>
               <a:t>An interview + a topic conversation about your career plan</a:t>
             </a:r>
@@ -45355,8 +44521,7 @@
                   <a:srgbClr val="5A6472"/>
                 </a:solidFill>
                 <a:latin typeface="Calibri" pitchFamily="34" charset="0"/>
-                <a:ea typeface="Calibri" pitchFamily="34" charset="-122"/>
-                <a:cs typeface="Calibri" pitchFamily="34" charset="-120"/>
+                <a:cs typeface="Amiri" pitchFamily="2" charset="-78"/>
               </a:rPr>
               <a:t>10</a:t>
             </a:r>
@@ -45421,8 +44586,7 @@
                   <a:srgbClr val="FFFFFF"/>
                 </a:solidFill>
                 <a:latin typeface="Calibri" pitchFamily="34" charset="0"/>
-                <a:ea typeface="Calibri" pitchFamily="34" charset="-122"/>
-                <a:cs typeface="Calibri" pitchFamily="34" charset="-120"/>
+                <a:cs typeface="Amiri" pitchFamily="2" charset="-78"/>
               </a:rPr>
               <a:t>CORE</a:t>
             </a:r>
@@ -45460,8 +44624,7 @@
                   <a:srgbClr val="8A93A0"/>
                 </a:solidFill>
                 <a:latin typeface="Calibri" pitchFamily="34" charset="0"/>
-                <a:ea typeface="Calibri" pitchFamily="34" charset="-122"/>
-                <a:cs typeface="Calibri" pitchFamily="34" charset="-120"/>
+                <a:cs typeface="Amiri" pitchFamily="2" charset="-78"/>
               </a:rPr>
               <a:t>7 / 23</a:t>
             </a:r>
@@ -45555,9 +44718,8 @@
                 <a:solidFill>
                   <a:srgbClr val="D4AF37"/>
                 </a:solidFill>
-                <a:latin typeface="Amiri" pitchFamily="34" charset="0"/>
-                <a:ea typeface="Amiri" pitchFamily="34" charset="-122"/>
-                <a:cs typeface="Amiri" pitchFamily="34" charset="-120"/>
+                <a:latin typeface="Amiri" pitchFamily="2" charset="-78"/>
+                <a:cs typeface="Amiri" pitchFamily="2" charset="-78"/>
               </a:rPr>
               <a:t>م</a:t>
             </a:r>
@@ -45595,8 +44757,7 @@
                   <a:srgbClr val="1B3B6F"/>
                 </a:solidFill>
                 <a:latin typeface="Cambria" pitchFamily="34" charset="0"/>
-                <a:ea typeface="Cambria" pitchFamily="34" charset="-122"/>
-                <a:cs typeface="Cambria" pitchFamily="34" charset="-120"/>
+                <a:cs typeface="Amiri" pitchFamily="2" charset="-78"/>
               </a:rPr>
               <a:t>Al Madina Online School</a:t>
             </a:r>
@@ -45634,8 +44795,7 @@
                   <a:srgbClr val="8A6D1E"/>
                 </a:solidFill>
                 <a:latin typeface="Calibri" pitchFamily="34" charset="0"/>
-                <a:ea typeface="Calibri" pitchFamily="34" charset="-122"/>
-                <a:cs typeface="Calibri" pitchFamily="34" charset="-120"/>
+                <a:cs typeface="Amiri" pitchFamily="2" charset="-78"/>
               </a:rPr>
               <a:t>ARABIC DEPARTMENT · MIFTAH ARABIC · IGCSE 0544</a:t>
             </a:r>
@@ -45700,8 +44860,7 @@
                   <a:srgbClr val="FFFFFF"/>
                 </a:solidFill>
                 <a:latin typeface="Calibri" pitchFamily="34" charset="0"/>
-                <a:ea typeface="Calibri" pitchFamily="34" charset="-122"/>
-                <a:cs typeface="Calibri" pitchFamily="34" charset="-120"/>
+                <a:cs typeface="Amiri" pitchFamily="2" charset="-78"/>
               </a:rPr>
               <a:t>D3-L12 · D3 Assessment</a:t>
             </a:r>
@@ -45766,8 +44925,7 @@
                   <a:srgbClr val="FFFFFF"/>
                 </a:solidFill>
                 <a:latin typeface="Calibri" pitchFamily="34" charset="0"/>
-                <a:ea typeface="Calibri" pitchFamily="34" charset="-122"/>
-                <a:cs typeface="Calibri" pitchFamily="34" charset="-120"/>
+                <a:cs typeface="Amiri" pitchFamily="2" charset="-78"/>
               </a:rPr>
               <a:t>I DO · 5 MIN</a:t>
             </a:r>
@@ -45805,8 +44963,7 @@
                   <a:srgbClr val="6B4C9A"/>
                 </a:solidFill>
                 <a:latin typeface="Calibri" pitchFamily="34" charset="0"/>
-                <a:ea typeface="Calibri" pitchFamily="34" charset="-122"/>
-                <a:cs typeface="Calibri" pitchFamily="34" charset="-120"/>
+                <a:cs typeface="Amiri" pitchFamily="2" charset="-78"/>
               </a:rPr>
               <a:t>LISTENING · QUESTIONS 1–5 · 2 MARKS EACH (WEBSITE)</a:t>
             </a:r>
@@ -45844,8 +45001,7 @@
                   <a:srgbClr val="1B3B6F"/>
                 </a:solidFill>
                 <a:latin typeface="Cambria" pitchFamily="34" charset="0"/>
-                <a:ea typeface="Cambria" pitchFamily="34" charset="-122"/>
-                <a:cs typeface="Cambria" pitchFamily="34" charset="-120"/>
+                <a:cs typeface="Amiri" pitchFamily="2" charset="-78"/>
               </a:rPr>
               <a:t>The summer-training advert (1–5)</a:t>
             </a:r>
@@ -45882,9 +45038,8 @@
                 <a:solidFill>
                   <a:srgbClr val="8A6D1E"/>
                 </a:solidFill>
-                <a:latin typeface="Amiri" pitchFamily="34" charset="0"/>
-                <a:ea typeface="Amiri" pitchFamily="34" charset="-122"/>
-                <a:cs typeface="Amiri" pitchFamily="34" charset="-120"/>
+                <a:latin typeface="Amiri" pitchFamily="2" charset="-78"/>
+                <a:cs typeface="Amiri" pitchFamily="2" charset="-78"/>
               </a:rPr>
               <a:t>الاِسْتِمَاعُ</a:t>
             </a:r>
@@ -45922,8 +45077,7 @@
                   <a:srgbClr val="8A93A0"/>
                 </a:solidFill>
                 <a:latin typeface="Calibri" pitchFamily="34" charset="0"/>
-                <a:ea typeface="Calibri" pitchFamily="34" charset="-122"/>
-                <a:cs typeface="Calibri" pitchFamily="34" charset="-120"/>
+                <a:cs typeface="Amiri" pitchFamily="2" charset="-78"/>
               </a:rPr>
               <a:t>Miftah Arabic · Development D3 · Work and Careers · D3-L12</a:t>
             </a:r>
@@ -46020,8 +45174,7 @@
                   <a:srgbClr val="FFFFFF"/>
                 </a:solidFill>
                 <a:latin typeface="Calibri" pitchFamily="34" charset="0"/>
-                <a:ea typeface="Calibri" pitchFamily="34" charset="-122"/>
-                <a:cs typeface="Calibri" pitchFamily="34" charset="-120"/>
+                <a:cs typeface="Amiri" pitchFamily="2" charset="-78"/>
               </a:rPr>
               <a:t>1</a:t>
             </a:r>
@@ -46059,8 +45212,7 @@
                   <a:srgbClr val="1B3B6F"/>
                 </a:solidFill>
                 <a:latin typeface="Calibri" pitchFamily="34" charset="0"/>
-                <a:ea typeface="Calibri" pitchFamily="34" charset="-122"/>
-                <a:cs typeface="Calibri" pitchFamily="34" charset="-120"/>
+                <a:cs typeface="Amiri" pitchFamily="2" charset="-78"/>
               </a:rPr>
               <a:t>Which opportunity is described?</a:t>
             </a:r>
@@ -46123,8 +45275,7 @@
                   <a:srgbClr val="1B3B6F"/>
                 </a:solidFill>
                 <a:latin typeface="Calibri" pitchFamily="34" charset="0"/>
-                <a:ea typeface="Calibri" pitchFamily="34" charset="-122"/>
-                <a:cs typeface="Calibri" pitchFamily="34" charset="-120"/>
+                <a:cs typeface="Amiri" pitchFamily="2" charset="-78"/>
               </a:rPr>
               <a:t>A</a:t>
             </a:r>
@@ -46162,8 +45313,7 @@
                   <a:srgbClr val="1F2A37"/>
                 </a:solidFill>
                 <a:latin typeface="Calibri" pitchFamily="34" charset="0"/>
-                <a:ea typeface="Calibri" pitchFamily="34" charset="-122"/>
-                <a:cs typeface="Calibri" pitchFamily="34" charset="-120"/>
+                <a:cs typeface="Amiri" pitchFamily="2" charset="-78"/>
               </a:rPr>
               <a:t>a university course</a:t>
             </a:r>
@@ -46226,8 +45376,7 @@
                   <a:srgbClr val="1B3B6F"/>
                 </a:solidFill>
                 <a:latin typeface="Calibri" pitchFamily="34" charset="0"/>
-                <a:ea typeface="Calibri" pitchFamily="34" charset="-122"/>
-                <a:cs typeface="Calibri" pitchFamily="34" charset="-120"/>
+                <a:cs typeface="Amiri" pitchFamily="2" charset="-78"/>
               </a:rPr>
               <a:t>B</a:t>
             </a:r>
@@ -46265,8 +45414,7 @@
                   <a:srgbClr val="1F2A37"/>
                 </a:solidFill>
                 <a:latin typeface="Calibri" pitchFamily="34" charset="0"/>
-                <a:ea typeface="Calibri" pitchFamily="34" charset="-122"/>
-                <a:cs typeface="Calibri" pitchFamily="34" charset="-120"/>
+                <a:cs typeface="Amiri" pitchFamily="2" charset="-78"/>
               </a:rPr>
               <a:t>a permanent director role</a:t>
             </a:r>
@@ -46329,8 +45477,7 @@
                   <a:srgbClr val="1B3B6F"/>
                 </a:solidFill>
                 <a:latin typeface="Calibri" pitchFamily="34" charset="0"/>
-                <a:ea typeface="Calibri" pitchFamily="34" charset="-122"/>
-                <a:cs typeface="Calibri" pitchFamily="34" charset="-120"/>
+                <a:cs typeface="Amiri" pitchFamily="2" charset="-78"/>
               </a:rPr>
               <a:t>C</a:t>
             </a:r>
@@ -46368,8 +45515,7 @@
                   <a:srgbClr val="1F2A37"/>
                 </a:solidFill>
                 <a:latin typeface="Calibri" pitchFamily="34" charset="0"/>
-                <a:ea typeface="Calibri" pitchFamily="34" charset="-122"/>
-                <a:cs typeface="Calibri" pitchFamily="34" charset="-120"/>
+                <a:cs typeface="Amiri" pitchFamily="2" charset="-78"/>
               </a:rPr>
               <a:t>summer training</a:t>
             </a:r>
@@ -46466,8 +45612,7 @@
                   <a:srgbClr val="FFFFFF"/>
                 </a:solidFill>
                 <a:latin typeface="Calibri" pitchFamily="34" charset="0"/>
-                <a:ea typeface="Calibri" pitchFamily="34" charset="-122"/>
-                <a:cs typeface="Calibri" pitchFamily="34" charset="-120"/>
+                <a:cs typeface="Amiri" pitchFamily="2" charset="-78"/>
               </a:rPr>
               <a:t>2</a:t>
             </a:r>
@@ -46505,8 +45650,7 @@
                   <a:srgbClr val="1B3B6F"/>
                 </a:solidFill>
                 <a:latin typeface="Calibri" pitchFamily="34" charset="0"/>
-                <a:ea typeface="Calibri" pitchFamily="34" charset="-122"/>
-                <a:cs typeface="Calibri" pitchFamily="34" charset="-120"/>
+                <a:cs typeface="Amiri" pitchFamily="2" charset="-78"/>
               </a:rPr>
               <a:t>Which skill is essential?</a:t>
             </a:r>
@@ -46569,8 +45713,7 @@
                   <a:srgbClr val="1B3B6F"/>
                 </a:solidFill>
                 <a:latin typeface="Calibri" pitchFamily="34" charset="0"/>
-                <a:ea typeface="Calibri" pitchFamily="34" charset="-122"/>
-                <a:cs typeface="Calibri" pitchFamily="34" charset="-120"/>
+                <a:cs typeface="Amiri" pitchFamily="2" charset="-78"/>
               </a:rPr>
               <a:t>A</a:t>
             </a:r>
@@ -46608,8 +45751,7 @@
                   <a:srgbClr val="1F2A37"/>
                 </a:solidFill>
                 <a:latin typeface="Calibri" pitchFamily="34" charset="0"/>
-                <a:ea typeface="Calibri" pitchFamily="34" charset="-122"/>
-                <a:cs typeface="Calibri" pitchFamily="34" charset="-120"/>
+                <a:cs typeface="Amiri" pitchFamily="2" charset="-78"/>
               </a:rPr>
               <a:t>driving</a:t>
             </a:r>
@@ -46672,8 +45814,7 @@
                   <a:srgbClr val="1B3B6F"/>
                 </a:solidFill>
                 <a:latin typeface="Calibri" pitchFamily="34" charset="0"/>
-                <a:ea typeface="Calibri" pitchFamily="34" charset="-122"/>
-                <a:cs typeface="Calibri" pitchFamily="34" charset="-120"/>
+                <a:cs typeface="Amiri" pitchFamily="2" charset="-78"/>
               </a:rPr>
               <a:t>B</a:t>
             </a:r>
@@ -46711,8 +45852,7 @@
                   <a:srgbClr val="1F2A37"/>
                 </a:solidFill>
                 <a:latin typeface="Calibri" pitchFamily="34" charset="0"/>
-                <a:ea typeface="Calibri" pitchFamily="34" charset="-122"/>
-                <a:cs typeface="Calibri" pitchFamily="34" charset="-120"/>
+                <a:cs typeface="Amiri" pitchFamily="2" charset="-78"/>
               </a:rPr>
               <a:t>teamwork</a:t>
             </a:r>
@@ -46775,8 +45915,7 @@
                   <a:srgbClr val="1B3B6F"/>
                 </a:solidFill>
                 <a:latin typeface="Calibri" pitchFamily="34" charset="0"/>
-                <a:ea typeface="Calibri" pitchFamily="34" charset="-122"/>
-                <a:cs typeface="Calibri" pitchFamily="34" charset="-120"/>
+                <a:cs typeface="Amiri" pitchFamily="2" charset="-78"/>
               </a:rPr>
               <a:t>C</a:t>
             </a:r>
@@ -46814,8 +45953,7 @@
                   <a:srgbClr val="1F2A37"/>
                 </a:solidFill>
                 <a:latin typeface="Calibri" pitchFamily="34" charset="0"/>
-                <a:ea typeface="Calibri" pitchFamily="34" charset="-122"/>
-                <a:cs typeface="Calibri" pitchFamily="34" charset="-120"/>
+                <a:cs typeface="Amiri" pitchFamily="2" charset="-78"/>
               </a:rPr>
               <a:t>cooking</a:t>
             </a:r>
@@ -46912,8 +46050,7 @@
                   <a:srgbClr val="FFFFFF"/>
                 </a:solidFill>
                 <a:latin typeface="Calibri" pitchFamily="34" charset="0"/>
-                <a:ea typeface="Calibri" pitchFamily="34" charset="-122"/>
-                <a:cs typeface="Calibri" pitchFamily="34" charset="-120"/>
+                <a:cs typeface="Amiri" pitchFamily="2" charset="-78"/>
               </a:rPr>
               <a:t>3</a:t>
             </a:r>
@@ -46951,8 +46088,7 @@
                   <a:srgbClr val="1B3B6F"/>
                 </a:solidFill>
                 <a:latin typeface="Calibri" pitchFamily="34" charset="0"/>
-                <a:ea typeface="Calibri" pitchFamily="34" charset="-122"/>
-                <a:cs typeface="Calibri" pitchFamily="34" charset="-120"/>
+                <a:cs typeface="Amiri" pitchFamily="2" charset="-78"/>
               </a:rPr>
               <a:t>What is the corrected start date?</a:t>
             </a:r>
@@ -47015,8 +46151,7 @@
                   <a:srgbClr val="1B3B6F"/>
                 </a:solidFill>
                 <a:latin typeface="Calibri" pitchFamily="34" charset="0"/>
-                <a:ea typeface="Calibri" pitchFamily="34" charset="-122"/>
-                <a:cs typeface="Calibri" pitchFamily="34" charset="-120"/>
+                <a:cs typeface="Amiri" pitchFamily="2" charset="-78"/>
               </a:rPr>
               <a:t>A</a:t>
             </a:r>
@@ -47054,8 +46189,7 @@
                   <a:srgbClr val="1F2A37"/>
                 </a:solidFill>
                 <a:latin typeface="Calibri" pitchFamily="34" charset="0"/>
-                <a:ea typeface="Calibri" pitchFamily="34" charset="-122"/>
-                <a:cs typeface="Calibri" pitchFamily="34" charset="-120"/>
+                <a:cs typeface="Amiri" pitchFamily="2" charset="-78"/>
               </a:rPr>
               <a:t>12 August</a:t>
             </a:r>
@@ -47118,8 +46252,7 @@
                   <a:srgbClr val="1B3B6F"/>
                 </a:solidFill>
                 <a:latin typeface="Calibri" pitchFamily="34" charset="0"/>
-                <a:ea typeface="Calibri" pitchFamily="34" charset="-122"/>
-                <a:cs typeface="Calibri" pitchFamily="34" charset="-120"/>
+                <a:cs typeface="Amiri" pitchFamily="2" charset="-78"/>
               </a:rPr>
               <a:t>B</a:t>
             </a:r>
@@ -47157,8 +46290,7 @@
                   <a:srgbClr val="1F2A37"/>
                 </a:solidFill>
                 <a:latin typeface="Calibri" pitchFamily="34" charset="0"/>
-                <a:ea typeface="Calibri" pitchFamily="34" charset="-122"/>
-                <a:cs typeface="Calibri" pitchFamily="34" charset="-120"/>
+                <a:cs typeface="Amiri" pitchFamily="2" charset="-78"/>
               </a:rPr>
               <a:t>2 August</a:t>
             </a:r>
@@ -47221,8 +46353,7 @@
                   <a:srgbClr val="1B3B6F"/>
                 </a:solidFill>
                 <a:latin typeface="Calibri" pitchFamily="34" charset="0"/>
-                <a:ea typeface="Calibri" pitchFamily="34" charset="-122"/>
-                <a:cs typeface="Calibri" pitchFamily="34" charset="-120"/>
+                <a:cs typeface="Amiri" pitchFamily="2" charset="-78"/>
               </a:rPr>
               <a:t>C</a:t>
             </a:r>
@@ -47260,8 +46391,7 @@
                   <a:srgbClr val="1F2A37"/>
                 </a:solidFill>
                 <a:latin typeface="Calibri" pitchFamily="34" charset="0"/>
-                <a:ea typeface="Calibri" pitchFamily="34" charset="-122"/>
-                <a:cs typeface="Calibri" pitchFamily="34" charset="-120"/>
+                <a:cs typeface="Amiri" pitchFamily="2" charset="-78"/>
               </a:rPr>
               <a:t>20 August</a:t>
             </a:r>
@@ -47358,8 +46488,7 @@
                   <a:srgbClr val="FFFFFF"/>
                 </a:solidFill>
                 <a:latin typeface="Calibri" pitchFamily="34" charset="0"/>
-                <a:ea typeface="Calibri" pitchFamily="34" charset="-122"/>
-                <a:cs typeface="Calibri" pitchFamily="34" charset="-120"/>
+                <a:cs typeface="Amiri" pitchFamily="2" charset="-78"/>
               </a:rPr>
               <a:t>4</a:t>
             </a:r>
@@ -47397,8 +46526,7 @@
                   <a:srgbClr val="1B3B6F"/>
                 </a:solidFill>
                 <a:latin typeface="Calibri" pitchFamily="34" charset="0"/>
-                <a:ea typeface="Calibri" pitchFamily="34" charset="-122"/>
-                <a:cs typeface="Calibri" pitchFamily="34" charset="-120"/>
+                <a:cs typeface="Amiri" pitchFamily="2" charset="-78"/>
               </a:rPr>
               <a:t>How long does it last?</a:t>
             </a:r>
@@ -47461,8 +46589,7 @@
                   <a:srgbClr val="1B3B6F"/>
                 </a:solidFill>
                 <a:latin typeface="Calibri" pitchFamily="34" charset="0"/>
-                <a:ea typeface="Calibri" pitchFamily="34" charset="-122"/>
-                <a:cs typeface="Calibri" pitchFamily="34" charset="-120"/>
+                <a:cs typeface="Amiri" pitchFamily="2" charset="-78"/>
               </a:rPr>
               <a:t>A</a:t>
             </a:r>
@@ -47500,8 +46627,7 @@
                   <a:srgbClr val="1F2A37"/>
                 </a:solidFill>
                 <a:latin typeface="Calibri" pitchFamily="34" charset="0"/>
-                <a:ea typeface="Calibri" pitchFamily="34" charset="-122"/>
-                <a:cs typeface="Calibri" pitchFamily="34" charset="-120"/>
+                <a:cs typeface="Amiri" pitchFamily="2" charset="-78"/>
               </a:rPr>
               <a:t>four months</a:t>
             </a:r>
@@ -47564,8 +46690,7 @@
                   <a:srgbClr val="1B3B6F"/>
                 </a:solidFill>
                 <a:latin typeface="Calibri" pitchFamily="34" charset="0"/>
-                <a:ea typeface="Calibri" pitchFamily="34" charset="-122"/>
-                <a:cs typeface="Calibri" pitchFamily="34" charset="-120"/>
+                <a:cs typeface="Amiri" pitchFamily="2" charset="-78"/>
               </a:rPr>
               <a:t>B</a:t>
             </a:r>
@@ -47603,8 +46728,7 @@
                   <a:srgbClr val="1F2A37"/>
                 </a:solidFill>
                 <a:latin typeface="Calibri" pitchFamily="34" charset="0"/>
-                <a:ea typeface="Calibri" pitchFamily="34" charset="-122"/>
-                <a:cs typeface="Calibri" pitchFamily="34" charset="-120"/>
+                <a:cs typeface="Amiri" pitchFamily="2" charset="-78"/>
               </a:rPr>
               <a:t>two days</a:t>
             </a:r>
@@ -47667,8 +46791,7 @@
                   <a:srgbClr val="1B3B6F"/>
                 </a:solidFill>
                 <a:latin typeface="Calibri" pitchFamily="34" charset="0"/>
-                <a:ea typeface="Calibri" pitchFamily="34" charset="-122"/>
-                <a:cs typeface="Calibri" pitchFamily="34" charset="-120"/>
+                <a:cs typeface="Amiri" pitchFamily="2" charset="-78"/>
               </a:rPr>
               <a:t>C</a:t>
             </a:r>
@@ -47706,8 +46829,7 @@
                   <a:srgbClr val="1F2A37"/>
                 </a:solidFill>
                 <a:latin typeface="Calibri" pitchFamily="34" charset="0"/>
-                <a:ea typeface="Calibri" pitchFamily="34" charset="-122"/>
-                <a:cs typeface="Calibri" pitchFamily="34" charset="-120"/>
+                <a:cs typeface="Amiri" pitchFamily="2" charset="-78"/>
               </a:rPr>
               <a:t>four weeks</a:t>
             </a:r>
@@ -47804,8 +46926,7 @@
                   <a:srgbClr val="FFFFFF"/>
                 </a:solidFill>
                 <a:latin typeface="Calibri" pitchFamily="34" charset="0"/>
-                <a:ea typeface="Calibri" pitchFamily="34" charset="-122"/>
-                <a:cs typeface="Calibri" pitchFamily="34" charset="-120"/>
+                <a:cs typeface="Amiri" pitchFamily="2" charset="-78"/>
               </a:rPr>
               <a:t>5</a:t>
             </a:r>
@@ -47843,8 +46964,7 @@
                   <a:srgbClr val="1B3B6F"/>
                 </a:solidFill>
                 <a:latin typeface="Calibri" pitchFamily="34" charset="0"/>
-                <a:ea typeface="Calibri" pitchFamily="34" charset="-122"/>
-                <a:cs typeface="Calibri" pitchFamily="34" charset="-120"/>
+                <a:cs typeface="Amiri" pitchFamily="2" charset="-78"/>
               </a:rPr>
               <a:t>What is provided?</a:t>
             </a:r>
@@ -47907,8 +47027,7 @@
                   <a:srgbClr val="1B3B6F"/>
                 </a:solidFill>
                 <a:latin typeface="Calibri" pitchFamily="34" charset="0"/>
-                <a:ea typeface="Calibri" pitchFamily="34" charset="-122"/>
-                <a:cs typeface="Calibri" pitchFamily="34" charset="-120"/>
+                <a:cs typeface="Amiri" pitchFamily="2" charset="-78"/>
               </a:rPr>
               <a:t>A</a:t>
             </a:r>
@@ -47946,8 +47065,7 @@
                   <a:srgbClr val="1F2A37"/>
                 </a:solidFill>
                 <a:latin typeface="Calibri" pitchFamily="34" charset="0"/>
-                <a:ea typeface="Calibri" pitchFamily="34" charset="-122"/>
-                <a:cs typeface="Calibri" pitchFamily="34" charset="-120"/>
+                <a:cs typeface="Amiri" pitchFamily="2" charset="-78"/>
               </a:rPr>
               <a:t>training and a certificate</a:t>
             </a:r>
@@ -48010,8 +47128,7 @@
                   <a:srgbClr val="1B3B6F"/>
                 </a:solidFill>
                 <a:latin typeface="Calibri" pitchFamily="34" charset="0"/>
-                <a:ea typeface="Calibri" pitchFamily="34" charset="-122"/>
-                <a:cs typeface="Calibri" pitchFamily="34" charset="-120"/>
+                <a:cs typeface="Amiri" pitchFamily="2" charset="-78"/>
               </a:rPr>
               <a:t>B</a:t>
             </a:r>
@@ -48049,8 +47166,7 @@
                   <a:srgbClr val="1F2A37"/>
                 </a:solidFill>
                 <a:latin typeface="Calibri" pitchFamily="34" charset="0"/>
-                <a:ea typeface="Calibri" pitchFamily="34" charset="-122"/>
-                <a:cs typeface="Calibri" pitchFamily="34" charset="-120"/>
+                <a:cs typeface="Amiri" pitchFamily="2" charset="-78"/>
               </a:rPr>
               <a:t>free accommodation</a:t>
             </a:r>
@@ -48113,8 +47229,7 @@
                   <a:srgbClr val="1B3B6F"/>
                 </a:solidFill>
                 <a:latin typeface="Calibri" pitchFamily="34" charset="0"/>
-                <a:ea typeface="Calibri" pitchFamily="34" charset="-122"/>
-                <a:cs typeface="Calibri" pitchFamily="34" charset="-120"/>
+                <a:cs typeface="Amiri" pitchFamily="2" charset="-78"/>
               </a:rPr>
               <a:t>C</a:t>
             </a:r>
@@ -48152,8 +47267,7 @@
                   <a:srgbClr val="1F2A37"/>
                 </a:solidFill>
                 <a:latin typeface="Calibri" pitchFamily="34" charset="0"/>
-                <a:ea typeface="Calibri" pitchFamily="34" charset="-122"/>
-                <a:cs typeface="Calibri" pitchFamily="34" charset="-120"/>
+                <a:cs typeface="Amiri" pitchFamily="2" charset="-78"/>
               </a:rPr>
               <a:t>a high salary</a:t>
             </a:r>
@@ -48191,8 +47305,7 @@
                   <a:srgbClr val="8A93A0"/>
                 </a:solidFill>
                 <a:latin typeface="Calibri" pitchFamily="34" charset="0"/>
-                <a:ea typeface="Calibri" pitchFamily="34" charset="-122"/>
-                <a:cs typeface="Calibri" pitchFamily="34" charset="-120"/>
+                <a:cs typeface="Amiri" pitchFamily="2" charset="-78"/>
               </a:rPr>
               <a:t>8 / 23</a:t>
             </a:r>
@@ -48286,9 +47399,8 @@
                 <a:solidFill>
                   <a:srgbClr val="D4AF37"/>
                 </a:solidFill>
-                <a:latin typeface="Amiri" pitchFamily="34" charset="0"/>
-                <a:ea typeface="Amiri" pitchFamily="34" charset="-122"/>
-                <a:cs typeface="Amiri" pitchFamily="34" charset="-120"/>
+                <a:latin typeface="Amiri" pitchFamily="2" charset="-78"/>
+                <a:cs typeface="Amiri" pitchFamily="2" charset="-78"/>
               </a:rPr>
               <a:t>م</a:t>
             </a:r>
@@ -48326,8 +47438,7 @@
                   <a:srgbClr val="1B3B6F"/>
                 </a:solidFill>
                 <a:latin typeface="Cambria" pitchFamily="34" charset="0"/>
-                <a:ea typeface="Cambria" pitchFamily="34" charset="-122"/>
-                <a:cs typeface="Cambria" pitchFamily="34" charset="-120"/>
+                <a:cs typeface="Amiri" pitchFamily="2" charset="-78"/>
               </a:rPr>
               <a:t>Al Madina Online School</a:t>
             </a:r>
@@ -48365,8 +47476,7 @@
                   <a:srgbClr val="8A6D1E"/>
                 </a:solidFill>
                 <a:latin typeface="Calibri" pitchFamily="34" charset="0"/>
-                <a:ea typeface="Calibri" pitchFamily="34" charset="-122"/>
-                <a:cs typeface="Calibri" pitchFamily="34" charset="-120"/>
+                <a:cs typeface="Amiri" pitchFamily="2" charset="-78"/>
               </a:rPr>
               <a:t>ARABIC DEPARTMENT · MIFTAH ARABIC · IGCSE 0544</a:t>
             </a:r>
@@ -48431,8 +47541,7 @@
                   <a:srgbClr val="FFFFFF"/>
                 </a:solidFill>
                 <a:latin typeface="Calibri" pitchFamily="34" charset="0"/>
-                <a:ea typeface="Calibri" pitchFamily="34" charset="-122"/>
-                <a:cs typeface="Calibri" pitchFamily="34" charset="-120"/>
+                <a:cs typeface="Amiri" pitchFamily="2" charset="-78"/>
               </a:rPr>
               <a:t>D3-L12 · D3 Assessment</a:t>
             </a:r>
@@ -48497,8 +47606,7 @@
                   <a:srgbClr val="FFFFFF"/>
                 </a:solidFill>
                 <a:latin typeface="Calibri" pitchFamily="34" charset="0"/>
-                <a:ea typeface="Calibri" pitchFamily="34" charset="-122"/>
-                <a:cs typeface="Calibri" pitchFamily="34" charset="-120"/>
+                <a:cs typeface="Amiri" pitchFamily="2" charset="-78"/>
               </a:rPr>
               <a:t>I DO</a:t>
             </a:r>
@@ -48536,8 +47644,7 @@
                   <a:srgbClr val="6B4C9A"/>
                 </a:solidFill>
                 <a:latin typeface="Calibri" pitchFamily="34" charset="0"/>
-                <a:ea typeface="Calibri" pitchFamily="34" charset="-122"/>
-                <a:cs typeface="Calibri" pitchFamily="34" charset="-120"/>
+                <a:cs typeface="Amiri" pitchFamily="2" charset="-78"/>
               </a:rPr>
               <a:t>LISTENING · QUESTIONS 1–5 · ANSWERS</a:t>
             </a:r>
@@ -48575,8 +47682,7 @@
                   <a:srgbClr val="1B3B6F"/>
                 </a:solidFill>
                 <a:latin typeface="Cambria" pitchFamily="34" charset="0"/>
-                <a:ea typeface="Cambria" pitchFamily="34" charset="-122"/>
-                <a:cs typeface="Cambria" pitchFamily="34" charset="-120"/>
+                <a:cs typeface="Amiri" pitchFamily="2" charset="-78"/>
               </a:rPr>
               <a:t>Questions 1–5: answers</a:t>
             </a:r>
@@ -48613,9 +47719,8 @@
                 <a:solidFill>
                   <a:srgbClr val="8A6D1E"/>
                 </a:solidFill>
-                <a:latin typeface="Amiri" pitchFamily="34" charset="0"/>
-                <a:ea typeface="Amiri" pitchFamily="34" charset="-122"/>
-                <a:cs typeface="Amiri" pitchFamily="34" charset="-120"/>
+                <a:latin typeface="Amiri" pitchFamily="2" charset="-78"/>
+                <a:cs typeface="Amiri" pitchFamily="2" charset="-78"/>
               </a:rPr>
               <a:t>الإِجَابَاتُ</a:t>
             </a:r>
@@ -48653,8 +47758,7 @@
                   <a:srgbClr val="8A93A0"/>
                 </a:solidFill>
                 <a:latin typeface="Calibri" pitchFamily="34" charset="0"/>
-                <a:ea typeface="Calibri" pitchFamily="34" charset="-122"/>
-                <a:cs typeface="Calibri" pitchFamily="34" charset="-120"/>
+                <a:cs typeface="Amiri" pitchFamily="2" charset="-78"/>
               </a:rPr>
               <a:t>Miftah Arabic · Development D3 · Work and Careers · D3-L12</a:t>
             </a:r>
@@ -48751,8 +47855,7 @@
                   <a:srgbClr val="FFFFFF"/>
                 </a:solidFill>
                 <a:latin typeface="Calibri" pitchFamily="34" charset="0"/>
-                <a:ea typeface="Calibri" pitchFamily="34" charset="-122"/>
-                <a:cs typeface="Calibri" pitchFamily="34" charset="-120"/>
+                <a:cs typeface="Amiri" pitchFamily="2" charset="-78"/>
               </a:rPr>
               <a:t>1</a:t>
             </a:r>
@@ -48790,8 +47893,7 @@
                   <a:srgbClr val="1B3B6F"/>
                 </a:solidFill>
                 <a:latin typeface="Calibri" pitchFamily="34" charset="0"/>
-                <a:ea typeface="Calibri" pitchFamily="34" charset="-122"/>
-                <a:cs typeface="Calibri" pitchFamily="34" charset="-120"/>
+                <a:cs typeface="Amiri" pitchFamily="2" charset="-78"/>
               </a:rPr>
               <a:t>Which opportunity is described?</a:t>
             </a:r>
@@ -48854,8 +47956,7 @@
                   <a:srgbClr val="1B3B6F"/>
                 </a:solidFill>
                 <a:latin typeface="Calibri" pitchFamily="34" charset="0"/>
-                <a:ea typeface="Calibri" pitchFamily="34" charset="-122"/>
-                <a:cs typeface="Calibri" pitchFamily="34" charset="-120"/>
+                <a:cs typeface="Amiri" pitchFamily="2" charset="-78"/>
               </a:rPr>
               <a:t>A</a:t>
             </a:r>
@@ -48893,8 +47994,7 @@
                   <a:srgbClr val="9AA1AB"/>
                 </a:solidFill>
                 <a:latin typeface="Calibri" pitchFamily="34" charset="0"/>
-                <a:ea typeface="Calibri" pitchFamily="34" charset="-122"/>
-                <a:cs typeface="Calibri" pitchFamily="34" charset="-120"/>
+                <a:cs typeface="Amiri" pitchFamily="2" charset="-78"/>
               </a:rPr>
               <a:t>a university course</a:t>
             </a:r>
@@ -48957,8 +48057,7 @@
                   <a:srgbClr val="1B3B6F"/>
                 </a:solidFill>
                 <a:latin typeface="Calibri" pitchFamily="34" charset="0"/>
-                <a:ea typeface="Calibri" pitchFamily="34" charset="-122"/>
-                <a:cs typeface="Calibri" pitchFamily="34" charset="-120"/>
+                <a:cs typeface="Amiri" pitchFamily="2" charset="-78"/>
               </a:rPr>
               <a:t>B</a:t>
             </a:r>
@@ -48996,8 +48095,7 @@
                   <a:srgbClr val="9AA1AB"/>
                 </a:solidFill>
                 <a:latin typeface="Calibri" pitchFamily="34" charset="0"/>
-                <a:ea typeface="Calibri" pitchFamily="34" charset="-122"/>
-                <a:cs typeface="Calibri" pitchFamily="34" charset="-120"/>
+                <a:cs typeface="Amiri" pitchFamily="2" charset="-78"/>
               </a:rPr>
               <a:t>a permanent director role</a:t>
             </a:r>
@@ -49087,8 +48185,7 @@
                   <a:srgbClr val="FFFFFF"/>
                 </a:solidFill>
                 <a:latin typeface="Calibri" pitchFamily="34" charset="0"/>
-                <a:ea typeface="Calibri" pitchFamily="34" charset="-122"/>
-                <a:cs typeface="Calibri" pitchFamily="34" charset="-120"/>
+                <a:cs typeface="Amiri" pitchFamily="2" charset="-78"/>
               </a:rPr>
               <a:t>C</a:t>
             </a:r>
@@ -49126,8 +48223,7 @@
                   <a:srgbClr val="1F2A37"/>
                 </a:solidFill>
                 <a:latin typeface="Calibri" pitchFamily="34" charset="0"/>
-                <a:ea typeface="Calibri" pitchFamily="34" charset="-122"/>
-                <a:cs typeface="Calibri" pitchFamily="34" charset="-120"/>
+                <a:cs typeface="Amiri" pitchFamily="2" charset="-78"/>
               </a:rPr>
               <a:t>summer training</a:t>
             </a:r>
@@ -49164,9 +48260,8 @@
                 <a:solidFill>
                   <a:srgbClr val="8A6D1E"/>
                 </a:solidFill>
-                <a:latin typeface="Amiri" pitchFamily="34" charset="0"/>
-                <a:ea typeface="Amiri" pitchFamily="34" charset="-122"/>
-                <a:cs typeface="Amiri" pitchFamily="34" charset="-120"/>
+                <a:latin typeface="Amiri" pitchFamily="2" charset="-78"/>
+                <a:cs typeface="Amiri" pitchFamily="2" charset="-78"/>
               </a:rPr>
               <a:t>فُرْصَةِ تَدْرِيبٍ صَيْفِيٍّ</a:t>
             </a:r>
@@ -49263,8 +48358,7 @@
                   <a:srgbClr val="FFFFFF"/>
                 </a:solidFill>
                 <a:latin typeface="Calibri" pitchFamily="34" charset="0"/>
-                <a:ea typeface="Calibri" pitchFamily="34" charset="-122"/>
-                <a:cs typeface="Calibri" pitchFamily="34" charset="-120"/>
+                <a:cs typeface="Amiri" pitchFamily="2" charset="-78"/>
               </a:rPr>
               <a:t>2</a:t>
             </a:r>
@@ -49302,8 +48396,7 @@
                   <a:srgbClr val="1B3B6F"/>
                 </a:solidFill>
                 <a:latin typeface="Calibri" pitchFamily="34" charset="0"/>
-                <a:ea typeface="Calibri" pitchFamily="34" charset="-122"/>
-                <a:cs typeface="Calibri" pitchFamily="34" charset="-120"/>
+                <a:cs typeface="Amiri" pitchFamily="2" charset="-78"/>
               </a:rPr>
               <a:t>Which skill is essential?</a:t>
             </a:r>
@@ -49366,8 +48459,7 @@
                   <a:srgbClr val="1B3B6F"/>
                 </a:solidFill>
                 <a:latin typeface="Calibri" pitchFamily="34" charset="0"/>
-                <a:ea typeface="Calibri" pitchFamily="34" charset="-122"/>
-                <a:cs typeface="Calibri" pitchFamily="34" charset="-120"/>
+                <a:cs typeface="Amiri" pitchFamily="2" charset="-78"/>
               </a:rPr>
               <a:t>A</a:t>
             </a:r>
@@ -49405,8 +48497,7 @@
                   <a:srgbClr val="9AA1AB"/>
                 </a:solidFill>
                 <a:latin typeface="Calibri" pitchFamily="34" charset="0"/>
-                <a:ea typeface="Calibri" pitchFamily="34" charset="-122"/>
-                <a:cs typeface="Calibri" pitchFamily="34" charset="-120"/>
+                <a:cs typeface="Amiri" pitchFamily="2" charset="-78"/>
               </a:rPr>
               <a:t>driving</a:t>
             </a:r>
@@ -49496,8 +48587,7 @@
                   <a:srgbClr val="FFFFFF"/>
                 </a:solidFill>
                 <a:latin typeface="Calibri" pitchFamily="34" charset="0"/>
-                <a:ea typeface="Calibri" pitchFamily="34" charset="-122"/>
-                <a:cs typeface="Calibri" pitchFamily="34" charset="-120"/>
+                <a:cs typeface="Amiri" pitchFamily="2" charset="-78"/>
               </a:rPr>
               <a:t>B</a:t>
             </a:r>
@@ -49535,8 +48625,7 @@
                   <a:srgbClr val="1F2A37"/>
                 </a:solidFill>
                 <a:latin typeface="Calibri" pitchFamily="34" charset="0"/>
-                <a:ea typeface="Calibri" pitchFamily="34" charset="-122"/>
-                <a:cs typeface="Calibri" pitchFamily="34" charset="-120"/>
+                <a:cs typeface="Amiri" pitchFamily="2" charset="-78"/>
               </a:rPr>
               <a:t>teamwork</a:t>
             </a:r>
@@ -49599,8 +48688,7 @@
                   <a:srgbClr val="1B3B6F"/>
                 </a:solidFill>
                 <a:latin typeface="Calibri" pitchFamily="34" charset="0"/>
-                <a:ea typeface="Calibri" pitchFamily="34" charset="-122"/>
-                <a:cs typeface="Calibri" pitchFamily="34" charset="-120"/>
+                <a:cs typeface="Amiri" pitchFamily="2" charset="-78"/>
               </a:rPr>
               <a:t>C</a:t>
             </a:r>
@@ -49638,8 +48726,7 @@
                   <a:srgbClr val="9AA1AB"/>
                 </a:solidFill>
                 <a:latin typeface="Calibri" pitchFamily="34" charset="0"/>
-                <a:ea typeface="Calibri" pitchFamily="34" charset="-122"/>
-                <a:cs typeface="Calibri" pitchFamily="34" charset="-120"/>
+                <a:cs typeface="Amiri" pitchFamily="2" charset="-78"/>
               </a:rPr>
               <a:t>cooking</a:t>
             </a:r>
@@ -49676,9 +48763,8 @@
                 <a:solidFill>
                   <a:srgbClr val="8A6D1E"/>
                 </a:solidFill>
-                <a:latin typeface="Amiri" pitchFamily="34" charset="0"/>
-                <a:ea typeface="Amiri" pitchFamily="34" charset="-122"/>
-                <a:cs typeface="Amiri" pitchFamily="34" charset="-120"/>
+                <a:latin typeface="Amiri" pitchFamily="2" charset="-78"/>
+                <a:cs typeface="Amiri" pitchFamily="2" charset="-78"/>
               </a:rPr>
               <a:t>العَمَلِ ضِمْنَ فَرِيقٍ</a:t>
             </a:r>
@@ -49775,8 +48861,7 @@
                   <a:srgbClr val="FFFFFF"/>
                 </a:solidFill>
                 <a:latin typeface="Calibri" pitchFamily="34" charset="0"/>
-                <a:ea typeface="Calibri" pitchFamily="34" charset="-122"/>
-                <a:cs typeface="Calibri" pitchFamily="34" charset="-120"/>
+                <a:cs typeface="Amiri" pitchFamily="2" charset="-78"/>
               </a:rPr>
               <a:t>3</a:t>
             </a:r>
@@ -49814,8 +48899,7 @@
                   <a:srgbClr val="1B3B6F"/>
                 </a:solidFill>
                 <a:latin typeface="Calibri" pitchFamily="34" charset="0"/>
-                <a:ea typeface="Calibri" pitchFamily="34" charset="-122"/>
-                <a:cs typeface="Calibri" pitchFamily="34" charset="-120"/>
+                <a:cs typeface="Amiri" pitchFamily="2" charset="-78"/>
               </a:rPr>
               <a:t>What is the corrected start date?</a:t>
             </a:r>
@@ -49878,8 +48962,7 @@
                   <a:srgbClr val="1B3B6F"/>
                 </a:solidFill>
                 <a:latin typeface="Calibri" pitchFamily="34" charset="0"/>
-                <a:ea typeface="Calibri" pitchFamily="34" charset="-122"/>
-                <a:cs typeface="Calibri" pitchFamily="34" charset="-120"/>
+                <a:cs typeface="Amiri" pitchFamily="2" charset="-78"/>
               </a:rPr>
               <a:t>A</a:t>
             </a:r>
@@ -49917,8 +49000,7 @@
                   <a:srgbClr val="9AA1AB"/>
                 </a:solidFill>
                 <a:latin typeface="Calibri" pitchFamily="34" charset="0"/>
-                <a:ea typeface="Calibri" pitchFamily="34" charset="-122"/>
-                <a:cs typeface="Calibri" pitchFamily="34" charset="-120"/>
+                <a:cs typeface="Amiri" pitchFamily="2" charset="-78"/>
               </a:rPr>
               <a:t>12 August</a:t>
             </a:r>
@@ -50008,8 +49090,7 @@
                   <a:srgbClr val="FFFFFF"/>
                 </a:solidFill>
                 <a:latin typeface="Calibri" pitchFamily="34" charset="0"/>
-                <a:ea typeface="Calibri" pitchFamily="34" charset="-122"/>
-                <a:cs typeface="Calibri" pitchFamily="34" charset="-120"/>
+                <a:cs typeface="Amiri" pitchFamily="2" charset="-78"/>
               </a:rPr>
               <a:t>B</a:t>
             </a:r>
@@ -50047,8 +49128,7 @@
                   <a:srgbClr val="1F2A37"/>
                 </a:solidFill>
                 <a:latin typeface="Calibri" pitchFamily="34" charset="0"/>
-                <a:ea typeface="Calibri" pitchFamily="34" charset="-122"/>
-                <a:cs typeface="Calibri" pitchFamily="34" charset="-120"/>
+                <a:cs typeface="Amiri" pitchFamily="2" charset="-78"/>
               </a:rPr>
               <a:t>2 August</a:t>
             </a:r>
@@ -50111,8 +49191,7 @@
                   <a:srgbClr val="1B3B6F"/>
                 </a:solidFill>
                 <a:latin typeface="Calibri" pitchFamily="34" charset="0"/>
-                <a:ea typeface="Calibri" pitchFamily="34" charset="-122"/>
-                <a:cs typeface="Calibri" pitchFamily="34" charset="-120"/>
+                <a:cs typeface="Amiri" pitchFamily="2" charset="-78"/>
               </a:rPr>
               <a:t>C</a:t>
             </a:r>
@@ -50150,8 +49229,7 @@
                   <a:srgbClr val="9AA1AB"/>
                 </a:solidFill>
                 <a:latin typeface="Calibri" pitchFamily="34" charset="0"/>
-                <a:ea typeface="Calibri" pitchFamily="34" charset="-122"/>
-                <a:cs typeface="Calibri" pitchFamily="34" charset="-120"/>
+                <a:cs typeface="Amiri" pitchFamily="2" charset="-78"/>
               </a:rPr>
               <a:t>20 August</a:t>
             </a:r>
@@ -50188,9 +49266,8 @@
                 <a:solidFill>
                   <a:srgbClr val="8A6D1E"/>
                 </a:solidFill>
-                <a:latin typeface="Amiri" pitchFamily="34" charset="0"/>
-                <a:ea typeface="Amiri" pitchFamily="34" charset="-122"/>
-                <a:cs typeface="Amiri" pitchFamily="34" charset="-120"/>
+                <a:latin typeface="Amiri" pitchFamily="2" charset="-78"/>
+                <a:cs typeface="Amiri" pitchFamily="2" charset="-78"/>
               </a:rPr>
               <a:t>فِي الثَّانِي مِنْ أَغُسْطُسَ، لَا فِي الثَّانِي عَشَرَ</a:t>
             </a:r>
@@ -50287,8 +49364,7 @@
                   <a:srgbClr val="FFFFFF"/>
                 </a:solidFill>
                 <a:latin typeface="Calibri" pitchFamily="34" charset="0"/>
-                <a:ea typeface="Calibri" pitchFamily="34" charset="-122"/>
-                <a:cs typeface="Calibri" pitchFamily="34" charset="-120"/>
+                <a:cs typeface="Amiri" pitchFamily="2" charset="-78"/>
               </a:rPr>
               <a:t>4</a:t>
             </a:r>
@@ -50326,8 +49402,7 @@
                   <a:srgbClr val="1B3B6F"/>
                 </a:solidFill>
                 <a:latin typeface="Calibri" pitchFamily="34" charset="0"/>
-                <a:ea typeface="Calibri" pitchFamily="34" charset="-122"/>
-                <a:cs typeface="Calibri" pitchFamily="34" charset="-120"/>
+                <a:cs typeface="Amiri" pitchFamily="2" charset="-78"/>
               </a:rPr>
               <a:t>How long does it last?</a:t>
             </a:r>
@@ -50390,8 +49465,7 @@
                   <a:srgbClr val="1B3B6F"/>
                 </a:solidFill>
                 <a:latin typeface="Calibri" pitchFamily="34" charset="0"/>
-                <a:ea typeface="Calibri" pitchFamily="34" charset="-122"/>
-                <a:cs typeface="Calibri" pitchFamily="34" charset="-120"/>
+                <a:cs typeface="Amiri" pitchFamily="2" charset="-78"/>
               </a:rPr>
               <a:t>A</a:t>
             </a:r>
@@ -50429,8 +49503,7 @@
                   <a:srgbClr val="9AA1AB"/>
                 </a:solidFill>
                 <a:latin typeface="Calibri" pitchFamily="34" charset="0"/>
-                <a:ea typeface="Calibri" pitchFamily="34" charset="-122"/>
-                <a:cs typeface="Calibri" pitchFamily="34" charset="-120"/>
+                <a:cs typeface="Amiri" pitchFamily="2" charset="-78"/>
               </a:rPr>
               <a:t>four months</a:t>
             </a:r>
@@ -50493,8 +49566,7 @@
                   <a:srgbClr val="1B3B6F"/>
                 </a:solidFill>
                 <a:latin typeface="Calibri" pitchFamily="34" charset="0"/>
-                <a:ea typeface="Calibri" pitchFamily="34" charset="-122"/>
-                <a:cs typeface="Calibri" pitchFamily="34" charset="-120"/>
+                <a:cs typeface="Amiri" pitchFamily="2" charset="-78"/>
               </a:rPr>
               <a:t>B</a:t>
             </a:r>
@@ -50532,8 +49604,7 @@
                   <a:srgbClr val="9AA1AB"/>
                 </a:solidFill>
                 <a:latin typeface="Calibri" pitchFamily="34" charset="0"/>
-                <a:ea typeface="Calibri" pitchFamily="34" charset="-122"/>
-                <a:cs typeface="Calibri" pitchFamily="34" charset="-120"/>
+                <a:cs typeface="Amiri" pitchFamily="2" charset="-78"/>
               </a:rPr>
               <a:t>two days</a:t>
             </a:r>
@@ -50623,8 +49694,7 @@
                   <a:srgbClr val="FFFFFF"/>
                 </a:solidFill>
                 <a:latin typeface="Calibri" pitchFamily="34" charset="0"/>
-                <a:ea typeface="Calibri" pitchFamily="34" charset="-122"/>
-                <a:cs typeface="Calibri" pitchFamily="34" charset="-120"/>
+                <a:cs typeface="Amiri" pitchFamily="2" charset="-78"/>
               </a:rPr>
               <a:t>C</a:t>
             </a:r>
@@ -50662,8 +49732,7 @@
                   <a:srgbClr val="1F2A37"/>
                 </a:solidFill>
                 <a:latin typeface="Calibri" pitchFamily="34" charset="0"/>
-                <a:ea typeface="Calibri" pitchFamily="34" charset="-122"/>
-                <a:cs typeface="Calibri" pitchFamily="34" charset="-120"/>
+                <a:cs typeface="Amiri" pitchFamily="2" charset="-78"/>
               </a:rPr>
               <a:t>four weeks</a:t>
             </a:r>
@@ -50700,9 +49769,8 @@
                 <a:solidFill>
                   <a:srgbClr val="8A6D1E"/>
                 </a:solidFill>
-                <a:latin typeface="Amiri" pitchFamily="34" charset="0"/>
-                <a:ea typeface="Amiri" pitchFamily="34" charset="-122"/>
-                <a:cs typeface="Amiri" pitchFamily="34" charset="-120"/>
+                <a:latin typeface="Amiri" pitchFamily="2" charset="-78"/>
+                <a:cs typeface="Amiri" pitchFamily="2" charset="-78"/>
               </a:rPr>
               <a:t>أَرْبَعَةَ أَسَابِيعَ</a:t>
             </a:r>
@@ -50799,8 +49867,7 @@
                   <a:srgbClr val="FFFFFF"/>
                 </a:solidFill>
                 <a:latin typeface="Calibri" pitchFamily="34" charset="0"/>
-                <a:ea typeface="Calibri" pitchFamily="34" charset="-122"/>
-                <a:cs typeface="Calibri" pitchFamily="34" charset="-120"/>
+                <a:cs typeface="Amiri" pitchFamily="2" charset="-78"/>
               </a:rPr>
               <a:t>5</a:t>
             </a:r>
@@ -50838,8 +49905,7 @@
                   <a:srgbClr val="1B3B6F"/>
                 </a:solidFill>
                 <a:latin typeface="Calibri" pitchFamily="34" charset="0"/>
-                <a:ea typeface="Calibri" pitchFamily="34" charset="-122"/>
-                <a:cs typeface="Calibri" pitchFamily="34" charset="-120"/>
+                <a:cs typeface="Amiri" pitchFamily="2" charset="-78"/>
               </a:rPr>
               <a:t>What is provided?</a:t>
             </a:r>
@@ -50929,8 +49995,7 @@
                   <a:srgbClr val="FFFFFF"/>
                 </a:solidFill>
                 <a:latin typeface="Calibri" pitchFamily="34" charset="0"/>
-                <a:ea typeface="Calibri" pitchFamily="34" charset="-122"/>
-                <a:cs typeface="Calibri" pitchFamily="34" charset="-120"/>
+                <a:cs typeface="Amiri" pitchFamily="2" charset="-78"/>
               </a:rPr>
               <a:t>A</a:t>
             </a:r>
@@ -50968,8 +50033,7 @@
                   <a:srgbClr val="1F2A37"/>
                 </a:solidFill>
                 <a:latin typeface="Calibri" pitchFamily="34" charset="0"/>
-                <a:ea typeface="Calibri" pitchFamily="34" charset="-122"/>
-                <a:cs typeface="Calibri" pitchFamily="34" charset="-120"/>
+                <a:cs typeface="Amiri" pitchFamily="2" charset="-78"/>
               </a:rPr>
               <a:t>training and a certificate</a:t>
             </a:r>
@@ -51032,8 +50096,7 @@
                   <a:srgbClr val="1B3B6F"/>
                 </a:solidFill>
                 <a:latin typeface="Calibri" pitchFamily="34" charset="0"/>
-                <a:ea typeface="Calibri" pitchFamily="34" charset="-122"/>
-                <a:cs typeface="Calibri" pitchFamily="34" charset="-120"/>
+                <a:cs typeface="Amiri" pitchFamily="2" charset="-78"/>
               </a:rPr>
               <a:t>B</a:t>
             </a:r>
@@ -51071,8 +50134,7 @@
                   <a:srgbClr val="9AA1AB"/>
                 </a:solidFill>
                 <a:latin typeface="Calibri" pitchFamily="34" charset="0"/>
-                <a:ea typeface="Calibri" pitchFamily="34" charset="-122"/>
-                <a:cs typeface="Calibri" pitchFamily="34" charset="-120"/>
+                <a:cs typeface="Amiri" pitchFamily="2" charset="-78"/>
               </a:rPr>
               <a:t>free accommodation</a:t>
             </a:r>
@@ -51135,8 +50197,7 @@
                   <a:srgbClr val="1B3B6F"/>
                 </a:solidFill>
                 <a:latin typeface="Calibri" pitchFamily="34" charset="0"/>
-                <a:ea typeface="Calibri" pitchFamily="34" charset="-122"/>
-                <a:cs typeface="Calibri" pitchFamily="34" charset="-120"/>
+                <a:cs typeface="Amiri" pitchFamily="2" charset="-78"/>
               </a:rPr>
               <a:t>C</a:t>
             </a:r>
@@ -51174,8 +50235,7 @@
                   <a:srgbClr val="9AA1AB"/>
                 </a:solidFill>
                 <a:latin typeface="Calibri" pitchFamily="34" charset="0"/>
-                <a:ea typeface="Calibri" pitchFamily="34" charset="-122"/>
-                <a:cs typeface="Calibri" pitchFamily="34" charset="-120"/>
+                <a:cs typeface="Amiri" pitchFamily="2" charset="-78"/>
               </a:rPr>
               <a:t>a high salary</a:t>
             </a:r>
@@ -51212,9 +50272,8 @@
                 <a:solidFill>
                   <a:srgbClr val="8A6D1E"/>
                 </a:solidFill>
-                <a:latin typeface="Amiri" pitchFamily="34" charset="0"/>
-                <a:ea typeface="Amiri" pitchFamily="34" charset="-122"/>
-                <a:cs typeface="Amiri" pitchFamily="34" charset="-120"/>
+                <a:latin typeface="Amiri" pitchFamily="2" charset="-78"/>
+                <a:cs typeface="Amiri" pitchFamily="2" charset="-78"/>
               </a:rPr>
               <a:t>تَدْرِيبًا وَشَهَادَةً</a:t>
             </a:r>
@@ -51252,8 +50311,7 @@
                   <a:srgbClr val="8A93A0"/>
                 </a:solidFill>
                 <a:latin typeface="Calibri" pitchFamily="34" charset="0"/>
-                <a:ea typeface="Calibri" pitchFamily="34" charset="-122"/>
-                <a:cs typeface="Calibri" pitchFamily="34" charset="-120"/>
+                <a:cs typeface="Amiri" pitchFamily="2" charset="-78"/>
               </a:rPr>
               <a:t>9 / 23</a:t>
             </a:r>

--- a/Development_D3/D3-L12_Review_and_Unit_Assessment_Work_and_Careers.pptx
+++ b/Development_D3/D3-L12_Review_and_Unit_Assessment_Work_and_Careers.pptx
@@ -621,7 +621,11 @@
           <a:lstStyle/>
           <a:p>
             <a:r>
-              <a:rPr lang="en-US" dirty="0"/>
+              <a:rPr lang="ar-SA" dirty="0">
+                <a:latin typeface="Amiri" pitchFamily="2" charset="-78"/>
+                <a:ea typeface="Amiri" pitchFamily="2" charset="-78"/>
+                <a:cs typeface="Amiri" pitchFamily="2" charset="-78"/>
+              </a:rPr>
               <a:t>LISTENING (website Part A, 20 marks: 10 questions × 2). Read the advert twice at natural pace; students answer after the second reading (website: “three listens · final details” — a third listening is allowed).
 SCRIPT: تُعْلِنُ شَرِكَةُ النُّورِ التِّقْنِيَّةُ عَنْ فُرْصَةِ تَدْرِيبٍ صَيْفِيٍّ لِلطُّلَّابِ. يُشْتَرَطُ إِجَادَةُ الحَاسُوبِ وَالقُدْرَةُ عَلَى العَمَلِ ضِمْنَ فَرِيقٍ. سَتَبْدَأُ الفُرْصَةُ فِي الثَّانِي مِنْ أَغُسْطُسَ، لَا فِي الثَّانِي عَشَرَ مِنْهُ، وَسَتَسْتَمِرُّ أَرْبَعَةَ أَسَابِيعَ. تُقَدِّمُ الشَّرِكَةُ تَدْرِيبًا وَشَهَادَةً، وَلٰكِنَّهَا لَا تُقَدِّمُ رَاتِبًا. عَلَى المُتَقَدِّمِينَ إِرْسَالُ سِيرَةٍ ذَاتِيَّةٍ قَبْلَ يَوْمِ الخَمِيسِ، وَيَنْبَغِي أَنْ يَكُونُوا مَسْؤُولِينَ وَمُسْتَعِدِّينَ لِلتَّعَلُّمِ.
 Private chat: five letters.</a:t>
@@ -1415,7 +1419,11 @@
           <a:lstStyle/>
           <a:p>
             <a:r>
-              <a:rPr lang="en-US" dirty="0"/>
+              <a:rPr lang="ar-SA" dirty="0">
+                <a:latin typeface="Amiri" pitchFamily="2" charset="-78"/>
+                <a:ea typeface="Amiri" pitchFamily="2" charset="-78"/>
+                <a:cs typeface="Amiri" pitchFamily="2" charset="-78"/>
+              </a:rPr>
               <a:t>SPEAKING (website, 10 marks). Teacher questions (the D3-L11 conversation): مَا المِهْنَةُ الَّتِي تُرِيدُهَا؟ وَلِمَاذَا؟ · مَا مَهَارَاتُكَ؟ وَمَا الدَّلِيلُ؟ · مَا خُطَّتُكَ بَعْدَ المَدْرَسَةِ؟ · مَا نُقْطَةُ قُوَّتِكَ؟ · مَا الصُّعُوبَةُ المُحْتَمَلَةُ؟ وَكَيْفَ سَتَتَغَلَّبُ عَلَيْهَا؟
 To a girl: تُرِيدِينَهَا · مَهَارَاتُكِ · خُطَّتُكِ · قُوَّتِكِ · سَتَتَغَلَّبِينَ.
 Suggested marking: communication and development 4 · range 3 · accuracy and pronunciation 3. ORGANISATION: one-to-one while others finish writing, or trusted pairs with the teacher as interviewer.</a:t>
@@ -1505,7 +1513,11 @@
           <a:lstStyle/>
           <a:p>
             <a:r>
-              <a:rPr lang="en-US" dirty="0"/>
+              <a:rPr lang="ar-SA" dirty="0">
+                <a:latin typeface="Amiri" pitchFamily="2" charset="-78"/>
+                <a:ea typeface="Amiri" pitchFamily="2" charset="-78"/>
+                <a:cs typeface="Amiri" pitchFamily="2" charset="-78"/>
+              </a:rPr>
               <a:t>WELCOME (1 min) — while students join.
 • Greet each student by name as they arrive: السَّلَامُ عَلَيْكُمْ. Take the register (Pastoral Tracker: attendance 0/1).
 • 2-MINUTE CHECK-IN (SEND training): a private chat to any student who seemed unsettled last lesson — “Are you okay today? 👍 / 👎”.
@@ -2224,7 +2236,11 @@
           <a:lstStyle/>
           <a:p>
             <a:r>
-              <a:rPr lang="en-US" dirty="0"/>
+              <a:rPr lang="ar-SA" dirty="0">
+                <a:latin typeface="Amiri" pitchFamily="2" charset="-78"/>
+                <a:ea typeface="Amiri" pitchFamily="2" charset="-78"/>
+                <a:cs typeface="Amiri" pitchFamily="2" charset="-78"/>
+              </a:rPr>
               <a:t>REVIEW (website “Cumulative grammar laboratory”, correct answers): مُهَنْدِسَةٌ · يَحْتَاجُ … إِلَى · سَأَتَدَرَّبُ · يَسُرُّنِي أَنْ أَتَقَدَّمَ لِـ · لِكَيْ أَنْجَحَ · أَنَا مُنَظَّمٌ، وَالدَّلِيلُ … · إِذَا نَجَحْتُ فَسَأَدْرُسُ … · الشَّرِكَةُ الَّتِي تُقَدِّمُ تَدْرِيبًا · مَنْ جَدَّ وَجَدَ (effort) · أُخْتِي مُحَاسِبَةٌ وَسَتَعْمَلُ فِي شَرِكَةٍ.
 The website language vault (all D3 vocabulary by lesson) is for revision BEFORE the assessment — close it during each section.</a:t>
             </a:r>
@@ -2401,7 +2417,11 @@
           <a:lstStyle/>
           <a:p>
             <a:r>
-              <a:rPr lang="en-US" dirty="0"/>
+              <a:rPr lang="ar-SA" dirty="0">
+                <a:latin typeface="Amiri" pitchFamily="2" charset="-78"/>
+                <a:ea typeface="Amiri" pitchFamily="2" charset="-78"/>
+                <a:cs typeface="Amiri" pitchFamily="2" charset="-78"/>
+              </a:rPr>
               <a:t>LISTENING (website Part A, 20 marks: 10 questions × 2). Read the advert twice at natural pace; students answer after the second reading (website: “three listens · final details” — a third listening is allowed).
 SCRIPT: تُعْلِنُ شَرِكَةُ النُّورِ التِّقْنِيَّةُ عَنْ فُرْصَةِ تَدْرِيبٍ صَيْفِيٍّ لِلطُّلَّابِ. يُشْتَرَطُ إِجَادَةُ الحَاسُوبِ وَالقُدْرَةُ عَلَى العَمَلِ ضِمْنَ فَرِيقٍ. سَتَبْدَأُ الفُرْصَةُ فِي الثَّانِي مِنْ أَغُسْطُسَ، لَا فِي الثَّانِي عَشَرَ مِنْهُ، وَسَتَسْتَمِرُّ أَرْبَعَةَ أَسَابِيعَ. تُقَدِّمُ الشَّرِكَةُ تَدْرِيبًا وَشَهَادَةً، وَلٰكِنَّهَا لَا تُقَدِّمُ رَاتِبًا. عَلَى المُتَقَدِّمِينَ إِرْسَالُ سِيرَةٍ ذَاتِيَّةٍ قَبْلَ يَوْمِ الخَمِيسِ، وَيَنْبَغِي أَنْ يَكُونُوا مَسْؤُولِينَ وَمُسْتَعِدِّينَ لِلتَّعَلُّمِ.
 Private chat: five letters.</a:t>
@@ -2975,6 +2995,7 @@
                   <a:srgbClr val="D4AF37"/>
                 </a:solidFill>
                 <a:latin typeface="Amiri" pitchFamily="2" charset="-78"/>
+                <a:ea typeface="Amiri" pitchFamily="2" charset="-78"/>
                 <a:cs typeface="Amiri" pitchFamily="2" charset="-78"/>
               </a:rPr>
               <a:t>م</a:t>
@@ -3181,6 +3202,7 @@
                   <a:srgbClr val="D4AF37"/>
                 </a:solidFill>
                 <a:latin typeface="Amiri" pitchFamily="2" charset="-78"/>
+                <a:ea typeface="Amiri" pitchFamily="2" charset="-78"/>
                 <a:cs typeface="Amiri" pitchFamily="2" charset="-78"/>
               </a:rPr>
               <a:t>المُرَاجَعَةُ وَتَقْيِيمُ الوَحْدَةِ</a:t>
@@ -3638,6 +3660,7 @@
                   <a:srgbClr val="D4AF37"/>
                 </a:solidFill>
                 <a:latin typeface="Amiri" pitchFamily="2" charset="-78"/>
+                <a:ea typeface="Amiri" pitchFamily="2" charset="-78"/>
                 <a:cs typeface="Amiri" pitchFamily="2" charset="-78"/>
               </a:rPr>
               <a:t>م</a:t>
@@ -3958,6 +3981,7 @@
                   <a:srgbClr val="8A6D1E"/>
                 </a:solidFill>
                 <a:latin typeface="Amiri" pitchFamily="2" charset="-78"/>
+                <a:ea typeface="Amiri" pitchFamily="2" charset="-78"/>
                 <a:cs typeface="Amiri" pitchFamily="2" charset="-78"/>
               </a:rPr>
               <a:t>الاِسْتِمَاعُ</a:t>
@@ -6319,6 +6343,7 @@
                   <a:srgbClr val="D4AF37"/>
                 </a:solidFill>
                 <a:latin typeface="Amiri" pitchFamily="2" charset="-78"/>
+                <a:ea typeface="Amiri" pitchFamily="2" charset="-78"/>
                 <a:cs typeface="Amiri" pitchFamily="2" charset="-78"/>
               </a:rPr>
               <a:t>م</a:t>
@@ -6639,6 +6664,7 @@
                   <a:srgbClr val="8A6D1E"/>
                 </a:solidFill>
                 <a:latin typeface="Amiri" pitchFamily="2" charset="-78"/>
+                <a:ea typeface="Amiri" pitchFamily="2" charset="-78"/>
                 <a:cs typeface="Amiri" pitchFamily="2" charset="-78"/>
               </a:rPr>
               <a:t>الإِجَابَاتُ</a:t>
@@ -7180,6 +7206,7 @@
                   <a:srgbClr val="8A6D1E"/>
                 </a:solidFill>
                 <a:latin typeface="Amiri" pitchFamily="2" charset="-78"/>
+                <a:ea typeface="Amiri" pitchFamily="2" charset="-78"/>
                 <a:cs typeface="Amiri" pitchFamily="2" charset="-78"/>
               </a:rPr>
               <a:t>لَا تُقَدِّمُ رَاتِبًا</a:t>
@@ -7683,6 +7710,7 @@
                   <a:srgbClr val="8A6D1E"/>
                 </a:solidFill>
                 <a:latin typeface="Amiri" pitchFamily="2" charset="-78"/>
+                <a:ea typeface="Amiri" pitchFamily="2" charset="-78"/>
                 <a:cs typeface="Amiri" pitchFamily="2" charset="-78"/>
               </a:rPr>
               <a:t>إِرْسَالُ سِيرَةٍ ذَاتِيَّةٍ</a:t>
@@ -8186,6 +8214,7 @@
                   <a:srgbClr val="8A6D1E"/>
                 </a:solidFill>
                 <a:latin typeface="Amiri" pitchFamily="2" charset="-78"/>
+                <a:ea typeface="Amiri" pitchFamily="2" charset="-78"/>
                 <a:cs typeface="Amiri" pitchFamily="2" charset="-78"/>
               </a:rPr>
               <a:t>قَبْلَ يَوْمِ الخَمِيسِ</a:t>
@@ -8689,6 +8718,7 @@
                   <a:srgbClr val="8A6D1E"/>
                 </a:solidFill>
                 <a:latin typeface="Amiri" pitchFamily="2" charset="-78"/>
+                <a:ea typeface="Amiri" pitchFamily="2" charset="-78"/>
                 <a:cs typeface="Amiri" pitchFamily="2" charset="-78"/>
               </a:rPr>
               <a:t>مَسْؤُولِينَ وَمُسْتَعِدِّينَ لِلتَّعَلُّمِ</a:t>
@@ -9192,6 +9222,7 @@
                   <a:srgbClr val="8A6D1E"/>
                 </a:solidFill>
                 <a:latin typeface="Amiri" pitchFamily="2" charset="-78"/>
+                <a:ea typeface="Amiri" pitchFamily="2" charset="-78"/>
                 <a:cs typeface="Amiri" pitchFamily="2" charset="-78"/>
               </a:rPr>
               <a:t>تُعْلِنُ … عَنْ فُرْصَةِ تَدْرِيبٍ</a:t>
@@ -9325,6 +9356,7 @@
                   <a:srgbClr val="D4AF37"/>
                 </a:solidFill>
                 <a:latin typeface="Amiri" pitchFamily="2" charset="-78"/>
+                <a:ea typeface="Amiri" pitchFamily="2" charset="-78"/>
                 <a:cs typeface="Amiri" pitchFamily="2" charset="-78"/>
               </a:rPr>
               <a:t>م</a:t>
@@ -9645,6 +9677,7 @@
                   <a:srgbClr val="8A6D1E"/>
                 </a:solidFill>
                 <a:latin typeface="Amiri" pitchFamily="2" charset="-78"/>
+                <a:ea typeface="Amiri" pitchFamily="2" charset="-78"/>
                 <a:cs typeface="Amiri" pitchFamily="2" charset="-78"/>
               </a:rPr>
               <a:t>خُطَّتِي المِهَنِيَّةُ</a:t>
@@ -9758,6 +9791,7 @@
                   <a:srgbClr val="1F2A37"/>
                 </a:solidFill>
                 <a:latin typeface="Amiri" pitchFamily="2" charset="-78"/>
+                <a:ea typeface="Amiri" pitchFamily="2" charset="-78"/>
                 <a:cs typeface="Amiri" pitchFamily="2" charset="-78"/>
               </a:rPr>
               <a:t>أَطْمَحُ إِلَى أَنْ أُصْبِحَ مُهَنْدِسَةَ بِيئَةٍ لِأَنَّنِي أُرِيدُ أَنْ أُسَاهِمَ فِي حَلِّ مُشْكِلَاتِ التَّلَوُّثِ. أَنَا جَيِّدَةٌ فِي العُلُومِ وَالعَمَلِ الجَمَاعِيِّ، وَالدَّلِيلُ عَلَى ذٰلِكَ أَنَّنِي قُدْتُ مَشْرُوعًا مَدْرَسِيًّا عَنْ إِعَادَةِ التَّدْوِيرِ. بَعْدَ التَّخَرُّجِ سَأَدْرُسُ الهَنْدَسَةَ، ثُمَّ سَأَبْحَثُ عَنْ تَدْرِيبٍ عَمَلِيٍّ. عَلَى الرَّغْمِ مِنْ أَنَّ الطَّرِيقَ طَوِيلٌ، فَإِنَّنِي مُسْتَعِدَّةٌ لِلْعَمَلِ بِجِدٍّ.</a:t>
@@ -9891,6 +9925,7 @@
                   <a:srgbClr val="D4AF37"/>
                 </a:solidFill>
                 <a:latin typeface="Amiri" pitchFamily="2" charset="-78"/>
+                <a:ea typeface="Amiri" pitchFamily="2" charset="-78"/>
                 <a:cs typeface="Amiri" pitchFamily="2" charset="-78"/>
               </a:rPr>
               <a:t>م</a:t>
@@ -10211,6 +10246,7 @@
                   <a:srgbClr val="8A6D1E"/>
                 </a:solidFill>
                 <a:latin typeface="Amiri" pitchFamily="2" charset="-78"/>
+                <a:ea typeface="Amiri" pitchFamily="2" charset="-78"/>
                 <a:cs typeface="Amiri" pitchFamily="2" charset="-78"/>
               </a:rPr>
               <a:t>أَسْئِلَةُ القِرَاءَةِ</a:t>
@@ -12572,6 +12608,7 @@
                   <a:srgbClr val="D4AF37"/>
                 </a:solidFill>
                 <a:latin typeface="Amiri" pitchFamily="2" charset="-78"/>
+                <a:ea typeface="Amiri" pitchFamily="2" charset="-78"/>
                 <a:cs typeface="Amiri" pitchFamily="2" charset="-78"/>
               </a:rPr>
               <a:t>م</a:t>
@@ -12892,6 +12929,7 @@
                   <a:srgbClr val="8A6D1E"/>
                 </a:solidFill>
                 <a:latin typeface="Amiri" pitchFamily="2" charset="-78"/>
+                <a:ea typeface="Amiri" pitchFamily="2" charset="-78"/>
                 <a:cs typeface="Amiri" pitchFamily="2" charset="-78"/>
               </a:rPr>
               <a:t>الإِجَابَاتُ</a:t>
@@ -13433,6 +13471,7 @@
                   <a:srgbClr val="8A6D1E"/>
                 </a:solidFill>
                 <a:latin typeface="Amiri" pitchFamily="2" charset="-78"/>
+                <a:ea typeface="Amiri" pitchFamily="2" charset="-78"/>
                 <a:cs typeface="Amiri" pitchFamily="2" charset="-78"/>
               </a:rPr>
               <a:t>مُهَنْدِسَةَ بِيئَةٍ</a:t>
@@ -13936,6 +13975,7 @@
                   <a:srgbClr val="8A6D1E"/>
                 </a:solidFill>
                 <a:latin typeface="Amiri" pitchFamily="2" charset="-78"/>
+                <a:ea typeface="Amiri" pitchFamily="2" charset="-78"/>
                 <a:cs typeface="Amiri" pitchFamily="2" charset="-78"/>
               </a:rPr>
               <a:t>حَلِّ مُشْكِلَاتِ التَّلَوُّثِ</a:t>
@@ -14439,6 +14479,7 @@
                   <a:srgbClr val="8A6D1E"/>
                 </a:solidFill>
                 <a:latin typeface="Amiri" pitchFamily="2" charset="-78"/>
+                <a:ea typeface="Amiri" pitchFamily="2" charset="-78"/>
                 <a:cs typeface="Amiri" pitchFamily="2" charset="-78"/>
               </a:rPr>
               <a:t>العُلُومِ وَالعَمَلِ الجَمَاعِيِّ</a:t>
@@ -14942,6 +14983,7 @@
                   <a:srgbClr val="8A6D1E"/>
                 </a:solidFill>
                 <a:latin typeface="Amiri" pitchFamily="2" charset="-78"/>
+                <a:ea typeface="Amiri" pitchFamily="2" charset="-78"/>
                 <a:cs typeface="Amiri" pitchFamily="2" charset="-78"/>
               </a:rPr>
               <a:t>قُدْتُ مَشْرُوعًا … إِعَادَةِ التَّدْوِيرِ</a:t>
@@ -15445,6 +15487,7 @@
                   <a:srgbClr val="8A6D1E"/>
                 </a:solidFill>
                 <a:latin typeface="Amiri" pitchFamily="2" charset="-78"/>
+                <a:ea typeface="Amiri" pitchFamily="2" charset="-78"/>
                 <a:cs typeface="Amiri" pitchFamily="2" charset="-78"/>
               </a:rPr>
               <a:t>سَأَدْرُسُ الهَنْدَسَةَ</a:t>
@@ -15578,6 +15621,7 @@
                   <a:srgbClr val="D4AF37"/>
                 </a:solidFill>
                 <a:latin typeface="Amiri" pitchFamily="2" charset="-78"/>
+                <a:ea typeface="Amiri" pitchFamily="2" charset="-78"/>
                 <a:cs typeface="Amiri" pitchFamily="2" charset="-78"/>
               </a:rPr>
               <a:t>م</a:t>
@@ -15898,6 +15942,7 @@
                   <a:srgbClr val="8A6D1E"/>
                 </a:solidFill>
                 <a:latin typeface="Amiri" pitchFamily="2" charset="-78"/>
+                <a:ea typeface="Amiri" pitchFamily="2" charset="-78"/>
                 <a:cs typeface="Amiri" pitchFamily="2" charset="-78"/>
               </a:rPr>
               <a:t>أَسْئِلَةُ القِرَاءَةِ</a:t>
@@ -17486,6 +17531,7 @@
                   <a:srgbClr val="1F2A37"/>
                 </a:solidFill>
                 <a:latin typeface="Amiri" pitchFamily="2" charset="-78"/>
+                <a:ea typeface="Amiri" pitchFamily="2" charset="-78"/>
                 <a:cs typeface="Amiri" pitchFamily="2" charset="-78"/>
               </a:rPr>
               <a:t>عَلَى الرَّغْمِ مِنْ أَنَّ</a:t>
@@ -17587,6 +17633,7 @@
                   <a:srgbClr val="1F2A37"/>
                 </a:solidFill>
                 <a:latin typeface="Amiri" pitchFamily="2" charset="-78"/>
+                <a:ea typeface="Amiri" pitchFamily="2" charset="-78"/>
                 <a:cs typeface="Amiri" pitchFamily="2" charset="-78"/>
               </a:rPr>
               <a:t>ثُمَّ</a:t>
@@ -17688,6 +17735,7 @@
                   <a:srgbClr val="1F2A37"/>
                 </a:solidFill>
                 <a:latin typeface="Amiri" pitchFamily="2" charset="-78"/>
+                <a:ea typeface="Amiri" pitchFamily="2" charset="-78"/>
                 <a:cs typeface="Amiri" pitchFamily="2" charset="-78"/>
               </a:rPr>
               <a:t>لِكَيْ</a:t>
@@ -18259,6 +18307,7 @@
                   <a:srgbClr val="D4AF37"/>
                 </a:solidFill>
                 <a:latin typeface="Amiri" pitchFamily="2" charset="-78"/>
+                <a:ea typeface="Amiri" pitchFamily="2" charset="-78"/>
                 <a:cs typeface="Amiri" pitchFamily="2" charset="-78"/>
               </a:rPr>
               <a:t>م</a:t>
@@ -18579,6 +18628,7 @@
                   <a:srgbClr val="8A6D1E"/>
                 </a:solidFill>
                 <a:latin typeface="Amiri" pitchFamily="2" charset="-78"/>
+                <a:ea typeface="Amiri" pitchFamily="2" charset="-78"/>
                 <a:cs typeface="Amiri" pitchFamily="2" charset="-78"/>
               </a:rPr>
               <a:t>الإِجَابَاتُ</a:t>
@@ -19120,6 +19170,7 @@
                   <a:srgbClr val="8A6D1E"/>
                 </a:solidFill>
                 <a:latin typeface="Amiri" pitchFamily="2" charset="-78"/>
+                <a:ea typeface="Amiri" pitchFamily="2" charset="-78"/>
                 <a:cs typeface="Amiri" pitchFamily="2" charset="-78"/>
               </a:rPr>
               <a:t>تَدْرِيبٍ عَمَلِيٍّ</a:t>
@@ -19623,6 +19674,7 @@
                   <a:srgbClr val="8A6D1E"/>
                 </a:solidFill>
                 <a:latin typeface="Amiri" pitchFamily="2" charset="-78"/>
+                <a:ea typeface="Amiri" pitchFamily="2" charset="-78"/>
                 <a:cs typeface="Amiri" pitchFamily="2" charset="-78"/>
               </a:rPr>
               <a:t>الطَّرِيقَ طَوِيلٌ</a:t>
@@ -20126,6 +20178,7 @@
                   <a:srgbClr val="8A6D1E"/>
                 </a:solidFill>
                 <a:latin typeface="Amiri" pitchFamily="2" charset="-78"/>
+                <a:ea typeface="Amiri" pitchFamily="2" charset="-78"/>
                 <a:cs typeface="Amiri" pitchFamily="2" charset="-78"/>
               </a:rPr>
               <a:t>مُسْتَعِدَّةٌ لِلْعَمَلِ بِجِدٍّ</a:t>
@@ -20389,6 +20442,7 @@
                   <a:srgbClr val="1F2A37"/>
                 </a:solidFill>
                 <a:latin typeface="Amiri" pitchFamily="2" charset="-78"/>
+                <a:ea typeface="Amiri" pitchFamily="2" charset="-78"/>
                 <a:cs typeface="Amiri" pitchFamily="2" charset="-78"/>
               </a:rPr>
               <a:t>عَلَى الرَّغْمِ مِنْ أَنَّ</a:t>
@@ -20490,6 +20544,7 @@
                   <a:srgbClr val="9AA1AB"/>
                 </a:solidFill>
                 <a:latin typeface="Amiri" pitchFamily="2" charset="-78"/>
+                <a:ea typeface="Amiri" pitchFamily="2" charset="-78"/>
                 <a:cs typeface="Amiri" pitchFamily="2" charset="-78"/>
               </a:rPr>
               <a:t>ثُمَّ</a:t>
@@ -20591,6 +20646,7 @@
                   <a:srgbClr val="9AA1AB"/>
                 </a:solidFill>
                 <a:latin typeface="Amiri" pitchFamily="2" charset="-78"/>
+                <a:ea typeface="Amiri" pitchFamily="2" charset="-78"/>
                 <a:cs typeface="Amiri" pitchFamily="2" charset="-78"/>
               </a:rPr>
               <a:t>لِكَيْ</a:t>
@@ -21132,6 +21188,7 @@
                   <a:srgbClr val="8A6D1E"/>
                 </a:solidFill>
                 <a:latin typeface="Amiri" pitchFamily="2" charset="-78"/>
+                <a:ea typeface="Amiri" pitchFamily="2" charset="-78"/>
                 <a:cs typeface="Amiri" pitchFamily="2" charset="-78"/>
               </a:rPr>
               <a:t>أَطْمَحُ … سَأَدْرُسُ …</a:t>
@@ -21265,6 +21322,7 @@
                   <a:srgbClr val="D4AF37"/>
                 </a:solidFill>
                 <a:latin typeface="Amiri" pitchFamily="2" charset="-78"/>
+                <a:ea typeface="Amiri" pitchFamily="2" charset="-78"/>
                 <a:cs typeface="Amiri" pitchFamily="2" charset="-78"/>
               </a:rPr>
               <a:t>م</a:t>
@@ -21585,6 +21643,7 @@
                   <a:srgbClr val="8A6D1E"/>
                 </a:solidFill>
                 <a:latin typeface="Amiri" pitchFamily="2" charset="-78"/>
+                <a:ea typeface="Amiri" pitchFamily="2" charset="-78"/>
                 <a:cs typeface="Amiri" pitchFamily="2" charset="-78"/>
               </a:rPr>
               <a:t>مِلَفُّ الطَّلَبِ</a:t>
@@ -21865,6 +21924,7 @@
                   <a:srgbClr val="1B3B6F"/>
                 </a:solidFill>
                 <a:latin typeface="Amiri" pitchFamily="2" charset="-78"/>
+                <a:ea typeface="Amiri" pitchFamily="2" charset="-78"/>
                 <a:cs typeface="Amiri" pitchFamily="2" charset="-78"/>
               </a:rPr>
               <a:t>الوَظِيفَةُ المُخْتَارَةُ</a:t>
@@ -22071,6 +22131,7 @@
                   <a:srgbClr val="1B3B6F"/>
                 </a:solidFill>
                 <a:latin typeface="Amiri" pitchFamily="2" charset="-78"/>
+                <a:ea typeface="Amiri" pitchFamily="2" charset="-78"/>
                 <a:cs typeface="Amiri" pitchFamily="2" charset="-78"/>
               </a:rPr>
               <a:t>مَهَارَتَانِ</a:t>
@@ -22277,6 +22338,7 @@
                   <a:srgbClr val="1B3B6F"/>
                 </a:solidFill>
                 <a:latin typeface="Amiri" pitchFamily="2" charset="-78"/>
+                <a:ea typeface="Amiri" pitchFamily="2" charset="-78"/>
                 <a:cs typeface="Amiri" pitchFamily="2" charset="-78"/>
               </a:rPr>
               <a:t>دَلِيلٌ عَلَى مَهَارَةٍ</a:t>
@@ -22483,6 +22545,7 @@
                   <a:srgbClr val="1B3B6F"/>
                 </a:solidFill>
                 <a:latin typeface="Amiri" pitchFamily="2" charset="-78"/>
+                <a:ea typeface="Amiri" pitchFamily="2" charset="-78"/>
                 <a:cs typeface="Amiri" pitchFamily="2" charset="-78"/>
               </a:rPr>
               <a:t>خِبْرَةٌ سَابِقَةٌ</a:t>
@@ -22689,6 +22752,7 @@
                   <a:srgbClr val="1B3B6F"/>
                 </a:solidFill>
                 <a:latin typeface="Amiri" pitchFamily="2" charset="-78"/>
+                <a:ea typeface="Amiri" pitchFamily="2" charset="-78"/>
                 <a:cs typeface="Amiri" pitchFamily="2" charset="-78"/>
               </a:rPr>
               <a:t>خُطَّةٌ مُسْتَقْبَلِيَّةٌ</a:t>
@@ -22843,6 +22907,7 @@
                   <a:srgbClr val="1B3B6F"/>
                 </a:solidFill>
                 <a:latin typeface="Amiri" pitchFamily="2" charset="-78"/>
+                <a:ea typeface="Amiri" pitchFamily="2" charset="-78"/>
                 <a:cs typeface="Amiri" pitchFamily="2" charset="-78"/>
               </a:rPr>
               <a:t>مُبَرْمِجٌ</a:t>
@@ -22869,6 +22934,7 @@
                   <a:srgbClr val="1B3B6F"/>
                 </a:solidFill>
                 <a:latin typeface="Amiri" pitchFamily="2" charset="-78"/>
+                <a:ea typeface="Amiri" pitchFamily="2" charset="-78"/>
                 <a:cs typeface="Amiri" pitchFamily="2" charset="-78"/>
               </a:rPr>
               <a:t>حَلُّ المُشْكِلَاتِ وَالعَمَلُ الجَمَاعِيُّ</a:t>
@@ -22895,6 +22961,7 @@
                   <a:srgbClr val="1B3B6F"/>
                 </a:solidFill>
                 <a:latin typeface="Amiri" pitchFamily="2" charset="-78"/>
+                <a:ea typeface="Amiri" pitchFamily="2" charset="-78"/>
                 <a:cs typeface="Amiri" pitchFamily="2" charset="-78"/>
               </a:rPr>
               <a:t>قُدْتُ فَرِيقًا فِي مَشْرُوعٍ</a:t>
@@ -22921,6 +22988,7 @@
                   <a:srgbClr val="1B3B6F"/>
                 </a:solidFill>
                 <a:latin typeface="Amiri" pitchFamily="2" charset="-78"/>
+                <a:ea typeface="Amiri" pitchFamily="2" charset="-78"/>
                 <a:cs typeface="Amiri" pitchFamily="2" charset="-78"/>
               </a:rPr>
               <a:t>تَطَوَّعْتُ فِي المَكْتَبَةِ</a:t>
@@ -22947,6 +23015,7 @@
                   <a:srgbClr val="1B3B6F"/>
                 </a:solidFill>
                 <a:latin typeface="Amiri" pitchFamily="2" charset="-78"/>
+                <a:ea typeface="Amiri" pitchFamily="2" charset="-78"/>
                 <a:cs typeface="Amiri" pitchFamily="2" charset="-78"/>
               </a:rPr>
               <a:t>سَأَدْرُسُ عُلُومَ الحَاسُوبِ</a:t>
@@ -23080,6 +23149,7 @@
                   <a:srgbClr val="D4AF37"/>
                 </a:solidFill>
                 <a:latin typeface="Amiri" pitchFamily="2" charset="-78"/>
+                <a:ea typeface="Amiri" pitchFamily="2" charset="-78"/>
                 <a:cs typeface="Amiri" pitchFamily="2" charset="-78"/>
               </a:rPr>
               <a:t>م</a:t>
@@ -23400,6 +23470,7 @@
                   <a:srgbClr val="8A6D1E"/>
                 </a:solidFill>
                 <a:latin typeface="Amiri" pitchFamily="2" charset="-78"/>
+                <a:ea typeface="Amiri" pitchFamily="2" charset="-78"/>
                 <a:cs typeface="Amiri" pitchFamily="2" charset="-78"/>
               </a:rPr>
               <a:t>مَقَالٌ أَوْ رِسَالَةٌ رَسْمِيَّةٌ</a:t>
@@ -24550,6 +24621,7 @@
                   <a:srgbClr val="D4AF37"/>
                 </a:solidFill>
                 <a:latin typeface="Amiri" pitchFamily="2" charset="-78"/>
+                <a:ea typeface="Amiri" pitchFamily="2" charset="-78"/>
                 <a:cs typeface="Amiri" pitchFamily="2" charset="-78"/>
               </a:rPr>
               <a:t>م</a:t>
@@ -24870,6 +24942,7 @@
                   <a:srgbClr val="8A6D1E"/>
                 </a:solidFill>
                 <a:latin typeface="Amiri" pitchFamily="2" charset="-78"/>
+                <a:ea typeface="Amiri" pitchFamily="2" charset="-78"/>
                 <a:cs typeface="Amiri" pitchFamily="2" charset="-78"/>
               </a:rPr>
               <a:t>التَّحَدُّثُ</a:t>
@@ -26020,6 +26093,7 @@
                   <a:srgbClr val="D4AF37"/>
                 </a:solidFill>
                 <a:latin typeface="Amiri" pitchFamily="2" charset="-78"/>
+                <a:ea typeface="Amiri" pitchFamily="2" charset="-78"/>
                 <a:cs typeface="Amiri" pitchFamily="2" charset="-78"/>
               </a:rPr>
               <a:t>م</a:t>
@@ -26340,6 +26414,7 @@
                   <a:srgbClr val="8A6D1E"/>
                 </a:solidFill>
                 <a:latin typeface="Amiri" pitchFamily="2" charset="-78"/>
+                <a:ea typeface="Amiri" pitchFamily="2" charset="-78"/>
                 <a:cs typeface="Amiri" pitchFamily="2" charset="-78"/>
               </a:rPr>
               <a:t>آدَابُ الصَّفِّ</a:t>
@@ -27871,6 +27946,7 @@
                   <a:srgbClr val="D4AF37"/>
                 </a:solidFill>
                 <a:latin typeface="Amiri" pitchFamily="2" charset="-78"/>
+                <a:ea typeface="Amiri" pitchFamily="2" charset="-78"/>
                 <a:cs typeface="Amiri" pitchFamily="2" charset="-78"/>
               </a:rPr>
               <a:t>م</a:t>
@@ -28191,6 +28267,7 @@
                   <a:srgbClr val="8A6D1E"/>
                 </a:solidFill>
                 <a:latin typeface="Amiri" pitchFamily="2" charset="-78"/>
+                <a:ea typeface="Amiri" pitchFamily="2" charset="-78"/>
                 <a:cs typeface="Amiri" pitchFamily="2" charset="-78"/>
               </a:rPr>
               <a:t>مِلَفُّ المَهَارَاتِ</a:t>
@@ -29363,6 +29440,7 @@
                   <a:srgbClr val="D4AF37"/>
                 </a:solidFill>
                 <a:latin typeface="Amiri" pitchFamily="2" charset="-78"/>
+                <a:ea typeface="Amiri" pitchFamily="2" charset="-78"/>
                 <a:cs typeface="Amiri" pitchFamily="2" charset="-78"/>
               </a:rPr>
               <a:t>م</a:t>
@@ -29683,6 +29761,7 @@
                   <a:srgbClr val="8A6D1E"/>
                 </a:solidFill>
                 <a:latin typeface="Amiri" pitchFamily="2" charset="-78"/>
+                <a:ea typeface="Amiri" pitchFamily="2" charset="-78"/>
                 <a:cs typeface="Amiri" pitchFamily="2" charset="-78"/>
               </a:rPr>
               <a:t>قَيِّمْ عَمَلَكَ</a:t>
@@ -30840,6 +30919,7 @@
                   <a:srgbClr val="D4AF37"/>
                 </a:solidFill>
                 <a:latin typeface="Amiri" pitchFamily="2" charset="-78"/>
+                <a:ea typeface="Amiri" pitchFamily="2" charset="-78"/>
                 <a:cs typeface="Amiri" pitchFamily="2" charset="-78"/>
               </a:rPr>
               <a:t>م</a:t>
@@ -31160,6 +31240,7 @@
                   <a:srgbClr val="8A6D1E"/>
                 </a:solidFill>
                 <a:latin typeface="Amiri" pitchFamily="2" charset="-78"/>
+                <a:ea typeface="Amiri" pitchFamily="2" charset="-78"/>
                 <a:cs typeface="Amiri" pitchFamily="2" charset="-78"/>
               </a:rPr>
               <a:t>التَّحْضِيرُ لِلدَّرْسِ القَادِمِ</a:t>
@@ -31373,6 +31454,7 @@
                   <a:srgbClr val="1B3B6F"/>
                 </a:solidFill>
                 <a:latin typeface="Amiri" pitchFamily="2" charset="-78"/>
+                <a:ea typeface="Amiri" pitchFamily="2" charset="-78"/>
                 <a:cs typeface="Amiri" pitchFamily="2" charset="-78"/>
               </a:rPr>
               <a:t>البِيئَةُ</a:t>
@@ -31462,6 +31544,7 @@
                   <a:srgbClr val="1B3B6F"/>
                 </a:solidFill>
                 <a:latin typeface="Amiri" pitchFamily="2" charset="-78"/>
+                <a:ea typeface="Amiri" pitchFamily="2" charset="-78"/>
                 <a:cs typeface="Amiri" pitchFamily="2" charset="-78"/>
               </a:rPr>
               <a:t>المَنَاخُ</a:t>
@@ -31551,6 +31634,7 @@
                   <a:srgbClr val="1B3B6F"/>
                 </a:solidFill>
                 <a:latin typeface="Amiri" pitchFamily="2" charset="-78"/>
+                <a:ea typeface="Amiri" pitchFamily="2" charset="-78"/>
                 <a:cs typeface="Amiri" pitchFamily="2" charset="-78"/>
               </a:rPr>
               <a:t>الطَّقْسُ</a:t>
@@ -31640,6 +31724,7 @@
                   <a:srgbClr val="1B3B6F"/>
                 </a:solidFill>
                 <a:latin typeface="Amiri" pitchFamily="2" charset="-78"/>
+                <a:ea typeface="Amiri" pitchFamily="2" charset="-78"/>
                 <a:cs typeface="Amiri" pitchFamily="2" charset="-78"/>
               </a:rPr>
               <a:t>الصَّحْرَاءُ</a:t>
@@ -31686,11 +31771,12 @@
               <a:buNone/>
             </a:pPr>
             <a:r>
-              <a:rPr lang="en-US" sz="1000" i="1" dirty="0">
+              <a:rPr lang="ar-SA" sz="1000" i="1" dirty="0">
                 <a:solidFill>
                   <a:srgbClr val="5A6472"/>
                 </a:solidFill>
                 <a:latin typeface="Calibri" pitchFamily="34" charset="0"/>
+                <a:ea typeface="Amiri" pitchFamily="2" charset="-78"/>
                 <a:cs typeface="Amiri" pitchFamily="2" charset="-78"/>
               </a:rPr>
               <a:t>  pl. الصَّحَارِي</a:t>
@@ -31729,6 +31815,7 @@
                   <a:srgbClr val="1B3B6F"/>
                 </a:solidFill>
                 <a:latin typeface="Amiri" pitchFamily="2" charset="-78"/>
+                <a:ea typeface="Amiri" pitchFamily="2" charset="-78"/>
                 <a:cs typeface="Amiri" pitchFamily="2" charset="-78"/>
               </a:rPr>
               <a:t>الغَابَةُ</a:t>
@@ -31775,11 +31862,12 @@
               <a:buNone/>
             </a:pPr>
             <a:r>
-              <a:rPr lang="en-US" sz="1000" i="1" dirty="0">
+              <a:rPr lang="ar-SA" sz="1000" i="1" dirty="0">
                 <a:solidFill>
                   <a:srgbClr val="5A6472"/>
                 </a:solidFill>
                 <a:latin typeface="Calibri" pitchFamily="34" charset="0"/>
+                <a:ea typeface="Amiri" pitchFamily="2" charset="-78"/>
                 <a:cs typeface="Amiri" pitchFamily="2" charset="-78"/>
               </a:rPr>
               <a:t>  pl. الغَابَاتُ</a:t>
@@ -31894,6 +31982,7 @@
                   <a:srgbClr val="1B3B6F"/>
                 </a:solidFill>
                 <a:latin typeface="Amiri" pitchFamily="2" charset="-78"/>
+                <a:ea typeface="Amiri" pitchFamily="2" charset="-78"/>
                 <a:cs typeface="Amiri" pitchFamily="2" charset="-78"/>
               </a:rPr>
               <a:t>الطَّقْسُ اليَوْمَ …</a:t>
@@ -32563,6 +32652,7 @@
                   <a:srgbClr val="FFFFFF"/>
                 </a:solidFill>
                 <a:latin typeface="Amiri" pitchFamily="2" charset="-78"/>
+                <a:ea typeface="Amiri" pitchFamily="2" charset="-78"/>
                 <a:cs typeface="Amiri" pitchFamily="2" charset="-78"/>
               </a:rPr>
               <a:t>أَحْسَنْتُمْ! إِلَى اللِّقَاءِ</a:t>
@@ -32715,6 +32805,7 @@
                   <a:srgbClr val="D4AF37"/>
                 </a:solidFill>
                 <a:latin typeface="Amiri" pitchFamily="2" charset="-78"/>
+                <a:ea typeface="Amiri" pitchFamily="2" charset="-78"/>
                 <a:cs typeface="Amiri" pitchFamily="2" charset="-78"/>
               </a:rPr>
               <a:t>العَالَمُ الطَّبِيعِيُّ</a:t>
@@ -32848,6 +32939,7 @@
                   <a:srgbClr val="D4AF37"/>
                 </a:solidFill>
                 <a:latin typeface="Amiri" pitchFamily="2" charset="-78"/>
+                <a:ea typeface="Amiri" pitchFamily="2" charset="-78"/>
                 <a:cs typeface="Amiri" pitchFamily="2" charset="-78"/>
               </a:rPr>
               <a:t>م</a:t>
@@ -33168,6 +33260,7 @@
                   <a:srgbClr val="8A6D1E"/>
                 </a:solidFill>
                 <a:latin typeface="Amiri" pitchFamily="2" charset="-78"/>
+                <a:ea typeface="Amiri" pitchFamily="2" charset="-78"/>
                 <a:cs typeface="Amiri" pitchFamily="2" charset="-78"/>
               </a:rPr>
               <a:t>خَرِيطَةُ الدَّرْسِ</a:t>
@@ -33482,6 +33575,7 @@
                   <a:srgbClr val="0E7C86"/>
                 </a:solidFill>
                 <a:latin typeface="Amiri" pitchFamily="2" charset="-78"/>
+                <a:ea typeface="Amiri" pitchFamily="2" charset="-78"/>
                 <a:cs typeface="Amiri" pitchFamily="2" charset="-78"/>
               </a:rPr>
               <a:t>تَهْيِئَةٌ</a:t>
@@ -33758,6 +33852,7 @@
                   <a:srgbClr val="1B3B6F"/>
                 </a:solidFill>
                 <a:latin typeface="Amiri" pitchFamily="2" charset="-78"/>
+                <a:ea typeface="Amiri" pitchFamily="2" charset="-78"/>
                 <a:cs typeface="Amiri" pitchFamily="2" charset="-78"/>
               </a:rPr>
               <a:t>خُطَّةُ التَّقْيِيمِ</a:t>
@@ -34034,6 +34129,7 @@
                   <a:srgbClr val="6B4C9A"/>
                 </a:solidFill>
                 <a:latin typeface="Amiri" pitchFamily="2" charset="-78"/>
+                <a:ea typeface="Amiri" pitchFamily="2" charset="-78"/>
                 <a:cs typeface="Amiri" pitchFamily="2" charset="-78"/>
               </a:rPr>
               <a:t>الاِسْتِمَاعُ</a:t>
@@ -34310,6 +34406,7 @@
                   <a:srgbClr val="2F6FB0"/>
                 </a:solidFill>
                 <a:latin typeface="Amiri" pitchFamily="2" charset="-78"/>
+                <a:ea typeface="Amiri" pitchFamily="2" charset="-78"/>
                 <a:cs typeface="Amiri" pitchFamily="2" charset="-78"/>
               </a:rPr>
               <a:t>القِرَاءَةُ</a:t>
@@ -34586,6 +34683,7 @@
                   <a:srgbClr val="1E6B52"/>
                 </a:solidFill>
                 <a:latin typeface="Amiri" pitchFamily="2" charset="-78"/>
+                <a:ea typeface="Amiri" pitchFamily="2" charset="-78"/>
                 <a:cs typeface="Amiri" pitchFamily="2" charset="-78"/>
               </a:rPr>
               <a:t>الكِتَابَةُ وَالتَّحَدُّثُ</a:t>
@@ -34862,6 +34960,7 @@
                   <a:srgbClr val="8A6D1E"/>
                 </a:solidFill>
                 <a:latin typeface="Amiri" pitchFamily="2" charset="-78"/>
+                <a:ea typeface="Amiri" pitchFamily="2" charset="-78"/>
                 <a:cs typeface="Amiri" pitchFamily="2" charset="-78"/>
               </a:rPr>
               <a:t>الهَدَفُ</a:t>
@@ -35138,6 +35237,7 @@
                   <a:srgbClr val="C45A3C"/>
                 </a:solidFill>
                 <a:latin typeface="Amiri" pitchFamily="2" charset="-78"/>
+                <a:ea typeface="Amiri" pitchFamily="2" charset="-78"/>
                 <a:cs typeface="Amiri" pitchFamily="2" charset="-78"/>
               </a:rPr>
               <a:t>اِسْتَعِدَّ</a:t>
@@ -35381,6 +35481,7 @@
                   <a:srgbClr val="D4AF37"/>
                 </a:solidFill>
                 <a:latin typeface="Amiri" pitchFamily="2" charset="-78"/>
+                <a:ea typeface="Amiri" pitchFamily="2" charset="-78"/>
                 <a:cs typeface="Amiri" pitchFamily="2" charset="-78"/>
               </a:rPr>
               <a:t>م</a:t>
@@ -35701,6 +35802,7 @@
                   <a:srgbClr val="8A6D1E"/>
                 </a:solidFill>
                 <a:latin typeface="Amiri" pitchFamily="2" charset="-78"/>
+                <a:ea typeface="Amiri" pitchFamily="2" charset="-78"/>
                 <a:cs typeface="Amiri" pitchFamily="2" charset="-78"/>
               </a:rPr>
               <a:t>اِبْدَأِ الآنَ</a:t>
@@ -35887,6 +35989,7 @@
                   <a:srgbClr val="1B3B6F"/>
                 </a:solidFill>
                 <a:latin typeface="Amiri" pitchFamily="2" charset="-78"/>
+                <a:ea typeface="Amiri" pitchFamily="2" charset="-78"/>
                 <a:cs typeface="Amiri" pitchFamily="2" charset="-78"/>
               </a:rPr>
               <a:t>تَقْيِيمٌ</a:t>
@@ -36351,6 +36454,7 @@
                   <a:srgbClr val="1B3B6F"/>
                 </a:solidFill>
                 <a:latin typeface="Amiri" pitchFamily="2" charset="-78"/>
+                <a:ea typeface="Amiri" pitchFamily="2" charset="-78"/>
                 <a:cs typeface="Amiri" pitchFamily="2" charset="-78"/>
               </a:rPr>
               <a:t>يَحْتَاجُ المُدَرِّسُ</a:t>
@@ -36377,6 +36481,7 @@
                   <a:srgbClr val="1B3B6F"/>
                 </a:solidFill>
                 <a:latin typeface="Amiri" pitchFamily="2" charset="-78"/>
+                <a:ea typeface="Amiri" pitchFamily="2" charset="-78"/>
                 <a:cs typeface="Amiri" pitchFamily="2" charset="-78"/>
               </a:rPr>
               <a:t>الصَّبْرِ</a:t>
@@ -36491,6 +36596,7 @@
                   <a:srgbClr val="1F2A37"/>
                 </a:solidFill>
                 <a:latin typeface="Amiri" pitchFamily="2" charset="-78"/>
+                <a:ea typeface="Amiri" pitchFamily="2" charset="-78"/>
                 <a:cs typeface="Amiri" pitchFamily="2" charset="-78"/>
               </a:rPr>
               <a:t>إِلَى</a:t>
@@ -36592,6 +36698,7 @@
                   <a:srgbClr val="1F2A37"/>
                 </a:solidFill>
                 <a:latin typeface="Amiri" pitchFamily="2" charset="-78"/>
+                <a:ea typeface="Amiri" pitchFamily="2" charset="-78"/>
                 <a:cs typeface="Amiri" pitchFamily="2" charset="-78"/>
               </a:rPr>
               <a:t>فِي</a:t>
@@ -36693,6 +36800,7 @@
                   <a:srgbClr val="1F2A37"/>
                 </a:solidFill>
                 <a:latin typeface="Amiri" pitchFamily="2" charset="-78"/>
+                <a:ea typeface="Amiri" pitchFamily="2" charset="-78"/>
                 <a:cs typeface="Amiri" pitchFamily="2" charset="-78"/>
               </a:rPr>
               <a:t>مِنْ</a:t>
@@ -36929,6 +37037,7 @@
                   <a:srgbClr val="1F2A37"/>
                 </a:solidFill>
                 <a:latin typeface="Amiri" pitchFamily="2" charset="-78"/>
+                <a:ea typeface="Amiri" pitchFamily="2" charset="-78"/>
                 <a:cs typeface="Amiri" pitchFamily="2" charset="-78"/>
               </a:rPr>
               <a:t>سَوْفَ تَدَرَّبْتُ</a:t>
@@ -37030,6 +37139,7 @@
                   <a:srgbClr val="1F2A37"/>
                 </a:solidFill>
                 <a:latin typeface="Amiri" pitchFamily="2" charset="-78"/>
+                <a:ea typeface="Amiri" pitchFamily="2" charset="-78"/>
                 <a:cs typeface="Amiri" pitchFamily="2" charset="-78"/>
               </a:rPr>
               <a:t>سَتَدَرَّبْتُ</a:t>
@@ -37131,6 +37241,7 @@
                   <a:srgbClr val="1F2A37"/>
                 </a:solidFill>
                 <a:latin typeface="Amiri" pitchFamily="2" charset="-78"/>
+                <a:ea typeface="Amiri" pitchFamily="2" charset="-78"/>
                 <a:cs typeface="Amiri" pitchFamily="2" charset="-78"/>
               </a:rPr>
               <a:t>سَأَتَدَرَّبُ</a:t>
@@ -37279,6 +37390,7 @@
                   <a:srgbClr val="1B3B6F"/>
                 </a:solidFill>
                 <a:latin typeface="Amiri" pitchFamily="2" charset="-78"/>
+                <a:ea typeface="Amiri" pitchFamily="2" charset="-78"/>
                 <a:cs typeface="Amiri" pitchFamily="2" charset="-78"/>
               </a:rPr>
               <a:t>سَأَدْرُسُ بِجِدٍّ</a:t>
@@ -37305,6 +37417,7 @@
                   <a:srgbClr val="1B3B6F"/>
                 </a:solidFill>
                 <a:latin typeface="Amiri" pitchFamily="2" charset="-78"/>
+                <a:ea typeface="Amiri" pitchFamily="2" charset="-78"/>
                 <a:cs typeface="Amiri" pitchFamily="2" charset="-78"/>
               </a:rPr>
               <a:t>أَنْجَحَ</a:t>
@@ -37419,6 +37532,7 @@
                   <a:srgbClr val="1F2A37"/>
                 </a:solidFill>
                 <a:latin typeface="Amiri" pitchFamily="2" charset="-78"/>
+                <a:ea typeface="Amiri" pitchFamily="2" charset="-78"/>
                 <a:cs typeface="Amiri" pitchFamily="2" charset="-78"/>
               </a:rPr>
               <a:t>مَعَ</a:t>
@@ -37520,6 +37634,7 @@
                   <a:srgbClr val="1F2A37"/>
                 </a:solidFill>
                 <a:latin typeface="Amiri" pitchFamily="2" charset="-78"/>
+                <a:ea typeface="Amiri" pitchFamily="2" charset="-78"/>
                 <a:cs typeface="Amiri" pitchFamily="2" charset="-78"/>
               </a:rPr>
               <a:t>بَيْنَمَا</a:t>
@@ -37621,6 +37736,7 @@
                   <a:srgbClr val="1F2A37"/>
                 </a:solidFill>
                 <a:latin typeface="Amiri" pitchFamily="2" charset="-78"/>
+                <a:ea typeface="Amiri" pitchFamily="2" charset="-78"/>
                 <a:cs typeface="Amiri" pitchFamily="2" charset="-78"/>
               </a:rPr>
               <a:t>لِكَيْ</a:t>
@@ -37857,6 +37973,7 @@
                   <a:srgbClr val="1F2A37"/>
                 </a:solidFill>
                 <a:latin typeface="Amiri" pitchFamily="2" charset="-78"/>
+                <a:ea typeface="Amiri" pitchFamily="2" charset="-78"/>
                 <a:cs typeface="Amiri" pitchFamily="2" charset="-78"/>
               </a:rPr>
               <a:t>أُخْتِي مُحَاسِبَةٌ وَسَتَعْمَلُ فِي شَرِكَةٍ.</a:t>
@@ -37958,6 +38075,7 @@
                   <a:srgbClr val="1F2A37"/>
                 </a:solidFill>
                 <a:latin typeface="Amiri" pitchFamily="2" charset="-78"/>
+                <a:ea typeface="Amiri" pitchFamily="2" charset="-78"/>
                 <a:cs typeface="Amiri" pitchFamily="2" charset="-78"/>
               </a:rPr>
               <a:t>أُخْتِي مُحَاسِبٌ وَسَوْفَ عَمِلَتْ.</a:t>
@@ -38059,6 +38177,7 @@
                   <a:srgbClr val="1F2A37"/>
                 </a:solidFill>
                 <a:latin typeface="Amiri" pitchFamily="2" charset="-78"/>
+                <a:ea typeface="Amiri" pitchFamily="2" charset="-78"/>
                 <a:cs typeface="Amiri" pitchFamily="2" charset="-78"/>
               </a:rPr>
               <a:t>أُخْتِي فِي مُحَاسِبَةٍ.</a:t>
@@ -38394,6 +38513,7 @@
                   <a:srgbClr val="D4AF37"/>
                 </a:solidFill>
                 <a:latin typeface="Amiri" pitchFamily="2" charset="-78"/>
+                <a:ea typeface="Amiri" pitchFamily="2" charset="-78"/>
                 <a:cs typeface="Amiri" pitchFamily="2" charset="-78"/>
               </a:rPr>
               <a:t>م</a:t>
@@ -38714,6 +38834,7 @@
                   <a:srgbClr val="8A6D1E"/>
                 </a:solidFill>
                 <a:latin typeface="Amiri" pitchFamily="2" charset="-78"/>
+                <a:ea typeface="Amiri" pitchFamily="2" charset="-78"/>
                 <a:cs typeface="Amiri" pitchFamily="2" charset="-78"/>
               </a:rPr>
               <a:t>الإِجَابَاتُ وَالتَّعْلِيلُ</a:t>
@@ -38900,6 +39021,7 @@
                   <a:srgbClr val="1B3B6F"/>
                 </a:solidFill>
                 <a:latin typeface="Amiri" pitchFamily="2" charset="-78"/>
+                <a:ea typeface="Amiri" pitchFamily="2" charset="-78"/>
                 <a:cs typeface="Amiri" pitchFamily="2" charset="-78"/>
               </a:rPr>
               <a:t>تَقْيِيمٌ</a:t>
@@ -39429,6 +39551,7 @@
                   <a:srgbClr val="1B3B6F"/>
                 </a:solidFill>
                 <a:latin typeface="Amiri" pitchFamily="2" charset="-78"/>
+                <a:ea typeface="Amiri" pitchFamily="2" charset="-78"/>
                 <a:cs typeface="Amiri" pitchFamily="2" charset="-78"/>
               </a:rPr>
               <a:t>يَحْتَاجُ المُدَرِّسُ</a:t>
@@ -39455,6 +39578,7 @@
                   <a:srgbClr val="1B3B6F"/>
                 </a:solidFill>
                 <a:latin typeface="Amiri" pitchFamily="2" charset="-78"/>
+                <a:ea typeface="Amiri" pitchFamily="2" charset="-78"/>
                 <a:cs typeface="Amiri" pitchFamily="2" charset="-78"/>
               </a:rPr>
               <a:t>الصَّبْرِ</a:t>
@@ -39596,6 +39720,7 @@
                   <a:srgbClr val="1F2A37"/>
                 </a:solidFill>
                 <a:latin typeface="Amiri" pitchFamily="2" charset="-78"/>
+                <a:ea typeface="Amiri" pitchFamily="2" charset="-78"/>
                 <a:cs typeface="Amiri" pitchFamily="2" charset="-78"/>
               </a:rPr>
               <a:t>إِلَى</a:t>
@@ -39697,6 +39822,7 @@
                   <a:srgbClr val="9AA1AB"/>
                 </a:solidFill>
                 <a:latin typeface="Amiri" pitchFamily="2" charset="-78"/>
+                <a:ea typeface="Amiri" pitchFamily="2" charset="-78"/>
                 <a:cs typeface="Amiri" pitchFamily="2" charset="-78"/>
               </a:rPr>
               <a:t>فِي</a:t>
@@ -39798,6 +39924,7 @@
                   <a:srgbClr val="9AA1AB"/>
                 </a:solidFill>
                 <a:latin typeface="Amiri" pitchFamily="2" charset="-78"/>
+                <a:ea typeface="Amiri" pitchFamily="2" charset="-78"/>
                 <a:cs typeface="Amiri" pitchFamily="2" charset="-78"/>
               </a:rPr>
               <a:t>مِنْ</a:t>
@@ -40072,6 +40199,7 @@
                   <a:srgbClr val="9AA1AB"/>
                 </a:solidFill>
                 <a:latin typeface="Amiri" pitchFamily="2" charset="-78"/>
+                <a:ea typeface="Amiri" pitchFamily="2" charset="-78"/>
                 <a:cs typeface="Amiri" pitchFamily="2" charset="-78"/>
               </a:rPr>
               <a:t>سَوْفَ تَدَرَّبْتُ</a:t>
@@ -40173,6 +40301,7 @@
                   <a:srgbClr val="9AA1AB"/>
                 </a:solidFill>
                 <a:latin typeface="Amiri" pitchFamily="2" charset="-78"/>
+                <a:ea typeface="Amiri" pitchFamily="2" charset="-78"/>
                 <a:cs typeface="Amiri" pitchFamily="2" charset="-78"/>
               </a:rPr>
               <a:t>سَتَدَرَّبْتُ</a:t>
@@ -40301,6 +40430,7 @@
                   <a:srgbClr val="1F2A37"/>
                 </a:solidFill>
                 <a:latin typeface="Amiri" pitchFamily="2" charset="-78"/>
+                <a:ea typeface="Amiri" pitchFamily="2" charset="-78"/>
                 <a:cs typeface="Amiri" pitchFamily="2" charset="-78"/>
               </a:rPr>
               <a:t>سَأَتَدَرَّبُ</a:t>
@@ -40487,6 +40617,7 @@
                   <a:srgbClr val="1B3B6F"/>
                 </a:solidFill>
                 <a:latin typeface="Amiri" pitchFamily="2" charset="-78"/>
+                <a:ea typeface="Amiri" pitchFamily="2" charset="-78"/>
                 <a:cs typeface="Amiri" pitchFamily="2" charset="-78"/>
               </a:rPr>
               <a:t>سَأَدْرُسُ بِجِدٍّ</a:t>
@@ -40513,6 +40644,7 @@
                   <a:srgbClr val="1B3B6F"/>
                 </a:solidFill>
                 <a:latin typeface="Amiri" pitchFamily="2" charset="-78"/>
+                <a:ea typeface="Amiri" pitchFamily="2" charset="-78"/>
                 <a:cs typeface="Amiri" pitchFamily="2" charset="-78"/>
               </a:rPr>
               <a:t>أَنْجَحَ</a:t>
@@ -40627,6 +40759,7 @@
                   <a:srgbClr val="9AA1AB"/>
                 </a:solidFill>
                 <a:latin typeface="Amiri" pitchFamily="2" charset="-78"/>
+                <a:ea typeface="Amiri" pitchFamily="2" charset="-78"/>
                 <a:cs typeface="Amiri" pitchFamily="2" charset="-78"/>
               </a:rPr>
               <a:t>مَعَ</a:t>
@@ -40728,6 +40861,7 @@
                   <a:srgbClr val="9AA1AB"/>
                 </a:solidFill>
                 <a:latin typeface="Amiri" pitchFamily="2" charset="-78"/>
+                <a:ea typeface="Amiri" pitchFamily="2" charset="-78"/>
                 <a:cs typeface="Amiri" pitchFamily="2" charset="-78"/>
               </a:rPr>
               <a:t>بَيْنَمَا</a:t>
@@ -40856,6 +40990,7 @@
                   <a:srgbClr val="1F2A37"/>
                 </a:solidFill>
                 <a:latin typeface="Amiri" pitchFamily="2" charset="-78"/>
+                <a:ea typeface="Amiri" pitchFamily="2" charset="-78"/>
                 <a:cs typeface="Amiri" pitchFamily="2" charset="-78"/>
               </a:rPr>
               <a:t>لِكَيْ</a:t>
@@ -41157,6 +41292,7 @@
                   <a:srgbClr val="1F2A37"/>
                 </a:solidFill>
                 <a:latin typeface="Amiri" pitchFamily="2" charset="-78"/>
+                <a:ea typeface="Amiri" pitchFamily="2" charset="-78"/>
                 <a:cs typeface="Amiri" pitchFamily="2" charset="-78"/>
               </a:rPr>
               <a:t>أُخْتِي مُحَاسِبَةٌ وَسَتَعْمَلُ فِي شَرِكَةٍ.</a:t>
@@ -41258,6 +41394,7 @@
                   <a:srgbClr val="9AA1AB"/>
                 </a:solidFill>
                 <a:latin typeface="Amiri" pitchFamily="2" charset="-78"/>
+                <a:ea typeface="Amiri" pitchFamily="2" charset="-78"/>
                 <a:cs typeface="Amiri" pitchFamily="2" charset="-78"/>
               </a:rPr>
               <a:t>أُخْتِي مُحَاسِبٌ وَسَوْفَ عَمِلَتْ.</a:t>
@@ -41359,6 +41496,7 @@
                   <a:srgbClr val="9AA1AB"/>
                 </a:solidFill>
                 <a:latin typeface="Amiri" pitchFamily="2" charset="-78"/>
+                <a:ea typeface="Amiri" pitchFamily="2" charset="-78"/>
                 <a:cs typeface="Amiri" pitchFamily="2" charset="-78"/>
               </a:rPr>
               <a:t>أُخْتِي فِي مُحَاسِبَةٍ.</a:t>
@@ -41548,6 +41686,7 @@
                   <a:srgbClr val="1B3B6F"/>
                 </a:solidFill>
                 <a:latin typeface="Amiri" pitchFamily="2" charset="-78"/>
+                <a:ea typeface="Amiri" pitchFamily="2" charset="-78"/>
                 <a:cs typeface="Amiri" pitchFamily="2" charset="-78"/>
               </a:rPr>
               <a:t>المُطَابَقَةُ · حَرْفُ الجَرِّ · المُسْتَقْبَلُ · الدَّلِيلُ</a:t>
@@ -41681,6 +41820,7 @@
                   <a:srgbClr val="D4AF37"/>
                 </a:solidFill>
                 <a:latin typeface="Amiri" pitchFamily="2" charset="-78"/>
+                <a:ea typeface="Amiri" pitchFamily="2" charset="-78"/>
                 <a:cs typeface="Amiri" pitchFamily="2" charset="-78"/>
               </a:rPr>
               <a:t>م</a:t>
@@ -42001,6 +42141,7 @@
                   <a:srgbClr val="8A6D1E"/>
                 </a:solidFill>
                 <a:latin typeface="Amiri" pitchFamily="2" charset="-78"/>
+                <a:ea typeface="Amiri" pitchFamily="2" charset="-78"/>
                 <a:cs typeface="Amiri" pitchFamily="2" charset="-78"/>
               </a:rPr>
               <a:t>مُرَاجَعَةُ القَوَاعِدِ</a:t>
@@ -42176,6 +42317,7 @@
                   <a:srgbClr val="8A6D1E"/>
                 </a:solidFill>
                 <a:latin typeface="Amiri" pitchFamily="2" charset="-78"/>
+                <a:ea typeface="Amiri" pitchFamily="2" charset="-78"/>
                 <a:cs typeface="Amiri" pitchFamily="2" charset="-78"/>
               </a:rPr>
               <a:t>مُهَنْدِسَةٌ · تَعْمَلُ</a:t>
@@ -42217,6 +42359,7 @@
                   <a:srgbClr val="1B3B6F"/>
                 </a:solidFill>
                 <a:latin typeface="Amiri" pitchFamily="2" charset="-78"/>
+                <a:ea typeface="Amiri" pitchFamily="2" charset="-78"/>
                 <a:cs typeface="Amiri" pitchFamily="2" charset="-78"/>
               </a:rPr>
               <a:t>أُخْتِي مُحَاسِبَةٌ وَسَتَعْمَلُ فِي شَرِكَةٍ.</a:t>
@@ -42457,6 +42600,7 @@
                   <a:srgbClr val="8A6D1E"/>
                 </a:solidFill>
                 <a:latin typeface="Amiri" pitchFamily="2" charset="-78"/>
+                <a:ea typeface="Amiri" pitchFamily="2" charset="-78"/>
                 <a:cs typeface="Amiri" pitchFamily="2" charset="-78"/>
               </a:rPr>
               <a:t>إِلَى · لِـ · الَّتِي</a:t>
@@ -42495,6 +42639,7 @@
                   <a:srgbClr val="1B3B6F"/>
                 </a:solidFill>
                 <a:latin typeface="Amiri" pitchFamily="2" charset="-78"/>
+                <a:ea typeface="Amiri" pitchFamily="2" charset="-78"/>
                 <a:cs typeface="Amiri" pitchFamily="2" charset="-78"/>
               </a:rPr>
               <a:t>الشَّرِكَةُ الَّتِي تُقَدِّمُ تَدْرِيبًا</a:t>
@@ -42735,6 +42880,7 @@
                   <a:srgbClr val="8A6D1E"/>
                 </a:solidFill>
                 <a:latin typeface="Amiri" pitchFamily="2" charset="-78"/>
+                <a:ea typeface="Amiri" pitchFamily="2" charset="-78"/>
                 <a:cs typeface="Amiri" pitchFamily="2" charset="-78"/>
               </a:rPr>
               <a:t>سَـ · لِكَيْ · الدَّلِيلُ</a:t>
@@ -42776,6 +42922,7 @@
                   <a:srgbClr val="1B3B6F"/>
                 </a:solidFill>
                 <a:latin typeface="Amiri" pitchFamily="2" charset="-78"/>
+                <a:ea typeface="Amiri" pitchFamily="2" charset="-78"/>
                 <a:cs typeface="Amiri" pitchFamily="2" charset="-78"/>
               </a:rPr>
               <a:t>أَنَا مُنَظَّمٌ، وَالدَّلِيلُ أَنَّنِي أَحْتَرِمُ المَوَاعِيدَ.</a:t>
@@ -43030,6 +43177,7 @@
                   <a:srgbClr val="1B3B6F"/>
                 </a:solidFill>
                 <a:latin typeface="Amiri" pitchFamily="2" charset="-78"/>
+                <a:ea typeface="Amiri" pitchFamily="2" charset="-78"/>
                 <a:cs typeface="Amiri" pitchFamily="2" charset="-78"/>
               </a:rPr>
               <a:t>إِذَا نَجَحْتُ فَسَأَدْرُسُ فِي الجَامِعَةِ.</a:t>
@@ -43109,6 +43257,7 @@
                   <a:srgbClr val="B83227"/>
                 </a:solidFill>
                 <a:latin typeface="Amiri" pitchFamily="2" charset="-78"/>
+                <a:ea typeface="Amiri" pitchFamily="2" charset="-78"/>
                 <a:cs typeface="Amiri" pitchFamily="2" charset="-78"/>
               </a:rPr>
               <a:t>إِذَا أَنْجَحُ سَوْفَ دَرَسْتُ.</a:t>
@@ -43265,6 +43414,7 @@
                   <a:srgbClr val="D4AF37"/>
                 </a:solidFill>
                 <a:latin typeface="Amiri" pitchFamily="2" charset="-78"/>
+                <a:ea typeface="Amiri" pitchFamily="2" charset="-78"/>
                 <a:cs typeface="Amiri" pitchFamily="2" charset="-78"/>
               </a:rPr>
               <a:t>م</a:t>
@@ -43585,6 +43735,7 @@
                   <a:srgbClr val="8A6D1E"/>
                 </a:solidFill>
                 <a:latin typeface="Amiri" pitchFamily="2" charset="-78"/>
+                <a:ea typeface="Amiri" pitchFamily="2" charset="-78"/>
                 <a:cs typeface="Amiri" pitchFamily="2" charset="-78"/>
               </a:rPr>
               <a:t>خُطَّةُ التَّقْيِيمِ</a:t>
@@ -44719,6 +44870,7 @@
                   <a:srgbClr val="D4AF37"/>
                 </a:solidFill>
                 <a:latin typeface="Amiri" pitchFamily="2" charset="-78"/>
+                <a:ea typeface="Amiri" pitchFamily="2" charset="-78"/>
                 <a:cs typeface="Amiri" pitchFamily="2" charset="-78"/>
               </a:rPr>
               <a:t>م</a:t>
@@ -45039,6 +45191,7 @@
                   <a:srgbClr val="8A6D1E"/>
                 </a:solidFill>
                 <a:latin typeface="Amiri" pitchFamily="2" charset="-78"/>
+                <a:ea typeface="Amiri" pitchFamily="2" charset="-78"/>
                 <a:cs typeface="Amiri" pitchFamily="2" charset="-78"/>
               </a:rPr>
               <a:t>الاِسْتِمَاعُ</a:t>
@@ -47400,6 +47553,7 @@
                   <a:srgbClr val="D4AF37"/>
                 </a:solidFill>
                 <a:latin typeface="Amiri" pitchFamily="2" charset="-78"/>
+                <a:ea typeface="Amiri" pitchFamily="2" charset="-78"/>
                 <a:cs typeface="Amiri" pitchFamily="2" charset="-78"/>
               </a:rPr>
               <a:t>م</a:t>
@@ -47720,6 +47874,7 @@
                   <a:srgbClr val="8A6D1E"/>
                 </a:solidFill>
                 <a:latin typeface="Amiri" pitchFamily="2" charset="-78"/>
+                <a:ea typeface="Amiri" pitchFamily="2" charset="-78"/>
                 <a:cs typeface="Amiri" pitchFamily="2" charset="-78"/>
               </a:rPr>
               <a:t>الإِجَابَاتُ</a:t>
@@ -48261,6 +48416,7 @@
                   <a:srgbClr val="8A6D1E"/>
                 </a:solidFill>
                 <a:latin typeface="Amiri" pitchFamily="2" charset="-78"/>
+                <a:ea typeface="Amiri" pitchFamily="2" charset="-78"/>
                 <a:cs typeface="Amiri" pitchFamily="2" charset="-78"/>
               </a:rPr>
               <a:t>فُرْصَةِ تَدْرِيبٍ صَيْفِيٍّ</a:t>
@@ -48764,6 +48920,7 @@
                   <a:srgbClr val="8A6D1E"/>
                 </a:solidFill>
                 <a:latin typeface="Amiri" pitchFamily="2" charset="-78"/>
+                <a:ea typeface="Amiri" pitchFamily="2" charset="-78"/>
                 <a:cs typeface="Amiri" pitchFamily="2" charset="-78"/>
               </a:rPr>
               <a:t>العَمَلِ ضِمْنَ فَرِيقٍ</a:t>
@@ -49267,6 +49424,7 @@
                   <a:srgbClr val="8A6D1E"/>
                 </a:solidFill>
                 <a:latin typeface="Amiri" pitchFamily="2" charset="-78"/>
+                <a:ea typeface="Amiri" pitchFamily="2" charset="-78"/>
                 <a:cs typeface="Amiri" pitchFamily="2" charset="-78"/>
               </a:rPr>
               <a:t>فِي الثَّانِي مِنْ أَغُسْطُسَ، لَا فِي الثَّانِي عَشَرَ</a:t>
@@ -49770,6 +49928,7 @@
                   <a:srgbClr val="8A6D1E"/>
                 </a:solidFill>
                 <a:latin typeface="Amiri" pitchFamily="2" charset="-78"/>
+                <a:ea typeface="Amiri" pitchFamily="2" charset="-78"/>
                 <a:cs typeface="Amiri" pitchFamily="2" charset="-78"/>
               </a:rPr>
               <a:t>أَرْبَعَةَ أَسَابِيعَ</a:t>
@@ -50273,6 +50432,7 @@
                   <a:srgbClr val="8A6D1E"/>
                 </a:solidFill>
                 <a:latin typeface="Amiri" pitchFamily="2" charset="-78"/>
+                <a:ea typeface="Amiri" pitchFamily="2" charset="-78"/>
                 <a:cs typeface="Amiri" pitchFamily="2" charset="-78"/>
               </a:rPr>
               <a:t>تَدْرِيبًا وَشَهَادَةً</a:t>
@@ -50371,13 +50531,9 @@
     <a:fontScheme name="Office">
       <a:majorFont>
         <a:latin typeface="Calibri Light" panose="020F0302020204030204"/>
-        <a:ea typeface=""/>
-        <a:cs typeface=""/>
-        <a:font script="Jpan" typeface="游ゴシック Light"/>
-        <a:font script="Hang" typeface="맑은 고딕"/>
-        <a:font script="Hans" typeface="等线 Light"/>
-        <a:font script="Hant" typeface="新細明體"/>
-        <a:font script="Arab" typeface="Times New Roman"/>
+        <a:ea typeface="Amiri" pitchFamily="2" charset="-78"/>
+        <a:cs typeface="Amiri" pitchFamily="2" charset="-78"/>
+        <a:font script="Arab" typeface="Amiri"/>
         <a:font script="Hebr" typeface="Times New Roman"/>
         <a:font script="Thai" typeface="Angsana New"/>
         <a:font script="Ethi" typeface="Nyala"/>
@@ -50423,13 +50579,9 @@
       </a:majorFont>
       <a:minorFont>
         <a:latin typeface="Calibri" panose="020F0502020204030204"/>
-        <a:ea typeface=""/>
-        <a:cs typeface=""/>
-        <a:font script="Jpan" typeface="游ゴシック"/>
-        <a:font script="Hang" typeface="맑은 고딕"/>
-        <a:font script="Hans" typeface="等线"/>
-        <a:font script="Hant" typeface="新細明體"/>
-        <a:font script="Arab" typeface="Arial"/>
+        <a:ea typeface="Amiri" pitchFamily="2" charset="-78"/>
+        <a:cs typeface="Amiri" pitchFamily="2" charset="-78"/>
+        <a:font script="Arab" typeface="Amiri"/>
         <a:font script="Hebr" typeface="Arial"/>
         <a:font script="Thai" typeface="Cordia New"/>
         <a:font script="Ethi" typeface="Nyala"/>
